--- a/docs/proposals/森ビル様_業務提携ご提案_WineBank_20260810.pptx
+++ b/docs/proposals/森ビル様_業務提携ご提案_WineBank_20260810.pptx
@@ -26,9 +26,12 @@
     <p:sldId id="274" r:id="rId20"/>
     <p:sldId id="275" r:id="rId21"/>
     <p:sldId id="276" r:id="rId22"/>
+    <p:sldId id="277" r:id="rId23"/>
+    <p:sldId id="278" r:id="rId24"/>
+    <p:sldId id="279" r:id="rId25"/>
   </p:sldIdLst>
   <p:notesMasterIdLst>
-    <p:notesMasterId r:id="rId23"/>
+    <p:notesMasterId r:id="rId26"/>
   </p:notesMasterIdLst>
   <p:sldSz cx="12191695" cy="6858000"/>
   <p:notesSz cx="6858000" cy="12191695"/>
@@ -2363,6 +2366,270 @@
             <a:fld id="{F7021451-1387-4CA6-816F-3879F97B5CBC}" type="slidenum">
               <a:rPr lang="en-US"/>
               <a:t>21</a:t>
+            </a:fld>
+            <a:endParaRPr lang="en-US"/>
+          </a:p>
+        </p:txBody>
+      </p:sp>
+    </p:spTree>
+    <p:extLst>
+      <p:ext uri="{BB962C8B-B14F-4D97-AF65-F5344CB8AC3E}">
+        <p14:creationId xmlns:p14="http://schemas.microsoft.com/office/powerpoint/2010/main" val="1024086991"/>
+      </p:ext>
+    </p:extLst>
+  </p:cSld>
+  <p:clrMapOvr>
+    <a:masterClrMapping/>
+  </p:clrMapOvr>
+</p:notes>
+</file>
+
+<file path=ppt/notesSlides/notesSlide22.xml><?xml version="1.0" encoding="utf-8"?>
+<p:notes xmlns:a="http://schemas.openxmlformats.org/drawingml/2006/main" xmlns:r="http://schemas.openxmlformats.org/officeDocument/2006/relationships" xmlns:p="http://schemas.openxmlformats.org/presentationml/2006/main">
+  <p:cSld>
+    <p:spTree>
+      <p:nvGrpSpPr>
+        <p:cNvPr id="1" name=""/>
+        <p:cNvGrpSpPr/>
+        <p:nvPr/>
+      </p:nvGrpSpPr>
+      <p:grpSpPr>
+        <a:xfrm>
+          <a:off x="0" y="0"/>
+          <a:ext cx="0" cy="0"/>
+          <a:chOff x="0" y="0"/>
+          <a:chExt cx="0" cy="0"/>
+        </a:xfrm>
+      </p:grpSpPr>
+      <p:sp>
+        <p:nvSpPr>
+          <p:cNvPr id="2" name="Slide Image Placeholder 1"/>
+          <p:cNvSpPr>
+            <a:spLocks noGrp="1" noRot="1" noChangeAspect="1"/>
+          </p:cNvSpPr>
+          <p:nvPr>
+            <p:ph type="sldImg"/>
+          </p:nvPr>
+        </p:nvSpPr>
+        <p:spPr/>
+      </p:sp>
+      <p:sp>
+        <p:nvSpPr>
+          <p:cNvPr id="3" name="Notes Placeholder 2"/>
+          <p:cNvSpPr>
+            <a:spLocks noGrp="1"/>
+          </p:cNvSpPr>
+          <p:nvPr>
+            <p:ph type="body" idx="1"/>
+          </p:nvPr>
+        </p:nvSpPr>
+        <p:spPr/>
+        <p:txBody>
+          <a:bodyPr/>
+          <a:lstStyle/>
+          <a:p>
+            <a:r>
+              <a:rPr lang="en-US" dirty="0"/>
+              <a:t/>
+            </a:r>
+            <a:endParaRPr lang="en-US" dirty="0"/>
+          </a:p>
+        </p:txBody>
+      </p:sp>
+      <p:sp>
+        <p:nvSpPr>
+          <p:cNvPr id="4" name="Slide Number Placeholder 3"/>
+          <p:cNvSpPr>
+            <a:spLocks noGrp="1"/>
+          </p:cNvSpPr>
+          <p:nvPr>
+            <p:ph type="sldNum" sz="quarter" idx="10"/>
+          </p:nvPr>
+        </p:nvSpPr>
+        <p:spPr/>
+        <p:txBody>
+          <a:bodyPr/>
+          <a:lstStyle/>
+          <a:p>
+            <a:fld id="{F7021451-1387-4CA6-816F-3879F97B5CBC}" type="slidenum">
+              <a:rPr lang="en-US"/>
+              <a:t>22</a:t>
+            </a:fld>
+            <a:endParaRPr lang="en-US"/>
+          </a:p>
+        </p:txBody>
+      </p:sp>
+    </p:spTree>
+    <p:extLst>
+      <p:ext uri="{BB962C8B-B14F-4D97-AF65-F5344CB8AC3E}">
+        <p14:creationId xmlns:p14="http://schemas.microsoft.com/office/powerpoint/2010/main" val="1024086991"/>
+      </p:ext>
+    </p:extLst>
+  </p:cSld>
+  <p:clrMapOvr>
+    <a:masterClrMapping/>
+  </p:clrMapOvr>
+</p:notes>
+</file>
+
+<file path=ppt/notesSlides/notesSlide23.xml><?xml version="1.0" encoding="utf-8"?>
+<p:notes xmlns:a="http://schemas.openxmlformats.org/drawingml/2006/main" xmlns:r="http://schemas.openxmlformats.org/officeDocument/2006/relationships" xmlns:p="http://schemas.openxmlformats.org/presentationml/2006/main">
+  <p:cSld>
+    <p:spTree>
+      <p:nvGrpSpPr>
+        <p:cNvPr id="1" name=""/>
+        <p:cNvGrpSpPr/>
+        <p:nvPr/>
+      </p:nvGrpSpPr>
+      <p:grpSpPr>
+        <a:xfrm>
+          <a:off x="0" y="0"/>
+          <a:ext cx="0" cy="0"/>
+          <a:chOff x="0" y="0"/>
+          <a:chExt cx="0" cy="0"/>
+        </a:xfrm>
+      </p:grpSpPr>
+      <p:sp>
+        <p:nvSpPr>
+          <p:cNvPr id="2" name="Slide Image Placeholder 1"/>
+          <p:cNvSpPr>
+            <a:spLocks noGrp="1" noRot="1" noChangeAspect="1"/>
+          </p:cNvSpPr>
+          <p:nvPr>
+            <p:ph type="sldImg"/>
+          </p:nvPr>
+        </p:nvSpPr>
+        <p:spPr/>
+      </p:sp>
+      <p:sp>
+        <p:nvSpPr>
+          <p:cNvPr id="3" name="Notes Placeholder 2"/>
+          <p:cNvSpPr>
+            <a:spLocks noGrp="1"/>
+          </p:cNvSpPr>
+          <p:nvPr>
+            <p:ph type="body" idx="1"/>
+          </p:nvPr>
+        </p:nvSpPr>
+        <p:spPr/>
+        <p:txBody>
+          <a:bodyPr/>
+          <a:lstStyle/>
+          <a:p>
+            <a:r>
+              <a:rPr lang="en-US" dirty="0"/>
+              <a:t/>
+            </a:r>
+            <a:endParaRPr lang="en-US" dirty="0"/>
+          </a:p>
+        </p:txBody>
+      </p:sp>
+      <p:sp>
+        <p:nvSpPr>
+          <p:cNvPr id="4" name="Slide Number Placeholder 3"/>
+          <p:cNvSpPr>
+            <a:spLocks noGrp="1"/>
+          </p:cNvSpPr>
+          <p:nvPr>
+            <p:ph type="sldNum" sz="quarter" idx="10"/>
+          </p:nvPr>
+        </p:nvSpPr>
+        <p:spPr/>
+        <p:txBody>
+          <a:bodyPr/>
+          <a:lstStyle/>
+          <a:p>
+            <a:fld id="{F7021451-1387-4CA6-816F-3879F97B5CBC}" type="slidenum">
+              <a:rPr lang="en-US"/>
+              <a:t>23</a:t>
+            </a:fld>
+            <a:endParaRPr lang="en-US"/>
+          </a:p>
+        </p:txBody>
+      </p:sp>
+    </p:spTree>
+    <p:extLst>
+      <p:ext uri="{BB962C8B-B14F-4D97-AF65-F5344CB8AC3E}">
+        <p14:creationId xmlns:p14="http://schemas.microsoft.com/office/powerpoint/2010/main" val="1024086991"/>
+      </p:ext>
+    </p:extLst>
+  </p:cSld>
+  <p:clrMapOvr>
+    <a:masterClrMapping/>
+  </p:clrMapOvr>
+</p:notes>
+</file>
+
+<file path=ppt/notesSlides/notesSlide24.xml><?xml version="1.0" encoding="utf-8"?>
+<p:notes xmlns:a="http://schemas.openxmlformats.org/drawingml/2006/main" xmlns:r="http://schemas.openxmlformats.org/officeDocument/2006/relationships" xmlns:p="http://schemas.openxmlformats.org/presentationml/2006/main">
+  <p:cSld>
+    <p:spTree>
+      <p:nvGrpSpPr>
+        <p:cNvPr id="1" name=""/>
+        <p:cNvGrpSpPr/>
+        <p:nvPr/>
+      </p:nvGrpSpPr>
+      <p:grpSpPr>
+        <a:xfrm>
+          <a:off x="0" y="0"/>
+          <a:ext cx="0" cy="0"/>
+          <a:chOff x="0" y="0"/>
+          <a:chExt cx="0" cy="0"/>
+        </a:xfrm>
+      </p:grpSpPr>
+      <p:sp>
+        <p:nvSpPr>
+          <p:cNvPr id="2" name="Slide Image Placeholder 1"/>
+          <p:cNvSpPr>
+            <a:spLocks noGrp="1" noRot="1" noChangeAspect="1"/>
+          </p:cNvSpPr>
+          <p:nvPr>
+            <p:ph type="sldImg"/>
+          </p:nvPr>
+        </p:nvSpPr>
+        <p:spPr/>
+      </p:sp>
+      <p:sp>
+        <p:nvSpPr>
+          <p:cNvPr id="3" name="Notes Placeholder 2"/>
+          <p:cNvSpPr>
+            <a:spLocks noGrp="1"/>
+          </p:cNvSpPr>
+          <p:nvPr>
+            <p:ph type="body" idx="1"/>
+          </p:nvPr>
+        </p:nvSpPr>
+        <p:spPr/>
+        <p:txBody>
+          <a:bodyPr/>
+          <a:lstStyle/>
+          <a:p>
+            <a:r>
+              <a:rPr lang="en-US" dirty="0"/>
+              <a:t/>
+            </a:r>
+            <a:endParaRPr lang="en-US" dirty="0"/>
+          </a:p>
+        </p:txBody>
+      </p:sp>
+      <p:sp>
+        <p:nvSpPr>
+          <p:cNvPr id="4" name="Slide Number Placeholder 3"/>
+          <p:cNvSpPr>
+            <a:spLocks noGrp="1"/>
+          </p:cNvSpPr>
+          <p:nvPr>
+            <p:ph type="sldNum" sz="quarter" idx="10"/>
+          </p:nvPr>
+        </p:nvSpPr>
+        <p:spPr/>
+        <p:txBody>
+          <a:bodyPr/>
+          <a:lstStyle/>
+          <a:p>
+            <a:fld id="{F7021451-1387-4CA6-816F-3879F97B5CBC}" type="slidenum">
+              <a:rPr lang="en-US"/>
+              <a:t>24</a:t>
             </a:fld>
             <a:endParaRPr lang="en-US"/>
           </a:p>
@@ -24689,6 +24956,5187 @@
 </p:sld>
 </file>
 
+<file path=ppt/slides/slide22.xml><?xml version="1.0" encoding="utf-8"?>
+<p:sld xmlns:a="http://schemas.openxmlformats.org/drawingml/2006/main" xmlns:r="http://schemas.openxmlformats.org/officeDocument/2006/relationships" xmlns:p="http://schemas.openxmlformats.org/presentationml/2006/main">
+  <p:cSld name="Slide 22">
+    <p:bg>
+      <p:bgPr>
+        <a:solidFill>
+          <a:srgbClr val="FFFFFF"/>
+        </a:solidFill>
+      </p:bgPr>
+    </p:bg>
+    <p:spTree>
+      <p:nvGrpSpPr>
+        <p:cNvPr id="1" name=""/>
+        <p:cNvGrpSpPr/>
+        <p:nvPr/>
+      </p:nvGrpSpPr>
+      <p:grpSpPr>
+        <a:xfrm>
+          <a:off x="0" y="0"/>
+          <a:ext cx="0" cy="0"/>
+          <a:chOff x="0" y="0"/>
+          <a:chExt cx="0" cy="0"/>
+        </a:xfrm>
+      </p:grpSpPr>
+      <p:sp>
+        <p:nvSpPr>
+          <p:cNvPr id="2" name="Text 0"/>
+          <p:cNvSpPr/>
+          <p:nvPr/>
+        </p:nvSpPr>
+        <p:spPr>
+          <a:xfrm>
+            <a:off x="566928" y="384048"/>
+            <a:ext cx="8229600" cy="237744"/>
+          </a:xfrm>
+          <a:prstGeom prst="rect">
+            <a:avLst/>
+          </a:prstGeom>
+          <a:noFill/>
+          <a:ln/>
+        </p:spPr>
+        <p:txBody>
+          <a:bodyPr wrap="square" lIns="0" tIns="0" rIns="0" bIns="0" rtlCol="0" anchor="ctr"/>
+          <a:lstStyle/>
+          <a:p>
+            <a:pPr indent="0" marL="0">
+              <a:buNone/>
+            </a:pPr>
+            <a:r>
+              <a:rPr lang="en-US" sz="1100" b="1" spc="240" kern="0" dirty="0">
+                <a:solidFill>
+                  <a:srgbClr val="C2A15A"/>
+                </a:solidFill>
+                <a:latin typeface="Cambria" pitchFamily="34" charset="0"/>
+                <a:ea typeface="Cambria" pitchFamily="34" charset="-122"/>
+                <a:cs typeface="Cambria" pitchFamily="34" charset="-120"/>
+              </a:rPr>
+              <a:t>APPENDIX C</a:t>
+            </a:r>
+            <a:endParaRPr lang="en-US" sz="1100" dirty="0"/>
+          </a:p>
+        </p:txBody>
+      </p:sp>
+      <p:sp>
+        <p:nvSpPr>
+          <p:cNvPr id="3" name="Text 1"/>
+          <p:cNvSpPr/>
+          <p:nvPr/>
+        </p:nvSpPr>
+        <p:spPr>
+          <a:xfrm>
+            <a:off x="566928" y="658368"/>
+            <a:ext cx="10241280" cy="566928"/>
+          </a:xfrm>
+          <a:prstGeom prst="rect">
+            <a:avLst/>
+          </a:prstGeom>
+          <a:noFill/>
+          <a:ln/>
+        </p:spPr>
+        <p:txBody>
+          <a:bodyPr wrap="square" lIns="0" tIns="0" rIns="0" bIns="0" rtlCol="0" anchor="ctr"/>
+          <a:lstStyle/>
+          <a:p>
+            <a:pPr indent="0" marL="0">
+              <a:buNone/>
+            </a:pPr>
+            <a:r>
+              <a:rPr lang="en-US" sz="3000" b="1" dirty="0">
+                <a:solidFill>
+                  <a:srgbClr val="45121F"/>
+                </a:solidFill>
+                <a:latin typeface="Yu Gothic" pitchFamily="34" charset="0"/>
+                <a:ea typeface="Yu Gothic" pitchFamily="34" charset="-122"/>
+                <a:cs typeface="Yu Gothic" pitchFamily="34" charset="-120"/>
+              </a:rPr>
+              <a:t>なぜ、価格で勝てるのか</a:t>
+            </a:r>
+            <a:endParaRPr lang="en-US" sz="3000" dirty="0"/>
+          </a:p>
+        </p:txBody>
+      </p:sp>
+      <p:sp>
+        <p:nvSpPr>
+          <p:cNvPr id="4" name="Text 2"/>
+          <p:cNvSpPr/>
+          <p:nvPr/>
+        </p:nvSpPr>
+        <p:spPr>
+          <a:xfrm>
+            <a:off x="566928" y="1280160"/>
+            <a:ext cx="11064240" cy="384048"/>
+          </a:xfrm>
+          <a:prstGeom prst="rect">
+            <a:avLst/>
+          </a:prstGeom>
+          <a:noFill/>
+          <a:ln/>
+        </p:spPr>
+        <p:txBody>
+          <a:bodyPr wrap="square" lIns="0" tIns="0" rIns="0" bIns="0" rtlCol="0" anchor="ctr"/>
+          <a:lstStyle/>
+          <a:p>
+            <a:pPr indent="0" marL="0">
+              <a:lnSpc>
+                <a:spcPts val="1900"/>
+              </a:lnSpc>
+              <a:buNone/>
+            </a:pPr>
+            <a:r>
+              <a:rPr lang="en-US" sz="1300" dirty="0">
+                <a:solidFill>
+                  <a:srgbClr val="6E666A"/>
+                </a:solidFill>
+                <a:latin typeface="Yu Gothic" pitchFamily="34" charset="0"/>
+                <a:ea typeface="Yu Gothic" pitchFamily="34" charset="-122"/>
+                <a:cs typeface="Yu Gothic" pitchFamily="34" charset="-120"/>
+              </a:rPr>
+              <a:t>ワイン流通は、生産者から消費者までに何段もの中間マージンが積み上がります。当社は最上流に立っています。</a:t>
+            </a:r>
+            <a:endParaRPr lang="en-US" sz="1300" dirty="0"/>
+          </a:p>
+        </p:txBody>
+      </p:sp>
+      <p:sp>
+        <p:nvSpPr>
+          <p:cNvPr id="5" name="Text 3"/>
+          <p:cNvSpPr/>
+          <p:nvPr/>
+        </p:nvSpPr>
+        <p:spPr>
+          <a:xfrm>
+            <a:off x="566928" y="6437376"/>
+            <a:ext cx="5486400" cy="237744"/>
+          </a:xfrm>
+          <a:prstGeom prst="rect">
+            <a:avLst/>
+          </a:prstGeom>
+          <a:noFill/>
+          <a:ln/>
+        </p:spPr>
+        <p:txBody>
+          <a:bodyPr wrap="square" lIns="0" tIns="0" rIns="0" bIns="0" rtlCol="0" anchor="ctr"/>
+          <a:lstStyle/>
+          <a:p>
+            <a:pPr indent="0" marL="0">
+              <a:buNone/>
+            </a:pPr>
+            <a:r>
+              <a:rPr lang="en-US" sz="850" dirty="0">
+                <a:solidFill>
+                  <a:srgbClr val="9A9498"/>
+                </a:solidFill>
+                <a:latin typeface="Yu Gothic" pitchFamily="34" charset="0"/>
+                <a:ea typeface="Yu Gothic" pitchFamily="34" charset="-122"/>
+                <a:cs typeface="Yu Gothic" pitchFamily="34" charset="-120"/>
+              </a:rPr>
+              <a:t>WineBank × Mori Building ｜ 業務提携ご提案</a:t>
+            </a:r>
+            <a:endParaRPr lang="en-US" sz="850" dirty="0"/>
+          </a:p>
+        </p:txBody>
+      </p:sp>
+      <p:sp>
+        <p:nvSpPr>
+          <p:cNvPr id="6" name="Text 4"/>
+          <p:cNvSpPr/>
+          <p:nvPr/>
+        </p:nvSpPr>
+        <p:spPr>
+          <a:xfrm>
+            <a:off x="10801807" y="6437376"/>
+            <a:ext cx="822960" cy="237744"/>
+          </a:xfrm>
+          <a:prstGeom prst="rect">
+            <a:avLst/>
+          </a:prstGeom>
+          <a:noFill/>
+          <a:ln/>
+        </p:spPr>
+        <p:txBody>
+          <a:bodyPr wrap="square" lIns="0" tIns="0" rIns="0" bIns="0" rtlCol="0" anchor="ctr"/>
+          <a:lstStyle/>
+          <a:p>
+            <a:pPr algn="r" indent="0" marL="0">
+              <a:buNone/>
+            </a:pPr>
+            <a:r>
+              <a:rPr lang="en-US" sz="900" dirty="0">
+                <a:solidFill>
+                  <a:srgbClr val="9A9498"/>
+                </a:solidFill>
+                <a:latin typeface="Cambria" pitchFamily="34" charset="0"/>
+                <a:ea typeface="Cambria" pitchFamily="34" charset="-122"/>
+                <a:cs typeface="Cambria" pitchFamily="34" charset="-120"/>
+              </a:rPr>
+              <a:t>21</a:t>
+            </a:r>
+            <a:endParaRPr lang="en-US" sz="900" dirty="0"/>
+          </a:p>
+        </p:txBody>
+      </p:sp>
+      <p:sp>
+        <p:nvSpPr>
+          <p:cNvPr id="7" name="Text 5"/>
+          <p:cNvSpPr/>
+          <p:nvPr/>
+        </p:nvSpPr>
+        <p:spPr>
+          <a:xfrm>
+            <a:off x="8881567" y="6437376"/>
+            <a:ext cx="1828800" cy="237744"/>
+          </a:xfrm>
+          <a:prstGeom prst="rect">
+            <a:avLst/>
+          </a:prstGeom>
+          <a:noFill/>
+          <a:ln/>
+        </p:spPr>
+        <p:txBody>
+          <a:bodyPr wrap="square" lIns="0" tIns="0" rIns="0" bIns="0" rtlCol="0" anchor="ctr"/>
+          <a:lstStyle/>
+          <a:p>
+            <a:pPr algn="r" indent="0" marL="0">
+              <a:buNone/>
+            </a:pPr>
+            <a:r>
+              <a:rPr lang="en-US" sz="800" spc="120" kern="0" dirty="0">
+                <a:solidFill>
+                  <a:srgbClr val="C6C0C3"/>
+                </a:solidFill>
+                <a:latin typeface="Cambria" pitchFamily="34" charset="0"/>
+                <a:ea typeface="Cambria" pitchFamily="34" charset="-122"/>
+                <a:cs typeface="Cambria" pitchFamily="34" charset="-120"/>
+              </a:rPr>
+              <a:t>CONFIDENTIAL</a:t>
+            </a:r>
+            <a:endParaRPr lang="en-US" sz="800" dirty="0"/>
+          </a:p>
+        </p:txBody>
+      </p:sp>
+      <p:sp>
+        <p:nvSpPr>
+          <p:cNvPr id="8" name="Shape 6"/>
+          <p:cNvSpPr/>
+          <p:nvPr/>
+        </p:nvSpPr>
+        <p:spPr>
+          <a:xfrm>
+            <a:off x="566928" y="1883664"/>
+            <a:ext cx="6583680" cy="1188720"/>
+          </a:xfrm>
+          <a:prstGeom prst="roundRect">
+            <a:avLst>
+              <a:gd name="adj" fmla="val 6923"/>
+            </a:avLst>
+          </a:prstGeom>
+          <a:solidFill>
+            <a:srgbClr val="F4F1F2"/>
+          </a:solidFill>
+          <a:ln w="12700">
+            <a:solidFill>
+              <a:srgbClr val="F4F1F2"/>
+            </a:solidFill>
+            <a:prstDash val="solid"/>
+          </a:ln>
+          <a:effectLst>
+            <a:outerShdw sx="100000" sy="100000" kx="0" ky="0" algn="bl" rotWithShape="0" blurRad="127000" dist="25400" dir="5400000">
+              <a:srgbClr val="8A7078">
+                <a:alpha val="18000"/>
+              </a:srgbClr>
+            </a:outerShdw>
+          </a:effectLst>
+        </p:spPr>
+      </p:sp>
+      <p:sp>
+        <p:nvSpPr>
+          <p:cNvPr id="9" name="Text 7"/>
+          <p:cNvSpPr/>
+          <p:nvPr/>
+        </p:nvSpPr>
+        <p:spPr>
+          <a:xfrm>
+            <a:off x="841248" y="2029968"/>
+            <a:ext cx="6035040" cy="256032"/>
+          </a:xfrm>
+          <a:prstGeom prst="rect">
+            <a:avLst/>
+          </a:prstGeom>
+          <a:noFill/>
+          <a:ln/>
+        </p:spPr>
+        <p:txBody>
+          <a:bodyPr wrap="square" lIns="0" tIns="0" rIns="0" bIns="0" rtlCol="0" anchor="ctr"/>
+          <a:lstStyle/>
+          <a:p>
+            <a:pPr indent="0" marL="0">
+              <a:buNone/>
+            </a:pPr>
+            <a:r>
+              <a:rPr lang="en-US" sz="1300" b="1" dirty="0">
+                <a:solidFill>
+                  <a:srgbClr val="45121F"/>
+                </a:solidFill>
+                <a:latin typeface="Yu Gothic" pitchFamily="34" charset="0"/>
+                <a:ea typeface="Yu Gothic" pitchFamily="34" charset="-122"/>
+                <a:cs typeface="Yu Gothic" pitchFamily="34" charset="-120"/>
+              </a:rPr>
+              <a:t>最上流に立てる理由</a:t>
+            </a:r>
+            <a:endParaRPr lang="en-US" sz="1300" dirty="0"/>
+          </a:p>
+        </p:txBody>
+      </p:sp>
+      <p:sp>
+        <p:nvSpPr>
+          <p:cNvPr id="10" name="Text 8"/>
+          <p:cNvSpPr/>
+          <p:nvPr/>
+        </p:nvSpPr>
+        <p:spPr>
+          <a:xfrm>
+            <a:off x="841248" y="2340864"/>
+            <a:ext cx="6035040" cy="640080"/>
+          </a:xfrm>
+          <a:prstGeom prst="rect">
+            <a:avLst/>
+          </a:prstGeom>
+          <a:noFill/>
+          <a:ln/>
+        </p:spPr>
+        <p:txBody>
+          <a:bodyPr wrap="square" lIns="0" tIns="0" rIns="0" bIns="0" rtlCol="0" anchor="ctr"/>
+          <a:lstStyle/>
+          <a:p>
+            <a:pPr marL="342900" indent="-342900">
+              <a:lnSpc>
+                <a:spcPts val="1300"/>
+              </a:lnSpc>
+              <a:spcAft>
+                <a:spcPts val="200"/>
+              </a:spcAft>
+              <a:buSzPct val="100000"/>
+              <a:buChar char="▪"/>
+            </a:pPr>
+            <a:r>
+              <a:rPr lang="en-US" sz="980" dirty="0">
+                <a:solidFill>
+                  <a:srgbClr val="241A1E"/>
+                </a:solidFill>
+                <a:latin typeface="Yu Gothic" pitchFamily="34" charset="0"/>
+                <a:ea typeface="Yu Gothic" pitchFamily="34" charset="-122"/>
+                <a:cs typeface="Yu Gothic" pitchFamily="34" charset="-120"/>
+              </a:rPr>
+              <a:t>創業55年の酒販業実績による、生産者・インポーターとの信頼とパイプ</a:t>
+            </a:r>
+            <a:endParaRPr lang="en-US" sz="980" dirty="0"/>
+          </a:p>
+          <a:p>
+            <a:pPr marL="342900" indent="-342900">
+              <a:lnSpc>
+                <a:spcPts val="1300"/>
+              </a:lnSpc>
+              <a:spcAft>
+                <a:spcPts val="200"/>
+              </a:spcAft>
+              <a:buSzPct val="100000"/>
+              <a:buChar char="▪"/>
+            </a:pPr>
+            <a:r>
+              <a:rPr lang="en-US" sz="980" dirty="0">
+                <a:solidFill>
+                  <a:srgbClr val="241A1E"/>
+                </a:solidFill>
+                <a:latin typeface="Yu Gothic" pitchFamily="34" charset="0"/>
+                <a:ea typeface="Yu Gothic" pitchFamily="34" charset="-122"/>
+                <a:cs typeface="Yu Gothic" pitchFamily="34" charset="-120"/>
+              </a:rPr>
+              <a:t>国内大手インポーターとの直接取引による特価・正規品仕入</a:t>
+            </a:r>
+            <a:endParaRPr lang="en-US" sz="980" dirty="0"/>
+          </a:p>
+          <a:p>
+            <a:pPr marL="342900" indent="-342900">
+              <a:lnSpc>
+                <a:spcPts val="1300"/>
+              </a:lnSpc>
+              <a:spcAft>
+                <a:spcPts val="200"/>
+              </a:spcAft>
+              <a:buSzPct val="100000"/>
+              <a:buChar char="▪"/>
+            </a:pPr>
+            <a:r>
+              <a:rPr lang="en-US" sz="980" dirty="0">
+                <a:solidFill>
+                  <a:srgbClr val="241A1E"/>
+                </a:solidFill>
+                <a:latin typeface="Yu Gothic" pitchFamily="34" charset="0"/>
+                <a:ea typeface="Yu Gothic" pitchFamily="34" charset="-122"/>
+                <a:cs typeface="Yu Gothic" pitchFamily="34" charset="-120"/>
+              </a:rPr>
+              <a:t>海外輸出入ライセンスを活かした独自の仕入ネットワークと情報収集</a:t>
+            </a:r>
+            <a:endParaRPr lang="en-US" sz="980" dirty="0"/>
+          </a:p>
+        </p:txBody>
+      </p:sp>
+      <p:sp>
+        <p:nvSpPr>
+          <p:cNvPr id="11" name="Shape 9"/>
+          <p:cNvSpPr/>
+          <p:nvPr/>
+        </p:nvSpPr>
+        <p:spPr>
+          <a:xfrm>
+            <a:off x="984352" y="4261104"/>
+            <a:ext cx="10222992" cy="0"/>
+          </a:xfrm>
+          <a:prstGeom prst="line">
+            <a:avLst/>
+          </a:prstGeom>
+          <a:noFill/>
+          <a:ln w="12700">
+            <a:solidFill>
+              <a:srgbClr val="DCD3D7"/>
+            </a:solidFill>
+            <a:prstDash val="solid"/>
+          </a:ln>
+        </p:spPr>
+      </p:sp>
+      <p:sp>
+        <p:nvSpPr>
+          <p:cNvPr id="12" name="Shape 10"/>
+          <p:cNvSpPr/>
+          <p:nvPr/>
+        </p:nvSpPr>
+        <p:spPr>
+          <a:xfrm>
+            <a:off x="1258672" y="3985565"/>
+            <a:ext cx="1481328" cy="275539"/>
+          </a:xfrm>
+          <a:prstGeom prst="rect">
+            <a:avLst/>
+          </a:prstGeom>
+          <a:solidFill>
+            <a:srgbClr val="C2A15A"/>
+          </a:solidFill>
+          <a:ln w="12700">
+            <a:solidFill>
+              <a:srgbClr val="333333"/>
+            </a:solidFill>
+            <a:prstDash val="solid"/>
+          </a:ln>
+        </p:spPr>
+      </p:sp>
+      <p:sp>
+        <p:nvSpPr>
+          <p:cNvPr id="13" name="Text 11"/>
+          <p:cNvSpPr/>
+          <p:nvPr/>
+        </p:nvSpPr>
+        <p:spPr>
+          <a:xfrm>
+            <a:off x="1258672" y="3638093"/>
+            <a:ext cx="1481328" cy="292608"/>
+          </a:xfrm>
+          <a:prstGeom prst="rect">
+            <a:avLst/>
+          </a:prstGeom>
+          <a:noFill/>
+          <a:ln/>
+        </p:spPr>
+        <p:txBody>
+          <a:bodyPr wrap="square" lIns="0" tIns="0" rIns="0" bIns="0" rtlCol="0" anchor="ctr"/>
+          <a:lstStyle/>
+          <a:p>
+            <a:pPr algn="ctr" indent="0" marL="0">
+              <a:buNone/>
+            </a:pPr>
+            <a:r>
+              <a:rPr lang="en-US" sz="1500" b="1" dirty="0">
+                <a:solidFill>
+                  <a:srgbClr val="8A6A18"/>
+                </a:solidFill>
+                <a:latin typeface="Yu Gothic" pitchFamily="34" charset="0"/>
+                <a:ea typeface="Yu Gothic" pitchFamily="34" charset="-122"/>
+                <a:cs typeface="Yu Gothic" pitchFamily="34" charset="-120"/>
+              </a:rPr>
+              <a:t>40</a:t>
+            </a:r>
+            <a:endParaRPr lang="en-US" sz="1500" dirty="0"/>
+          </a:p>
+        </p:txBody>
+      </p:sp>
+      <p:sp>
+        <p:nvSpPr>
+          <p:cNvPr id="14" name="Text 12"/>
+          <p:cNvSpPr/>
+          <p:nvPr/>
+        </p:nvSpPr>
+        <p:spPr>
+          <a:xfrm>
+            <a:off x="1258672" y="4352544"/>
+            <a:ext cx="1481328" cy="457200"/>
+          </a:xfrm>
+          <a:prstGeom prst="rect">
+            <a:avLst/>
+          </a:prstGeom>
+          <a:noFill/>
+          <a:ln/>
+        </p:spPr>
+        <p:txBody>
+          <a:bodyPr wrap="square" lIns="0" tIns="0" rIns="0" bIns="0" rtlCol="0" anchor="ctr"/>
+          <a:lstStyle/>
+          <a:p>
+            <a:pPr algn="ctr" indent="0" marL="0">
+              <a:lnSpc>
+                <a:spcPts val="1350"/>
+              </a:lnSpc>
+              <a:buNone/>
+            </a:pPr>
+            <a:r>
+              <a:rPr lang="en-US" sz="1000" dirty="0">
+                <a:solidFill>
+                  <a:srgbClr val="6E666A"/>
+                </a:solidFill>
+                <a:latin typeface="Yu Gothic" pitchFamily="34" charset="0"/>
+                <a:ea typeface="Yu Gothic" pitchFamily="34" charset="-122"/>
+                <a:cs typeface="Yu Gothic" pitchFamily="34" charset="-120"/>
+              </a:rPr>
+              <a:t>インポーター</a:t>
+            </a:r>
+            <a:endParaRPr lang="en-US" sz="1000" dirty="0"/>
+          </a:p>
+          <a:p>
+            <a:pPr algn="ctr" indent="0" marL="0">
+              <a:lnSpc>
+                <a:spcPts val="1350"/>
+              </a:lnSpc>
+              <a:buNone/>
+            </a:pPr>
+            <a:r>
+              <a:rPr lang="en-US" sz="1000" dirty="0">
+                <a:solidFill>
+                  <a:srgbClr val="6E666A"/>
+                </a:solidFill>
+                <a:latin typeface="Yu Gothic" pitchFamily="34" charset="0"/>
+                <a:ea typeface="Yu Gothic" pitchFamily="34" charset="-122"/>
+                <a:cs typeface="Yu Gothic" pitchFamily="34" charset="-120"/>
+              </a:rPr>
+              <a:t>仕入価格</a:t>
+            </a:r>
+            <a:endParaRPr lang="en-US" sz="1000" dirty="0"/>
+          </a:p>
+        </p:txBody>
+      </p:sp>
+      <p:sp>
+        <p:nvSpPr>
+          <p:cNvPr id="15" name="Text 13"/>
+          <p:cNvSpPr/>
+          <p:nvPr/>
+        </p:nvSpPr>
+        <p:spPr>
+          <a:xfrm>
+            <a:off x="1075792" y="3308909"/>
+            <a:ext cx="1847088" cy="274320"/>
+          </a:xfrm>
+          <a:prstGeom prst="rect">
+            <a:avLst/>
+          </a:prstGeom>
+          <a:noFill/>
+          <a:ln/>
+        </p:spPr>
+        <p:txBody>
+          <a:bodyPr wrap="square" lIns="0" tIns="0" rIns="0" bIns="0" rtlCol="0" anchor="ctr"/>
+          <a:lstStyle/>
+          <a:p>
+            <a:pPr algn="ctr" indent="0" marL="0">
+              <a:buNone/>
+            </a:pPr>
+            <a:r>
+              <a:rPr lang="en-US" sz="1100" b="1" dirty="0">
+                <a:solidFill>
+                  <a:srgbClr val="C2A15A"/>
+                </a:solidFill>
+                <a:latin typeface="Yu Gothic" pitchFamily="34" charset="0"/>
+                <a:ea typeface="Yu Gothic" pitchFamily="34" charset="-122"/>
+                <a:cs typeface="Yu Gothic" pitchFamily="34" charset="-120"/>
+              </a:rPr>
+              <a:t>WineBank はここ</a:t>
+            </a:r>
+            <a:endParaRPr lang="en-US" sz="1100" dirty="0"/>
+          </a:p>
+        </p:txBody>
+      </p:sp>
+      <p:sp>
+        <p:nvSpPr>
+          <p:cNvPr id="16" name="Shape 14"/>
+          <p:cNvSpPr/>
+          <p:nvPr/>
+        </p:nvSpPr>
+        <p:spPr>
+          <a:xfrm>
+            <a:off x="3306928" y="3847795"/>
+            <a:ext cx="1481328" cy="413309"/>
+          </a:xfrm>
+          <a:prstGeom prst="rect">
+            <a:avLst/>
+          </a:prstGeom>
+          <a:solidFill>
+            <a:srgbClr val="6B1F32"/>
+          </a:solidFill>
+          <a:ln w="12700">
+            <a:solidFill>
+              <a:srgbClr val="333333"/>
+            </a:solidFill>
+            <a:prstDash val="solid"/>
+          </a:ln>
+        </p:spPr>
+      </p:sp>
+      <p:sp>
+        <p:nvSpPr>
+          <p:cNvPr id="17" name="Text 15"/>
+          <p:cNvSpPr/>
+          <p:nvPr/>
+        </p:nvSpPr>
+        <p:spPr>
+          <a:xfrm>
+            <a:off x="3306928" y="3500323"/>
+            <a:ext cx="1481328" cy="292608"/>
+          </a:xfrm>
+          <a:prstGeom prst="rect">
+            <a:avLst/>
+          </a:prstGeom>
+          <a:noFill/>
+          <a:ln/>
+        </p:spPr>
+        <p:txBody>
+          <a:bodyPr wrap="square" lIns="0" tIns="0" rIns="0" bIns="0" rtlCol="0" anchor="ctr"/>
+          <a:lstStyle/>
+          <a:p>
+            <a:pPr algn="ctr" indent="0" marL="0">
+              <a:buNone/>
+            </a:pPr>
+            <a:r>
+              <a:rPr lang="en-US" sz="1500" b="1" dirty="0">
+                <a:solidFill>
+                  <a:srgbClr val="45121F"/>
+                </a:solidFill>
+                <a:latin typeface="Yu Gothic" pitchFamily="34" charset="0"/>
+                <a:ea typeface="Yu Gothic" pitchFamily="34" charset="-122"/>
+                <a:cs typeface="Yu Gothic" pitchFamily="34" charset="-120"/>
+              </a:rPr>
+              <a:t>60</a:t>
+            </a:r>
+            <a:endParaRPr lang="en-US" sz="1500" dirty="0"/>
+          </a:p>
+        </p:txBody>
+      </p:sp>
+      <p:sp>
+        <p:nvSpPr>
+          <p:cNvPr id="18" name="Text 16"/>
+          <p:cNvSpPr/>
+          <p:nvPr/>
+        </p:nvSpPr>
+        <p:spPr>
+          <a:xfrm>
+            <a:off x="3306928" y="4352544"/>
+            <a:ext cx="1481328" cy="457200"/>
+          </a:xfrm>
+          <a:prstGeom prst="rect">
+            <a:avLst/>
+          </a:prstGeom>
+          <a:noFill/>
+          <a:ln/>
+        </p:spPr>
+        <p:txBody>
+          <a:bodyPr wrap="square" lIns="0" tIns="0" rIns="0" bIns="0" rtlCol="0" anchor="ctr"/>
+          <a:lstStyle/>
+          <a:p>
+            <a:pPr algn="ctr" indent="0" marL="0">
+              <a:lnSpc>
+                <a:spcPts val="1350"/>
+              </a:lnSpc>
+              <a:buNone/>
+            </a:pPr>
+            <a:r>
+              <a:rPr lang="en-US" sz="1000" dirty="0">
+                <a:solidFill>
+                  <a:srgbClr val="6E666A"/>
+                </a:solidFill>
+                <a:latin typeface="Yu Gothic" pitchFamily="34" charset="0"/>
+                <a:ea typeface="Yu Gothic" pitchFamily="34" charset="-122"/>
+                <a:cs typeface="Yu Gothic" pitchFamily="34" charset="-120"/>
+              </a:rPr>
+              <a:t>酒販店①</a:t>
+            </a:r>
+            <a:endParaRPr lang="en-US" sz="1000" dirty="0"/>
+          </a:p>
+          <a:p>
+            <a:pPr algn="ctr" indent="0" marL="0">
+              <a:lnSpc>
+                <a:spcPts val="1350"/>
+              </a:lnSpc>
+              <a:buNone/>
+            </a:pPr>
+            <a:r>
+              <a:rPr lang="en-US" sz="1000" dirty="0">
+                <a:solidFill>
+                  <a:srgbClr val="6E666A"/>
+                </a:solidFill>
+                <a:latin typeface="Yu Gothic" pitchFamily="34" charset="0"/>
+                <a:ea typeface="Yu Gothic" pitchFamily="34" charset="-122"/>
+                <a:cs typeface="Yu Gothic" pitchFamily="34" charset="-120"/>
+              </a:rPr>
+              <a:t>仕入価格</a:t>
+            </a:r>
+            <a:endParaRPr lang="en-US" sz="1000" dirty="0"/>
+          </a:p>
+        </p:txBody>
+      </p:sp>
+      <p:sp>
+        <p:nvSpPr>
+          <p:cNvPr id="19" name="Shape 17"/>
+          <p:cNvSpPr/>
+          <p:nvPr/>
+        </p:nvSpPr>
+        <p:spPr>
+          <a:xfrm>
+            <a:off x="5355184" y="3778910"/>
+            <a:ext cx="1481328" cy="482194"/>
+          </a:xfrm>
+          <a:prstGeom prst="rect">
+            <a:avLst/>
+          </a:prstGeom>
+          <a:solidFill>
+            <a:srgbClr val="6B1F32"/>
+          </a:solidFill>
+          <a:ln w="12700">
+            <a:solidFill>
+              <a:srgbClr val="333333"/>
+            </a:solidFill>
+            <a:prstDash val="solid"/>
+          </a:ln>
+        </p:spPr>
+      </p:sp>
+      <p:sp>
+        <p:nvSpPr>
+          <p:cNvPr id="20" name="Text 18"/>
+          <p:cNvSpPr/>
+          <p:nvPr/>
+        </p:nvSpPr>
+        <p:spPr>
+          <a:xfrm>
+            <a:off x="5355184" y="3431438"/>
+            <a:ext cx="1481328" cy="292608"/>
+          </a:xfrm>
+          <a:prstGeom prst="rect">
+            <a:avLst/>
+          </a:prstGeom>
+          <a:noFill/>
+          <a:ln/>
+        </p:spPr>
+        <p:txBody>
+          <a:bodyPr wrap="square" lIns="0" tIns="0" rIns="0" bIns="0" rtlCol="0" anchor="ctr"/>
+          <a:lstStyle/>
+          <a:p>
+            <a:pPr algn="ctr" indent="0" marL="0">
+              <a:buNone/>
+            </a:pPr>
+            <a:r>
+              <a:rPr lang="en-US" sz="1500" b="1" dirty="0">
+                <a:solidFill>
+                  <a:srgbClr val="45121F"/>
+                </a:solidFill>
+                <a:latin typeface="Yu Gothic" pitchFamily="34" charset="0"/>
+                <a:ea typeface="Yu Gothic" pitchFamily="34" charset="-122"/>
+                <a:cs typeface="Yu Gothic" pitchFamily="34" charset="-120"/>
+              </a:rPr>
+              <a:t>70</a:t>
+            </a:r>
+            <a:endParaRPr lang="en-US" sz="1500" dirty="0"/>
+          </a:p>
+        </p:txBody>
+      </p:sp>
+      <p:sp>
+        <p:nvSpPr>
+          <p:cNvPr id="21" name="Text 19"/>
+          <p:cNvSpPr/>
+          <p:nvPr/>
+        </p:nvSpPr>
+        <p:spPr>
+          <a:xfrm>
+            <a:off x="5355184" y="4352544"/>
+            <a:ext cx="1481328" cy="457200"/>
+          </a:xfrm>
+          <a:prstGeom prst="rect">
+            <a:avLst/>
+          </a:prstGeom>
+          <a:noFill/>
+          <a:ln/>
+        </p:spPr>
+        <p:txBody>
+          <a:bodyPr wrap="square" lIns="0" tIns="0" rIns="0" bIns="0" rtlCol="0" anchor="ctr"/>
+          <a:lstStyle/>
+          <a:p>
+            <a:pPr algn="ctr" indent="0" marL="0">
+              <a:lnSpc>
+                <a:spcPts val="1350"/>
+              </a:lnSpc>
+              <a:buNone/>
+            </a:pPr>
+            <a:r>
+              <a:rPr lang="en-US" sz="1000" dirty="0">
+                <a:solidFill>
+                  <a:srgbClr val="6E666A"/>
+                </a:solidFill>
+                <a:latin typeface="Yu Gothic" pitchFamily="34" charset="0"/>
+                <a:ea typeface="Yu Gothic" pitchFamily="34" charset="-122"/>
+                <a:cs typeface="Yu Gothic" pitchFamily="34" charset="-120"/>
+              </a:rPr>
+              <a:t>酒販店②</a:t>
+            </a:r>
+            <a:endParaRPr lang="en-US" sz="1000" dirty="0"/>
+          </a:p>
+          <a:p>
+            <a:pPr algn="ctr" indent="0" marL="0">
+              <a:lnSpc>
+                <a:spcPts val="1350"/>
+              </a:lnSpc>
+              <a:buNone/>
+            </a:pPr>
+            <a:r>
+              <a:rPr lang="en-US" sz="1000" dirty="0">
+                <a:solidFill>
+                  <a:srgbClr val="6E666A"/>
+                </a:solidFill>
+                <a:latin typeface="Yu Gothic" pitchFamily="34" charset="0"/>
+                <a:ea typeface="Yu Gothic" pitchFamily="34" charset="-122"/>
+                <a:cs typeface="Yu Gothic" pitchFamily="34" charset="-120"/>
+              </a:rPr>
+              <a:t>仕入価格</a:t>
+            </a:r>
+            <a:endParaRPr lang="en-US" sz="1000" dirty="0"/>
+          </a:p>
+        </p:txBody>
+      </p:sp>
+      <p:sp>
+        <p:nvSpPr>
+          <p:cNvPr id="22" name="Shape 20"/>
+          <p:cNvSpPr/>
+          <p:nvPr/>
+        </p:nvSpPr>
+        <p:spPr>
+          <a:xfrm>
+            <a:off x="7403440" y="3572256"/>
+            <a:ext cx="1481328" cy="688848"/>
+          </a:xfrm>
+          <a:prstGeom prst="rect">
+            <a:avLst/>
+          </a:prstGeom>
+          <a:solidFill>
+            <a:srgbClr val="6B1F32"/>
+          </a:solidFill>
+          <a:ln w="12700">
+            <a:solidFill>
+              <a:srgbClr val="333333"/>
+            </a:solidFill>
+            <a:prstDash val="solid"/>
+          </a:ln>
+        </p:spPr>
+      </p:sp>
+      <p:sp>
+        <p:nvSpPr>
+          <p:cNvPr id="23" name="Text 21"/>
+          <p:cNvSpPr/>
+          <p:nvPr/>
+        </p:nvSpPr>
+        <p:spPr>
+          <a:xfrm>
+            <a:off x="7403440" y="3224784"/>
+            <a:ext cx="1481328" cy="292608"/>
+          </a:xfrm>
+          <a:prstGeom prst="rect">
+            <a:avLst/>
+          </a:prstGeom>
+          <a:noFill/>
+          <a:ln/>
+        </p:spPr>
+        <p:txBody>
+          <a:bodyPr wrap="square" lIns="0" tIns="0" rIns="0" bIns="0" rtlCol="0" anchor="ctr"/>
+          <a:lstStyle/>
+          <a:p>
+            <a:pPr algn="ctr" indent="0" marL="0">
+              <a:buNone/>
+            </a:pPr>
+            <a:r>
+              <a:rPr lang="en-US" sz="1500" b="1" dirty="0">
+                <a:solidFill>
+                  <a:srgbClr val="45121F"/>
+                </a:solidFill>
+                <a:latin typeface="Yu Gothic" pitchFamily="34" charset="0"/>
+                <a:ea typeface="Yu Gothic" pitchFamily="34" charset="-122"/>
+                <a:cs typeface="Yu Gothic" pitchFamily="34" charset="-120"/>
+              </a:rPr>
+              <a:t>80〜100</a:t>
+            </a:r>
+            <a:endParaRPr lang="en-US" sz="1500" dirty="0"/>
+          </a:p>
+        </p:txBody>
+      </p:sp>
+      <p:sp>
+        <p:nvSpPr>
+          <p:cNvPr id="24" name="Text 22"/>
+          <p:cNvSpPr/>
+          <p:nvPr/>
+        </p:nvSpPr>
+        <p:spPr>
+          <a:xfrm>
+            <a:off x="7403440" y="4352544"/>
+            <a:ext cx="1481328" cy="457200"/>
+          </a:xfrm>
+          <a:prstGeom prst="rect">
+            <a:avLst/>
+          </a:prstGeom>
+          <a:noFill/>
+          <a:ln/>
+        </p:spPr>
+        <p:txBody>
+          <a:bodyPr wrap="square" lIns="0" tIns="0" rIns="0" bIns="0" rtlCol="0" anchor="ctr"/>
+          <a:lstStyle/>
+          <a:p>
+            <a:pPr algn="ctr" indent="0" marL="0">
+              <a:lnSpc>
+                <a:spcPts val="1350"/>
+              </a:lnSpc>
+              <a:buNone/>
+            </a:pPr>
+            <a:r>
+              <a:rPr lang="en-US" sz="1000" dirty="0">
+                <a:solidFill>
+                  <a:srgbClr val="6E666A"/>
+                </a:solidFill>
+                <a:latin typeface="Yu Gothic" pitchFamily="34" charset="0"/>
+                <a:ea typeface="Yu Gothic" pitchFamily="34" charset="-122"/>
+                <a:cs typeface="Yu Gothic" pitchFamily="34" charset="-120"/>
+              </a:rPr>
+              <a:t>一般消費者</a:t>
+            </a:r>
+            <a:endParaRPr lang="en-US" sz="1000" dirty="0"/>
+          </a:p>
+          <a:p>
+            <a:pPr algn="ctr" indent="0" marL="0">
+              <a:lnSpc>
+                <a:spcPts val="1350"/>
+              </a:lnSpc>
+              <a:buNone/>
+            </a:pPr>
+            <a:r>
+              <a:rPr lang="en-US" sz="1000" dirty="0">
+                <a:solidFill>
+                  <a:srgbClr val="6E666A"/>
+                </a:solidFill>
+                <a:latin typeface="Yu Gothic" pitchFamily="34" charset="0"/>
+                <a:ea typeface="Yu Gothic" pitchFamily="34" charset="-122"/>
+                <a:cs typeface="Yu Gothic" pitchFamily="34" charset="-120"/>
+              </a:rPr>
+              <a:t>購入価格</a:t>
+            </a:r>
+            <a:endParaRPr lang="en-US" sz="1000" dirty="0"/>
+          </a:p>
+        </p:txBody>
+      </p:sp>
+      <p:sp>
+        <p:nvSpPr>
+          <p:cNvPr id="25" name="Shape 23"/>
+          <p:cNvSpPr/>
+          <p:nvPr/>
+        </p:nvSpPr>
+        <p:spPr>
+          <a:xfrm>
+            <a:off x="9451696" y="2194560"/>
+            <a:ext cx="1481328" cy="1033272"/>
+          </a:xfrm>
+          <a:prstGeom prst="rect">
+            <a:avLst/>
+          </a:prstGeom>
+          <a:solidFill>
+            <a:srgbClr val="9B5568">
+              <a:alpha val="48000"/>
+            </a:srgbClr>
+          </a:solidFill>
+          <a:ln w="12700">
+            <a:solidFill>
+              <a:srgbClr val="333333"/>
+            </a:solidFill>
+            <a:prstDash val="solid"/>
+          </a:ln>
+        </p:spPr>
+      </p:sp>
+      <p:sp>
+        <p:nvSpPr>
+          <p:cNvPr id="26" name="Shape 24"/>
+          <p:cNvSpPr/>
+          <p:nvPr/>
+        </p:nvSpPr>
+        <p:spPr>
+          <a:xfrm>
+            <a:off x="9451696" y="3227832"/>
+            <a:ext cx="1481328" cy="1033272"/>
+          </a:xfrm>
+          <a:prstGeom prst="rect">
+            <a:avLst/>
+          </a:prstGeom>
+          <a:solidFill>
+            <a:srgbClr val="9B5568"/>
+          </a:solidFill>
+          <a:ln w="12700">
+            <a:solidFill>
+              <a:srgbClr val="333333"/>
+            </a:solidFill>
+            <a:prstDash val="solid"/>
+          </a:ln>
+        </p:spPr>
+      </p:sp>
+      <p:sp>
+        <p:nvSpPr>
+          <p:cNvPr id="27" name="Text 25"/>
+          <p:cNvSpPr/>
+          <p:nvPr/>
+        </p:nvSpPr>
+        <p:spPr>
+          <a:xfrm>
+            <a:off x="9451696" y="1847088"/>
+            <a:ext cx="1481328" cy="292608"/>
+          </a:xfrm>
+          <a:prstGeom prst="rect">
+            <a:avLst/>
+          </a:prstGeom>
+          <a:noFill/>
+          <a:ln/>
+        </p:spPr>
+        <p:txBody>
+          <a:bodyPr wrap="square" lIns="0" tIns="0" rIns="0" bIns="0" rtlCol="0" anchor="ctr"/>
+          <a:lstStyle/>
+          <a:p>
+            <a:pPr algn="ctr" indent="0" marL="0">
+              <a:buNone/>
+            </a:pPr>
+            <a:r>
+              <a:rPr lang="en-US" sz="1500" b="1" dirty="0">
+                <a:solidFill>
+                  <a:srgbClr val="45121F"/>
+                </a:solidFill>
+                <a:latin typeface="Yu Gothic" pitchFamily="34" charset="0"/>
+                <a:ea typeface="Yu Gothic" pitchFamily="34" charset="-122"/>
+                <a:cs typeface="Yu Gothic" pitchFamily="34" charset="-120"/>
+              </a:rPr>
+              <a:t>150〜300</a:t>
+            </a:r>
+            <a:endParaRPr lang="en-US" sz="1500" dirty="0"/>
+          </a:p>
+        </p:txBody>
+      </p:sp>
+      <p:sp>
+        <p:nvSpPr>
+          <p:cNvPr id="28" name="Text 26"/>
+          <p:cNvSpPr/>
+          <p:nvPr/>
+        </p:nvSpPr>
+        <p:spPr>
+          <a:xfrm>
+            <a:off x="9451696" y="4352544"/>
+            <a:ext cx="1481328" cy="457200"/>
+          </a:xfrm>
+          <a:prstGeom prst="rect">
+            <a:avLst/>
+          </a:prstGeom>
+          <a:noFill/>
+          <a:ln/>
+        </p:spPr>
+        <p:txBody>
+          <a:bodyPr wrap="square" lIns="0" tIns="0" rIns="0" bIns="0" rtlCol="0" anchor="ctr"/>
+          <a:lstStyle/>
+          <a:p>
+            <a:pPr algn="ctr" indent="0" marL="0">
+              <a:lnSpc>
+                <a:spcPts val="1350"/>
+              </a:lnSpc>
+              <a:buNone/>
+            </a:pPr>
+            <a:r>
+              <a:rPr lang="en-US" sz="1000" dirty="0">
+                <a:solidFill>
+                  <a:srgbClr val="6E666A"/>
+                </a:solidFill>
+                <a:latin typeface="Yu Gothic" pitchFamily="34" charset="0"/>
+                <a:ea typeface="Yu Gothic" pitchFamily="34" charset="-122"/>
+                <a:cs typeface="Yu Gothic" pitchFamily="34" charset="-120"/>
+              </a:rPr>
+              <a:t>レストラン</a:t>
+            </a:r>
+            <a:endParaRPr lang="en-US" sz="1000" dirty="0"/>
+          </a:p>
+          <a:p>
+            <a:pPr algn="ctr" indent="0" marL="0">
+              <a:lnSpc>
+                <a:spcPts val="1350"/>
+              </a:lnSpc>
+              <a:buNone/>
+            </a:pPr>
+            <a:r>
+              <a:rPr lang="en-US" sz="1000" dirty="0">
+                <a:solidFill>
+                  <a:srgbClr val="6E666A"/>
+                </a:solidFill>
+                <a:latin typeface="Yu Gothic" pitchFamily="34" charset="0"/>
+                <a:ea typeface="Yu Gothic" pitchFamily="34" charset="-122"/>
+                <a:cs typeface="Yu Gothic" pitchFamily="34" charset="-120"/>
+              </a:rPr>
+              <a:t>店頭価格</a:t>
+            </a:r>
+            <a:endParaRPr lang="en-US" sz="1000" dirty="0"/>
+          </a:p>
+        </p:txBody>
+      </p:sp>
+      <p:sp>
+        <p:nvSpPr>
+          <p:cNvPr id="29" name="Shape 27"/>
+          <p:cNvSpPr/>
+          <p:nvPr/>
+        </p:nvSpPr>
+        <p:spPr>
+          <a:xfrm>
+            <a:off x="566928" y="4956048"/>
+            <a:ext cx="11057839" cy="969264"/>
+          </a:xfrm>
+          <a:prstGeom prst="roundRect">
+            <a:avLst>
+              <a:gd name="adj" fmla="val 8491"/>
+            </a:avLst>
+          </a:prstGeom>
+          <a:solidFill>
+            <a:srgbClr val="45121F"/>
+          </a:solidFill>
+          <a:ln w="12700">
+            <a:solidFill>
+              <a:srgbClr val="45121F"/>
+            </a:solidFill>
+            <a:prstDash val="solid"/>
+          </a:ln>
+        </p:spPr>
+      </p:sp>
+      <p:sp>
+        <p:nvSpPr>
+          <p:cNvPr id="30" name="Text 28"/>
+          <p:cNvSpPr/>
+          <p:nvPr/>
+        </p:nvSpPr>
+        <p:spPr>
+          <a:xfrm>
+            <a:off x="877824" y="4956048"/>
+            <a:ext cx="4023360" cy="969264"/>
+          </a:xfrm>
+          <a:prstGeom prst="rect">
+            <a:avLst/>
+          </a:prstGeom>
+          <a:noFill/>
+          <a:ln/>
+        </p:spPr>
+        <p:txBody>
+          <a:bodyPr wrap="square" lIns="0" tIns="0" rIns="0" bIns="0" rtlCol="0" anchor="ctr"/>
+          <a:lstStyle/>
+          <a:p>
+            <a:pPr indent="0" marL="0">
+              <a:lnSpc>
+                <a:spcPts val="2100"/>
+              </a:lnSpc>
+              <a:buNone/>
+            </a:pPr>
+            <a:r>
+              <a:rPr lang="en-US" sz="1500" b="1" dirty="0">
+                <a:solidFill>
+                  <a:srgbClr val="C2A15A"/>
+                </a:solidFill>
+                <a:latin typeface="Yu Gothic" pitchFamily="34" charset="0"/>
+                <a:ea typeface="Yu Gothic" pitchFamily="34" charset="-122"/>
+                <a:cs typeface="Yu Gothic" pitchFamily="34" charset="-120"/>
+              </a:rPr>
+              <a:t>レストラン店頭価格の</a:t>
+            </a:r>
+            <a:endParaRPr lang="en-US" sz="1500" dirty="0"/>
+          </a:p>
+          <a:p>
+            <a:pPr indent="0" marL="0">
+              <a:lnSpc>
+                <a:spcPts val="2100"/>
+              </a:lnSpc>
+              <a:buNone/>
+            </a:pPr>
+            <a:r>
+              <a:rPr lang="en-US" sz="1500" b="1" dirty="0">
+                <a:solidFill>
+                  <a:srgbClr val="C2A15A"/>
+                </a:solidFill>
+                <a:latin typeface="Yu Gothic" pitchFamily="34" charset="0"/>
+                <a:ea typeface="Yu Gothic" pitchFamily="34" charset="-122"/>
+                <a:cs typeface="Yu Gothic" pitchFamily="34" charset="-120"/>
+              </a:rPr>
+              <a:t>1/4〜1/7 の水準で仕入れる。</a:t>
+            </a:r>
+            <a:endParaRPr lang="en-US" sz="1500" dirty="0"/>
+          </a:p>
+        </p:txBody>
+      </p:sp>
+      <p:sp>
+        <p:nvSpPr>
+          <p:cNvPr id="31" name="Text 29"/>
+          <p:cNvSpPr/>
+          <p:nvPr/>
+        </p:nvSpPr>
+        <p:spPr>
+          <a:xfrm>
+            <a:off x="5230368" y="5120640"/>
+            <a:ext cx="2121408" cy="256032"/>
+          </a:xfrm>
+          <a:prstGeom prst="rect">
+            <a:avLst/>
+          </a:prstGeom>
+          <a:noFill/>
+          <a:ln/>
+        </p:spPr>
+        <p:txBody>
+          <a:bodyPr wrap="square" lIns="0" tIns="0" rIns="0" bIns="0" rtlCol="0" anchor="ctr"/>
+          <a:lstStyle/>
+          <a:p>
+            <a:pPr indent="0" marL="0">
+              <a:buNone/>
+            </a:pPr>
+            <a:r>
+              <a:rPr lang="en-US" sz="1050" b="1" dirty="0">
+                <a:solidFill>
+                  <a:srgbClr val="FFFFFF"/>
+                </a:solidFill>
+                <a:latin typeface="Yu Gothic" pitchFamily="34" charset="0"/>
+                <a:ea typeface="Yu Gothic" pitchFamily="34" charset="-122"/>
+                <a:cs typeface="Yu Gothic" pitchFamily="34" charset="-120"/>
+              </a:rPr>
+              <a:t>会員は最安値で買える</a:t>
+            </a:r>
+            <a:endParaRPr lang="en-US" sz="1050" dirty="0"/>
+          </a:p>
+        </p:txBody>
+      </p:sp>
+      <p:sp>
+        <p:nvSpPr>
+          <p:cNvPr id="32" name="Text 30"/>
+          <p:cNvSpPr/>
+          <p:nvPr/>
+        </p:nvSpPr>
+        <p:spPr>
+          <a:xfrm>
+            <a:off x="5230368" y="5394960"/>
+            <a:ext cx="2121408" cy="438912"/>
+          </a:xfrm>
+          <a:prstGeom prst="rect">
+            <a:avLst/>
+          </a:prstGeom>
+          <a:noFill/>
+          <a:ln/>
+        </p:spPr>
+        <p:txBody>
+          <a:bodyPr wrap="square" lIns="0" tIns="0" rIns="0" bIns="0" rtlCol="0" anchor="ctr"/>
+          <a:lstStyle/>
+          <a:p>
+            <a:pPr indent="0" marL="0">
+              <a:lnSpc>
+                <a:spcPts val="1250"/>
+              </a:lnSpc>
+              <a:buNone/>
+            </a:pPr>
+            <a:r>
+              <a:rPr lang="en-US" sz="900" dirty="0">
+                <a:solidFill>
+                  <a:srgbClr val="CBBAC1"/>
+                </a:solidFill>
+                <a:latin typeface="Yu Gothic" pitchFamily="34" charset="0"/>
+                <a:ea typeface="Yu Gothic" pitchFamily="34" charset="-122"/>
+                <a:cs typeface="Yu Gothic" pitchFamily="34" charset="-120"/>
+              </a:rPr>
+              <a:t>ネット最安値水準から</a:t>
+            </a:r>
+            <a:endParaRPr lang="en-US" sz="900" dirty="0"/>
+          </a:p>
+          <a:p>
+            <a:pPr indent="0" marL="0">
+              <a:lnSpc>
+                <a:spcPts val="1250"/>
+              </a:lnSpc>
+              <a:buNone/>
+            </a:pPr>
+            <a:r>
+              <a:rPr lang="en-US" sz="900" dirty="0">
+                <a:solidFill>
+                  <a:srgbClr val="CBBAC1"/>
+                </a:solidFill>
+                <a:latin typeface="Yu Gothic" pitchFamily="34" charset="0"/>
+                <a:ea typeface="Yu Gothic" pitchFamily="34" charset="-122"/>
+                <a:cs typeface="Yu Gothic" pitchFamily="34" charset="-120"/>
+              </a:rPr>
+              <a:t>さらに10〜20%OFF</a:t>
+            </a:r>
+            <a:endParaRPr lang="en-US" sz="900" dirty="0"/>
+          </a:p>
+        </p:txBody>
+      </p:sp>
+      <p:sp>
+        <p:nvSpPr>
+          <p:cNvPr id="33" name="Text 31"/>
+          <p:cNvSpPr/>
+          <p:nvPr/>
+        </p:nvSpPr>
+        <p:spPr>
+          <a:xfrm>
+            <a:off x="7443216" y="5120640"/>
+            <a:ext cx="2121408" cy="256032"/>
+          </a:xfrm>
+          <a:prstGeom prst="rect">
+            <a:avLst/>
+          </a:prstGeom>
+          <a:noFill/>
+          <a:ln/>
+        </p:spPr>
+        <p:txBody>
+          <a:bodyPr wrap="square" lIns="0" tIns="0" rIns="0" bIns="0" rtlCol="0" anchor="ctr"/>
+          <a:lstStyle/>
+          <a:p>
+            <a:pPr indent="0" marL="0">
+              <a:buNone/>
+            </a:pPr>
+            <a:r>
+              <a:rPr lang="en-US" sz="1050" b="1" dirty="0">
+                <a:solidFill>
+                  <a:srgbClr val="FFFFFF"/>
+                </a:solidFill>
+                <a:latin typeface="Yu Gothic" pitchFamily="34" charset="0"/>
+                <a:ea typeface="Yu Gothic" pitchFamily="34" charset="-122"/>
+                <a:cs typeface="Yu Gothic" pitchFamily="34" charset="-120"/>
+              </a:rPr>
+              <a:t>飲食店は在庫ゼロで足りる</a:t>
+            </a:r>
+            <a:endParaRPr lang="en-US" sz="1050" dirty="0"/>
+          </a:p>
+        </p:txBody>
+      </p:sp>
+      <p:sp>
+        <p:nvSpPr>
+          <p:cNvPr id="34" name="Text 32"/>
+          <p:cNvSpPr/>
+          <p:nvPr/>
+        </p:nvSpPr>
+        <p:spPr>
+          <a:xfrm>
+            <a:off x="7443216" y="5394960"/>
+            <a:ext cx="2121408" cy="438912"/>
+          </a:xfrm>
+          <a:prstGeom prst="rect">
+            <a:avLst/>
+          </a:prstGeom>
+          <a:noFill/>
+          <a:ln/>
+        </p:spPr>
+        <p:txBody>
+          <a:bodyPr wrap="square" lIns="0" tIns="0" rIns="0" bIns="0" rtlCol="0" anchor="ctr"/>
+          <a:lstStyle/>
+          <a:p>
+            <a:pPr indent="0" marL="0">
+              <a:lnSpc>
+                <a:spcPts val="1250"/>
+              </a:lnSpc>
+              <a:buNone/>
+            </a:pPr>
+            <a:r>
+              <a:rPr lang="en-US" sz="900" dirty="0">
+                <a:solidFill>
+                  <a:srgbClr val="CBBAC1"/>
+                </a:solidFill>
+                <a:latin typeface="Yu Gothic" pitchFamily="34" charset="0"/>
+                <a:ea typeface="Yu Gothic" pitchFamily="34" charset="-122"/>
+                <a:cs typeface="Yu Gothic" pitchFamily="34" charset="-120"/>
+              </a:rPr>
+              <a:t>資金を寝かせずに</a:t>
+            </a:r>
+            <a:endParaRPr lang="en-US" sz="900" dirty="0"/>
+          </a:p>
+          <a:p>
+            <a:pPr indent="0" marL="0">
+              <a:lnSpc>
+                <a:spcPts val="1250"/>
+              </a:lnSpc>
+              <a:buNone/>
+            </a:pPr>
+            <a:r>
+              <a:rPr lang="en-US" sz="900" dirty="0">
+                <a:solidFill>
+                  <a:srgbClr val="CBBAC1"/>
+                </a:solidFill>
+                <a:latin typeface="Yu Gothic" pitchFamily="34" charset="0"/>
+                <a:ea typeface="Yu Gothic" pitchFamily="34" charset="-122"/>
+                <a:cs typeface="Yu Gothic" pitchFamily="34" charset="-120"/>
+              </a:rPr>
+              <a:t>ワインリストが華やぐ</a:t>
+            </a:r>
+            <a:endParaRPr lang="en-US" sz="900" dirty="0"/>
+          </a:p>
+        </p:txBody>
+      </p:sp>
+      <p:sp>
+        <p:nvSpPr>
+          <p:cNvPr id="35" name="Text 33"/>
+          <p:cNvSpPr/>
+          <p:nvPr/>
+        </p:nvSpPr>
+        <p:spPr>
+          <a:xfrm>
+            <a:off x="9656064" y="5120640"/>
+            <a:ext cx="2121408" cy="256032"/>
+          </a:xfrm>
+          <a:prstGeom prst="rect">
+            <a:avLst/>
+          </a:prstGeom>
+          <a:noFill/>
+          <a:ln/>
+        </p:spPr>
+        <p:txBody>
+          <a:bodyPr wrap="square" lIns="0" tIns="0" rIns="0" bIns="0" rtlCol="0" anchor="ctr"/>
+          <a:lstStyle/>
+          <a:p>
+            <a:pPr indent="0" marL="0">
+              <a:buNone/>
+            </a:pPr>
+            <a:r>
+              <a:rPr lang="en-US" sz="1050" b="1" dirty="0">
+                <a:solidFill>
+                  <a:srgbClr val="FFFFFF"/>
+                </a:solidFill>
+                <a:latin typeface="Yu Gothic" pitchFamily="34" charset="0"/>
+                <a:ea typeface="Yu Gothic" pitchFamily="34" charset="-122"/>
+                <a:cs typeface="Yu Gothic" pitchFamily="34" charset="-120"/>
+              </a:rPr>
+              <a:t>新規参入は追随できない</a:t>
+            </a:r>
+            <a:endParaRPr lang="en-US" sz="1050" dirty="0"/>
+          </a:p>
+        </p:txBody>
+      </p:sp>
+      <p:sp>
+        <p:nvSpPr>
+          <p:cNvPr id="36" name="Text 34"/>
+          <p:cNvSpPr/>
+          <p:nvPr/>
+        </p:nvSpPr>
+        <p:spPr>
+          <a:xfrm>
+            <a:off x="9656064" y="5394960"/>
+            <a:ext cx="2121408" cy="438912"/>
+          </a:xfrm>
+          <a:prstGeom prst="rect">
+            <a:avLst/>
+          </a:prstGeom>
+          <a:noFill/>
+          <a:ln/>
+        </p:spPr>
+        <p:txBody>
+          <a:bodyPr wrap="square" lIns="0" tIns="0" rIns="0" bIns="0" rtlCol="0" anchor="ctr"/>
+          <a:lstStyle/>
+          <a:p>
+            <a:pPr indent="0" marL="0">
+              <a:lnSpc>
+                <a:spcPts val="1250"/>
+              </a:lnSpc>
+              <a:buNone/>
+            </a:pPr>
+            <a:r>
+              <a:rPr lang="en-US" sz="900" dirty="0">
+                <a:solidFill>
+                  <a:srgbClr val="CBBAC1"/>
+                </a:solidFill>
+                <a:latin typeface="Yu Gothic" pitchFamily="34" charset="0"/>
+                <a:ea typeface="Yu Gothic" pitchFamily="34" charset="-122"/>
+                <a:cs typeface="Yu Gothic" pitchFamily="34" charset="-120"/>
+              </a:rPr>
+              <a:t>参入業者は「70」の</a:t>
+            </a:r>
+            <a:endParaRPr lang="en-US" sz="900" dirty="0"/>
+          </a:p>
+          <a:p>
+            <a:pPr indent="0" marL="0">
+              <a:lnSpc>
+                <a:spcPts val="1250"/>
+              </a:lnSpc>
+              <a:buNone/>
+            </a:pPr>
+            <a:r>
+              <a:rPr lang="en-US" sz="900" dirty="0">
+                <a:solidFill>
+                  <a:srgbClr val="CBBAC1"/>
+                </a:solidFill>
+                <a:latin typeface="Yu Gothic" pitchFamily="34" charset="0"/>
+                <a:ea typeface="Yu Gothic" pitchFamily="34" charset="-122"/>
+                <a:cs typeface="Yu Gothic" pitchFamily="34" charset="-120"/>
+              </a:rPr>
+              <a:t>水準からしか始まらない</a:t>
+            </a:r>
+            <a:endParaRPr lang="en-US" sz="900" dirty="0"/>
+          </a:p>
+        </p:txBody>
+      </p:sp>
+      <p:sp>
+        <p:nvSpPr>
+          <p:cNvPr id="37" name="Text 35"/>
+          <p:cNvSpPr/>
+          <p:nvPr/>
+        </p:nvSpPr>
+        <p:spPr>
+          <a:xfrm>
+            <a:off x="566928" y="6016752"/>
+            <a:ext cx="10972800" cy="256032"/>
+          </a:xfrm>
+          <a:prstGeom prst="rect">
+            <a:avLst/>
+          </a:prstGeom>
+          <a:noFill/>
+          <a:ln/>
+        </p:spPr>
+        <p:txBody>
+          <a:bodyPr wrap="square" lIns="0" tIns="0" rIns="0" bIns="0" rtlCol="0" anchor="ctr"/>
+          <a:lstStyle/>
+          <a:p>
+            <a:pPr indent="0" marL="0">
+              <a:buNone/>
+            </a:pPr>
+            <a:r>
+              <a:rPr lang="en-US" sz="880" dirty="0">
+                <a:solidFill>
+                  <a:srgbClr val="9A9498"/>
+                </a:solidFill>
+                <a:latin typeface="Yu Gothic" pitchFamily="34" charset="0"/>
+                <a:ea typeface="Yu Gothic" pitchFamily="34" charset="-122"/>
+                <a:cs typeface="Yu Gothic" pitchFamily="34" charset="-120"/>
+              </a:rPr>
+              <a:t>※ 希望小売価格を100とした相対指数。ネット最安値／並行輸入価格は概ね80の水準。出典：当社資料。</a:t>
+            </a:r>
+            <a:endParaRPr lang="en-US" sz="880" dirty="0"/>
+          </a:p>
+        </p:txBody>
+      </p:sp>
+    </p:spTree>
+  </p:cSld>
+  <p:clrMapOvr>
+    <a:masterClrMapping/>
+  </p:clrMapOvr>
+</p:sld>
+</file>
+
+<file path=ppt/slides/slide23.xml><?xml version="1.0" encoding="utf-8"?>
+<p:sld xmlns:a="http://schemas.openxmlformats.org/drawingml/2006/main" xmlns:r="http://schemas.openxmlformats.org/officeDocument/2006/relationships" xmlns:p="http://schemas.openxmlformats.org/presentationml/2006/main">
+  <p:cSld name="Slide 23">
+    <p:bg>
+      <p:bgPr>
+        <a:solidFill>
+          <a:srgbClr val="FFFFFF"/>
+        </a:solidFill>
+      </p:bgPr>
+    </p:bg>
+    <p:spTree>
+      <p:nvGrpSpPr>
+        <p:cNvPr id="1" name=""/>
+        <p:cNvGrpSpPr/>
+        <p:nvPr/>
+      </p:nvGrpSpPr>
+      <p:grpSpPr>
+        <a:xfrm>
+          <a:off x="0" y="0"/>
+          <a:ext cx="0" cy="0"/>
+          <a:chOff x="0" y="0"/>
+          <a:chExt cx="0" cy="0"/>
+        </a:xfrm>
+      </p:grpSpPr>
+      <p:sp>
+        <p:nvSpPr>
+          <p:cNvPr id="2" name="Text 0"/>
+          <p:cNvSpPr/>
+          <p:nvPr/>
+        </p:nvSpPr>
+        <p:spPr>
+          <a:xfrm>
+            <a:off x="566928" y="384048"/>
+            <a:ext cx="8229600" cy="237744"/>
+          </a:xfrm>
+          <a:prstGeom prst="rect">
+            <a:avLst/>
+          </a:prstGeom>
+          <a:noFill/>
+          <a:ln/>
+        </p:spPr>
+        <p:txBody>
+          <a:bodyPr wrap="square" lIns="0" tIns="0" rIns="0" bIns="0" rtlCol="0" anchor="ctr"/>
+          <a:lstStyle/>
+          <a:p>
+            <a:pPr indent="0" marL="0">
+              <a:buNone/>
+            </a:pPr>
+            <a:r>
+              <a:rPr lang="en-US" sz="1100" b="1" spc="240" kern="0" dirty="0">
+                <a:solidFill>
+                  <a:srgbClr val="C2A15A"/>
+                </a:solidFill>
+                <a:latin typeface="Cambria" pitchFamily="34" charset="0"/>
+                <a:ea typeface="Cambria" pitchFamily="34" charset="-122"/>
+                <a:cs typeface="Cambria" pitchFamily="34" charset="-120"/>
+              </a:rPr>
+              <a:t>APPENDIX D</a:t>
+            </a:r>
+            <a:endParaRPr lang="en-US" sz="1100" dirty="0"/>
+          </a:p>
+        </p:txBody>
+      </p:sp>
+      <p:sp>
+        <p:nvSpPr>
+          <p:cNvPr id="3" name="Text 1"/>
+          <p:cNvSpPr/>
+          <p:nvPr/>
+        </p:nvSpPr>
+        <p:spPr>
+          <a:xfrm>
+            <a:off x="566928" y="658368"/>
+            <a:ext cx="10241280" cy="566928"/>
+          </a:xfrm>
+          <a:prstGeom prst="rect">
+            <a:avLst/>
+          </a:prstGeom>
+          <a:noFill/>
+          <a:ln/>
+        </p:spPr>
+        <p:txBody>
+          <a:bodyPr wrap="square" lIns="0" tIns="0" rIns="0" bIns="0" rtlCol="0" anchor="ctr"/>
+          <a:lstStyle/>
+          <a:p>
+            <a:pPr indent="0" marL="0">
+              <a:buNone/>
+            </a:pPr>
+            <a:r>
+              <a:rPr lang="en-US" sz="3000" b="1" dirty="0">
+                <a:solidFill>
+                  <a:srgbClr val="45121F"/>
+                </a:solidFill>
+                <a:latin typeface="Yu Gothic" pitchFamily="34" charset="0"/>
+                <a:ea typeface="Yu Gothic" pitchFamily="34" charset="-122"/>
+                <a:cs typeface="Yu Gothic" pitchFamily="34" charset="-120"/>
+              </a:rPr>
+              <a:t>代表取締役 中野 邦人</a:t>
+            </a:r>
+            <a:endParaRPr lang="en-US" sz="3000" dirty="0"/>
+          </a:p>
+        </p:txBody>
+      </p:sp>
+      <p:sp>
+        <p:nvSpPr>
+          <p:cNvPr id="4" name="Text 2"/>
+          <p:cNvSpPr/>
+          <p:nvPr/>
+        </p:nvSpPr>
+        <p:spPr>
+          <a:xfrm>
+            <a:off x="566928" y="1280160"/>
+            <a:ext cx="11064240" cy="384048"/>
+          </a:xfrm>
+          <a:prstGeom prst="rect">
+            <a:avLst/>
+          </a:prstGeom>
+          <a:noFill/>
+          <a:ln/>
+        </p:spPr>
+        <p:txBody>
+          <a:bodyPr wrap="square" lIns="0" tIns="0" rIns="0" bIns="0" rtlCol="0" anchor="ctr"/>
+          <a:lstStyle/>
+          <a:p>
+            <a:pPr indent="0" marL="0">
+              <a:lnSpc>
+                <a:spcPts val="1900"/>
+              </a:lnSpc>
+              <a:buNone/>
+            </a:pPr>
+            <a:r>
+              <a:rPr lang="en-US" sz="1300" dirty="0">
+                <a:solidFill>
+                  <a:srgbClr val="6E666A"/>
+                </a:solidFill>
+                <a:latin typeface="Yu Gothic" pitchFamily="34" charset="0"/>
+                <a:ea typeface="Yu Gothic" pitchFamily="34" charset="-122"/>
+                <a:cs typeface="Yu Gothic" pitchFamily="34" charset="-120"/>
+              </a:rPr>
+              <a:t>不動産投資・不動産証券化・ホテルコンド開発・スペースシェアリングを経て、ワインへ。デベロッパーの言語が通じる相手です。</a:t>
+            </a:r>
+            <a:endParaRPr lang="en-US" sz="1300" dirty="0"/>
+          </a:p>
+        </p:txBody>
+      </p:sp>
+      <p:sp>
+        <p:nvSpPr>
+          <p:cNvPr id="5" name="Text 3"/>
+          <p:cNvSpPr/>
+          <p:nvPr/>
+        </p:nvSpPr>
+        <p:spPr>
+          <a:xfrm>
+            <a:off x="566928" y="6437376"/>
+            <a:ext cx="5486400" cy="237744"/>
+          </a:xfrm>
+          <a:prstGeom prst="rect">
+            <a:avLst/>
+          </a:prstGeom>
+          <a:noFill/>
+          <a:ln/>
+        </p:spPr>
+        <p:txBody>
+          <a:bodyPr wrap="square" lIns="0" tIns="0" rIns="0" bIns="0" rtlCol="0" anchor="ctr"/>
+          <a:lstStyle/>
+          <a:p>
+            <a:pPr indent="0" marL="0">
+              <a:buNone/>
+            </a:pPr>
+            <a:r>
+              <a:rPr lang="en-US" sz="850" dirty="0">
+                <a:solidFill>
+                  <a:srgbClr val="9A9498"/>
+                </a:solidFill>
+                <a:latin typeface="Yu Gothic" pitchFamily="34" charset="0"/>
+                <a:ea typeface="Yu Gothic" pitchFamily="34" charset="-122"/>
+                <a:cs typeface="Yu Gothic" pitchFamily="34" charset="-120"/>
+              </a:rPr>
+              <a:t>WineBank × Mori Building ｜ 業務提携ご提案</a:t>
+            </a:r>
+            <a:endParaRPr lang="en-US" sz="850" dirty="0"/>
+          </a:p>
+        </p:txBody>
+      </p:sp>
+      <p:sp>
+        <p:nvSpPr>
+          <p:cNvPr id="6" name="Text 4"/>
+          <p:cNvSpPr/>
+          <p:nvPr/>
+        </p:nvSpPr>
+        <p:spPr>
+          <a:xfrm>
+            <a:off x="10801807" y="6437376"/>
+            <a:ext cx="822960" cy="237744"/>
+          </a:xfrm>
+          <a:prstGeom prst="rect">
+            <a:avLst/>
+          </a:prstGeom>
+          <a:noFill/>
+          <a:ln/>
+        </p:spPr>
+        <p:txBody>
+          <a:bodyPr wrap="square" lIns="0" tIns="0" rIns="0" bIns="0" rtlCol="0" anchor="ctr"/>
+          <a:lstStyle/>
+          <a:p>
+            <a:pPr algn="r" indent="0" marL="0">
+              <a:buNone/>
+            </a:pPr>
+            <a:r>
+              <a:rPr lang="en-US" sz="900" dirty="0">
+                <a:solidFill>
+                  <a:srgbClr val="9A9498"/>
+                </a:solidFill>
+                <a:latin typeface="Cambria" pitchFamily="34" charset="0"/>
+                <a:ea typeface="Cambria" pitchFamily="34" charset="-122"/>
+                <a:cs typeface="Cambria" pitchFamily="34" charset="-120"/>
+              </a:rPr>
+              <a:t>22</a:t>
+            </a:r>
+            <a:endParaRPr lang="en-US" sz="900" dirty="0"/>
+          </a:p>
+        </p:txBody>
+      </p:sp>
+      <p:sp>
+        <p:nvSpPr>
+          <p:cNvPr id="7" name="Text 5"/>
+          <p:cNvSpPr/>
+          <p:nvPr/>
+        </p:nvSpPr>
+        <p:spPr>
+          <a:xfrm>
+            <a:off x="8881567" y="6437376"/>
+            <a:ext cx="1828800" cy="237744"/>
+          </a:xfrm>
+          <a:prstGeom prst="rect">
+            <a:avLst/>
+          </a:prstGeom>
+          <a:noFill/>
+          <a:ln/>
+        </p:spPr>
+        <p:txBody>
+          <a:bodyPr wrap="square" lIns="0" tIns="0" rIns="0" bIns="0" rtlCol="0" anchor="ctr"/>
+          <a:lstStyle/>
+          <a:p>
+            <a:pPr algn="r" indent="0" marL="0">
+              <a:buNone/>
+            </a:pPr>
+            <a:r>
+              <a:rPr lang="en-US" sz="800" spc="120" kern="0" dirty="0">
+                <a:solidFill>
+                  <a:srgbClr val="C6C0C3"/>
+                </a:solidFill>
+                <a:latin typeface="Cambria" pitchFamily="34" charset="0"/>
+                <a:ea typeface="Cambria" pitchFamily="34" charset="-122"/>
+                <a:cs typeface="Cambria" pitchFamily="34" charset="-120"/>
+              </a:rPr>
+              <a:t>CONFIDENTIAL</a:t>
+            </a:r>
+            <a:endParaRPr lang="en-US" sz="800" dirty="0"/>
+          </a:p>
+        </p:txBody>
+      </p:sp>
+      <p:sp>
+        <p:nvSpPr>
+          <p:cNvPr id="8" name="Text 6"/>
+          <p:cNvSpPr/>
+          <p:nvPr/>
+        </p:nvSpPr>
+        <p:spPr>
+          <a:xfrm>
+            <a:off x="566928" y="1810512"/>
+            <a:ext cx="2743200" cy="274320"/>
+          </a:xfrm>
+          <a:prstGeom prst="rect">
+            <a:avLst/>
+          </a:prstGeom>
+          <a:noFill/>
+          <a:ln/>
+        </p:spPr>
+        <p:txBody>
+          <a:bodyPr wrap="square" lIns="0" tIns="0" rIns="0" bIns="0" rtlCol="0" anchor="ctr"/>
+          <a:lstStyle/>
+          <a:p>
+            <a:pPr indent="0" marL="0">
+              <a:buNone/>
+            </a:pPr>
+            <a:r>
+              <a:rPr lang="en-US" sz="1400" b="1" dirty="0">
+                <a:solidFill>
+                  <a:srgbClr val="45121F"/>
+                </a:solidFill>
+                <a:latin typeface="Yu Gothic" pitchFamily="34" charset="0"/>
+                <a:ea typeface="Yu Gothic" pitchFamily="34" charset="-122"/>
+                <a:cs typeface="Yu Gothic" pitchFamily="34" charset="-120"/>
+              </a:rPr>
+              <a:t>経歴</a:t>
+            </a:r>
+            <a:endParaRPr lang="en-US" sz="1400" dirty="0"/>
+          </a:p>
+        </p:txBody>
+      </p:sp>
+      <p:sp>
+        <p:nvSpPr>
+          <p:cNvPr id="9" name="Text 7"/>
+          <p:cNvSpPr/>
+          <p:nvPr/>
+        </p:nvSpPr>
+        <p:spPr>
+          <a:xfrm>
+            <a:off x="566928" y="2157984"/>
+            <a:ext cx="658368" cy="256032"/>
+          </a:xfrm>
+          <a:prstGeom prst="rect">
+            <a:avLst/>
+          </a:prstGeom>
+          <a:noFill/>
+          <a:ln/>
+        </p:spPr>
+        <p:txBody>
+          <a:bodyPr wrap="square" lIns="0" tIns="0" rIns="0" bIns="0" rtlCol="0" anchor="ctr"/>
+          <a:lstStyle/>
+          <a:p>
+            <a:pPr indent="0" marL="0">
+              <a:buNone/>
+            </a:pPr>
+            <a:r>
+              <a:rPr lang="en-US" sz="1200" b="1" dirty="0">
+                <a:solidFill>
+                  <a:srgbClr val="C2A15A"/>
+                </a:solidFill>
+                <a:latin typeface="Cambria" pitchFamily="34" charset="0"/>
+                <a:ea typeface="Cambria" pitchFamily="34" charset="-122"/>
+                <a:cs typeface="Cambria" pitchFamily="34" charset="-120"/>
+              </a:rPr>
+              <a:t>2001</a:t>
+            </a:r>
+            <a:endParaRPr lang="en-US" sz="1200" dirty="0"/>
+          </a:p>
+        </p:txBody>
+      </p:sp>
+      <p:sp>
+        <p:nvSpPr>
+          <p:cNvPr id="10" name="Text 8"/>
+          <p:cNvSpPr/>
+          <p:nvPr/>
+        </p:nvSpPr>
+        <p:spPr>
+          <a:xfrm>
+            <a:off x="1280160" y="2157984"/>
+            <a:ext cx="5669280" cy="256032"/>
+          </a:xfrm>
+          <a:prstGeom prst="rect">
+            <a:avLst/>
+          </a:prstGeom>
+          <a:noFill/>
+          <a:ln/>
+        </p:spPr>
+        <p:txBody>
+          <a:bodyPr wrap="square" lIns="0" tIns="0" rIns="0" bIns="0" rtlCol="0" anchor="ctr"/>
+          <a:lstStyle/>
+          <a:p>
+            <a:pPr indent="0" marL="0">
+              <a:buNone/>
+            </a:pPr>
+            <a:r>
+              <a:rPr lang="en-US" sz="1080" b="1" dirty="0">
+                <a:solidFill>
+                  <a:srgbClr val="241A1E"/>
+                </a:solidFill>
+                <a:latin typeface="Yu Gothic" pitchFamily="34" charset="0"/>
+                <a:ea typeface="Yu Gothic" pitchFamily="34" charset="-122"/>
+                <a:cs typeface="Yu Gothic" pitchFamily="34" charset="-120"/>
+              </a:rPr>
+              <a:t>株式会社モリモト</a:t>
+            </a:r>
+            <a:endParaRPr lang="en-US" sz="1080" dirty="0"/>
+          </a:p>
+        </p:txBody>
+      </p:sp>
+      <p:sp>
+        <p:nvSpPr>
+          <p:cNvPr id="11" name="Text 9"/>
+          <p:cNvSpPr/>
+          <p:nvPr/>
+        </p:nvSpPr>
+        <p:spPr>
+          <a:xfrm>
+            <a:off x="1280160" y="2404872"/>
+            <a:ext cx="5669280" cy="347472"/>
+          </a:xfrm>
+          <a:prstGeom prst="rect">
+            <a:avLst/>
+          </a:prstGeom>
+          <a:noFill/>
+          <a:ln/>
+        </p:spPr>
+        <p:txBody>
+          <a:bodyPr wrap="square" lIns="0" tIns="0" rIns="0" bIns="0" rtlCol="0" anchor="ctr"/>
+          <a:lstStyle/>
+          <a:p>
+            <a:pPr indent="0" marL="0">
+              <a:lnSpc>
+                <a:spcPts val="1250"/>
+              </a:lnSpc>
+              <a:buNone/>
+            </a:pPr>
+            <a:r>
+              <a:rPr lang="en-US" sz="920" dirty="0">
+                <a:solidFill>
+                  <a:srgbClr val="6E666A"/>
+                </a:solidFill>
+                <a:latin typeface="Yu Gothic" pitchFamily="34" charset="0"/>
+                <a:ea typeface="Yu Gothic" pitchFamily="34" charset="-122"/>
+                <a:cs typeface="Yu Gothic" pitchFamily="34" charset="-120"/>
+              </a:rPr>
+              <a:t>不動産投資事業部にて不動産の購入・売却および不動産証券化に従事</a:t>
+            </a:r>
+            <a:endParaRPr lang="en-US" sz="920" dirty="0"/>
+          </a:p>
+        </p:txBody>
+      </p:sp>
+      <p:sp>
+        <p:nvSpPr>
+          <p:cNvPr id="12" name="Text 10"/>
+          <p:cNvSpPr/>
+          <p:nvPr/>
+        </p:nvSpPr>
+        <p:spPr>
+          <a:xfrm>
+            <a:off x="566928" y="2779776"/>
+            <a:ext cx="658368" cy="256032"/>
+          </a:xfrm>
+          <a:prstGeom prst="rect">
+            <a:avLst/>
+          </a:prstGeom>
+          <a:noFill/>
+          <a:ln/>
+        </p:spPr>
+        <p:txBody>
+          <a:bodyPr wrap="square" lIns="0" tIns="0" rIns="0" bIns="0" rtlCol="0" anchor="ctr"/>
+          <a:lstStyle/>
+          <a:p>
+            <a:pPr indent="0" marL="0">
+              <a:buNone/>
+            </a:pPr>
+            <a:r>
+              <a:rPr lang="en-US" sz="1200" b="1" dirty="0">
+                <a:solidFill>
+                  <a:srgbClr val="C2A15A"/>
+                </a:solidFill>
+                <a:latin typeface="Cambria" pitchFamily="34" charset="0"/>
+                <a:ea typeface="Cambria" pitchFamily="34" charset="-122"/>
+                <a:cs typeface="Cambria" pitchFamily="34" charset="-120"/>
+              </a:rPr>
+              <a:t>2003</a:t>
+            </a:r>
+            <a:endParaRPr lang="en-US" sz="1200" dirty="0"/>
+          </a:p>
+        </p:txBody>
+      </p:sp>
+      <p:sp>
+        <p:nvSpPr>
+          <p:cNvPr id="13" name="Text 11"/>
+          <p:cNvSpPr/>
+          <p:nvPr/>
+        </p:nvSpPr>
+        <p:spPr>
+          <a:xfrm>
+            <a:off x="1280160" y="2779776"/>
+            <a:ext cx="5669280" cy="256032"/>
+          </a:xfrm>
+          <a:prstGeom prst="rect">
+            <a:avLst/>
+          </a:prstGeom>
+          <a:noFill/>
+          <a:ln/>
+        </p:spPr>
+        <p:txBody>
+          <a:bodyPr wrap="square" lIns="0" tIns="0" rIns="0" bIns="0" rtlCol="0" anchor="ctr"/>
+          <a:lstStyle/>
+          <a:p>
+            <a:pPr indent="0" marL="0">
+              <a:buNone/>
+            </a:pPr>
+            <a:r>
+              <a:rPr lang="en-US" sz="1080" b="1" dirty="0">
+                <a:solidFill>
+                  <a:srgbClr val="241A1E"/>
+                </a:solidFill>
+                <a:latin typeface="Yu Gothic" pitchFamily="34" charset="0"/>
+                <a:ea typeface="Yu Gothic" pitchFamily="34" charset="-122"/>
+                <a:cs typeface="Yu Gothic" pitchFamily="34" charset="-120"/>
+              </a:rPr>
+              <a:t>株式会社LEXINGTON</a:t>
+            </a:r>
+            <a:endParaRPr lang="en-US" sz="1080" dirty="0"/>
+          </a:p>
+        </p:txBody>
+      </p:sp>
+      <p:sp>
+        <p:nvSpPr>
+          <p:cNvPr id="14" name="Text 12"/>
+          <p:cNvSpPr/>
+          <p:nvPr/>
+        </p:nvSpPr>
+        <p:spPr>
+          <a:xfrm>
+            <a:off x="1280160" y="3026664"/>
+            <a:ext cx="5669280" cy="347472"/>
+          </a:xfrm>
+          <a:prstGeom prst="rect">
+            <a:avLst/>
+          </a:prstGeom>
+          <a:noFill/>
+          <a:ln/>
+        </p:spPr>
+        <p:txBody>
+          <a:bodyPr wrap="square" lIns="0" tIns="0" rIns="0" bIns="0" rtlCol="0" anchor="ctr"/>
+          <a:lstStyle/>
+          <a:p>
+            <a:pPr indent="0" marL="0">
+              <a:lnSpc>
+                <a:spcPts val="1250"/>
+              </a:lnSpc>
+              <a:buNone/>
+            </a:pPr>
+            <a:r>
+              <a:rPr lang="en-US" sz="920" dirty="0">
+                <a:solidFill>
+                  <a:srgbClr val="6E666A"/>
+                </a:solidFill>
+                <a:latin typeface="Yu Gothic" pitchFamily="34" charset="0"/>
+                <a:ea typeface="Yu Gothic" pitchFamily="34" charset="-122"/>
+                <a:cs typeface="Yu Gothic" pitchFamily="34" charset="-120"/>
+              </a:rPr>
+              <a:t>富裕層向け資産コンサルティング</a:t>
+            </a:r>
+            <a:endParaRPr lang="en-US" sz="920" dirty="0"/>
+          </a:p>
+        </p:txBody>
+      </p:sp>
+      <p:sp>
+        <p:nvSpPr>
+          <p:cNvPr id="15" name="Text 13"/>
+          <p:cNvSpPr/>
+          <p:nvPr/>
+        </p:nvSpPr>
+        <p:spPr>
+          <a:xfrm>
+            <a:off x="566928" y="3401568"/>
+            <a:ext cx="658368" cy="256032"/>
+          </a:xfrm>
+          <a:prstGeom prst="rect">
+            <a:avLst/>
+          </a:prstGeom>
+          <a:noFill/>
+          <a:ln/>
+        </p:spPr>
+        <p:txBody>
+          <a:bodyPr wrap="square" lIns="0" tIns="0" rIns="0" bIns="0" rtlCol="0" anchor="ctr"/>
+          <a:lstStyle/>
+          <a:p>
+            <a:pPr indent="0" marL="0">
+              <a:buNone/>
+            </a:pPr>
+            <a:r>
+              <a:rPr lang="en-US" sz="1200" b="1" dirty="0">
+                <a:solidFill>
+                  <a:srgbClr val="C2A15A"/>
+                </a:solidFill>
+                <a:latin typeface="Cambria" pitchFamily="34" charset="0"/>
+                <a:ea typeface="Cambria" pitchFamily="34" charset="-122"/>
+                <a:cs typeface="Cambria" pitchFamily="34" charset="-120"/>
+              </a:rPr>
+              <a:t>2006</a:t>
+            </a:r>
+            <a:endParaRPr lang="en-US" sz="1200" dirty="0"/>
+          </a:p>
+        </p:txBody>
+      </p:sp>
+      <p:sp>
+        <p:nvSpPr>
+          <p:cNvPr id="16" name="Text 14"/>
+          <p:cNvSpPr/>
+          <p:nvPr/>
+        </p:nvSpPr>
+        <p:spPr>
+          <a:xfrm>
+            <a:off x="1280160" y="3401568"/>
+            <a:ext cx="5669280" cy="256032"/>
+          </a:xfrm>
+          <a:prstGeom prst="rect">
+            <a:avLst/>
+          </a:prstGeom>
+          <a:noFill/>
+          <a:ln/>
+        </p:spPr>
+        <p:txBody>
+          <a:bodyPr wrap="square" lIns="0" tIns="0" rIns="0" bIns="0" rtlCol="0" anchor="ctr"/>
+          <a:lstStyle/>
+          <a:p>
+            <a:pPr indent="0" marL="0">
+              <a:buNone/>
+            </a:pPr>
+            <a:r>
+              <a:rPr lang="en-US" sz="1080" b="1" dirty="0">
+                <a:solidFill>
+                  <a:srgbClr val="241A1E"/>
+                </a:solidFill>
+                <a:latin typeface="Yu Gothic" pitchFamily="34" charset="0"/>
+                <a:ea typeface="Yu Gothic" pitchFamily="34" charset="-122"/>
+                <a:cs typeface="Yu Gothic" pitchFamily="34" charset="-120"/>
+              </a:rPr>
+              <a:t>株式会社Seven Signatures 取締役</a:t>
+            </a:r>
+            <a:endParaRPr lang="en-US" sz="1080" dirty="0"/>
+          </a:p>
+        </p:txBody>
+      </p:sp>
+      <p:sp>
+        <p:nvSpPr>
+          <p:cNvPr id="17" name="Text 15"/>
+          <p:cNvSpPr/>
+          <p:nvPr/>
+        </p:nvSpPr>
+        <p:spPr>
+          <a:xfrm>
+            <a:off x="1280160" y="3648456"/>
+            <a:ext cx="5669280" cy="347472"/>
+          </a:xfrm>
+          <a:prstGeom prst="rect">
+            <a:avLst/>
+          </a:prstGeom>
+          <a:noFill/>
+          <a:ln/>
+        </p:spPr>
+        <p:txBody>
+          <a:bodyPr wrap="square" lIns="0" tIns="0" rIns="0" bIns="0" rtlCol="0" anchor="ctr"/>
+          <a:lstStyle/>
+          <a:p>
+            <a:pPr indent="0" marL="0">
+              <a:lnSpc>
+                <a:spcPts val="1250"/>
+              </a:lnSpc>
+              <a:buNone/>
+            </a:pPr>
+            <a:r>
+              <a:rPr lang="en-US" sz="920" dirty="0">
+                <a:solidFill>
+                  <a:srgbClr val="6E666A"/>
+                </a:solidFill>
+                <a:latin typeface="Yu Gothic" pitchFamily="34" charset="0"/>
+                <a:ea typeface="Yu Gothic" pitchFamily="34" charset="-122"/>
+                <a:cs typeface="Yu Gothic" pitchFamily="34" charset="-120"/>
+              </a:rPr>
+              <a:t>ホテルコンド事業開発・投資スキーム構築・国内不動産開発。ハワイのTrump Tower Waikikiプロジェクトに参画</a:t>
+            </a:r>
+            <a:endParaRPr lang="en-US" sz="920" dirty="0"/>
+          </a:p>
+        </p:txBody>
+      </p:sp>
+      <p:sp>
+        <p:nvSpPr>
+          <p:cNvPr id="18" name="Text 16"/>
+          <p:cNvSpPr/>
+          <p:nvPr/>
+        </p:nvSpPr>
+        <p:spPr>
+          <a:xfrm>
+            <a:off x="566928" y="4023360"/>
+            <a:ext cx="658368" cy="256032"/>
+          </a:xfrm>
+          <a:prstGeom prst="rect">
+            <a:avLst/>
+          </a:prstGeom>
+          <a:noFill/>
+          <a:ln/>
+        </p:spPr>
+        <p:txBody>
+          <a:bodyPr wrap="square" lIns="0" tIns="0" rIns="0" bIns="0" rtlCol="0" anchor="ctr"/>
+          <a:lstStyle/>
+          <a:p>
+            <a:pPr indent="0" marL="0">
+              <a:buNone/>
+            </a:pPr>
+            <a:r>
+              <a:rPr lang="en-US" sz="1200" b="1" dirty="0">
+                <a:solidFill>
+                  <a:srgbClr val="C2A15A"/>
+                </a:solidFill>
+                <a:latin typeface="Cambria" pitchFamily="34" charset="0"/>
+                <a:ea typeface="Cambria" pitchFamily="34" charset="-122"/>
+                <a:cs typeface="Cambria" pitchFamily="34" charset="-120"/>
+              </a:rPr>
+              <a:t>2008</a:t>
+            </a:r>
+            <a:endParaRPr lang="en-US" sz="1200" dirty="0"/>
+          </a:p>
+        </p:txBody>
+      </p:sp>
+      <p:sp>
+        <p:nvSpPr>
+          <p:cNvPr id="19" name="Text 17"/>
+          <p:cNvSpPr/>
+          <p:nvPr/>
+        </p:nvSpPr>
+        <p:spPr>
+          <a:xfrm>
+            <a:off x="1280160" y="4023360"/>
+            <a:ext cx="5669280" cy="256032"/>
+          </a:xfrm>
+          <a:prstGeom prst="rect">
+            <a:avLst/>
+          </a:prstGeom>
+          <a:noFill/>
+          <a:ln/>
+        </p:spPr>
+        <p:txBody>
+          <a:bodyPr wrap="square" lIns="0" tIns="0" rIns="0" bIns="0" rtlCol="0" anchor="ctr"/>
+          <a:lstStyle/>
+          <a:p>
+            <a:pPr indent="0" marL="0">
+              <a:buNone/>
+            </a:pPr>
+            <a:r>
+              <a:rPr lang="en-US" sz="1080" b="1" dirty="0">
+                <a:solidFill>
+                  <a:srgbClr val="241A1E"/>
+                </a:solidFill>
+                <a:latin typeface="Yu Gothic" pitchFamily="34" charset="0"/>
+                <a:ea typeface="Yu Gothic" pitchFamily="34" charset="-122"/>
+                <a:cs typeface="Yu Gothic" pitchFamily="34" charset="-120"/>
+              </a:rPr>
+              <a:t>株式会社あどばる 設立・代表取締役社長</a:t>
+            </a:r>
+            <a:endParaRPr lang="en-US" sz="1080" dirty="0"/>
+          </a:p>
+        </p:txBody>
+      </p:sp>
+      <p:sp>
+        <p:nvSpPr>
+          <p:cNvPr id="20" name="Text 18"/>
+          <p:cNvSpPr/>
+          <p:nvPr/>
+        </p:nvSpPr>
+        <p:spPr>
+          <a:xfrm>
+            <a:off x="1280160" y="4270248"/>
+            <a:ext cx="5669280" cy="347472"/>
+          </a:xfrm>
+          <a:prstGeom prst="rect">
+            <a:avLst/>
+          </a:prstGeom>
+          <a:noFill/>
+          <a:ln/>
+        </p:spPr>
+        <p:txBody>
+          <a:bodyPr wrap="square" lIns="0" tIns="0" rIns="0" bIns="0" rtlCol="0" anchor="ctr"/>
+          <a:lstStyle/>
+          <a:p>
+            <a:pPr indent="0" marL="0">
+              <a:lnSpc>
+                <a:spcPts val="1250"/>
+              </a:lnSpc>
+              <a:buNone/>
+            </a:pPr>
+            <a:r>
+              <a:rPr lang="en-US" sz="920" dirty="0">
+                <a:solidFill>
+                  <a:srgbClr val="6E666A"/>
+                </a:solidFill>
+                <a:latin typeface="Yu Gothic" pitchFamily="34" charset="0"/>
+                <a:ea typeface="Yu Gothic" pitchFamily="34" charset="-122"/>
+                <a:cs typeface="Yu Gothic" pitchFamily="34" charset="-120"/>
+              </a:rPr>
+              <a:t>不動産のスペースシェアリング事業。飲食・宿泊・会議の時間貸しコンテンツを展開</a:t>
+            </a:r>
+            <a:endParaRPr lang="en-US" sz="920" dirty="0"/>
+          </a:p>
+        </p:txBody>
+      </p:sp>
+      <p:sp>
+        <p:nvSpPr>
+          <p:cNvPr id="21" name="Text 19"/>
+          <p:cNvSpPr/>
+          <p:nvPr/>
+        </p:nvSpPr>
+        <p:spPr>
+          <a:xfrm>
+            <a:off x="566928" y="4645152"/>
+            <a:ext cx="658368" cy="256032"/>
+          </a:xfrm>
+          <a:prstGeom prst="rect">
+            <a:avLst/>
+          </a:prstGeom>
+          <a:noFill/>
+          <a:ln/>
+        </p:spPr>
+        <p:txBody>
+          <a:bodyPr wrap="square" lIns="0" tIns="0" rIns="0" bIns="0" rtlCol="0" anchor="ctr"/>
+          <a:lstStyle/>
+          <a:p>
+            <a:pPr indent="0" marL="0">
+              <a:buNone/>
+            </a:pPr>
+            <a:r>
+              <a:rPr lang="en-US" sz="1200" b="1" dirty="0">
+                <a:solidFill>
+                  <a:srgbClr val="C2A15A"/>
+                </a:solidFill>
+                <a:latin typeface="Cambria" pitchFamily="34" charset="0"/>
+                <a:ea typeface="Cambria" pitchFamily="34" charset="-122"/>
+                <a:cs typeface="Cambria" pitchFamily="34" charset="-120"/>
+              </a:rPr>
+              <a:t>2020</a:t>
+            </a:r>
+            <a:endParaRPr lang="en-US" sz="1200" dirty="0"/>
+          </a:p>
+        </p:txBody>
+      </p:sp>
+      <p:sp>
+        <p:nvSpPr>
+          <p:cNvPr id="22" name="Text 20"/>
+          <p:cNvSpPr/>
+          <p:nvPr/>
+        </p:nvSpPr>
+        <p:spPr>
+          <a:xfrm>
+            <a:off x="1280160" y="4645152"/>
+            <a:ext cx="5669280" cy="256032"/>
+          </a:xfrm>
+          <a:prstGeom prst="rect">
+            <a:avLst/>
+          </a:prstGeom>
+          <a:noFill/>
+          <a:ln/>
+        </p:spPr>
+        <p:txBody>
+          <a:bodyPr wrap="square" lIns="0" tIns="0" rIns="0" bIns="0" rtlCol="0" anchor="ctr"/>
+          <a:lstStyle/>
+          <a:p>
+            <a:pPr indent="0" marL="0">
+              <a:buNone/>
+            </a:pPr>
+            <a:r>
+              <a:rPr lang="en-US" sz="1080" b="1" dirty="0">
+                <a:solidFill>
+                  <a:srgbClr val="241A1E"/>
+                </a:solidFill>
+                <a:latin typeface="Yu Gothic" pitchFamily="34" charset="0"/>
+                <a:ea typeface="Yu Gothic" pitchFamily="34" charset="-122"/>
+                <a:cs typeface="Yu Gothic" pitchFamily="34" charset="-120"/>
+              </a:rPr>
+              <a:t>株式会社WineBank をM&amp;Aにより100%取得、代表取締役就任</a:t>
+            </a:r>
+            <a:endParaRPr lang="en-US" sz="1080" dirty="0"/>
+          </a:p>
+        </p:txBody>
+      </p:sp>
+      <p:sp>
+        <p:nvSpPr>
+          <p:cNvPr id="23" name="Text 21"/>
+          <p:cNvSpPr/>
+          <p:nvPr/>
+        </p:nvSpPr>
+        <p:spPr>
+          <a:xfrm>
+            <a:off x="566928" y="5065776"/>
+            <a:ext cx="658368" cy="256032"/>
+          </a:xfrm>
+          <a:prstGeom prst="rect">
+            <a:avLst/>
+          </a:prstGeom>
+          <a:noFill/>
+          <a:ln/>
+        </p:spPr>
+        <p:txBody>
+          <a:bodyPr wrap="square" lIns="0" tIns="0" rIns="0" bIns="0" rtlCol="0" anchor="ctr"/>
+          <a:lstStyle/>
+          <a:p>
+            <a:pPr indent="0" marL="0">
+              <a:buNone/>
+            </a:pPr>
+            <a:r>
+              <a:rPr lang="en-US" sz="1200" b="1" dirty="0">
+                <a:solidFill>
+                  <a:srgbClr val="C2A15A"/>
+                </a:solidFill>
+                <a:latin typeface="Cambria" pitchFamily="34" charset="0"/>
+                <a:ea typeface="Cambria" pitchFamily="34" charset="-122"/>
+                <a:cs typeface="Cambria" pitchFamily="34" charset="-120"/>
+              </a:rPr>
+              <a:t>2021</a:t>
+            </a:r>
+            <a:endParaRPr lang="en-US" sz="1200" dirty="0"/>
+          </a:p>
+        </p:txBody>
+      </p:sp>
+      <p:sp>
+        <p:nvSpPr>
+          <p:cNvPr id="24" name="Text 22"/>
+          <p:cNvSpPr/>
+          <p:nvPr/>
+        </p:nvSpPr>
+        <p:spPr>
+          <a:xfrm>
+            <a:off x="1280160" y="5065776"/>
+            <a:ext cx="5669280" cy="256032"/>
+          </a:xfrm>
+          <a:prstGeom prst="rect">
+            <a:avLst/>
+          </a:prstGeom>
+          <a:noFill/>
+          <a:ln/>
+        </p:spPr>
+        <p:txBody>
+          <a:bodyPr wrap="square" lIns="0" tIns="0" rIns="0" bIns="0" rtlCol="0" anchor="ctr"/>
+          <a:lstStyle/>
+          <a:p>
+            <a:pPr indent="0" marL="0">
+              <a:buNone/>
+            </a:pPr>
+            <a:r>
+              <a:rPr lang="en-US" sz="1080" b="1" dirty="0">
+                <a:solidFill>
+                  <a:srgbClr val="241A1E"/>
+                </a:solidFill>
+                <a:latin typeface="Yu Gothic" pitchFamily="34" charset="0"/>
+                <a:ea typeface="Yu Gothic" pitchFamily="34" charset="-122"/>
+                <a:cs typeface="Yu Gothic" pitchFamily="34" charset="-120"/>
+              </a:rPr>
+              <a:t>株式会社あどばる が東証プライム上場グループ入り</a:t>
+            </a:r>
+            <a:endParaRPr lang="en-US" sz="1080" dirty="0"/>
+          </a:p>
+        </p:txBody>
+      </p:sp>
+      <p:sp>
+        <p:nvSpPr>
+          <p:cNvPr id="25" name="Text 23"/>
+          <p:cNvSpPr/>
+          <p:nvPr/>
+        </p:nvSpPr>
+        <p:spPr>
+          <a:xfrm>
+            <a:off x="566928" y="5486400"/>
+            <a:ext cx="658368" cy="256032"/>
+          </a:xfrm>
+          <a:prstGeom prst="rect">
+            <a:avLst/>
+          </a:prstGeom>
+          <a:noFill/>
+          <a:ln/>
+        </p:spPr>
+        <p:txBody>
+          <a:bodyPr wrap="square" lIns="0" tIns="0" rIns="0" bIns="0" rtlCol="0" anchor="ctr"/>
+          <a:lstStyle/>
+          <a:p>
+            <a:pPr indent="0" marL="0">
+              <a:buNone/>
+            </a:pPr>
+            <a:r>
+              <a:rPr lang="en-US" sz="1200" b="1" dirty="0">
+                <a:solidFill>
+                  <a:srgbClr val="C2A15A"/>
+                </a:solidFill>
+                <a:latin typeface="Cambria" pitchFamily="34" charset="0"/>
+                <a:ea typeface="Cambria" pitchFamily="34" charset="-122"/>
+                <a:cs typeface="Cambria" pitchFamily="34" charset="-120"/>
+              </a:rPr>
+              <a:t>2022</a:t>
+            </a:r>
+            <a:endParaRPr lang="en-US" sz="1200" dirty="0"/>
+          </a:p>
+        </p:txBody>
+      </p:sp>
+      <p:sp>
+        <p:nvSpPr>
+          <p:cNvPr id="26" name="Text 24"/>
+          <p:cNvSpPr/>
+          <p:nvPr/>
+        </p:nvSpPr>
+        <p:spPr>
+          <a:xfrm>
+            <a:off x="1280160" y="5486400"/>
+            <a:ext cx="5669280" cy="256032"/>
+          </a:xfrm>
+          <a:prstGeom prst="rect">
+            <a:avLst/>
+          </a:prstGeom>
+          <a:noFill/>
+          <a:ln/>
+        </p:spPr>
+        <p:txBody>
+          <a:bodyPr wrap="square" lIns="0" tIns="0" rIns="0" bIns="0" rtlCol="0" anchor="ctr"/>
+          <a:lstStyle/>
+          <a:p>
+            <a:pPr indent="0" marL="0">
+              <a:buNone/>
+            </a:pPr>
+            <a:r>
+              <a:rPr lang="en-US" sz="1080" b="1" dirty="0">
+                <a:solidFill>
+                  <a:srgbClr val="241A1E"/>
+                </a:solidFill>
+                <a:latin typeface="Yu Gothic" pitchFamily="34" charset="0"/>
+                <a:ea typeface="Yu Gothic" pitchFamily="34" charset="-122"/>
+                <a:cs typeface="Yu Gothic" pitchFamily="34" charset="-120"/>
+              </a:rPr>
+              <a:t>株式会社AbHeri が東証グロース上場グループ入り</a:t>
+            </a:r>
+            <a:endParaRPr lang="en-US" sz="1080" dirty="0"/>
+          </a:p>
+        </p:txBody>
+      </p:sp>
+      <p:sp>
+        <p:nvSpPr>
+          <p:cNvPr id="27" name="Shape 25"/>
+          <p:cNvSpPr/>
+          <p:nvPr/>
+        </p:nvSpPr>
+        <p:spPr>
+          <a:xfrm>
+            <a:off x="7223760" y="1810512"/>
+            <a:ext cx="4401007" cy="1207008"/>
+          </a:xfrm>
+          <a:prstGeom prst="roundRect">
+            <a:avLst>
+              <a:gd name="adj" fmla="val 6818"/>
+            </a:avLst>
+          </a:prstGeom>
+          <a:solidFill>
+            <a:srgbClr val="45121F"/>
+          </a:solidFill>
+          <a:ln w="12700">
+            <a:solidFill>
+              <a:srgbClr val="45121F"/>
+            </a:solidFill>
+            <a:prstDash val="solid"/>
+          </a:ln>
+        </p:spPr>
+      </p:sp>
+      <p:sp>
+        <p:nvSpPr>
+          <p:cNvPr id="28" name="Shape 26"/>
+          <p:cNvSpPr/>
+          <p:nvPr/>
+        </p:nvSpPr>
+        <p:spPr>
+          <a:xfrm>
+            <a:off x="7479792" y="2011680"/>
+            <a:ext cx="420624" cy="420624"/>
+          </a:xfrm>
+          <a:prstGeom prst="ellipse">
+            <a:avLst/>
+          </a:prstGeom>
+          <a:solidFill>
+            <a:srgbClr val="45121F"/>
+          </a:solidFill>
+          <a:ln w="15875">
+            <a:solidFill>
+              <a:srgbClr val="C2A15A"/>
+            </a:solidFill>
+            <a:prstDash val="solid"/>
+          </a:ln>
+        </p:spPr>
+      </p:sp>
+      <p:sp>
+        <p:nvSpPr>
+          <p:cNvPr id="29" name="Text 27"/>
+          <p:cNvSpPr/>
+          <p:nvPr/>
+        </p:nvSpPr>
+        <p:spPr>
+          <a:xfrm>
+            <a:off x="7479792" y="2011680"/>
+            <a:ext cx="420624" cy="420624"/>
+          </a:xfrm>
+          <a:prstGeom prst="rect">
+            <a:avLst/>
+          </a:prstGeom>
+          <a:noFill/>
+          <a:ln/>
+        </p:spPr>
+        <p:txBody>
+          <a:bodyPr wrap="square" lIns="0" tIns="0" rIns="0" bIns="0" rtlCol="0" anchor="ctr"/>
+          <a:lstStyle/>
+          <a:p>
+            <a:pPr algn="ctr" indent="0" marL="0">
+              <a:buNone/>
+            </a:pPr>
+            <a:r>
+              <a:rPr lang="en-US" sz="1100" b="1" dirty="0">
+                <a:solidFill>
+                  <a:srgbClr val="C2A15A"/>
+                </a:solidFill>
+                <a:latin typeface="Cambria" pitchFamily="34" charset="0"/>
+                <a:ea typeface="Cambria" pitchFamily="34" charset="-122"/>
+                <a:cs typeface="Cambria" pitchFamily="34" charset="-120"/>
+              </a:rPr>
+              <a:t>01</a:t>
+            </a:r>
+            <a:endParaRPr lang="en-US" sz="1100" dirty="0"/>
+          </a:p>
+        </p:txBody>
+      </p:sp>
+      <p:sp>
+        <p:nvSpPr>
+          <p:cNvPr id="30" name="Text 28"/>
+          <p:cNvSpPr/>
+          <p:nvPr/>
+        </p:nvSpPr>
+        <p:spPr>
+          <a:xfrm>
+            <a:off x="8010144" y="2011680"/>
+            <a:ext cx="3358591" cy="420624"/>
+          </a:xfrm>
+          <a:prstGeom prst="rect">
+            <a:avLst/>
+          </a:prstGeom>
+          <a:noFill/>
+          <a:ln/>
+        </p:spPr>
+        <p:txBody>
+          <a:bodyPr wrap="square" lIns="0" tIns="0" rIns="0" bIns="0" rtlCol="0" anchor="ctr"/>
+          <a:lstStyle/>
+          <a:p>
+            <a:pPr indent="0" marL="0">
+              <a:buNone/>
+            </a:pPr>
+            <a:r>
+              <a:rPr lang="en-US" sz="1300" b="1" dirty="0">
+                <a:solidFill>
+                  <a:srgbClr val="C2A15A"/>
+                </a:solidFill>
+                <a:latin typeface="Yu Gothic" pitchFamily="34" charset="0"/>
+                <a:ea typeface="Yu Gothic" pitchFamily="34" charset="-122"/>
+                <a:cs typeface="Yu Gothic" pitchFamily="34" charset="-120"/>
+              </a:rPr>
+              <a:t>不動産・施設運営の出身</a:t>
+            </a:r>
+            <a:endParaRPr lang="en-US" sz="1300" dirty="0"/>
+          </a:p>
+        </p:txBody>
+      </p:sp>
+      <p:sp>
+        <p:nvSpPr>
+          <p:cNvPr id="31" name="Text 29"/>
+          <p:cNvSpPr/>
+          <p:nvPr/>
+        </p:nvSpPr>
+        <p:spPr>
+          <a:xfrm>
+            <a:off x="7479792" y="2505456"/>
+            <a:ext cx="3888943" cy="438912"/>
+          </a:xfrm>
+          <a:prstGeom prst="rect">
+            <a:avLst/>
+          </a:prstGeom>
+          <a:noFill/>
+          <a:ln/>
+        </p:spPr>
+        <p:txBody>
+          <a:bodyPr wrap="square" lIns="0" tIns="0" rIns="0" bIns="0" rtlCol="0" anchor="ctr"/>
+          <a:lstStyle/>
+          <a:p>
+            <a:pPr indent="0" marL="0">
+              <a:lnSpc>
+                <a:spcPts val="1350"/>
+              </a:lnSpc>
+              <a:buNone/>
+            </a:pPr>
+            <a:r>
+              <a:rPr lang="en-US" sz="980" dirty="0">
+                <a:solidFill>
+                  <a:srgbClr val="E8DDE1"/>
+                </a:solidFill>
+                <a:latin typeface="Yu Gothic" pitchFamily="34" charset="0"/>
+                <a:ea typeface="Yu Gothic" pitchFamily="34" charset="-122"/>
+                <a:cs typeface="Yu Gothic" pitchFamily="34" charset="-120"/>
+              </a:rPr>
+              <a:t>不動産証券化、ホテルコンド開発、時間貸しスペース事業。街と区画の経済で会話ができます。</a:t>
+            </a:r>
+            <a:endParaRPr lang="en-US" sz="980" dirty="0"/>
+          </a:p>
+        </p:txBody>
+      </p:sp>
+      <p:sp>
+        <p:nvSpPr>
+          <p:cNvPr id="32" name="Shape 30"/>
+          <p:cNvSpPr/>
+          <p:nvPr/>
+        </p:nvSpPr>
+        <p:spPr>
+          <a:xfrm>
+            <a:off x="7223760" y="3163824"/>
+            <a:ext cx="4401007" cy="1207008"/>
+          </a:xfrm>
+          <a:prstGeom prst="roundRect">
+            <a:avLst>
+              <a:gd name="adj" fmla="val 6818"/>
+            </a:avLst>
+          </a:prstGeom>
+          <a:solidFill>
+            <a:srgbClr val="F4F1F2"/>
+          </a:solidFill>
+          <a:ln w="12700">
+            <a:solidFill>
+              <a:srgbClr val="F4F1F2"/>
+            </a:solidFill>
+            <a:prstDash val="solid"/>
+          </a:ln>
+          <a:effectLst>
+            <a:outerShdw sx="100000" sy="100000" kx="0" ky="0" algn="bl" rotWithShape="0" blurRad="127000" dist="25400" dir="5400000">
+              <a:srgbClr val="8A7078">
+                <a:alpha val="18000"/>
+              </a:srgbClr>
+            </a:outerShdw>
+          </a:effectLst>
+        </p:spPr>
+      </p:sp>
+      <p:sp>
+        <p:nvSpPr>
+          <p:cNvPr id="33" name="Shape 31"/>
+          <p:cNvSpPr/>
+          <p:nvPr/>
+        </p:nvSpPr>
+        <p:spPr>
+          <a:xfrm>
+            <a:off x="7479792" y="3364992"/>
+            <a:ext cx="420624" cy="420624"/>
+          </a:xfrm>
+          <a:prstGeom prst="ellipse">
+            <a:avLst/>
+          </a:prstGeom>
+          <a:solidFill>
+            <a:srgbClr val="FFFFFF"/>
+          </a:solidFill>
+          <a:ln w="15875">
+            <a:solidFill>
+              <a:srgbClr val="C2A15A"/>
+            </a:solidFill>
+            <a:prstDash val="solid"/>
+          </a:ln>
+        </p:spPr>
+      </p:sp>
+      <p:sp>
+        <p:nvSpPr>
+          <p:cNvPr id="34" name="Text 32"/>
+          <p:cNvSpPr/>
+          <p:nvPr/>
+        </p:nvSpPr>
+        <p:spPr>
+          <a:xfrm>
+            <a:off x="7479792" y="3364992"/>
+            <a:ext cx="420624" cy="420624"/>
+          </a:xfrm>
+          <a:prstGeom prst="rect">
+            <a:avLst/>
+          </a:prstGeom>
+          <a:noFill/>
+          <a:ln/>
+        </p:spPr>
+        <p:txBody>
+          <a:bodyPr wrap="square" lIns="0" tIns="0" rIns="0" bIns="0" rtlCol="0" anchor="ctr"/>
+          <a:lstStyle/>
+          <a:p>
+            <a:pPr algn="ctr" indent="0" marL="0">
+              <a:buNone/>
+            </a:pPr>
+            <a:r>
+              <a:rPr lang="en-US" sz="1100" b="1" dirty="0">
+                <a:solidFill>
+                  <a:srgbClr val="6B1F32"/>
+                </a:solidFill>
+                <a:latin typeface="Cambria" pitchFamily="34" charset="0"/>
+                <a:ea typeface="Cambria" pitchFamily="34" charset="-122"/>
+                <a:cs typeface="Cambria" pitchFamily="34" charset="-120"/>
+              </a:rPr>
+              <a:t>02</a:t>
+            </a:r>
+            <a:endParaRPr lang="en-US" sz="1100" dirty="0"/>
+          </a:p>
+        </p:txBody>
+      </p:sp>
+      <p:sp>
+        <p:nvSpPr>
+          <p:cNvPr id="35" name="Text 33"/>
+          <p:cNvSpPr/>
+          <p:nvPr/>
+        </p:nvSpPr>
+        <p:spPr>
+          <a:xfrm>
+            <a:off x="8010144" y="3364992"/>
+            <a:ext cx="3358591" cy="420624"/>
+          </a:xfrm>
+          <a:prstGeom prst="rect">
+            <a:avLst/>
+          </a:prstGeom>
+          <a:noFill/>
+          <a:ln/>
+        </p:spPr>
+        <p:txBody>
+          <a:bodyPr wrap="square" lIns="0" tIns="0" rIns="0" bIns="0" rtlCol="0" anchor="ctr"/>
+          <a:lstStyle/>
+          <a:p>
+            <a:pPr indent="0" marL="0">
+              <a:buNone/>
+            </a:pPr>
+            <a:r>
+              <a:rPr lang="en-US" sz="1300" b="1" dirty="0">
+                <a:solidFill>
+                  <a:srgbClr val="45121F"/>
+                </a:solidFill>
+                <a:latin typeface="Yu Gothic" pitchFamily="34" charset="0"/>
+                <a:ea typeface="Yu Gothic" pitchFamily="34" charset="-122"/>
+                <a:cs typeface="Yu Gothic" pitchFamily="34" charset="-120"/>
+              </a:rPr>
+              <a:t>2社を上場企業グループへ</a:t>
+            </a:r>
+            <a:endParaRPr lang="en-US" sz="1300" dirty="0"/>
+          </a:p>
+        </p:txBody>
+      </p:sp>
+      <p:sp>
+        <p:nvSpPr>
+          <p:cNvPr id="36" name="Text 34"/>
+          <p:cNvSpPr/>
+          <p:nvPr/>
+        </p:nvSpPr>
+        <p:spPr>
+          <a:xfrm>
+            <a:off x="7479792" y="3858768"/>
+            <a:ext cx="3888943" cy="438912"/>
+          </a:xfrm>
+          <a:prstGeom prst="rect">
+            <a:avLst/>
+          </a:prstGeom>
+          <a:noFill/>
+          <a:ln/>
+        </p:spPr>
+        <p:txBody>
+          <a:bodyPr wrap="square" lIns="0" tIns="0" rIns="0" bIns="0" rtlCol="0" anchor="ctr"/>
+          <a:lstStyle/>
+          <a:p>
+            <a:pPr indent="0" marL="0">
+              <a:lnSpc>
+                <a:spcPts val="1350"/>
+              </a:lnSpc>
+              <a:buNone/>
+            </a:pPr>
+            <a:r>
+              <a:rPr lang="en-US" sz="980" dirty="0">
+                <a:solidFill>
+                  <a:srgbClr val="241A1E"/>
+                </a:solidFill>
+                <a:latin typeface="Yu Gothic" pitchFamily="34" charset="0"/>
+                <a:ea typeface="Yu Gothic" pitchFamily="34" charset="-122"/>
+                <a:cs typeface="Yu Gothic" pitchFamily="34" charset="-120"/>
+              </a:rPr>
+              <a:t>あどばる（東証プライム）、AbHeri（東証グロース）。立ち上げから引き渡しまでを2度経験。</a:t>
+            </a:r>
+            <a:endParaRPr lang="en-US" sz="980" dirty="0"/>
+          </a:p>
+        </p:txBody>
+      </p:sp>
+      <p:sp>
+        <p:nvSpPr>
+          <p:cNvPr id="37" name="Shape 35"/>
+          <p:cNvSpPr/>
+          <p:nvPr/>
+        </p:nvSpPr>
+        <p:spPr>
+          <a:xfrm>
+            <a:off x="7223760" y="4517136"/>
+            <a:ext cx="4401007" cy="1207008"/>
+          </a:xfrm>
+          <a:prstGeom prst="roundRect">
+            <a:avLst>
+              <a:gd name="adj" fmla="val 6818"/>
+            </a:avLst>
+          </a:prstGeom>
+          <a:solidFill>
+            <a:srgbClr val="F4F1F2"/>
+          </a:solidFill>
+          <a:ln w="12700">
+            <a:solidFill>
+              <a:srgbClr val="F4F1F2"/>
+            </a:solidFill>
+            <a:prstDash val="solid"/>
+          </a:ln>
+          <a:effectLst>
+            <a:outerShdw sx="100000" sy="100000" kx="0" ky="0" algn="bl" rotWithShape="0" blurRad="127000" dist="25400" dir="5400000">
+              <a:srgbClr val="8A7078">
+                <a:alpha val="18000"/>
+              </a:srgbClr>
+            </a:outerShdw>
+          </a:effectLst>
+        </p:spPr>
+      </p:sp>
+      <p:sp>
+        <p:nvSpPr>
+          <p:cNvPr id="38" name="Shape 36"/>
+          <p:cNvSpPr/>
+          <p:nvPr/>
+        </p:nvSpPr>
+        <p:spPr>
+          <a:xfrm>
+            <a:off x="7479792" y="4718304"/>
+            <a:ext cx="420624" cy="420624"/>
+          </a:xfrm>
+          <a:prstGeom prst="ellipse">
+            <a:avLst/>
+          </a:prstGeom>
+          <a:solidFill>
+            <a:srgbClr val="FFFFFF"/>
+          </a:solidFill>
+          <a:ln w="15875">
+            <a:solidFill>
+              <a:srgbClr val="C2A15A"/>
+            </a:solidFill>
+            <a:prstDash val="solid"/>
+          </a:ln>
+        </p:spPr>
+      </p:sp>
+      <p:sp>
+        <p:nvSpPr>
+          <p:cNvPr id="39" name="Text 37"/>
+          <p:cNvSpPr/>
+          <p:nvPr/>
+        </p:nvSpPr>
+        <p:spPr>
+          <a:xfrm>
+            <a:off x="7479792" y="4718304"/>
+            <a:ext cx="420624" cy="420624"/>
+          </a:xfrm>
+          <a:prstGeom prst="rect">
+            <a:avLst/>
+          </a:prstGeom>
+          <a:noFill/>
+          <a:ln/>
+        </p:spPr>
+        <p:txBody>
+          <a:bodyPr wrap="square" lIns="0" tIns="0" rIns="0" bIns="0" rtlCol="0" anchor="ctr"/>
+          <a:lstStyle/>
+          <a:p>
+            <a:pPr algn="ctr" indent="0" marL="0">
+              <a:buNone/>
+            </a:pPr>
+            <a:r>
+              <a:rPr lang="en-US" sz="1100" b="1" dirty="0">
+                <a:solidFill>
+                  <a:srgbClr val="6B1F32"/>
+                </a:solidFill>
+                <a:latin typeface="Cambria" pitchFamily="34" charset="0"/>
+                <a:ea typeface="Cambria" pitchFamily="34" charset="-122"/>
+                <a:cs typeface="Cambria" pitchFamily="34" charset="-120"/>
+              </a:rPr>
+              <a:t>03</a:t>
+            </a:r>
+            <a:endParaRPr lang="en-US" sz="1100" dirty="0"/>
+          </a:p>
+        </p:txBody>
+      </p:sp>
+      <p:sp>
+        <p:nvSpPr>
+          <p:cNvPr id="40" name="Text 38"/>
+          <p:cNvSpPr/>
+          <p:nvPr/>
+        </p:nvSpPr>
+        <p:spPr>
+          <a:xfrm>
+            <a:off x="8010144" y="4718304"/>
+            <a:ext cx="3358591" cy="420624"/>
+          </a:xfrm>
+          <a:prstGeom prst="rect">
+            <a:avLst/>
+          </a:prstGeom>
+          <a:noFill/>
+          <a:ln/>
+        </p:spPr>
+        <p:txBody>
+          <a:bodyPr wrap="square" lIns="0" tIns="0" rIns="0" bIns="0" rtlCol="0" anchor="ctr"/>
+          <a:lstStyle/>
+          <a:p>
+            <a:pPr indent="0" marL="0">
+              <a:buNone/>
+            </a:pPr>
+            <a:r>
+              <a:rPr lang="en-US" sz="1300" b="1" dirty="0">
+                <a:solidFill>
+                  <a:srgbClr val="45121F"/>
+                </a:solidFill>
+                <a:latin typeface="Yu Gothic" pitchFamily="34" charset="0"/>
+                <a:ea typeface="Yu Gothic" pitchFamily="34" charset="-122"/>
+                <a:cs typeface="Yu Gothic" pitchFamily="34" charset="-120"/>
+              </a:rPr>
+              <a:t>いまはワイン一本</a:t>
+            </a:r>
+            <a:endParaRPr lang="en-US" sz="1300" dirty="0"/>
+          </a:p>
+        </p:txBody>
+      </p:sp>
+      <p:sp>
+        <p:nvSpPr>
+          <p:cNvPr id="41" name="Text 39"/>
+          <p:cNvSpPr/>
+          <p:nvPr/>
+        </p:nvSpPr>
+        <p:spPr>
+          <a:xfrm>
+            <a:off x="7479792" y="5212080"/>
+            <a:ext cx="3888943" cy="438912"/>
+          </a:xfrm>
+          <a:prstGeom prst="rect">
+            <a:avLst/>
+          </a:prstGeom>
+          <a:noFill/>
+          <a:ln/>
+        </p:spPr>
+        <p:txBody>
+          <a:bodyPr wrap="square" lIns="0" tIns="0" rIns="0" bIns="0" rtlCol="0" anchor="ctr"/>
+          <a:lstStyle/>
+          <a:p>
+            <a:pPr indent="0" marL="0">
+              <a:lnSpc>
+                <a:spcPts val="1350"/>
+              </a:lnSpc>
+              <a:buNone/>
+            </a:pPr>
+            <a:r>
+              <a:rPr lang="en-US" sz="980" dirty="0">
+                <a:solidFill>
+                  <a:srgbClr val="241A1E"/>
+                </a:solidFill>
+                <a:latin typeface="Yu Gothic" pitchFamily="34" charset="0"/>
+                <a:ea typeface="Yu Gothic" pitchFamily="34" charset="-122"/>
+                <a:cs typeface="Yu Gothic" pitchFamily="34" charset="-120"/>
+              </a:rPr>
+              <a:t>2020年にWineBankを承継。シリアルアントレプレナーとして本事業に専念しています。</a:t>
+            </a:r>
+            <a:endParaRPr lang="en-US" sz="980" dirty="0"/>
+          </a:p>
+        </p:txBody>
+      </p:sp>
+      <p:sp>
+        <p:nvSpPr>
+          <p:cNvPr id="42" name="Text 40"/>
+          <p:cNvSpPr/>
+          <p:nvPr/>
+        </p:nvSpPr>
+        <p:spPr>
+          <a:xfrm>
+            <a:off x="566928" y="5998464"/>
+            <a:ext cx="10972800" cy="256032"/>
+          </a:xfrm>
+          <a:prstGeom prst="rect">
+            <a:avLst/>
+          </a:prstGeom>
+          <a:noFill/>
+          <a:ln/>
+        </p:spPr>
+        <p:txBody>
+          <a:bodyPr wrap="square" lIns="0" tIns="0" rIns="0" bIns="0" rtlCol="0" anchor="ctr"/>
+          <a:lstStyle/>
+          <a:p>
+            <a:pPr indent="0" marL="0">
+              <a:buNone/>
+            </a:pPr>
+            <a:r>
+              <a:rPr lang="en-US" sz="880" dirty="0">
+                <a:solidFill>
+                  <a:srgbClr val="9A9498"/>
+                </a:solidFill>
+                <a:latin typeface="Yu Gothic" pitchFamily="34" charset="0"/>
+                <a:ea typeface="Yu Gothic" pitchFamily="34" charset="-122"/>
+                <a:cs typeface="Yu Gothic" pitchFamily="34" charset="-120"/>
+              </a:rPr>
+              <a:t>※ Seven Signatures在籍時、Donald Trump氏とのハワイ・Trump Tower Waikikiプロジェクトにおいて1日あたり売上高のギネス記録を樹立。</a:t>
+            </a:r>
+            <a:endParaRPr lang="en-US" sz="880" dirty="0"/>
+          </a:p>
+        </p:txBody>
+      </p:sp>
+    </p:spTree>
+  </p:cSld>
+  <p:clrMapOvr>
+    <a:masterClrMapping/>
+  </p:clrMapOvr>
+</p:sld>
+</file>
+
+<file path=ppt/slides/slide24.xml><?xml version="1.0" encoding="utf-8"?>
+<p:sld xmlns:a="http://schemas.openxmlformats.org/drawingml/2006/main" xmlns:r="http://schemas.openxmlformats.org/officeDocument/2006/relationships" xmlns:p="http://schemas.openxmlformats.org/presentationml/2006/main">
+  <p:cSld name="Slide 24">
+    <p:bg>
+      <p:bgPr>
+        <a:solidFill>
+          <a:srgbClr val="FFFFFF"/>
+        </a:solidFill>
+      </p:bgPr>
+    </p:bg>
+    <p:spTree>
+      <p:nvGrpSpPr>
+        <p:cNvPr id="1" name=""/>
+        <p:cNvGrpSpPr/>
+        <p:nvPr/>
+      </p:nvGrpSpPr>
+      <p:grpSpPr>
+        <a:xfrm>
+          <a:off x="0" y="0"/>
+          <a:ext cx="0" cy="0"/>
+          <a:chOff x="0" y="0"/>
+          <a:chExt cx="0" cy="0"/>
+        </a:xfrm>
+      </p:grpSpPr>
+      <p:sp>
+        <p:nvSpPr>
+          <p:cNvPr id="2" name="Text 0"/>
+          <p:cNvSpPr/>
+          <p:nvPr/>
+        </p:nvSpPr>
+        <p:spPr>
+          <a:xfrm>
+            <a:off x="566928" y="384048"/>
+            <a:ext cx="8229600" cy="237744"/>
+          </a:xfrm>
+          <a:prstGeom prst="rect">
+            <a:avLst/>
+          </a:prstGeom>
+          <a:noFill/>
+          <a:ln/>
+        </p:spPr>
+        <p:txBody>
+          <a:bodyPr wrap="square" lIns="0" tIns="0" rIns="0" bIns="0" rtlCol="0" anchor="ctr"/>
+          <a:lstStyle/>
+          <a:p>
+            <a:pPr indent="0" marL="0">
+              <a:buNone/>
+            </a:pPr>
+            <a:r>
+              <a:rPr lang="en-US" sz="1100" b="1" spc="240" kern="0" dirty="0">
+                <a:solidFill>
+                  <a:srgbClr val="C2A15A"/>
+                </a:solidFill>
+                <a:latin typeface="Cambria" pitchFamily="34" charset="0"/>
+                <a:ea typeface="Cambria" pitchFamily="34" charset="-122"/>
+                <a:cs typeface="Cambria" pitchFamily="34" charset="-120"/>
+              </a:rPr>
+              <a:t>APPENDIX E</a:t>
+            </a:r>
+            <a:endParaRPr lang="en-US" sz="1100" dirty="0"/>
+          </a:p>
+        </p:txBody>
+      </p:sp>
+      <p:sp>
+        <p:nvSpPr>
+          <p:cNvPr id="3" name="Text 1"/>
+          <p:cNvSpPr/>
+          <p:nvPr/>
+        </p:nvSpPr>
+        <p:spPr>
+          <a:xfrm>
+            <a:off x="566928" y="658368"/>
+            <a:ext cx="10241280" cy="566928"/>
+          </a:xfrm>
+          <a:prstGeom prst="rect">
+            <a:avLst/>
+          </a:prstGeom>
+          <a:noFill/>
+          <a:ln/>
+        </p:spPr>
+        <p:txBody>
+          <a:bodyPr wrap="square" lIns="0" tIns="0" rIns="0" bIns="0" rtlCol="0" anchor="ctr"/>
+          <a:lstStyle/>
+          <a:p>
+            <a:pPr indent="0" marL="0">
+              <a:buNone/>
+            </a:pPr>
+            <a:r>
+              <a:rPr lang="en-US" sz="3000" b="1" dirty="0">
+                <a:solidFill>
+                  <a:srgbClr val="45121F"/>
+                </a:solidFill>
+                <a:latin typeface="Yu Gothic" pitchFamily="34" charset="0"/>
+                <a:ea typeface="Yu Gothic" pitchFamily="34" charset="-122"/>
+                <a:cs typeface="Yu Gothic" pitchFamily="34" charset="-120"/>
+              </a:rPr>
+              <a:t>55年の沿革と、いま動いていること</a:t>
+            </a:r>
+            <a:endParaRPr lang="en-US" sz="3000" dirty="0"/>
+          </a:p>
+        </p:txBody>
+      </p:sp>
+      <p:sp>
+        <p:nvSpPr>
+          <p:cNvPr id="4" name="Text 2"/>
+          <p:cNvSpPr/>
+          <p:nvPr/>
+        </p:nvSpPr>
+        <p:spPr>
+          <a:xfrm>
+            <a:off x="566928" y="1280160"/>
+            <a:ext cx="11064240" cy="384048"/>
+          </a:xfrm>
+          <a:prstGeom prst="rect">
+            <a:avLst/>
+          </a:prstGeom>
+          <a:noFill/>
+          <a:ln/>
+        </p:spPr>
+        <p:txBody>
+          <a:bodyPr wrap="square" lIns="0" tIns="0" rIns="0" bIns="0" rtlCol="0" anchor="ctr"/>
+          <a:lstStyle/>
+          <a:p>
+            <a:pPr indent="0" marL="0">
+              <a:lnSpc>
+                <a:spcPts val="1900"/>
+              </a:lnSpc>
+              <a:buNone/>
+            </a:pPr>
+            <a:r>
+              <a:rPr lang="en-US" sz="1300" dirty="0">
+                <a:solidFill>
+                  <a:srgbClr val="6E666A"/>
+                </a:solidFill>
+                <a:latin typeface="Yu Gothic" pitchFamily="34" charset="0"/>
+                <a:ea typeface="Yu Gothic" pitchFamily="34" charset="-122"/>
+                <a:cs typeface="Yu Gothic" pitchFamily="34" charset="-120"/>
+              </a:rPr>
+              <a:t>1970年札幌の酒販店として創業。承継後の6年間で、EC・ファンド・グランメゾン・プラットフォームを積み上げました。</a:t>
+            </a:r>
+            <a:endParaRPr lang="en-US" sz="1300" dirty="0"/>
+          </a:p>
+        </p:txBody>
+      </p:sp>
+      <p:sp>
+        <p:nvSpPr>
+          <p:cNvPr id="5" name="Text 3"/>
+          <p:cNvSpPr/>
+          <p:nvPr/>
+        </p:nvSpPr>
+        <p:spPr>
+          <a:xfrm>
+            <a:off x="566928" y="6437376"/>
+            <a:ext cx="5486400" cy="237744"/>
+          </a:xfrm>
+          <a:prstGeom prst="rect">
+            <a:avLst/>
+          </a:prstGeom>
+          <a:noFill/>
+          <a:ln/>
+        </p:spPr>
+        <p:txBody>
+          <a:bodyPr wrap="square" lIns="0" tIns="0" rIns="0" bIns="0" rtlCol="0" anchor="ctr"/>
+          <a:lstStyle/>
+          <a:p>
+            <a:pPr indent="0" marL="0">
+              <a:buNone/>
+            </a:pPr>
+            <a:r>
+              <a:rPr lang="en-US" sz="850" dirty="0">
+                <a:solidFill>
+                  <a:srgbClr val="9A9498"/>
+                </a:solidFill>
+                <a:latin typeface="Yu Gothic" pitchFamily="34" charset="0"/>
+                <a:ea typeface="Yu Gothic" pitchFamily="34" charset="-122"/>
+                <a:cs typeface="Yu Gothic" pitchFamily="34" charset="-120"/>
+              </a:rPr>
+              <a:t>WineBank × Mori Building ｜ 業務提携ご提案</a:t>
+            </a:r>
+            <a:endParaRPr lang="en-US" sz="850" dirty="0"/>
+          </a:p>
+        </p:txBody>
+      </p:sp>
+      <p:sp>
+        <p:nvSpPr>
+          <p:cNvPr id="6" name="Text 4"/>
+          <p:cNvSpPr/>
+          <p:nvPr/>
+        </p:nvSpPr>
+        <p:spPr>
+          <a:xfrm>
+            <a:off x="10801807" y="6437376"/>
+            <a:ext cx="822960" cy="237744"/>
+          </a:xfrm>
+          <a:prstGeom prst="rect">
+            <a:avLst/>
+          </a:prstGeom>
+          <a:noFill/>
+          <a:ln/>
+        </p:spPr>
+        <p:txBody>
+          <a:bodyPr wrap="square" lIns="0" tIns="0" rIns="0" bIns="0" rtlCol="0" anchor="ctr"/>
+          <a:lstStyle/>
+          <a:p>
+            <a:pPr algn="r" indent="0" marL="0">
+              <a:buNone/>
+            </a:pPr>
+            <a:r>
+              <a:rPr lang="en-US" sz="900" dirty="0">
+                <a:solidFill>
+                  <a:srgbClr val="9A9498"/>
+                </a:solidFill>
+                <a:latin typeface="Cambria" pitchFamily="34" charset="0"/>
+                <a:ea typeface="Cambria" pitchFamily="34" charset="-122"/>
+                <a:cs typeface="Cambria" pitchFamily="34" charset="-120"/>
+              </a:rPr>
+              <a:t>23</a:t>
+            </a:r>
+            <a:endParaRPr lang="en-US" sz="900" dirty="0"/>
+          </a:p>
+        </p:txBody>
+      </p:sp>
+      <p:sp>
+        <p:nvSpPr>
+          <p:cNvPr id="7" name="Text 5"/>
+          <p:cNvSpPr/>
+          <p:nvPr/>
+        </p:nvSpPr>
+        <p:spPr>
+          <a:xfrm>
+            <a:off x="8881567" y="6437376"/>
+            <a:ext cx="1828800" cy="237744"/>
+          </a:xfrm>
+          <a:prstGeom prst="rect">
+            <a:avLst/>
+          </a:prstGeom>
+          <a:noFill/>
+          <a:ln/>
+        </p:spPr>
+        <p:txBody>
+          <a:bodyPr wrap="square" lIns="0" tIns="0" rIns="0" bIns="0" rtlCol="0" anchor="ctr"/>
+          <a:lstStyle/>
+          <a:p>
+            <a:pPr algn="r" indent="0" marL="0">
+              <a:buNone/>
+            </a:pPr>
+            <a:r>
+              <a:rPr lang="en-US" sz="800" spc="120" kern="0" dirty="0">
+                <a:solidFill>
+                  <a:srgbClr val="C6C0C3"/>
+                </a:solidFill>
+                <a:latin typeface="Cambria" pitchFamily="34" charset="0"/>
+                <a:ea typeface="Cambria" pitchFamily="34" charset="-122"/>
+                <a:cs typeface="Cambria" pitchFamily="34" charset="-120"/>
+              </a:rPr>
+              <a:t>CONFIDENTIAL</a:t>
+            </a:r>
+            <a:endParaRPr lang="en-US" sz="800" dirty="0"/>
+          </a:p>
+        </p:txBody>
+      </p:sp>
+      <p:sp>
+        <p:nvSpPr>
+          <p:cNvPr id="8" name="Text 6"/>
+          <p:cNvSpPr/>
+          <p:nvPr/>
+        </p:nvSpPr>
+        <p:spPr>
+          <a:xfrm>
+            <a:off x="566928" y="1810512"/>
+            <a:ext cx="2743200" cy="274320"/>
+          </a:xfrm>
+          <a:prstGeom prst="rect">
+            <a:avLst/>
+          </a:prstGeom>
+          <a:noFill/>
+          <a:ln/>
+        </p:spPr>
+        <p:txBody>
+          <a:bodyPr wrap="square" lIns="0" tIns="0" rIns="0" bIns="0" rtlCol="0" anchor="ctr"/>
+          <a:lstStyle/>
+          <a:p>
+            <a:pPr indent="0" marL="0">
+              <a:buNone/>
+            </a:pPr>
+            <a:r>
+              <a:rPr lang="en-US" sz="1400" b="1" dirty="0">
+                <a:solidFill>
+                  <a:srgbClr val="45121F"/>
+                </a:solidFill>
+                <a:latin typeface="Yu Gothic" pitchFamily="34" charset="0"/>
+                <a:ea typeface="Yu Gothic" pitchFamily="34" charset="-122"/>
+                <a:cs typeface="Yu Gothic" pitchFamily="34" charset="-120"/>
+              </a:rPr>
+              <a:t>沿革</a:t>
+            </a:r>
+            <a:endParaRPr lang="en-US" sz="1400" dirty="0"/>
+          </a:p>
+        </p:txBody>
+      </p:sp>
+      <p:sp>
+        <p:nvSpPr>
+          <p:cNvPr id="9" name="Text 7"/>
+          <p:cNvSpPr/>
+          <p:nvPr/>
+        </p:nvSpPr>
+        <p:spPr>
+          <a:xfrm>
+            <a:off x="566928" y="2157984"/>
+            <a:ext cx="841248" cy="274320"/>
+          </a:xfrm>
+          <a:prstGeom prst="rect">
+            <a:avLst/>
+          </a:prstGeom>
+          <a:noFill/>
+          <a:ln/>
+        </p:spPr>
+        <p:txBody>
+          <a:bodyPr wrap="square" lIns="0" tIns="0" rIns="0" bIns="0" rtlCol="0" anchor="ctr"/>
+          <a:lstStyle/>
+          <a:p>
+            <a:pPr indent="0" marL="0">
+              <a:buNone/>
+            </a:pPr>
+            <a:r>
+              <a:rPr lang="en-US" sz="960" b="1" dirty="0">
+                <a:solidFill>
+                  <a:srgbClr val="C2A15A"/>
+                </a:solidFill>
+                <a:latin typeface="Cambria" pitchFamily="34" charset="0"/>
+                <a:ea typeface="Cambria" pitchFamily="34" charset="-122"/>
+                <a:cs typeface="Cambria" pitchFamily="34" charset="-120"/>
+              </a:rPr>
+              <a:t>1970.10</a:t>
+            </a:r>
+            <a:endParaRPr lang="en-US" sz="960" dirty="0"/>
+          </a:p>
+        </p:txBody>
+      </p:sp>
+      <p:sp>
+        <p:nvSpPr>
+          <p:cNvPr id="10" name="Text 8"/>
+          <p:cNvSpPr/>
+          <p:nvPr/>
+        </p:nvSpPr>
+        <p:spPr>
+          <a:xfrm>
+            <a:off x="1463040" y="2157984"/>
+            <a:ext cx="5358384" cy="274320"/>
+          </a:xfrm>
+          <a:prstGeom prst="rect">
+            <a:avLst/>
+          </a:prstGeom>
+          <a:noFill/>
+          <a:ln/>
+        </p:spPr>
+        <p:txBody>
+          <a:bodyPr wrap="square" lIns="0" tIns="0" rIns="0" bIns="0" rtlCol="0" anchor="ctr"/>
+          <a:lstStyle/>
+          <a:p>
+            <a:pPr indent="0" marL="0">
+              <a:lnSpc>
+                <a:spcPts val="1300"/>
+              </a:lnSpc>
+              <a:buNone/>
+            </a:pPr>
+            <a:r>
+              <a:rPr lang="en-US" sz="960" dirty="0">
+                <a:solidFill>
+                  <a:srgbClr val="241A1E"/>
+                </a:solidFill>
+                <a:latin typeface="Yu Gothic" pitchFamily="34" charset="0"/>
+                <a:ea typeface="Yu Gothic" pitchFamily="34" charset="-122"/>
+                <a:cs typeface="Yu Gothic" pitchFamily="34" charset="-120"/>
+              </a:rPr>
+              <a:t>北海道札幌で「有限会社中村」開業。1996年よりワイン販売に注力</a:t>
+            </a:r>
+            <a:endParaRPr lang="en-US" sz="960" dirty="0"/>
+          </a:p>
+        </p:txBody>
+      </p:sp>
+      <p:sp>
+        <p:nvSpPr>
+          <p:cNvPr id="11" name="Text 9"/>
+          <p:cNvSpPr/>
+          <p:nvPr/>
+        </p:nvSpPr>
+        <p:spPr>
+          <a:xfrm>
+            <a:off x="566928" y="2505456"/>
+            <a:ext cx="841248" cy="274320"/>
+          </a:xfrm>
+          <a:prstGeom prst="rect">
+            <a:avLst/>
+          </a:prstGeom>
+          <a:noFill/>
+          <a:ln/>
+        </p:spPr>
+        <p:txBody>
+          <a:bodyPr wrap="square" lIns="0" tIns="0" rIns="0" bIns="0" rtlCol="0" anchor="ctr"/>
+          <a:lstStyle/>
+          <a:p>
+            <a:pPr indent="0" marL="0">
+              <a:buNone/>
+            </a:pPr>
+            <a:r>
+              <a:rPr lang="en-US" sz="960" b="1" dirty="0">
+                <a:solidFill>
+                  <a:srgbClr val="C2A15A"/>
+                </a:solidFill>
+                <a:latin typeface="Cambria" pitchFamily="34" charset="0"/>
+                <a:ea typeface="Cambria" pitchFamily="34" charset="-122"/>
+                <a:cs typeface="Cambria" pitchFamily="34" charset="-120"/>
+              </a:rPr>
+              <a:t>2007.05</a:t>
+            </a:r>
+            <a:endParaRPr lang="en-US" sz="960" dirty="0"/>
+          </a:p>
+        </p:txBody>
+      </p:sp>
+      <p:sp>
+        <p:nvSpPr>
+          <p:cNvPr id="12" name="Text 10"/>
+          <p:cNvSpPr/>
+          <p:nvPr/>
+        </p:nvSpPr>
+        <p:spPr>
+          <a:xfrm>
+            <a:off x="1463040" y="2505456"/>
+            <a:ext cx="5358384" cy="274320"/>
+          </a:xfrm>
+          <a:prstGeom prst="rect">
+            <a:avLst/>
+          </a:prstGeom>
+          <a:noFill/>
+          <a:ln/>
+        </p:spPr>
+        <p:txBody>
+          <a:bodyPr wrap="square" lIns="0" tIns="0" rIns="0" bIns="0" rtlCol="0" anchor="ctr"/>
+          <a:lstStyle/>
+          <a:p>
+            <a:pPr indent="0" marL="0">
+              <a:lnSpc>
+                <a:spcPts val="1300"/>
+              </a:lnSpc>
+              <a:buNone/>
+            </a:pPr>
+            <a:r>
+              <a:rPr lang="en-US" sz="960" dirty="0">
+                <a:solidFill>
+                  <a:srgbClr val="241A1E"/>
+                </a:solidFill>
+                <a:latin typeface="Yu Gothic" pitchFamily="34" charset="0"/>
+                <a:ea typeface="Yu Gothic" pitchFamily="34" charset="-122"/>
+                <a:cs typeface="Yu Gothic" pitchFamily="34" charset="-120"/>
+              </a:rPr>
+              <a:t>楽天市場に出店しワインEC開始（現在はYahoo・寺田ワインマーケットにも出店）</a:t>
+            </a:r>
+            <a:endParaRPr lang="en-US" sz="960" dirty="0"/>
+          </a:p>
+        </p:txBody>
+      </p:sp>
+      <p:sp>
+        <p:nvSpPr>
+          <p:cNvPr id="13" name="Text 11"/>
+          <p:cNvSpPr/>
+          <p:nvPr/>
+        </p:nvSpPr>
+        <p:spPr>
+          <a:xfrm>
+            <a:off x="566928" y="2852928"/>
+            <a:ext cx="841248" cy="274320"/>
+          </a:xfrm>
+          <a:prstGeom prst="rect">
+            <a:avLst/>
+          </a:prstGeom>
+          <a:noFill/>
+          <a:ln/>
+        </p:spPr>
+        <p:txBody>
+          <a:bodyPr wrap="square" lIns="0" tIns="0" rIns="0" bIns="0" rtlCol="0" anchor="ctr"/>
+          <a:lstStyle/>
+          <a:p>
+            <a:pPr indent="0" marL="0">
+              <a:buNone/>
+            </a:pPr>
+            <a:r>
+              <a:rPr lang="en-US" sz="960" b="1" dirty="0">
+                <a:solidFill>
+                  <a:srgbClr val="C2A15A"/>
+                </a:solidFill>
+                <a:latin typeface="Cambria" pitchFamily="34" charset="0"/>
+                <a:ea typeface="Cambria" pitchFamily="34" charset="-122"/>
+                <a:cs typeface="Cambria" pitchFamily="34" charset="-120"/>
+              </a:rPr>
+              <a:t>2011.04</a:t>
+            </a:r>
+            <a:endParaRPr lang="en-US" sz="960" dirty="0"/>
+          </a:p>
+        </p:txBody>
+      </p:sp>
+      <p:sp>
+        <p:nvSpPr>
+          <p:cNvPr id="14" name="Text 12"/>
+          <p:cNvSpPr/>
+          <p:nvPr/>
+        </p:nvSpPr>
+        <p:spPr>
+          <a:xfrm>
+            <a:off x="1463040" y="2852928"/>
+            <a:ext cx="5358384" cy="274320"/>
+          </a:xfrm>
+          <a:prstGeom prst="rect">
+            <a:avLst/>
+          </a:prstGeom>
+          <a:noFill/>
+          <a:ln/>
+        </p:spPr>
+        <p:txBody>
+          <a:bodyPr wrap="square" lIns="0" tIns="0" rIns="0" bIns="0" rtlCol="0" anchor="ctr"/>
+          <a:lstStyle/>
+          <a:p>
+            <a:pPr indent="0" marL="0">
+              <a:lnSpc>
+                <a:spcPts val="1300"/>
+              </a:lnSpc>
+              <a:buNone/>
+            </a:pPr>
+            <a:r>
+              <a:rPr lang="en-US" sz="960" dirty="0">
+                <a:solidFill>
+                  <a:srgbClr val="241A1E"/>
+                </a:solidFill>
+                <a:latin typeface="Yu Gothic" pitchFamily="34" charset="0"/>
+                <a:ea typeface="Yu Gothic" pitchFamily="34" charset="-122"/>
+                <a:cs typeface="Yu Gothic" pitchFamily="34" charset="-120"/>
+              </a:rPr>
+              <a:t>ラ・ブリック（レストラン）／カーヴ・ド・ブリック（ワインショップ）開業</a:t>
+            </a:r>
+            <a:endParaRPr lang="en-US" sz="960" dirty="0"/>
+          </a:p>
+        </p:txBody>
+      </p:sp>
+      <p:sp>
+        <p:nvSpPr>
+          <p:cNvPr id="15" name="Text 13"/>
+          <p:cNvSpPr/>
+          <p:nvPr/>
+        </p:nvSpPr>
+        <p:spPr>
+          <a:xfrm>
+            <a:off x="566928" y="3200400"/>
+            <a:ext cx="841248" cy="274320"/>
+          </a:xfrm>
+          <a:prstGeom prst="rect">
+            <a:avLst/>
+          </a:prstGeom>
+          <a:noFill/>
+          <a:ln/>
+        </p:spPr>
+        <p:txBody>
+          <a:bodyPr wrap="square" lIns="0" tIns="0" rIns="0" bIns="0" rtlCol="0" anchor="ctr"/>
+          <a:lstStyle/>
+          <a:p>
+            <a:pPr indent="0" marL="0">
+              <a:buNone/>
+            </a:pPr>
+            <a:r>
+              <a:rPr lang="en-US" sz="960" b="1" dirty="0">
+                <a:solidFill>
+                  <a:srgbClr val="C2A15A"/>
+                </a:solidFill>
+                <a:latin typeface="Cambria" pitchFamily="34" charset="0"/>
+                <a:ea typeface="Cambria" pitchFamily="34" charset="-122"/>
+                <a:cs typeface="Cambria" pitchFamily="34" charset="-120"/>
+              </a:rPr>
+              <a:t>2020.07</a:t>
+            </a:r>
+            <a:endParaRPr lang="en-US" sz="960" dirty="0"/>
+          </a:p>
+        </p:txBody>
+      </p:sp>
+      <p:sp>
+        <p:nvSpPr>
+          <p:cNvPr id="16" name="Text 14"/>
+          <p:cNvSpPr/>
+          <p:nvPr/>
+        </p:nvSpPr>
+        <p:spPr>
+          <a:xfrm>
+            <a:off x="1463040" y="3200400"/>
+            <a:ext cx="5358384" cy="274320"/>
+          </a:xfrm>
+          <a:prstGeom prst="rect">
+            <a:avLst/>
+          </a:prstGeom>
+          <a:noFill/>
+          <a:ln/>
+        </p:spPr>
+        <p:txBody>
+          <a:bodyPr wrap="square" lIns="0" tIns="0" rIns="0" bIns="0" rtlCol="0" anchor="ctr"/>
+          <a:lstStyle/>
+          <a:p>
+            <a:pPr indent="0" marL="0">
+              <a:lnSpc>
+                <a:spcPts val="1300"/>
+              </a:lnSpc>
+              <a:buNone/>
+            </a:pPr>
+            <a:r>
+              <a:rPr lang="en-US" sz="960" dirty="0">
+                <a:solidFill>
+                  <a:srgbClr val="241A1E"/>
+                </a:solidFill>
+                <a:latin typeface="Yu Gothic" pitchFamily="34" charset="0"/>
+                <a:ea typeface="Yu Gothic" pitchFamily="34" charset="-122"/>
+                <a:cs typeface="Yu Gothic" pitchFamily="34" charset="-120"/>
+              </a:rPr>
+              <a:t>中野邦人がM&amp;Aにより100%取得、代表取締役就任</a:t>
+            </a:r>
+            <a:endParaRPr lang="en-US" sz="960" dirty="0"/>
+          </a:p>
+        </p:txBody>
+      </p:sp>
+      <p:sp>
+        <p:nvSpPr>
+          <p:cNvPr id="17" name="Text 15"/>
+          <p:cNvSpPr/>
+          <p:nvPr/>
+        </p:nvSpPr>
+        <p:spPr>
+          <a:xfrm>
+            <a:off x="566928" y="3547872"/>
+            <a:ext cx="841248" cy="274320"/>
+          </a:xfrm>
+          <a:prstGeom prst="rect">
+            <a:avLst/>
+          </a:prstGeom>
+          <a:noFill/>
+          <a:ln/>
+        </p:spPr>
+        <p:txBody>
+          <a:bodyPr wrap="square" lIns="0" tIns="0" rIns="0" bIns="0" rtlCol="0" anchor="ctr"/>
+          <a:lstStyle/>
+          <a:p>
+            <a:pPr indent="0" marL="0">
+              <a:buNone/>
+            </a:pPr>
+            <a:r>
+              <a:rPr lang="en-US" sz="960" b="1" dirty="0">
+                <a:solidFill>
+                  <a:srgbClr val="C2A15A"/>
+                </a:solidFill>
+                <a:latin typeface="Cambria" pitchFamily="34" charset="0"/>
+                <a:ea typeface="Cambria" pitchFamily="34" charset="-122"/>
+                <a:cs typeface="Cambria" pitchFamily="34" charset="-120"/>
+              </a:rPr>
+              <a:t>2022.05</a:t>
+            </a:r>
+            <a:endParaRPr lang="en-US" sz="960" dirty="0"/>
+          </a:p>
+        </p:txBody>
+      </p:sp>
+      <p:sp>
+        <p:nvSpPr>
+          <p:cNvPr id="18" name="Text 16"/>
+          <p:cNvSpPr/>
+          <p:nvPr/>
+        </p:nvSpPr>
+        <p:spPr>
+          <a:xfrm>
+            <a:off x="1463040" y="3547872"/>
+            <a:ext cx="5358384" cy="274320"/>
+          </a:xfrm>
+          <a:prstGeom prst="rect">
+            <a:avLst/>
+          </a:prstGeom>
+          <a:noFill/>
+          <a:ln/>
+        </p:spPr>
+        <p:txBody>
+          <a:bodyPr wrap="square" lIns="0" tIns="0" rIns="0" bIns="0" rtlCol="0" anchor="ctr"/>
+          <a:lstStyle/>
+          <a:p>
+            <a:pPr indent="0" marL="0">
+              <a:lnSpc>
+                <a:spcPts val="1300"/>
+              </a:lnSpc>
+              <a:buNone/>
+            </a:pPr>
+            <a:r>
+              <a:rPr lang="en-US" sz="960" dirty="0">
+                <a:solidFill>
+                  <a:srgbClr val="241A1E"/>
+                </a:solidFill>
+                <a:latin typeface="Yu Gothic" pitchFamily="34" charset="0"/>
+                <a:ea typeface="Yu Gothic" pitchFamily="34" charset="-122"/>
+                <a:cs typeface="Yu Gothic" pitchFamily="34" charset="-120"/>
+              </a:rPr>
+              <a:t>Wine Cave Roppongi 開業</a:t>
+            </a:r>
+            <a:endParaRPr lang="en-US" sz="960" dirty="0"/>
+          </a:p>
+        </p:txBody>
+      </p:sp>
+      <p:sp>
+        <p:nvSpPr>
+          <p:cNvPr id="19" name="Text 17"/>
+          <p:cNvSpPr/>
+          <p:nvPr/>
+        </p:nvSpPr>
+        <p:spPr>
+          <a:xfrm>
+            <a:off x="566928" y="3895344"/>
+            <a:ext cx="841248" cy="274320"/>
+          </a:xfrm>
+          <a:prstGeom prst="rect">
+            <a:avLst/>
+          </a:prstGeom>
+          <a:noFill/>
+          <a:ln/>
+        </p:spPr>
+        <p:txBody>
+          <a:bodyPr wrap="square" lIns="0" tIns="0" rIns="0" bIns="0" rtlCol="0" anchor="ctr"/>
+          <a:lstStyle/>
+          <a:p>
+            <a:pPr indent="0" marL="0">
+              <a:buNone/>
+            </a:pPr>
+            <a:r>
+              <a:rPr lang="en-US" sz="960" b="1" dirty="0">
+                <a:solidFill>
+                  <a:srgbClr val="C2A15A"/>
+                </a:solidFill>
+                <a:latin typeface="Cambria" pitchFamily="34" charset="0"/>
+                <a:ea typeface="Cambria" pitchFamily="34" charset="-122"/>
+                <a:cs typeface="Cambria" pitchFamily="34" charset="-120"/>
+              </a:rPr>
+              <a:t>2022.07</a:t>
+            </a:r>
+            <a:endParaRPr lang="en-US" sz="960" dirty="0"/>
+          </a:p>
+        </p:txBody>
+      </p:sp>
+      <p:sp>
+        <p:nvSpPr>
+          <p:cNvPr id="20" name="Text 18"/>
+          <p:cNvSpPr/>
+          <p:nvPr/>
+        </p:nvSpPr>
+        <p:spPr>
+          <a:xfrm>
+            <a:off x="1463040" y="3895344"/>
+            <a:ext cx="5358384" cy="274320"/>
+          </a:xfrm>
+          <a:prstGeom prst="rect">
+            <a:avLst/>
+          </a:prstGeom>
+          <a:noFill/>
+          <a:ln/>
+        </p:spPr>
+        <p:txBody>
+          <a:bodyPr wrap="square" lIns="0" tIns="0" rIns="0" bIns="0" rtlCol="0" anchor="ctr"/>
+          <a:lstStyle/>
+          <a:p>
+            <a:pPr indent="0" marL="0">
+              <a:lnSpc>
+                <a:spcPts val="1300"/>
+              </a:lnSpc>
+              <a:buNone/>
+            </a:pPr>
+            <a:r>
+              <a:rPr lang="en-US" sz="960" dirty="0">
+                <a:solidFill>
+                  <a:srgbClr val="241A1E"/>
+                </a:solidFill>
+                <a:latin typeface="Yu Gothic" pitchFamily="34" charset="0"/>
+                <a:ea typeface="Yu Gothic" pitchFamily="34" charset="-122"/>
+                <a:cs typeface="Yu Gothic" pitchFamily="34" charset="-120"/>
+              </a:rPr>
+              <a:t>ワインファンド1号 運用開始（2026年4月時点 累計+18.06%）</a:t>
+            </a:r>
+            <a:endParaRPr lang="en-US" sz="960" dirty="0"/>
+          </a:p>
+        </p:txBody>
+      </p:sp>
+      <p:sp>
+        <p:nvSpPr>
+          <p:cNvPr id="21" name="Text 19"/>
+          <p:cNvSpPr/>
+          <p:nvPr/>
+        </p:nvSpPr>
+        <p:spPr>
+          <a:xfrm>
+            <a:off x="566928" y="4242816"/>
+            <a:ext cx="841248" cy="274320"/>
+          </a:xfrm>
+          <a:prstGeom prst="rect">
+            <a:avLst/>
+          </a:prstGeom>
+          <a:noFill/>
+          <a:ln/>
+        </p:spPr>
+        <p:txBody>
+          <a:bodyPr wrap="square" lIns="0" tIns="0" rIns="0" bIns="0" rtlCol="0" anchor="ctr"/>
+          <a:lstStyle/>
+          <a:p>
+            <a:pPr indent="0" marL="0">
+              <a:buNone/>
+            </a:pPr>
+            <a:r>
+              <a:rPr lang="en-US" sz="960" b="1" dirty="0">
+                <a:solidFill>
+                  <a:srgbClr val="C2A15A"/>
+                </a:solidFill>
+                <a:latin typeface="Cambria" pitchFamily="34" charset="0"/>
+                <a:ea typeface="Cambria" pitchFamily="34" charset="-122"/>
+                <a:cs typeface="Cambria" pitchFamily="34" charset="-120"/>
+              </a:rPr>
+              <a:t>2022.09</a:t>
+            </a:r>
+            <a:endParaRPr lang="en-US" sz="960" dirty="0"/>
+          </a:p>
+        </p:txBody>
+      </p:sp>
+      <p:sp>
+        <p:nvSpPr>
+          <p:cNvPr id="22" name="Text 20"/>
+          <p:cNvSpPr/>
+          <p:nvPr/>
+        </p:nvSpPr>
+        <p:spPr>
+          <a:xfrm>
+            <a:off x="1463040" y="4242816"/>
+            <a:ext cx="5358384" cy="274320"/>
+          </a:xfrm>
+          <a:prstGeom prst="rect">
+            <a:avLst/>
+          </a:prstGeom>
+          <a:noFill/>
+          <a:ln/>
+        </p:spPr>
+        <p:txBody>
+          <a:bodyPr wrap="square" lIns="0" tIns="0" rIns="0" bIns="0" rtlCol="0" anchor="ctr"/>
+          <a:lstStyle/>
+          <a:p>
+            <a:pPr indent="0" marL="0">
+              <a:lnSpc>
+                <a:spcPts val="1300"/>
+              </a:lnSpc>
+              <a:buNone/>
+            </a:pPr>
+            <a:r>
+              <a:rPr lang="en-US" sz="960" dirty="0">
+                <a:solidFill>
+                  <a:srgbClr val="241A1E"/>
+                </a:solidFill>
+                <a:latin typeface="Yu Gothic" pitchFamily="34" charset="0"/>
+                <a:ea typeface="Yu Gothic" pitchFamily="34" charset="-122"/>
+                <a:cs typeface="Yu Gothic" pitchFamily="34" charset="-120"/>
+              </a:rPr>
+              <a:t>株式会社WineBank へ商号変更</a:t>
+            </a:r>
+            <a:endParaRPr lang="en-US" sz="960" dirty="0"/>
+          </a:p>
+        </p:txBody>
+      </p:sp>
+      <p:sp>
+        <p:nvSpPr>
+          <p:cNvPr id="23" name="Text 21"/>
+          <p:cNvSpPr/>
+          <p:nvPr/>
+        </p:nvSpPr>
+        <p:spPr>
+          <a:xfrm>
+            <a:off x="566928" y="4590288"/>
+            <a:ext cx="841248" cy="274320"/>
+          </a:xfrm>
+          <a:prstGeom prst="rect">
+            <a:avLst/>
+          </a:prstGeom>
+          <a:noFill/>
+          <a:ln/>
+        </p:spPr>
+        <p:txBody>
+          <a:bodyPr wrap="square" lIns="0" tIns="0" rIns="0" bIns="0" rtlCol="0" anchor="ctr"/>
+          <a:lstStyle/>
+          <a:p>
+            <a:pPr indent="0" marL="0">
+              <a:buNone/>
+            </a:pPr>
+            <a:r>
+              <a:rPr lang="en-US" sz="960" b="1" dirty="0">
+                <a:solidFill>
+                  <a:srgbClr val="C2A15A"/>
+                </a:solidFill>
+                <a:latin typeface="Cambria" pitchFamily="34" charset="0"/>
+                <a:ea typeface="Cambria" pitchFamily="34" charset="-122"/>
+                <a:cs typeface="Cambria" pitchFamily="34" charset="-120"/>
+              </a:rPr>
+              <a:t>2023.02</a:t>
+            </a:r>
+            <a:endParaRPr lang="en-US" sz="960" dirty="0"/>
+          </a:p>
+        </p:txBody>
+      </p:sp>
+      <p:sp>
+        <p:nvSpPr>
+          <p:cNvPr id="24" name="Text 22"/>
+          <p:cNvSpPr/>
+          <p:nvPr/>
+        </p:nvSpPr>
+        <p:spPr>
+          <a:xfrm>
+            <a:off x="1463040" y="4590288"/>
+            <a:ext cx="5358384" cy="274320"/>
+          </a:xfrm>
+          <a:prstGeom prst="rect">
+            <a:avLst/>
+          </a:prstGeom>
+          <a:noFill/>
+          <a:ln/>
+        </p:spPr>
+        <p:txBody>
+          <a:bodyPr wrap="square" lIns="0" tIns="0" rIns="0" bIns="0" rtlCol="0" anchor="ctr"/>
+          <a:lstStyle/>
+          <a:p>
+            <a:pPr indent="0" marL="0">
+              <a:lnSpc>
+                <a:spcPts val="1300"/>
+              </a:lnSpc>
+              <a:buNone/>
+            </a:pPr>
+            <a:r>
+              <a:rPr lang="en-US" sz="960" dirty="0">
+                <a:solidFill>
+                  <a:srgbClr val="241A1E"/>
+                </a:solidFill>
+                <a:latin typeface="Yu Gothic" pitchFamily="34" charset="0"/>
+                <a:ea typeface="Yu Gothic" pitchFamily="34" charset="-122"/>
+                <a:cs typeface="Yu Gothic" pitchFamily="34" charset="-120"/>
+              </a:rPr>
+              <a:t>ワイン投資プラットフォーム「WineBank」リリース</a:t>
+            </a:r>
+            <a:endParaRPr lang="en-US" sz="960" dirty="0"/>
+          </a:p>
+        </p:txBody>
+      </p:sp>
+      <p:sp>
+        <p:nvSpPr>
+          <p:cNvPr id="25" name="Text 23"/>
+          <p:cNvSpPr/>
+          <p:nvPr/>
+        </p:nvSpPr>
+        <p:spPr>
+          <a:xfrm>
+            <a:off x="566928" y="4937760"/>
+            <a:ext cx="841248" cy="274320"/>
+          </a:xfrm>
+          <a:prstGeom prst="rect">
+            <a:avLst/>
+          </a:prstGeom>
+          <a:noFill/>
+          <a:ln/>
+        </p:spPr>
+        <p:txBody>
+          <a:bodyPr wrap="square" lIns="0" tIns="0" rIns="0" bIns="0" rtlCol="0" anchor="ctr"/>
+          <a:lstStyle/>
+          <a:p>
+            <a:pPr indent="0" marL="0">
+              <a:buNone/>
+            </a:pPr>
+            <a:r>
+              <a:rPr lang="en-US" sz="960" b="1" dirty="0">
+                <a:solidFill>
+                  <a:srgbClr val="C2A15A"/>
+                </a:solidFill>
+                <a:latin typeface="Cambria" pitchFamily="34" charset="0"/>
+                <a:ea typeface="Cambria" pitchFamily="34" charset="-122"/>
+                <a:cs typeface="Cambria" pitchFamily="34" charset="-120"/>
+              </a:rPr>
+              <a:t>2024.06</a:t>
+            </a:r>
+            <a:endParaRPr lang="en-US" sz="960" dirty="0"/>
+          </a:p>
+        </p:txBody>
+      </p:sp>
+      <p:sp>
+        <p:nvSpPr>
+          <p:cNvPr id="26" name="Text 24"/>
+          <p:cNvSpPr/>
+          <p:nvPr/>
+        </p:nvSpPr>
+        <p:spPr>
+          <a:xfrm>
+            <a:off x="1463040" y="4937760"/>
+            <a:ext cx="5358384" cy="274320"/>
+          </a:xfrm>
+          <a:prstGeom prst="rect">
+            <a:avLst/>
+          </a:prstGeom>
+          <a:noFill/>
+          <a:ln/>
+        </p:spPr>
+        <p:txBody>
+          <a:bodyPr wrap="square" lIns="0" tIns="0" rIns="0" bIns="0" rtlCol="0" anchor="ctr"/>
+          <a:lstStyle/>
+          <a:p>
+            <a:pPr indent="0" marL="0">
+              <a:lnSpc>
+                <a:spcPts val="1300"/>
+              </a:lnSpc>
+              <a:buNone/>
+            </a:pPr>
+            <a:r>
+              <a:rPr lang="en-US" sz="960" dirty="0">
+                <a:solidFill>
+                  <a:srgbClr val="241A1E"/>
+                </a:solidFill>
+                <a:latin typeface="Yu Gothic" pitchFamily="34" charset="0"/>
+                <a:ea typeface="Yu Gothic" pitchFamily="34" charset="-122"/>
+                <a:cs typeface="Yu Gothic" pitchFamily="34" charset="-120"/>
+              </a:rPr>
+              <a:t>創業41年のグランメゾン「アピシウス」を100%株式取得</a:t>
+            </a:r>
+            <a:endParaRPr lang="en-US" sz="960" dirty="0"/>
+          </a:p>
+        </p:txBody>
+      </p:sp>
+      <p:sp>
+        <p:nvSpPr>
+          <p:cNvPr id="27" name="Text 25"/>
+          <p:cNvSpPr/>
+          <p:nvPr/>
+        </p:nvSpPr>
+        <p:spPr>
+          <a:xfrm>
+            <a:off x="566928" y="5285232"/>
+            <a:ext cx="841248" cy="274320"/>
+          </a:xfrm>
+          <a:prstGeom prst="rect">
+            <a:avLst/>
+          </a:prstGeom>
+          <a:noFill/>
+          <a:ln/>
+        </p:spPr>
+        <p:txBody>
+          <a:bodyPr wrap="square" lIns="0" tIns="0" rIns="0" bIns="0" rtlCol="0" anchor="ctr"/>
+          <a:lstStyle/>
+          <a:p>
+            <a:pPr indent="0" marL="0">
+              <a:buNone/>
+            </a:pPr>
+            <a:r>
+              <a:rPr lang="en-US" sz="960" b="1" dirty="0">
+                <a:solidFill>
+                  <a:srgbClr val="C2A15A"/>
+                </a:solidFill>
+                <a:latin typeface="Cambria" pitchFamily="34" charset="0"/>
+                <a:ea typeface="Cambria" pitchFamily="34" charset="-122"/>
+                <a:cs typeface="Cambria" pitchFamily="34" charset="-120"/>
+              </a:rPr>
+              <a:t>2026.07</a:t>
+            </a:r>
+            <a:endParaRPr lang="en-US" sz="960" dirty="0"/>
+          </a:p>
+        </p:txBody>
+      </p:sp>
+      <p:sp>
+        <p:nvSpPr>
+          <p:cNvPr id="28" name="Text 26"/>
+          <p:cNvSpPr/>
+          <p:nvPr/>
+        </p:nvSpPr>
+        <p:spPr>
+          <a:xfrm>
+            <a:off x="1463040" y="5285232"/>
+            <a:ext cx="5358384" cy="274320"/>
+          </a:xfrm>
+          <a:prstGeom prst="rect">
+            <a:avLst/>
+          </a:prstGeom>
+          <a:noFill/>
+          <a:ln/>
+        </p:spPr>
+        <p:txBody>
+          <a:bodyPr wrap="square" lIns="0" tIns="0" rIns="0" bIns="0" rtlCol="0" anchor="ctr"/>
+          <a:lstStyle/>
+          <a:p>
+            <a:pPr indent="0" marL="0">
+              <a:lnSpc>
+                <a:spcPts val="1300"/>
+              </a:lnSpc>
+              <a:buNone/>
+            </a:pPr>
+            <a:r>
+              <a:rPr lang="en-US" sz="960" dirty="0">
+                <a:solidFill>
+                  <a:srgbClr val="241A1E"/>
+                </a:solidFill>
+                <a:latin typeface="Yu Gothic" pitchFamily="34" charset="0"/>
+                <a:ea typeface="Yu Gothic" pitchFamily="34" charset="-122"/>
+                <a:cs typeface="Yu Gothic" pitchFamily="34" charset="-120"/>
+              </a:rPr>
+              <a:t>六本木の路面店に「Bistro &amp; Bar WineBank terrace」開業</a:t>
+            </a:r>
+            <a:endParaRPr lang="en-US" sz="960" dirty="0"/>
+          </a:p>
+        </p:txBody>
+      </p:sp>
+      <p:sp>
+        <p:nvSpPr>
+          <p:cNvPr id="29" name="Shape 27"/>
+          <p:cNvSpPr/>
+          <p:nvPr/>
+        </p:nvSpPr>
+        <p:spPr>
+          <a:xfrm>
+            <a:off x="7114032" y="1810512"/>
+            <a:ext cx="4510735" cy="2395728"/>
+          </a:xfrm>
+          <a:prstGeom prst="roundRect">
+            <a:avLst>
+              <a:gd name="adj" fmla="val 3435"/>
+            </a:avLst>
+          </a:prstGeom>
+          <a:solidFill>
+            <a:srgbClr val="F4F1F2"/>
+          </a:solidFill>
+          <a:ln w="12700">
+            <a:solidFill>
+              <a:srgbClr val="F4F1F2"/>
+            </a:solidFill>
+            <a:prstDash val="solid"/>
+          </a:ln>
+          <a:effectLst>
+            <a:outerShdw sx="100000" sy="100000" kx="0" ky="0" algn="bl" rotWithShape="0" blurRad="127000" dist="25400" dir="5400000">
+              <a:srgbClr val="8A7078">
+                <a:alpha val="18000"/>
+              </a:srgbClr>
+            </a:outerShdw>
+          </a:effectLst>
+        </p:spPr>
+      </p:sp>
+      <p:sp>
+        <p:nvSpPr>
+          <p:cNvPr id="30" name="Text 28"/>
+          <p:cNvSpPr/>
+          <p:nvPr/>
+        </p:nvSpPr>
+        <p:spPr>
+          <a:xfrm>
+            <a:off x="7388352" y="1975104"/>
+            <a:ext cx="3962095" cy="274320"/>
+          </a:xfrm>
+          <a:prstGeom prst="rect">
+            <a:avLst/>
+          </a:prstGeom>
+          <a:noFill/>
+          <a:ln/>
+        </p:spPr>
+        <p:txBody>
+          <a:bodyPr wrap="square" lIns="0" tIns="0" rIns="0" bIns="0" rtlCol="0" anchor="ctr"/>
+          <a:lstStyle/>
+          <a:p>
+            <a:pPr indent="0" marL="0">
+              <a:buNone/>
+            </a:pPr>
+            <a:r>
+              <a:rPr lang="en-US" sz="1400" b="1" dirty="0">
+                <a:solidFill>
+                  <a:srgbClr val="45121F"/>
+                </a:solidFill>
+                <a:latin typeface="Yu Gothic" pitchFamily="34" charset="0"/>
+                <a:ea typeface="Yu Gothic" pitchFamily="34" charset="-122"/>
+                <a:cs typeface="Yu Gothic" pitchFamily="34" charset="-120"/>
+              </a:rPr>
+              <a:t>いま動いている3つの大型提携</a:t>
+            </a:r>
+            <a:endParaRPr lang="en-US" sz="1400" dirty="0"/>
+          </a:p>
+        </p:txBody>
+      </p:sp>
+      <p:sp>
+        <p:nvSpPr>
+          <p:cNvPr id="31" name="Shape 29"/>
+          <p:cNvSpPr/>
+          <p:nvPr/>
+        </p:nvSpPr>
+        <p:spPr>
+          <a:xfrm>
+            <a:off x="7388352" y="2359152"/>
+            <a:ext cx="329184" cy="329184"/>
+          </a:xfrm>
+          <a:prstGeom prst="ellipse">
+            <a:avLst/>
+          </a:prstGeom>
+          <a:solidFill>
+            <a:srgbClr val="FFFFFF"/>
+          </a:solidFill>
+          <a:ln w="15875">
+            <a:solidFill>
+              <a:srgbClr val="C2A15A"/>
+            </a:solidFill>
+            <a:prstDash val="solid"/>
+          </a:ln>
+        </p:spPr>
+      </p:sp>
+      <p:sp>
+        <p:nvSpPr>
+          <p:cNvPr id="32" name="Text 30"/>
+          <p:cNvSpPr/>
+          <p:nvPr/>
+        </p:nvSpPr>
+        <p:spPr>
+          <a:xfrm>
+            <a:off x="7388352" y="2359152"/>
+            <a:ext cx="329184" cy="329184"/>
+          </a:xfrm>
+          <a:prstGeom prst="rect">
+            <a:avLst/>
+          </a:prstGeom>
+          <a:noFill/>
+          <a:ln/>
+        </p:spPr>
+        <p:txBody>
+          <a:bodyPr wrap="square" lIns="0" tIns="0" rIns="0" bIns="0" rtlCol="0" anchor="ctr"/>
+          <a:lstStyle/>
+          <a:p>
+            <a:pPr algn="ctr" indent="0" marL="0">
+              <a:buNone/>
+            </a:pPr>
+            <a:r>
+              <a:rPr lang="en-US" sz="1000" b="1" dirty="0">
+                <a:solidFill>
+                  <a:srgbClr val="6B1F32"/>
+                </a:solidFill>
+                <a:latin typeface="Cambria" pitchFamily="34" charset="0"/>
+                <a:ea typeface="Cambria" pitchFamily="34" charset="-122"/>
+                <a:cs typeface="Cambria" pitchFamily="34" charset="-120"/>
+              </a:rPr>
+              <a:t>1</a:t>
+            </a:r>
+            <a:endParaRPr lang="en-US" sz="1000" dirty="0"/>
+          </a:p>
+        </p:txBody>
+      </p:sp>
+      <p:sp>
+        <p:nvSpPr>
+          <p:cNvPr id="33" name="Text 31"/>
+          <p:cNvSpPr/>
+          <p:nvPr/>
+        </p:nvSpPr>
+        <p:spPr>
+          <a:xfrm>
+            <a:off x="7827264" y="2340864"/>
+            <a:ext cx="3523183" cy="237744"/>
+          </a:xfrm>
+          <a:prstGeom prst="rect">
+            <a:avLst/>
+          </a:prstGeom>
+          <a:noFill/>
+          <a:ln/>
+        </p:spPr>
+        <p:txBody>
+          <a:bodyPr wrap="square" lIns="0" tIns="0" rIns="0" bIns="0" rtlCol="0" anchor="ctr"/>
+          <a:lstStyle/>
+          <a:p>
+            <a:pPr indent="0" marL="0">
+              <a:buNone/>
+            </a:pPr>
+            <a:r>
+              <a:rPr lang="en-US" sz="1150" b="1" dirty="0">
+                <a:solidFill>
+                  <a:srgbClr val="6B1F32"/>
+                </a:solidFill>
+                <a:latin typeface="Yu Gothic" pitchFamily="34" charset="0"/>
+                <a:ea typeface="Yu Gothic" pitchFamily="34" charset="-122"/>
+                <a:cs typeface="Yu Gothic" pitchFamily="34" charset="-120"/>
+              </a:rPr>
+              <a:t>SBI証券</a:t>
+            </a:r>
+            <a:endParaRPr lang="en-US" sz="1150" dirty="0"/>
+          </a:p>
+        </p:txBody>
+      </p:sp>
+      <p:sp>
+        <p:nvSpPr>
+          <p:cNvPr id="34" name="Text 32"/>
+          <p:cNvSpPr/>
+          <p:nvPr/>
+        </p:nvSpPr>
+        <p:spPr>
+          <a:xfrm>
+            <a:off x="7827264" y="2578608"/>
+            <a:ext cx="3523183" cy="310896"/>
+          </a:xfrm>
+          <a:prstGeom prst="rect">
+            <a:avLst/>
+          </a:prstGeom>
+          <a:noFill/>
+          <a:ln/>
+        </p:spPr>
+        <p:txBody>
+          <a:bodyPr wrap="square" lIns="0" tIns="0" rIns="0" bIns="0" rtlCol="0" anchor="ctr"/>
+          <a:lstStyle/>
+          <a:p>
+            <a:pPr indent="0" marL="0">
+              <a:lnSpc>
+                <a:spcPts val="1250"/>
+              </a:lnSpc>
+              <a:buNone/>
+            </a:pPr>
+            <a:r>
+              <a:rPr lang="en-US" sz="920" dirty="0">
+                <a:solidFill>
+                  <a:srgbClr val="6E666A"/>
+                </a:solidFill>
+                <a:latin typeface="Yu Gothic" pitchFamily="34" charset="0"/>
+                <a:ea typeface="Yu Gothic" pitchFamily="34" charset="-122"/>
+                <a:cs typeface="Yu Gothic" pitchFamily="34" charset="-120"/>
+              </a:rPr>
+              <a:t>世界初のワインST（セキュリティトークン）の構築・販売</a:t>
+            </a:r>
+            <a:endParaRPr lang="en-US" sz="920" dirty="0"/>
+          </a:p>
+        </p:txBody>
+      </p:sp>
+      <p:sp>
+        <p:nvSpPr>
+          <p:cNvPr id="35" name="Shape 33"/>
+          <p:cNvSpPr/>
+          <p:nvPr/>
+        </p:nvSpPr>
+        <p:spPr>
+          <a:xfrm>
+            <a:off x="7388352" y="2980944"/>
+            <a:ext cx="329184" cy="329184"/>
+          </a:xfrm>
+          <a:prstGeom prst="ellipse">
+            <a:avLst/>
+          </a:prstGeom>
+          <a:solidFill>
+            <a:srgbClr val="FFFFFF"/>
+          </a:solidFill>
+          <a:ln w="15875">
+            <a:solidFill>
+              <a:srgbClr val="C2A15A"/>
+            </a:solidFill>
+            <a:prstDash val="solid"/>
+          </a:ln>
+        </p:spPr>
+      </p:sp>
+      <p:sp>
+        <p:nvSpPr>
+          <p:cNvPr id="36" name="Text 34"/>
+          <p:cNvSpPr/>
+          <p:nvPr/>
+        </p:nvSpPr>
+        <p:spPr>
+          <a:xfrm>
+            <a:off x="7388352" y="2980944"/>
+            <a:ext cx="329184" cy="329184"/>
+          </a:xfrm>
+          <a:prstGeom prst="rect">
+            <a:avLst/>
+          </a:prstGeom>
+          <a:noFill/>
+          <a:ln/>
+        </p:spPr>
+        <p:txBody>
+          <a:bodyPr wrap="square" lIns="0" tIns="0" rIns="0" bIns="0" rtlCol="0" anchor="ctr"/>
+          <a:lstStyle/>
+          <a:p>
+            <a:pPr algn="ctr" indent="0" marL="0">
+              <a:buNone/>
+            </a:pPr>
+            <a:r>
+              <a:rPr lang="en-US" sz="1000" b="1" dirty="0">
+                <a:solidFill>
+                  <a:srgbClr val="6B1F32"/>
+                </a:solidFill>
+                <a:latin typeface="Cambria" pitchFamily="34" charset="0"/>
+                <a:ea typeface="Cambria" pitchFamily="34" charset="-122"/>
+                <a:cs typeface="Cambria" pitchFamily="34" charset="-120"/>
+              </a:rPr>
+              <a:t>2</a:t>
+            </a:r>
+            <a:endParaRPr lang="en-US" sz="1000" dirty="0"/>
+          </a:p>
+        </p:txBody>
+      </p:sp>
+      <p:sp>
+        <p:nvSpPr>
+          <p:cNvPr id="37" name="Text 35"/>
+          <p:cNvSpPr/>
+          <p:nvPr/>
+        </p:nvSpPr>
+        <p:spPr>
+          <a:xfrm>
+            <a:off x="7827264" y="2962656"/>
+            <a:ext cx="3523183" cy="237744"/>
+          </a:xfrm>
+          <a:prstGeom prst="rect">
+            <a:avLst/>
+          </a:prstGeom>
+          <a:noFill/>
+          <a:ln/>
+        </p:spPr>
+        <p:txBody>
+          <a:bodyPr wrap="square" lIns="0" tIns="0" rIns="0" bIns="0" rtlCol="0" anchor="ctr"/>
+          <a:lstStyle/>
+          <a:p>
+            <a:pPr indent="0" marL="0">
+              <a:buNone/>
+            </a:pPr>
+            <a:r>
+              <a:rPr lang="en-US" sz="1150" b="1" dirty="0">
+                <a:solidFill>
+                  <a:srgbClr val="6B1F32"/>
+                </a:solidFill>
+                <a:latin typeface="Yu Gothic" pitchFamily="34" charset="0"/>
+                <a:ea typeface="Yu Gothic" pitchFamily="34" charset="-122"/>
+                <a:cs typeface="Yu Gothic" pitchFamily="34" charset="-120"/>
+              </a:rPr>
+              <a:t>ティエリー・マルクス × TBS</a:t>
+            </a:r>
+            <a:endParaRPr lang="en-US" sz="1150" dirty="0"/>
+          </a:p>
+        </p:txBody>
+      </p:sp>
+      <p:sp>
+        <p:nvSpPr>
+          <p:cNvPr id="38" name="Text 36"/>
+          <p:cNvSpPr/>
+          <p:nvPr/>
+        </p:nvSpPr>
+        <p:spPr>
+          <a:xfrm>
+            <a:off x="7827264" y="3200400"/>
+            <a:ext cx="3523183" cy="310896"/>
+          </a:xfrm>
+          <a:prstGeom prst="rect">
+            <a:avLst/>
+          </a:prstGeom>
+          <a:noFill/>
+          <a:ln/>
+        </p:spPr>
+        <p:txBody>
+          <a:bodyPr wrap="square" lIns="0" tIns="0" rIns="0" bIns="0" rtlCol="0" anchor="ctr"/>
+          <a:lstStyle/>
+          <a:p>
+            <a:pPr indent="0" marL="0">
+              <a:lnSpc>
+                <a:spcPts val="1250"/>
+              </a:lnSpc>
+              <a:buNone/>
+            </a:pPr>
+            <a:r>
+              <a:rPr lang="en-US" sz="920" dirty="0">
+                <a:solidFill>
+                  <a:srgbClr val="6E666A"/>
+                </a:solidFill>
+                <a:latin typeface="Yu Gothic" pitchFamily="34" charset="0"/>
+                <a:ea typeface="Yu Gothic" pitchFamily="34" charset="-122"/>
+                <a:cs typeface="Yu Gothic" pitchFamily="34" charset="-120"/>
+              </a:rPr>
+              <a:t>有名仏シェフとのレストラン事業。ライセンスとPRの両輪</a:t>
+            </a:r>
+            <a:endParaRPr lang="en-US" sz="920" dirty="0"/>
+          </a:p>
+        </p:txBody>
+      </p:sp>
+      <p:sp>
+        <p:nvSpPr>
+          <p:cNvPr id="39" name="Shape 37"/>
+          <p:cNvSpPr/>
+          <p:nvPr/>
+        </p:nvSpPr>
+        <p:spPr>
+          <a:xfrm>
+            <a:off x="7388352" y="3602736"/>
+            <a:ext cx="329184" cy="329184"/>
+          </a:xfrm>
+          <a:prstGeom prst="ellipse">
+            <a:avLst/>
+          </a:prstGeom>
+          <a:solidFill>
+            <a:srgbClr val="FFFFFF"/>
+          </a:solidFill>
+          <a:ln w="15875">
+            <a:solidFill>
+              <a:srgbClr val="C2A15A"/>
+            </a:solidFill>
+            <a:prstDash val="solid"/>
+          </a:ln>
+        </p:spPr>
+      </p:sp>
+      <p:sp>
+        <p:nvSpPr>
+          <p:cNvPr id="40" name="Text 38"/>
+          <p:cNvSpPr/>
+          <p:nvPr/>
+        </p:nvSpPr>
+        <p:spPr>
+          <a:xfrm>
+            <a:off x="7388352" y="3602736"/>
+            <a:ext cx="329184" cy="329184"/>
+          </a:xfrm>
+          <a:prstGeom prst="rect">
+            <a:avLst/>
+          </a:prstGeom>
+          <a:noFill/>
+          <a:ln/>
+        </p:spPr>
+        <p:txBody>
+          <a:bodyPr wrap="square" lIns="0" tIns="0" rIns="0" bIns="0" rtlCol="0" anchor="ctr"/>
+          <a:lstStyle/>
+          <a:p>
+            <a:pPr algn="ctr" indent="0" marL="0">
+              <a:buNone/>
+            </a:pPr>
+            <a:r>
+              <a:rPr lang="en-US" sz="1000" b="1" dirty="0">
+                <a:solidFill>
+                  <a:srgbClr val="6B1F32"/>
+                </a:solidFill>
+                <a:latin typeface="Cambria" pitchFamily="34" charset="0"/>
+                <a:ea typeface="Cambria" pitchFamily="34" charset="-122"/>
+                <a:cs typeface="Cambria" pitchFamily="34" charset="-120"/>
+              </a:rPr>
+              <a:t>3</a:t>
+            </a:r>
+            <a:endParaRPr lang="en-US" sz="1000" dirty="0"/>
+          </a:p>
+        </p:txBody>
+      </p:sp>
+      <p:sp>
+        <p:nvSpPr>
+          <p:cNvPr id="41" name="Text 39"/>
+          <p:cNvSpPr/>
+          <p:nvPr/>
+        </p:nvSpPr>
+        <p:spPr>
+          <a:xfrm>
+            <a:off x="7827264" y="3584448"/>
+            <a:ext cx="3523183" cy="237744"/>
+          </a:xfrm>
+          <a:prstGeom prst="rect">
+            <a:avLst/>
+          </a:prstGeom>
+          <a:noFill/>
+          <a:ln/>
+        </p:spPr>
+        <p:txBody>
+          <a:bodyPr wrap="square" lIns="0" tIns="0" rIns="0" bIns="0" rtlCol="0" anchor="ctr"/>
+          <a:lstStyle/>
+          <a:p>
+            <a:pPr indent="0" marL="0">
+              <a:buNone/>
+            </a:pPr>
+            <a:r>
+              <a:rPr lang="en-US" sz="1150" b="1" dirty="0">
+                <a:solidFill>
+                  <a:srgbClr val="6B1F32"/>
+                </a:solidFill>
+                <a:latin typeface="Yu Gothic" pitchFamily="34" charset="0"/>
+                <a:ea typeface="Yu Gothic" pitchFamily="34" charset="-122"/>
+                <a:cs typeface="Yu Gothic" pitchFamily="34" charset="-120"/>
+              </a:rPr>
+              <a:t>WineBank CLUB ＋ 他社提携</a:t>
+            </a:r>
+            <a:endParaRPr lang="en-US" sz="1150" dirty="0"/>
+          </a:p>
+        </p:txBody>
+      </p:sp>
+      <p:sp>
+        <p:nvSpPr>
+          <p:cNvPr id="42" name="Text 40"/>
+          <p:cNvSpPr/>
+          <p:nvPr/>
+        </p:nvSpPr>
+        <p:spPr>
+          <a:xfrm>
+            <a:off x="7827264" y="3822192"/>
+            <a:ext cx="3523183" cy="310896"/>
+          </a:xfrm>
+          <a:prstGeom prst="rect">
+            <a:avLst/>
+          </a:prstGeom>
+          <a:noFill/>
+          <a:ln/>
+        </p:spPr>
+        <p:txBody>
+          <a:bodyPr wrap="square" lIns="0" tIns="0" rIns="0" bIns="0" rtlCol="0" anchor="ctr"/>
+          <a:lstStyle/>
+          <a:p>
+            <a:pPr indent="0" marL="0">
+              <a:lnSpc>
+                <a:spcPts val="1250"/>
+              </a:lnSpc>
+              <a:buNone/>
+            </a:pPr>
+            <a:r>
+              <a:rPr lang="en-US" sz="920" dirty="0">
+                <a:solidFill>
+                  <a:srgbClr val="6E666A"/>
+                </a:solidFill>
+                <a:latin typeface="Yu Gothic" pitchFamily="34" charset="0"/>
+                <a:ea typeface="Yu Gothic" pitchFamily="34" charset="-122"/>
+                <a:cs typeface="Yu Gothic" pitchFamily="34" charset="-120"/>
+              </a:rPr>
+              <a:t>レストランサブスク。レコール・デュ・ヴァン等と業務提携</a:t>
+            </a:r>
+            <a:endParaRPr lang="en-US" sz="920" dirty="0"/>
+          </a:p>
+        </p:txBody>
+      </p:sp>
+      <p:sp>
+        <p:nvSpPr>
+          <p:cNvPr id="43" name="Shape 41"/>
+          <p:cNvSpPr/>
+          <p:nvPr/>
+        </p:nvSpPr>
+        <p:spPr>
+          <a:xfrm>
+            <a:off x="7114032" y="4352544"/>
+            <a:ext cx="4510735" cy="1316736"/>
+          </a:xfrm>
+          <a:prstGeom prst="roundRect">
+            <a:avLst>
+              <a:gd name="adj" fmla="val 6250"/>
+            </a:avLst>
+          </a:prstGeom>
+          <a:solidFill>
+            <a:srgbClr val="45121F"/>
+          </a:solidFill>
+          <a:ln w="12700">
+            <a:solidFill>
+              <a:srgbClr val="45121F"/>
+            </a:solidFill>
+            <a:prstDash val="solid"/>
+          </a:ln>
+        </p:spPr>
+      </p:sp>
+      <p:sp>
+        <p:nvSpPr>
+          <p:cNvPr id="44" name="Text 42"/>
+          <p:cNvSpPr/>
+          <p:nvPr/>
+        </p:nvSpPr>
+        <p:spPr>
+          <a:xfrm>
+            <a:off x="7388352" y="4498848"/>
+            <a:ext cx="3962095" cy="256032"/>
+          </a:xfrm>
+          <a:prstGeom prst="rect">
+            <a:avLst/>
+          </a:prstGeom>
+          <a:noFill/>
+          <a:ln/>
+        </p:spPr>
+        <p:txBody>
+          <a:bodyPr wrap="square" lIns="0" tIns="0" rIns="0" bIns="0" rtlCol="0" anchor="ctr"/>
+          <a:lstStyle/>
+          <a:p>
+            <a:pPr indent="0" marL="0">
+              <a:buNone/>
+            </a:pPr>
+            <a:r>
+              <a:rPr lang="en-US" sz="1300" b="1" dirty="0">
+                <a:solidFill>
+                  <a:srgbClr val="C2A15A"/>
+                </a:solidFill>
+                <a:latin typeface="Yu Gothic" pitchFamily="34" charset="0"/>
+                <a:ea typeface="Yu Gothic" pitchFamily="34" charset="-122"/>
+                <a:cs typeface="Yu Gothic" pitchFamily="34" charset="-120"/>
+              </a:rPr>
+              <a:t>中長期の絵姿（2029年9月期）</a:t>
+            </a:r>
+            <a:endParaRPr lang="en-US" sz="1300" dirty="0"/>
+          </a:p>
+        </p:txBody>
+      </p:sp>
+      <p:sp>
+        <p:nvSpPr>
+          <p:cNvPr id="45" name="Text 43"/>
+          <p:cNvSpPr/>
+          <p:nvPr/>
+        </p:nvSpPr>
+        <p:spPr>
+          <a:xfrm>
+            <a:off x="7388352" y="4828032"/>
+            <a:ext cx="1229258" cy="310896"/>
+          </a:xfrm>
+          <a:prstGeom prst="rect">
+            <a:avLst/>
+          </a:prstGeom>
+          <a:noFill/>
+          <a:ln/>
+        </p:spPr>
+        <p:txBody>
+          <a:bodyPr wrap="square" lIns="0" tIns="0" rIns="0" bIns="0" rtlCol="0" anchor="ctr"/>
+          <a:lstStyle/>
+          <a:p>
+            <a:pPr indent="0" marL="0">
+              <a:buNone/>
+            </a:pPr>
+            <a:r>
+              <a:rPr lang="en-US" sz="1400" b="1" dirty="0">
+                <a:solidFill>
+                  <a:srgbClr val="FFFFFF"/>
+                </a:solidFill>
+                <a:latin typeface="Yu Gothic" pitchFamily="34" charset="0"/>
+                <a:ea typeface="Yu Gothic" pitchFamily="34" charset="-122"/>
+                <a:cs typeface="Yu Gothic" pitchFamily="34" charset="-120"/>
+              </a:rPr>
+              <a:t>在庫 55億円</a:t>
+            </a:r>
+            <a:endParaRPr lang="en-US" sz="1400" dirty="0"/>
+          </a:p>
+        </p:txBody>
+      </p:sp>
+      <p:sp>
+        <p:nvSpPr>
+          <p:cNvPr id="46" name="Text 44"/>
+          <p:cNvSpPr/>
+          <p:nvPr/>
+        </p:nvSpPr>
+        <p:spPr>
+          <a:xfrm>
+            <a:off x="7388352" y="5138928"/>
+            <a:ext cx="1229258" cy="256032"/>
+          </a:xfrm>
+          <a:prstGeom prst="rect">
+            <a:avLst/>
+          </a:prstGeom>
+          <a:noFill/>
+          <a:ln/>
+        </p:spPr>
+        <p:txBody>
+          <a:bodyPr wrap="square" lIns="0" tIns="0" rIns="0" bIns="0" rtlCol="0" anchor="ctr"/>
+          <a:lstStyle/>
+          <a:p>
+            <a:pPr indent="0" marL="0">
+              <a:buNone/>
+            </a:pPr>
+            <a:r>
+              <a:rPr lang="en-US" sz="860" dirty="0">
+                <a:solidFill>
+                  <a:srgbClr val="CBBAC1"/>
+                </a:solidFill>
+                <a:latin typeface="Yu Gothic" pitchFamily="34" charset="0"/>
+                <a:ea typeface="Yu Gothic" pitchFamily="34" charset="-122"/>
+                <a:cs typeface="Yu Gothic" pitchFamily="34" charset="-120"/>
+              </a:rPr>
+              <a:t>管理ワイン在庫</a:t>
+            </a:r>
+            <a:endParaRPr lang="en-US" sz="860" dirty="0"/>
+          </a:p>
+        </p:txBody>
+      </p:sp>
+      <p:sp>
+        <p:nvSpPr>
+          <p:cNvPr id="47" name="Text 45"/>
+          <p:cNvSpPr/>
+          <p:nvPr/>
+        </p:nvSpPr>
+        <p:spPr>
+          <a:xfrm>
+            <a:off x="8709050" y="4828032"/>
+            <a:ext cx="1229258" cy="310896"/>
+          </a:xfrm>
+          <a:prstGeom prst="rect">
+            <a:avLst/>
+          </a:prstGeom>
+          <a:noFill/>
+          <a:ln/>
+        </p:spPr>
+        <p:txBody>
+          <a:bodyPr wrap="square" lIns="0" tIns="0" rIns="0" bIns="0" rtlCol="0" anchor="ctr"/>
+          <a:lstStyle/>
+          <a:p>
+            <a:pPr indent="0" marL="0">
+              <a:buNone/>
+            </a:pPr>
+            <a:r>
+              <a:rPr lang="en-US" sz="1400" b="1" dirty="0">
+                <a:solidFill>
+                  <a:srgbClr val="FFFFFF"/>
+                </a:solidFill>
+                <a:latin typeface="Yu Gothic" pitchFamily="34" charset="0"/>
+                <a:ea typeface="Yu Gothic" pitchFamily="34" charset="-122"/>
+                <a:cs typeface="Yu Gothic" pitchFamily="34" charset="-120"/>
+              </a:rPr>
+              <a:t>売上 25億円</a:t>
+            </a:r>
+            <a:endParaRPr lang="en-US" sz="1400" dirty="0"/>
+          </a:p>
+        </p:txBody>
+      </p:sp>
+      <p:sp>
+        <p:nvSpPr>
+          <p:cNvPr id="48" name="Text 46"/>
+          <p:cNvSpPr/>
+          <p:nvPr/>
+        </p:nvSpPr>
+        <p:spPr>
+          <a:xfrm>
+            <a:off x="8709050" y="5138928"/>
+            <a:ext cx="1229258" cy="256032"/>
+          </a:xfrm>
+          <a:prstGeom prst="rect">
+            <a:avLst/>
+          </a:prstGeom>
+          <a:noFill/>
+          <a:ln/>
+        </p:spPr>
+        <p:txBody>
+          <a:bodyPr wrap="square" lIns="0" tIns="0" rIns="0" bIns="0" rtlCol="0" anchor="ctr"/>
+          <a:lstStyle/>
+          <a:p>
+            <a:pPr indent="0" marL="0">
+              <a:buNone/>
+            </a:pPr>
+            <a:r>
+              <a:rPr lang="en-US" sz="860" dirty="0">
+                <a:solidFill>
+                  <a:srgbClr val="CBBAC1"/>
+                </a:solidFill>
+                <a:latin typeface="Yu Gothic" pitchFamily="34" charset="0"/>
+                <a:ea typeface="Yu Gothic" pitchFamily="34" charset="-122"/>
+                <a:cs typeface="Yu Gothic" pitchFamily="34" charset="-120"/>
+              </a:rPr>
+              <a:t>ワイン関連事業</a:t>
+            </a:r>
+            <a:endParaRPr lang="en-US" sz="860" dirty="0"/>
+          </a:p>
+        </p:txBody>
+      </p:sp>
+      <p:sp>
+        <p:nvSpPr>
+          <p:cNvPr id="49" name="Text 47"/>
+          <p:cNvSpPr/>
+          <p:nvPr/>
+        </p:nvSpPr>
+        <p:spPr>
+          <a:xfrm>
+            <a:off x="10029749" y="4828032"/>
+            <a:ext cx="1229258" cy="310896"/>
+          </a:xfrm>
+          <a:prstGeom prst="rect">
+            <a:avLst/>
+          </a:prstGeom>
+          <a:noFill/>
+          <a:ln/>
+        </p:spPr>
+        <p:txBody>
+          <a:bodyPr wrap="square" lIns="0" tIns="0" rIns="0" bIns="0" rtlCol="0" anchor="ctr"/>
+          <a:lstStyle/>
+          <a:p>
+            <a:pPr indent="0" marL="0">
+              <a:buNone/>
+            </a:pPr>
+            <a:r>
+              <a:rPr lang="en-US" sz="1400" b="1" dirty="0">
+                <a:solidFill>
+                  <a:srgbClr val="FFFFFF"/>
+                </a:solidFill>
+                <a:latin typeface="Yu Gothic" pitchFamily="34" charset="0"/>
+                <a:ea typeface="Yu Gothic" pitchFamily="34" charset="-122"/>
+                <a:cs typeface="Yu Gothic" pitchFamily="34" charset="-120"/>
+              </a:rPr>
+              <a:t>IPO</a:t>
+            </a:r>
+            <a:endParaRPr lang="en-US" sz="1400" dirty="0"/>
+          </a:p>
+        </p:txBody>
+      </p:sp>
+      <p:sp>
+        <p:nvSpPr>
+          <p:cNvPr id="50" name="Text 48"/>
+          <p:cNvSpPr/>
+          <p:nvPr/>
+        </p:nvSpPr>
+        <p:spPr>
+          <a:xfrm>
+            <a:off x="10029749" y="5138928"/>
+            <a:ext cx="1229258" cy="256032"/>
+          </a:xfrm>
+          <a:prstGeom prst="rect">
+            <a:avLst/>
+          </a:prstGeom>
+          <a:noFill/>
+          <a:ln/>
+        </p:spPr>
+        <p:txBody>
+          <a:bodyPr wrap="square" lIns="0" tIns="0" rIns="0" bIns="0" rtlCol="0" anchor="ctr"/>
+          <a:lstStyle/>
+          <a:p>
+            <a:pPr indent="0" marL="0">
+              <a:buNone/>
+            </a:pPr>
+            <a:r>
+              <a:rPr lang="en-US" sz="860" dirty="0">
+                <a:solidFill>
+                  <a:srgbClr val="CBBAC1"/>
+                </a:solidFill>
+                <a:latin typeface="Yu Gothic" pitchFamily="34" charset="0"/>
+                <a:ea typeface="Yu Gothic" pitchFamily="34" charset="-122"/>
+                <a:cs typeface="Yu Gothic" pitchFamily="34" charset="-120"/>
+              </a:rPr>
+              <a:t>を見据えた成長</a:t>
+            </a:r>
+            <a:endParaRPr lang="en-US" sz="860" dirty="0"/>
+          </a:p>
+        </p:txBody>
+      </p:sp>
+      <p:sp>
+        <p:nvSpPr>
+          <p:cNvPr id="51" name="Text 49"/>
+          <p:cNvSpPr/>
+          <p:nvPr/>
+        </p:nvSpPr>
+        <p:spPr>
+          <a:xfrm>
+            <a:off x="566928" y="5669280"/>
+            <a:ext cx="10972800" cy="237744"/>
+          </a:xfrm>
+          <a:prstGeom prst="rect">
+            <a:avLst/>
+          </a:prstGeom>
+          <a:noFill/>
+          <a:ln/>
+        </p:spPr>
+        <p:txBody>
+          <a:bodyPr wrap="square" lIns="0" tIns="0" rIns="0" bIns="0" rtlCol="0" anchor="ctr"/>
+          <a:lstStyle/>
+          <a:p>
+            <a:pPr indent="0" marL="0">
+              <a:buNone/>
+            </a:pPr>
+            <a:r>
+              <a:rPr lang="en-US" sz="900" dirty="0">
+                <a:solidFill>
+                  <a:srgbClr val="6E666A"/>
+                </a:solidFill>
+                <a:latin typeface="Yu Gothic" pitchFamily="34" charset="0"/>
+                <a:ea typeface="Yu Gothic" pitchFamily="34" charset="-122"/>
+                <a:cs typeface="Yu Gothic" pitchFamily="34" charset="-120"/>
+              </a:rPr>
+              <a:t>主要株主：マネーフォワードベンチャーパートナーズ株式会社／株式会社ベクトル／寺田倉庫株式会社／株式会社PrivateBANK</a:t>
+            </a:r>
+            <a:endParaRPr lang="en-US" sz="900" dirty="0"/>
+          </a:p>
+        </p:txBody>
+      </p:sp>
+      <p:sp>
+        <p:nvSpPr>
+          <p:cNvPr id="52" name="Text 50"/>
+          <p:cNvSpPr/>
+          <p:nvPr/>
+        </p:nvSpPr>
+        <p:spPr>
+          <a:xfrm>
+            <a:off x="566928" y="5943600"/>
+            <a:ext cx="10972800" cy="237744"/>
+          </a:xfrm>
+          <a:prstGeom prst="rect">
+            <a:avLst/>
+          </a:prstGeom>
+          <a:noFill/>
+          <a:ln/>
+        </p:spPr>
+        <p:txBody>
+          <a:bodyPr wrap="square" lIns="0" tIns="0" rIns="0" bIns="0" rtlCol="0" anchor="ctr"/>
+          <a:lstStyle/>
+          <a:p>
+            <a:pPr indent="0" marL="0">
+              <a:buNone/>
+            </a:pPr>
+            <a:r>
+              <a:rPr lang="en-US" sz="860" dirty="0">
+                <a:solidFill>
+                  <a:srgbClr val="9A9498"/>
+                </a:solidFill>
+                <a:latin typeface="Yu Gothic" pitchFamily="34" charset="0"/>
+                <a:ea typeface="Yu Gothic" pitchFamily="34" charset="-122"/>
+                <a:cs typeface="Yu Gothic" pitchFamily="34" charset="-120"/>
+              </a:rPr>
+              <a:t>※ 中長期計画は当社事業計画に基づく想定であり、確定的な見通しではありません。上表のワイン関連事業売上とは別途、レストラン事業売上を見込んでいます。</a:t>
+            </a:r>
+            <a:endParaRPr lang="en-US" sz="860" dirty="0"/>
+          </a:p>
+        </p:txBody>
+      </p:sp>
+    </p:spTree>
+  </p:cSld>
+  <p:clrMapOvr>
+    <a:masterClrMapping/>
+  </p:clrMapOvr>
+</p:sld>
+</file>
+
 <file path=ppt/slides/slide3.xml><?xml version="1.0" encoding="utf-8"?>
 <p:sld xmlns:a="http://schemas.openxmlformats.org/drawingml/2006/main" xmlns:r="http://schemas.openxmlformats.org/officeDocument/2006/relationships" xmlns:p="http://schemas.openxmlformats.org/presentationml/2006/main">
   <p:cSld name="Slide 3">

--- a/docs/proposals/森ビル様_業務提携ご提案_WineBank_20260810.pptx
+++ b/docs/proposals/森ビル様_業務提携ご提案_WineBank_20260810.pptx
@@ -38,9 +38,10 @@
     <p:sldId id="286" r:id="rId32"/>
     <p:sldId id="287" r:id="rId33"/>
     <p:sldId id="288" r:id="rId34"/>
+    <p:sldId id="289" r:id="rId35"/>
   </p:sldIdLst>
   <p:notesMasterIdLst>
-    <p:notesMasterId r:id="rId35"/>
+    <p:notesMasterId r:id="rId36"/>
   </p:notesMasterIdLst>
   <p:sldSz cx="12191695" cy="6858000"/>
   <p:notesSz cx="6858000" cy="12191695"/>
@@ -3519,6 +3520,94 @@
             <a:fld id="{F7021451-1387-4CA6-816F-3879F97B5CBC}" type="slidenum">
               <a:rPr lang="en-US"/>
               <a:t>33</a:t>
+            </a:fld>
+            <a:endParaRPr lang="en-US"/>
+          </a:p>
+        </p:txBody>
+      </p:sp>
+    </p:spTree>
+    <p:extLst>
+      <p:ext uri="{BB962C8B-B14F-4D97-AF65-F5344CB8AC3E}">
+        <p14:creationId xmlns:p14="http://schemas.microsoft.com/office/powerpoint/2010/main" val="1024086991"/>
+      </p:ext>
+    </p:extLst>
+  </p:cSld>
+  <p:clrMapOvr>
+    <a:masterClrMapping/>
+  </p:clrMapOvr>
+</p:notes>
+</file>
+
+<file path=ppt/notesSlides/notesSlide34.xml><?xml version="1.0" encoding="utf-8"?>
+<p:notes xmlns:a="http://schemas.openxmlformats.org/drawingml/2006/main" xmlns:r="http://schemas.openxmlformats.org/officeDocument/2006/relationships" xmlns:p="http://schemas.openxmlformats.org/presentationml/2006/main">
+  <p:cSld>
+    <p:spTree>
+      <p:nvGrpSpPr>
+        <p:cNvPr id="1" name=""/>
+        <p:cNvGrpSpPr/>
+        <p:nvPr/>
+      </p:nvGrpSpPr>
+      <p:grpSpPr>
+        <a:xfrm>
+          <a:off x="0" y="0"/>
+          <a:ext cx="0" cy="0"/>
+          <a:chOff x="0" y="0"/>
+          <a:chExt cx="0" cy="0"/>
+        </a:xfrm>
+      </p:grpSpPr>
+      <p:sp>
+        <p:nvSpPr>
+          <p:cNvPr id="2" name="Slide Image Placeholder 1"/>
+          <p:cNvSpPr>
+            <a:spLocks noGrp="1" noRot="1" noChangeAspect="1"/>
+          </p:cNvSpPr>
+          <p:nvPr>
+            <p:ph type="sldImg"/>
+          </p:nvPr>
+        </p:nvSpPr>
+        <p:spPr/>
+      </p:sp>
+      <p:sp>
+        <p:nvSpPr>
+          <p:cNvPr id="3" name="Notes Placeholder 2"/>
+          <p:cNvSpPr>
+            <a:spLocks noGrp="1"/>
+          </p:cNvSpPr>
+          <p:nvPr>
+            <p:ph type="body" idx="1"/>
+          </p:nvPr>
+        </p:nvSpPr>
+        <p:spPr/>
+        <p:txBody>
+          <a:bodyPr/>
+          <a:lstStyle/>
+          <a:p>
+            <a:r>
+              <a:rPr lang="en-US" dirty="0"/>
+              <a:t/>
+            </a:r>
+            <a:endParaRPr lang="en-US" dirty="0"/>
+          </a:p>
+        </p:txBody>
+      </p:sp>
+      <p:sp>
+        <p:nvSpPr>
+          <p:cNvPr id="4" name="Slide Number Placeholder 3"/>
+          <p:cNvSpPr>
+            <a:spLocks noGrp="1"/>
+          </p:cNvSpPr>
+          <p:nvPr>
+            <p:ph type="sldNum" sz="quarter" idx="10"/>
+          </p:nvPr>
+        </p:nvSpPr>
+        <p:spPr/>
+        <p:txBody>
+          <a:bodyPr/>
+          <a:lstStyle/>
+          <a:p>
+            <a:fld id="{F7021451-1387-4CA6-816F-3879F97B5CBC}" type="slidenum">
+              <a:rPr lang="en-US"/>
+              <a:t>34</a:t>
             </a:fld>
             <a:endParaRPr lang="en-US"/>
           </a:p>
@@ -4891,7 +4980,7 @@
                 <a:ea typeface="Yu Gothic" pitchFamily="34" charset="-122"/>
                 <a:cs typeface="Yu Gothic" pitchFamily="34" charset="-120"/>
               </a:rPr>
-              <a:t>26店舗</a:t>
+              <a:t>約半額</a:t>
             </a:r>
             <a:endParaRPr lang="en-US" sz="2600" dirty="0"/>
           </a:p>
@@ -4930,7 +5019,7 @@
                 <a:ea typeface="Yu Gothic" pitchFamily="34" charset="-122"/>
                 <a:cs typeface="Yu Gothic" pitchFamily="34" charset="-120"/>
               </a:rPr>
-              <a:t>コルケージ無料の提携店</a:t>
+              <a:t>レストランでのワイン価格</a:t>
             </a:r>
             <a:endParaRPr lang="en-US" sz="950" dirty="0"/>
           </a:p>
@@ -5236,7 +5325,7 @@
                 <a:ea typeface="Yu Gothic" pitchFamily="34" charset="-122"/>
                 <a:cs typeface="Yu Gothic" pitchFamily="34" charset="-120"/>
               </a:rPr>
-              <a:t>まず現行のWineBank CLUBです。月額会費制で、ワインの購入とグループ飲食店のご利用がお得になる会員サービスです。</a:t>
+              <a:t>2025年7月に開始した月額会員制サービスです（旧：Fine Wine Collection）。レストランでワインを飲食店仕入れ原価相当で楽しめる点が中核です。</a:t>
             </a:r>
             <a:endParaRPr lang="en-US" sz="1150" dirty="0"/>
           </a:p>
@@ -5508,7 +5597,7 @@
                 <a:ea typeface="Yu Gothic" pitchFamily="34" charset="-122"/>
                 <a:cs typeface="Yu Gothic" pitchFamily="34" charset="-120"/>
               </a:rPr>
-              <a:t>グループ飲食店 20%OFF</a:t>
+              <a:t>レストランでワインが約半額</a:t>
             </a:r>
             <a:endParaRPr lang="en-US" sz="1200" dirty="0"/>
           </a:p>
@@ -5550,7 +5639,7 @@
                 <a:ea typeface="Yu Gothic" pitchFamily="34" charset="-122"/>
                 <a:cs typeface="Yu Gothic" pitchFamily="34" charset="-120"/>
               </a:rPr>
-              <a:t>将来的に100店舗以上へ拡大予定。</a:t>
+              <a:t>飲食店の仕入れ原価相当でご提供。一般の飲食店は卸原価の2〜3倍が通例です。</a:t>
             </a:r>
             <a:endParaRPr lang="en-US" sz="940" dirty="0"/>
           </a:p>
@@ -5695,7 +5784,7 @@
                 <a:ea typeface="Yu Gothic" pitchFamily="34" charset="-122"/>
                 <a:cs typeface="Yu Gothic" pitchFamily="34" charset="-120"/>
               </a:rPr>
-              <a:t>提携26店舗へのBYOで抜栓料・持込料ゼロ。WineGOで購入した場合は最短5分で「手ぶらBYO」。</a:t>
+              <a:t>提携店へのBYOで抜栓料・持込料ゼロ。WineGOで購入した場合は最短5分で「手ぶらBYO」。</a:t>
             </a:r>
             <a:endParaRPr lang="en-US" sz="940" dirty="0"/>
           </a:p>
@@ -5798,7 +5887,7 @@
                 <a:ea typeface="Yu Gothic" pitchFamily="34" charset="-122"/>
                 <a:cs typeface="Yu Gothic" pitchFamily="34" charset="-120"/>
               </a:rPr>
-              <a:t>ワイン配送 月3回無料</a:t>
+              <a:t>同伴者も同じ特典</a:t>
             </a:r>
             <a:endParaRPr lang="en-US" sz="1200" dirty="0"/>
           </a:p>
@@ -5840,7 +5929,7 @@
                 <a:ea typeface="Yu Gothic" pitchFamily="34" charset="-122"/>
                 <a:cs typeface="Yu Gothic" pitchFamily="34" charset="-120"/>
               </a:rPr>
-              <a:t>自宅・会食先・贈答先へ。都心はWineGOで当日デリバリー。</a:t>
+              <a:t>会員ご本人だけでなく、同席の方も同じ価格でお楽しみいただけます。</a:t>
             </a:r>
             <a:endParaRPr lang="en-US" sz="940" dirty="0"/>
           </a:p>
@@ -5943,7 +6032,7 @@
                 <a:ea typeface="Yu Gothic" pitchFamily="34" charset="-122"/>
                 <a:cs typeface="Yu Gothic" pitchFamily="34" charset="-120"/>
               </a:rPr>
-              <a:t>ネット最安値水準での購入</a:t>
+              <a:t>ワイン配送 月1〜2回無料</a:t>
             </a:r>
             <a:endParaRPr lang="en-US" sz="1200" dirty="0"/>
           </a:p>
@@ -5985,7 +6074,7 @@
                 <a:ea typeface="Yu Gothic" pitchFamily="34" charset="-122"/>
                 <a:cs typeface="Yu Gothic" pitchFamily="34" charset="-120"/>
               </a:rPr>
-              <a:t>インポーター直の仕入力による特別価格。会員ランクに応じて設定。</a:t>
+              <a:t>自宅・会食先・贈答先へ。都心はWineGOで当日デリバリー。</a:t>
             </a:r>
             <a:endParaRPr lang="en-US" sz="940" dirty="0"/>
           </a:p>
@@ -6088,7 +6177,7 @@
                 <a:ea typeface="Yu Gothic" pitchFamily="34" charset="-122"/>
                 <a:cs typeface="Yu Gothic" pitchFamily="34" charset="-120"/>
               </a:rPr>
-              <a:t>優先割当</a:t>
+              <a:t>ネット最安値水準でのワイン購入</a:t>
             </a:r>
             <a:endParaRPr lang="en-US" sz="1200" dirty="0"/>
           </a:p>
@@ -6130,7 +6219,7 @@
                 <a:ea typeface="Yu Gothic" pitchFamily="34" charset="-122"/>
                 <a:cs typeface="Yu Gothic" pitchFamily="34" charset="-120"/>
               </a:rPr>
-              <a:t>アロケーションワイン、希少ウイスキー等を会員に優先してご案内。</a:t>
+              <a:t>インポーター直の仕入力による特別価格。会員プランに応じて設定。</a:t>
             </a:r>
             <a:endParaRPr lang="en-US" sz="940" dirty="0"/>
           </a:p>
@@ -6242,7 +6331,7 @@
                 <a:ea typeface="Yu Gothic" pitchFamily="34" charset="-122"/>
                 <a:cs typeface="Yu Gothic" pitchFamily="34" charset="-120"/>
               </a:rPr>
-              <a:t>個人会員：年会費 30万円／年</a:t>
+              <a:t>個人会員：月会費 8,800円〜（プランにより特典が異なります）</a:t>
             </a:r>
             <a:endParaRPr lang="en-US" sz="1020" dirty="0"/>
           </a:p>
@@ -7188,7 +7277,7 @@
                           <a:ea typeface="Yu Gothic" pitchFamily="34" charset="-122"/>
                           <a:cs typeface="Yu Gothic" pitchFamily="34" charset="-120"/>
                         </a:rPr>
-                        <a:t>年会費</a:t>
+                        <a:t>会費</a:t>
                       </a:r>
                       <a:endParaRPr lang="en-US" sz="960" dirty="0">
                         <a:latin typeface="Yu Gothic" charset="0"/>
@@ -7253,7 +7342,7 @@
                           <a:ea typeface="Yu Gothic" pitchFamily="34" charset="-122"/>
                           <a:cs typeface="Yu Gothic" pitchFamily="34" charset="-120"/>
                         </a:rPr>
-                        <a:t>30万円／年</a:t>
+                        <a:t>月会費 8,800円〜</a:t>
                       </a:r>
                       <a:endParaRPr lang="en-US" sz="960" dirty="0">
                         <a:latin typeface="Yu Gothic" charset="0"/>
@@ -7385,7 +7474,7 @@
                           <a:ea typeface="Yu Gothic" pitchFamily="34" charset="-122"/>
                           <a:cs typeface="Yu Gothic" pitchFamily="34" charset="-120"/>
                         </a:rPr>
-                        <a:t>飲食特典</a:t>
+                        <a:t>レストラン</a:t>
                       </a:r>
                       <a:endParaRPr lang="en-US" sz="960" dirty="0">
                         <a:latin typeface="Yu Gothic" charset="0"/>
@@ -7450,7 +7539,7 @@
                           <a:ea typeface="Yu Gothic" pitchFamily="34" charset="-122"/>
                           <a:cs typeface="Yu Gothic" pitchFamily="34" charset="-120"/>
                         </a:rPr>
-                        <a:t>グループ飲食店 20%OFF</a:t>
+                        <a:t>ワインが仕入原価相当（約半額）</a:t>
                       </a:r>
                       <a:endParaRPr lang="en-US" sz="960" dirty="0">
                         <a:latin typeface="Yu Gothic" charset="0"/>
@@ -7515,7 +7604,7 @@
                           <a:ea typeface="Yu Gothic" pitchFamily="34" charset="-122"/>
                           <a:cs typeface="Yu Gothic" pitchFamily="34" charset="-120"/>
                         </a:rPr>
-                        <a:t>グループ店に加え、館内の対象店を追加</a:t>
+                        <a:t>館内の対象店を追加。同伴者も同特典</a:t>
                       </a:r>
                       <a:endParaRPr lang="en-US" sz="960" dirty="0">
                         <a:latin typeface="Yu Gothic" charset="0"/>
@@ -7647,7 +7736,7 @@
                           <a:ea typeface="Yu Gothic" pitchFamily="34" charset="-122"/>
                           <a:cs typeface="Yu Gothic" pitchFamily="34" charset="-120"/>
                         </a:rPr>
-                        <a:t>提携26店舗へのBYO無料</a:t>
+                        <a:t>提携店へのBYO無料</a:t>
                       </a:r>
                       <a:endParaRPr lang="en-US" sz="960" dirty="0">
                         <a:latin typeface="Yu Gothic" charset="0"/>
@@ -7844,7 +7933,7 @@
                           <a:ea typeface="Yu Gothic" pitchFamily="34" charset="-122"/>
                           <a:cs typeface="Yu Gothic" pitchFamily="34" charset="-120"/>
                         </a:rPr>
-                        <a:t>月3回無料</a:t>
+                        <a:t>月1〜2回無料</a:t>
                       </a:r>
                       <a:endParaRPr lang="en-US" sz="960" dirty="0">
                         <a:latin typeface="Yu Gothic" charset="0"/>
@@ -8996,7 +9085,7 @@
                 <a:ea typeface="Yu Gothic" pitchFamily="34" charset="-122"/>
                 <a:cs typeface="Yu Gothic" pitchFamily="34" charset="-120"/>
               </a:rPr>
-              <a:t>年会費・特典水準は、対象人数と館内対象店の範囲が決まった段階で確定させていただきます。会員特典の相当額の考え方は Appendix に記載しています。</a:t>
+              <a:t>会費・特典水準は、対象人数と館内対象店の範囲が決まった段階で確定させていただきます。特典の相当額の考え方は Appendix に記載しています。</a:t>
             </a:r>
             <a:endParaRPr lang="en-US" sz="960" dirty="0"/>
           </a:p>
@@ -13868,7 +13957,7 @@
                 <a:ea typeface="Yu Gothic" pitchFamily="34" charset="-122"/>
                 <a:cs typeface="Yu Gothic" pitchFamily="34" charset="-120"/>
               </a:rPr>
-              <a:t>コルケージ無料と卸値仕入。市価の2〜3倍を払う店内価格から解放されます。</a:t>
+              <a:t>コルケージ無料と仕入原価相当での提供。卸原価の2〜3倍を払う店内価格から解放されます。</a:t>
             </a:r>
             <a:endParaRPr lang="en-US" sz="980" dirty="0"/>
           </a:p>
@@ -31505,56 +31594,19 @@
       </p:pic>
       <p:sp>
         <p:nvSpPr>
-          <p:cNvPr id="3" name="Text 0"/>
-          <p:cNvSpPr/>
-          <p:nvPr/>
-        </p:nvSpPr>
-        <p:spPr>
-          <a:xfrm>
-            <a:off x="0" y="2798064"/>
-            <a:ext cx="12191695" cy="548640"/>
-          </a:xfrm>
-          <a:prstGeom prst="rect">
-            <a:avLst/>
-          </a:prstGeom>
-          <a:noFill/>
-          <a:ln/>
-        </p:spPr>
-        <p:txBody>
-          <a:bodyPr wrap="square" lIns="0" tIns="0" rIns="0" bIns="0" rtlCol="0" anchor="ctr"/>
-          <a:lstStyle/>
-          <a:p>
-            <a:pPr algn="ctr" indent="0" marL="0">
-              <a:buNone/>
-            </a:pPr>
-            <a:r>
-              <a:rPr lang="en-US" sz="3000" b="1" spc="240" kern="0" dirty="0">
-                <a:solidFill>
-                  <a:srgbClr val="1A1A1A"/>
-                </a:solidFill>
-                <a:latin typeface="Calibri" pitchFamily="34" charset="0"/>
-                <a:ea typeface="Calibri" pitchFamily="34" charset="-122"/>
-                <a:cs typeface="Calibri" pitchFamily="34" charset="-120"/>
-              </a:rPr>
-              <a:t>APPENDIX</a:t>
-            </a:r>
-            <a:endParaRPr lang="en-US" sz="3000" dirty="0"/>
-          </a:p>
-        </p:txBody>
-      </p:sp>
-      <p:sp>
-        <p:nvSpPr>
-          <p:cNvPr id="4" name="Shape 1"/>
-          <p:cNvSpPr/>
-          <p:nvPr/>
-        </p:nvSpPr>
-        <p:spPr>
-          <a:xfrm>
-            <a:off x="5730088" y="3438144"/>
-            <a:ext cx="731520" cy="32004"/>
-          </a:xfrm>
-          <a:prstGeom prst="rect">
-            <a:avLst/>
+          <p:cNvPr id="3" name="Shape 0"/>
+          <p:cNvSpPr/>
+          <p:nvPr/>
+        </p:nvSpPr>
+        <p:spPr>
+          <a:xfrm>
+            <a:off x="566928" y="292608"/>
+            <a:ext cx="1115568" cy="237744"/>
+          </a:xfrm>
+          <a:prstGeom prst="roundRect">
+            <a:avLst>
+              <a:gd name="adj" fmla="val 11538"/>
+            </a:avLst>
           </a:prstGeom>
           <a:solidFill>
             <a:srgbClr val="C68A65"/>
@@ -31569,30 +31621,111 @@
       </p:sp>
       <p:sp>
         <p:nvSpPr>
+          <p:cNvPr id="4" name="Text 1"/>
+          <p:cNvSpPr/>
+          <p:nvPr/>
+        </p:nvSpPr>
+        <p:spPr>
+          <a:xfrm>
+            <a:off x="566928" y="292608"/>
+            <a:ext cx="1115568" cy="237744"/>
+          </a:xfrm>
+          <a:prstGeom prst="rect">
+            <a:avLst/>
+          </a:prstGeom>
+          <a:noFill/>
+          <a:ln/>
+        </p:spPr>
+        <p:txBody>
+          <a:bodyPr wrap="square" lIns="0" tIns="0" rIns="0" bIns="0" rtlCol="0" anchor="ctr"/>
+          <a:lstStyle/>
+          <a:p>
+            <a:pPr algn="ctr" indent="0" marL="0">
+              <a:buNone/>
+            </a:pPr>
+            <a:r>
+              <a:rPr lang="en-US" sz="850" b="1" dirty="0">
+                <a:solidFill>
+                  <a:srgbClr val="FFFFFF"/>
+                </a:solidFill>
+                <a:latin typeface="Yu Gothic" pitchFamily="34" charset="0"/>
+                <a:ea typeface="Yu Gothic" pitchFamily="34" charset="-122"/>
+                <a:cs typeface="Yu Gothic" pitchFamily="34" charset="-120"/>
+              </a:rPr>
+              <a:t>THE FUTURE</a:t>
+            </a:r>
+            <a:endParaRPr lang="en-US" sz="850" dirty="0"/>
+          </a:p>
+        </p:txBody>
+      </p:sp>
+      <p:sp>
+        <p:nvSpPr>
           <p:cNvPr id="5" name="Text 2"/>
           <p:cNvSpPr/>
           <p:nvPr/>
         </p:nvSpPr>
         <p:spPr>
           <a:xfrm>
-            <a:off x="0" y="3602736"/>
-            <a:ext cx="12191695" cy="274320"/>
-          </a:xfrm>
-          <a:prstGeom prst="rect">
-            <a:avLst/>
-          </a:prstGeom>
-          <a:noFill/>
-          <a:ln/>
-        </p:spPr>
-        <p:txBody>
-          <a:bodyPr wrap="square" lIns="0" tIns="0" rIns="0" bIns="0" rtlCol="0" anchor="ctr"/>
-          <a:lstStyle/>
-          <a:p>
-            <a:pPr algn="ctr" indent="0" marL="0">
-              <a:buNone/>
-            </a:pPr>
-            <a:r>
-              <a:rPr lang="en-US" sz="1100" dirty="0">
+            <a:off x="566928" y="585216"/>
+            <a:ext cx="9509760" cy="420624"/>
+          </a:xfrm>
+          <a:prstGeom prst="rect">
+            <a:avLst/>
+          </a:prstGeom>
+          <a:noFill/>
+          <a:ln/>
+        </p:spPr>
+        <p:txBody>
+          <a:bodyPr wrap="square" lIns="0" tIns="0" rIns="0" bIns="0" rtlCol="0" anchor="ctr"/>
+          <a:lstStyle/>
+          <a:p>
+            <a:pPr indent="0" marL="0">
+              <a:buNone/>
+            </a:pPr>
+            <a:r>
+              <a:rPr lang="en-US" sz="2300" b="1" dirty="0">
+                <a:solidFill>
+                  <a:srgbClr val="1A1A1A"/>
+                </a:solidFill>
+                <a:latin typeface="Yu Gothic" pitchFamily="34" charset="0"/>
+                <a:ea typeface="Yu Gothic" pitchFamily="34" charset="-122"/>
+                <a:cs typeface="Yu Gothic" pitchFamily="34" charset="-120"/>
+              </a:rPr>
+              <a:t>2030年のヒルズ ─ ワインが巡る街</a:t>
+            </a:r>
+            <a:endParaRPr lang="en-US" sz="2300" dirty="0"/>
+          </a:p>
+        </p:txBody>
+      </p:sp>
+      <p:sp>
+        <p:nvSpPr>
+          <p:cNvPr id="6" name="Text 3"/>
+          <p:cNvSpPr/>
+          <p:nvPr/>
+        </p:nvSpPr>
+        <p:spPr>
+          <a:xfrm>
+            <a:off x="566928" y="1024128"/>
+            <a:ext cx="11057839" cy="310896"/>
+          </a:xfrm>
+          <a:prstGeom prst="rect">
+            <a:avLst/>
+          </a:prstGeom>
+          <a:noFill/>
+          <a:ln/>
+        </p:spPr>
+        <p:txBody>
+          <a:bodyPr wrap="square" lIns="0" tIns="0" rIns="0" bIns="0" rtlCol="0" anchor="ctr"/>
+          <a:lstStyle/>
+          <a:p>
+            <a:pPr indent="0" marL="0">
+              <a:lnSpc>
+                <a:spcPts val="1700"/>
+              </a:lnSpc>
+              <a:buNone/>
+            </a:pPr>
+            <a:r>
+              <a:rPr lang="en-US" sz="1150" dirty="0">
                 <a:solidFill>
                   <a:srgbClr val="6E7378"/>
                 </a:solidFill>
@@ -31600,15 +31733,15 @@
                 <a:ea typeface="Yu Gothic" pitchFamily="34" charset="-122"/>
                 <a:cs typeface="Yu Gothic" pitchFamily="34" charset="-120"/>
               </a:rPr>
-              <a:t>会社紹介（2026年6月）より抜粋</a:t>
-            </a:r>
-            <a:endParaRPr lang="en-US" sz="1100" dirty="0"/>
-          </a:p>
-        </p:txBody>
-      </p:sp>
-      <p:sp>
-        <p:nvSpPr>
-          <p:cNvPr id="6" name="Shape 3"/>
+              <a:t>いまは各店がそれぞれ在庫を抱え、居住者は街の外で買い、ワーカーは店内価格を払っています。それが、こうなります。</a:t>
+            </a:r>
+            <a:endParaRPr lang="en-US" sz="1150" dirty="0"/>
+          </a:p>
+        </p:txBody>
+      </p:sp>
+      <p:sp>
+        <p:nvSpPr>
+          <p:cNvPr id="7" name="Shape 4"/>
           <p:cNvSpPr/>
           <p:nvPr/>
         </p:nvSpPr>
@@ -31633,7 +31766,7 @@
       </p:sp>
       <p:sp>
         <p:nvSpPr>
-          <p:cNvPr id="7" name="Text 4"/>
+          <p:cNvPr id="8" name="Text 5"/>
           <p:cNvSpPr/>
           <p:nvPr/>
         </p:nvSpPr>
@@ -31672,7 +31805,7 @@
       </p:sp>
       <p:sp>
         <p:nvSpPr>
-          <p:cNvPr id="8" name="Text 5"/>
+          <p:cNvPr id="9" name="Text 6"/>
           <p:cNvSpPr/>
           <p:nvPr/>
         </p:nvSpPr>
@@ -31706,6 +31839,1021 @@
               <a:t>CONFIDENTIAL</a:t>
             </a:r>
             <a:endParaRPr lang="en-US" sz="850" dirty="0"/>
+          </a:p>
+        </p:txBody>
+      </p:sp>
+      <p:sp>
+        <p:nvSpPr>
+          <p:cNvPr id="10" name="Shape 7"/>
+          <p:cNvSpPr/>
+          <p:nvPr/>
+        </p:nvSpPr>
+        <p:spPr>
+          <a:xfrm>
+            <a:off x="3749040" y="2633472"/>
+            <a:ext cx="694944" cy="329184"/>
+          </a:xfrm>
+          <a:prstGeom prst="line">
+            <a:avLst/>
+          </a:prstGeom>
+          <a:noFill/>
+          <a:ln w="19050">
+            <a:solidFill>
+              <a:srgbClr val="C68A65"/>
+            </a:solidFill>
+            <a:prstDash val="solid"/>
+          </a:ln>
+        </p:spPr>
+      </p:sp>
+      <p:sp>
+        <p:nvSpPr>
+          <p:cNvPr id="11" name="Shape 8"/>
+          <p:cNvSpPr/>
+          <p:nvPr/>
+        </p:nvSpPr>
+        <p:spPr>
+          <a:xfrm flipV="1">
+            <a:off x="7735824" y="2633472"/>
+            <a:ext cx="694944" cy="329184"/>
+          </a:xfrm>
+          <a:prstGeom prst="line">
+            <a:avLst/>
+          </a:prstGeom>
+          <a:noFill/>
+          <a:ln w="19050">
+            <a:solidFill>
+              <a:srgbClr val="C68A65"/>
+            </a:solidFill>
+            <a:prstDash val="solid"/>
+          </a:ln>
+        </p:spPr>
+      </p:sp>
+      <p:sp>
+        <p:nvSpPr>
+          <p:cNvPr id="12" name="Shape 9"/>
+          <p:cNvSpPr/>
+          <p:nvPr/>
+        </p:nvSpPr>
+        <p:spPr>
+          <a:xfrm flipV="1">
+            <a:off x="3749040" y="4114800"/>
+            <a:ext cx="694944" cy="329184"/>
+          </a:xfrm>
+          <a:prstGeom prst="line">
+            <a:avLst/>
+          </a:prstGeom>
+          <a:noFill/>
+          <a:ln w="19050">
+            <a:solidFill>
+              <a:srgbClr val="C68A65"/>
+            </a:solidFill>
+            <a:prstDash val="solid"/>
+          </a:ln>
+        </p:spPr>
+      </p:sp>
+      <p:sp>
+        <p:nvSpPr>
+          <p:cNvPr id="13" name="Shape 10"/>
+          <p:cNvSpPr/>
+          <p:nvPr/>
+        </p:nvSpPr>
+        <p:spPr>
+          <a:xfrm>
+            <a:off x="7735824" y="4114800"/>
+            <a:ext cx="694944" cy="329184"/>
+          </a:xfrm>
+          <a:prstGeom prst="line">
+            <a:avLst/>
+          </a:prstGeom>
+          <a:noFill/>
+          <a:ln w="19050">
+            <a:solidFill>
+              <a:srgbClr val="C68A65"/>
+            </a:solidFill>
+            <a:prstDash val="solid"/>
+          </a:ln>
+        </p:spPr>
+      </p:sp>
+      <p:sp>
+        <p:nvSpPr>
+          <p:cNvPr id="14" name="Shape 11"/>
+          <p:cNvSpPr/>
+          <p:nvPr/>
+        </p:nvSpPr>
+        <p:spPr>
+          <a:xfrm>
+            <a:off x="4443984" y="2962656"/>
+            <a:ext cx="3291840" cy="1152144"/>
+          </a:xfrm>
+          <a:prstGeom prst="roundRect">
+            <a:avLst>
+              <a:gd name="adj" fmla="val 3968"/>
+            </a:avLst>
+          </a:prstGeom>
+          <a:solidFill>
+            <a:srgbClr val="2F3941"/>
+          </a:solidFill>
+          <a:ln w="12700">
+            <a:solidFill>
+              <a:srgbClr val="333333"/>
+            </a:solidFill>
+            <a:prstDash val="solid"/>
+          </a:ln>
+        </p:spPr>
+      </p:sp>
+      <p:sp>
+        <p:nvSpPr>
+          <p:cNvPr id="15" name="Text 12"/>
+          <p:cNvSpPr/>
+          <p:nvPr/>
+        </p:nvSpPr>
+        <p:spPr>
+          <a:xfrm>
+            <a:off x="4443984" y="3090672"/>
+            <a:ext cx="3291840" cy="219456"/>
+          </a:xfrm>
+          <a:prstGeom prst="rect">
+            <a:avLst/>
+          </a:prstGeom>
+          <a:noFill/>
+          <a:ln/>
+        </p:spPr>
+        <p:txBody>
+          <a:bodyPr wrap="square" lIns="0" tIns="0" rIns="0" bIns="0" rtlCol="0" anchor="ctr"/>
+          <a:lstStyle/>
+          <a:p>
+            <a:pPr algn="ctr" indent="0" marL="0">
+              <a:buNone/>
+            </a:pPr>
+            <a:r>
+              <a:rPr lang="en-US" sz="950" b="1" dirty="0">
+                <a:solidFill>
+                  <a:srgbClr val="C68A65"/>
+                </a:solidFill>
+                <a:latin typeface="Yu Gothic" pitchFamily="34" charset="0"/>
+                <a:ea typeface="Yu Gothic" pitchFamily="34" charset="-122"/>
+                <a:cs typeface="Yu Gothic" pitchFamily="34" charset="-120"/>
+              </a:rPr>
+              <a:t>街に、在庫はひとつだけ</a:t>
+            </a:r>
+            <a:endParaRPr lang="en-US" sz="950" dirty="0"/>
+          </a:p>
+        </p:txBody>
+      </p:sp>
+      <p:sp>
+        <p:nvSpPr>
+          <p:cNvPr id="16" name="Text 13"/>
+          <p:cNvSpPr/>
+          <p:nvPr/>
+        </p:nvSpPr>
+        <p:spPr>
+          <a:xfrm>
+            <a:off x="4443984" y="3328416"/>
+            <a:ext cx="3291840" cy="310896"/>
+          </a:xfrm>
+          <a:prstGeom prst="rect">
+            <a:avLst/>
+          </a:prstGeom>
+          <a:noFill/>
+          <a:ln/>
+        </p:spPr>
+        <p:txBody>
+          <a:bodyPr wrap="square" lIns="0" tIns="0" rIns="0" bIns="0" rtlCol="0" anchor="ctr"/>
+          <a:lstStyle/>
+          <a:p>
+            <a:pPr algn="ctr" indent="0" marL="0">
+              <a:buNone/>
+            </a:pPr>
+            <a:r>
+              <a:rPr lang="en-US" sz="1500" b="1" dirty="0">
+                <a:solidFill>
+                  <a:srgbClr val="FFFFFF"/>
+                </a:solidFill>
+                <a:latin typeface="Yu Gothic" pitchFamily="34" charset="0"/>
+                <a:ea typeface="Yu Gothic" pitchFamily="34" charset="-122"/>
+                <a:cs typeface="Yu Gothic" pitchFamily="34" charset="-120"/>
+              </a:rPr>
+              <a:t>館内ワインストレージ ＋ WineGO</a:t>
+            </a:r>
+            <a:endParaRPr lang="en-US" sz="1500" dirty="0"/>
+          </a:p>
+        </p:txBody>
+      </p:sp>
+      <p:sp>
+        <p:nvSpPr>
+          <p:cNvPr id="17" name="Text 14"/>
+          <p:cNvSpPr/>
+          <p:nvPr/>
+        </p:nvSpPr>
+        <p:spPr>
+          <a:xfrm>
+            <a:off x="4663440" y="3657600"/>
+            <a:ext cx="2852928" cy="365760"/>
+          </a:xfrm>
+          <a:prstGeom prst="rect">
+            <a:avLst/>
+          </a:prstGeom>
+          <a:noFill/>
+          <a:ln/>
+        </p:spPr>
+        <p:txBody>
+          <a:bodyPr wrap="square" lIns="0" tIns="0" rIns="0" bIns="0" rtlCol="0" anchor="ctr"/>
+          <a:lstStyle/>
+          <a:p>
+            <a:pPr algn="ctr" indent="0" marL="0">
+              <a:lnSpc>
+                <a:spcPts val="1250"/>
+              </a:lnSpc>
+              <a:buNone/>
+            </a:pPr>
+            <a:r>
+              <a:rPr lang="en-US" sz="920" dirty="0">
+                <a:solidFill>
+                  <a:srgbClr val="B9BEC2"/>
+                </a:solidFill>
+                <a:latin typeface="Yu Gothic" pitchFamily="34" charset="0"/>
+                <a:ea typeface="Yu Gothic" pitchFamily="34" charset="-122"/>
+                <a:cs typeface="Yu Gothic" pitchFamily="34" charset="-120"/>
+              </a:rPr>
+              <a:t>数千〜1万本を街区内に常備し、定温のまま即日・最短5分で動く。</a:t>
+            </a:r>
+            <a:endParaRPr lang="en-US" sz="920" dirty="0"/>
+          </a:p>
+        </p:txBody>
+      </p:sp>
+      <p:sp>
+        <p:nvSpPr>
+          <p:cNvPr id="18" name="Shape 15"/>
+          <p:cNvSpPr/>
+          <p:nvPr/>
+        </p:nvSpPr>
+        <p:spPr>
+          <a:xfrm>
+            <a:off x="731520" y="1536192"/>
+            <a:ext cx="3017520" cy="1097280"/>
+          </a:xfrm>
+          <a:prstGeom prst="roundRect">
+            <a:avLst>
+              <a:gd name="adj" fmla="val 4167"/>
+            </a:avLst>
+          </a:prstGeom>
+          <a:solidFill>
+            <a:srgbClr val="F6F6F6"/>
+          </a:solidFill>
+          <a:ln w="12700">
+            <a:solidFill>
+              <a:srgbClr val="333333"/>
+            </a:solidFill>
+            <a:prstDash val="solid"/>
+          </a:ln>
+        </p:spPr>
+      </p:sp>
+      <p:sp>
+        <p:nvSpPr>
+          <p:cNvPr id="19" name="Text 16"/>
+          <p:cNvSpPr/>
+          <p:nvPr/>
+        </p:nvSpPr>
+        <p:spPr>
+          <a:xfrm>
+            <a:off x="969264" y="1664208"/>
+            <a:ext cx="2542032" cy="201168"/>
+          </a:xfrm>
+          <a:prstGeom prst="rect">
+            <a:avLst/>
+          </a:prstGeom>
+          <a:noFill/>
+          <a:ln/>
+        </p:spPr>
+        <p:txBody>
+          <a:bodyPr wrap="square" lIns="0" tIns="0" rIns="0" bIns="0" rtlCol="0" anchor="ctr"/>
+          <a:lstStyle/>
+          <a:p>
+            <a:pPr indent="0" marL="0">
+              <a:buNone/>
+            </a:pPr>
+            <a:r>
+              <a:rPr lang="en-US" sz="900" b="1" dirty="0">
+                <a:solidFill>
+                  <a:srgbClr val="A06D4C"/>
+                </a:solidFill>
+                <a:latin typeface="Yu Gothic" pitchFamily="34" charset="0"/>
+                <a:ea typeface="Yu Gothic" pitchFamily="34" charset="-122"/>
+                <a:cs typeface="Yu Gothic" pitchFamily="34" charset="-120"/>
+              </a:rPr>
+              <a:t>レジデンス居住者</a:t>
+            </a:r>
+            <a:endParaRPr lang="en-US" sz="900" dirty="0"/>
+          </a:p>
+        </p:txBody>
+      </p:sp>
+      <p:sp>
+        <p:nvSpPr>
+          <p:cNvPr id="20" name="Text 17"/>
+          <p:cNvSpPr/>
+          <p:nvPr/>
+        </p:nvSpPr>
+        <p:spPr>
+          <a:xfrm>
+            <a:off x="969264" y="1883664"/>
+            <a:ext cx="2542032" cy="274320"/>
+          </a:xfrm>
+          <a:prstGeom prst="rect">
+            <a:avLst/>
+          </a:prstGeom>
+          <a:noFill/>
+          <a:ln/>
+        </p:spPr>
+        <p:txBody>
+          <a:bodyPr wrap="square" lIns="0" tIns="0" rIns="0" bIns="0" rtlCol="0" anchor="ctr"/>
+          <a:lstStyle/>
+          <a:p>
+            <a:pPr indent="0" marL="0">
+              <a:buNone/>
+            </a:pPr>
+            <a:r>
+              <a:rPr lang="en-US" sz="1250" b="1" dirty="0">
+                <a:solidFill>
+                  <a:srgbClr val="1A1A1A"/>
+                </a:solidFill>
+                <a:latin typeface="Yu Gothic" pitchFamily="34" charset="0"/>
+                <a:ea typeface="Yu Gothic" pitchFamily="34" charset="-122"/>
+                <a:cs typeface="Yu Gothic" pitchFamily="34" charset="-120"/>
+              </a:rPr>
+              <a:t>自宅のセラーが、街の中にある</a:t>
+            </a:r>
+            <a:endParaRPr lang="en-US" sz="1250" dirty="0"/>
+          </a:p>
+        </p:txBody>
+      </p:sp>
+      <p:sp>
+        <p:nvSpPr>
+          <p:cNvPr id="21" name="Text 18"/>
+          <p:cNvSpPr/>
+          <p:nvPr/>
+        </p:nvSpPr>
+        <p:spPr>
+          <a:xfrm>
+            <a:off x="969264" y="2176272"/>
+            <a:ext cx="2542032" cy="384048"/>
+          </a:xfrm>
+          <a:prstGeom prst="rect">
+            <a:avLst/>
+          </a:prstGeom>
+          <a:noFill/>
+          <a:ln/>
+        </p:spPr>
+        <p:txBody>
+          <a:bodyPr wrap="square" lIns="0" tIns="0" rIns="0" bIns="0" rtlCol="0" anchor="ctr"/>
+          <a:lstStyle/>
+          <a:p>
+            <a:pPr indent="0" marL="0">
+              <a:lnSpc>
+                <a:spcPts val="1250"/>
+              </a:lnSpc>
+              <a:buNone/>
+            </a:pPr>
+            <a:r>
+              <a:rPr lang="en-US" sz="900" dirty="0">
+                <a:solidFill>
+                  <a:srgbClr val="6E7378"/>
+                </a:solidFill>
+                <a:latin typeface="Yu Gothic" pitchFamily="34" charset="0"/>
+                <a:ea typeface="Yu Gothic" pitchFamily="34" charset="-122"/>
+                <a:cs typeface="Yu Gothic" pitchFamily="34" charset="-120"/>
+              </a:rPr>
+              <a:t>買う・預ける・出すが一つの画面で完結。飲みたい夜に、飲みたい一本が届く。</a:t>
+            </a:r>
+            <a:endParaRPr lang="en-US" sz="900" dirty="0"/>
+          </a:p>
+        </p:txBody>
+      </p:sp>
+      <p:sp>
+        <p:nvSpPr>
+          <p:cNvPr id="22" name="Shape 19"/>
+          <p:cNvSpPr/>
+          <p:nvPr/>
+        </p:nvSpPr>
+        <p:spPr>
+          <a:xfrm>
+            <a:off x="8430768" y="1536192"/>
+            <a:ext cx="3017520" cy="1097280"/>
+          </a:xfrm>
+          <a:prstGeom prst="roundRect">
+            <a:avLst>
+              <a:gd name="adj" fmla="val 4167"/>
+            </a:avLst>
+          </a:prstGeom>
+          <a:solidFill>
+            <a:srgbClr val="F6F6F6"/>
+          </a:solidFill>
+          <a:ln w="12700">
+            <a:solidFill>
+              <a:srgbClr val="333333"/>
+            </a:solidFill>
+            <a:prstDash val="solid"/>
+          </a:ln>
+        </p:spPr>
+      </p:sp>
+      <p:sp>
+        <p:nvSpPr>
+          <p:cNvPr id="23" name="Text 20"/>
+          <p:cNvSpPr/>
+          <p:nvPr/>
+        </p:nvSpPr>
+        <p:spPr>
+          <a:xfrm>
+            <a:off x="8668512" y="1664208"/>
+            <a:ext cx="2542032" cy="201168"/>
+          </a:xfrm>
+          <a:prstGeom prst="rect">
+            <a:avLst/>
+          </a:prstGeom>
+          <a:noFill/>
+          <a:ln/>
+        </p:spPr>
+        <p:txBody>
+          <a:bodyPr wrap="square" lIns="0" tIns="0" rIns="0" bIns="0" rtlCol="0" anchor="ctr"/>
+          <a:lstStyle/>
+          <a:p>
+            <a:pPr indent="0" marL="0">
+              <a:buNone/>
+            </a:pPr>
+            <a:r>
+              <a:rPr lang="en-US" sz="900" b="1" dirty="0">
+                <a:solidFill>
+                  <a:srgbClr val="A06D4C"/>
+                </a:solidFill>
+                <a:latin typeface="Yu Gothic" pitchFamily="34" charset="0"/>
+                <a:ea typeface="Yu Gothic" pitchFamily="34" charset="-122"/>
+                <a:cs typeface="Yu Gothic" pitchFamily="34" charset="-120"/>
+              </a:rPr>
+              <a:t>商業区画</a:t>
+            </a:r>
+            <a:endParaRPr lang="en-US" sz="900" dirty="0"/>
+          </a:p>
+        </p:txBody>
+      </p:sp>
+      <p:sp>
+        <p:nvSpPr>
+          <p:cNvPr id="24" name="Text 21"/>
+          <p:cNvSpPr/>
+          <p:nvPr/>
+        </p:nvSpPr>
+        <p:spPr>
+          <a:xfrm>
+            <a:off x="8668512" y="1883664"/>
+            <a:ext cx="2542032" cy="274320"/>
+          </a:xfrm>
+          <a:prstGeom prst="rect">
+            <a:avLst/>
+          </a:prstGeom>
+          <a:noFill/>
+          <a:ln/>
+        </p:spPr>
+        <p:txBody>
+          <a:bodyPr wrap="square" lIns="0" tIns="0" rIns="0" bIns="0" rtlCol="0" anchor="ctr"/>
+          <a:lstStyle/>
+          <a:p>
+            <a:pPr indent="0" marL="0">
+              <a:buNone/>
+            </a:pPr>
+            <a:r>
+              <a:rPr lang="en-US" sz="1250" b="1" dirty="0">
+                <a:solidFill>
+                  <a:srgbClr val="1A1A1A"/>
+                </a:solidFill>
+                <a:latin typeface="Yu Gothic" pitchFamily="34" charset="0"/>
+                <a:ea typeface="Yu Gothic" pitchFamily="34" charset="-122"/>
+                <a:cs typeface="Yu Gothic" pitchFamily="34" charset="-120"/>
+              </a:rPr>
+              <a:t>街の目的地になる</a:t>
+            </a:r>
+            <a:endParaRPr lang="en-US" sz="1250" dirty="0"/>
+          </a:p>
+        </p:txBody>
+      </p:sp>
+      <p:sp>
+        <p:nvSpPr>
+          <p:cNvPr id="25" name="Text 22"/>
+          <p:cNvSpPr/>
+          <p:nvPr/>
+        </p:nvSpPr>
+        <p:spPr>
+          <a:xfrm>
+            <a:off x="8668512" y="2176272"/>
+            <a:ext cx="2542032" cy="384048"/>
+          </a:xfrm>
+          <a:prstGeom prst="rect">
+            <a:avLst/>
+          </a:prstGeom>
+          <a:noFill/>
+          <a:ln/>
+        </p:spPr>
+        <p:txBody>
+          <a:bodyPr wrap="square" lIns="0" tIns="0" rIns="0" bIns="0" rtlCol="0" anchor="ctr"/>
+          <a:lstStyle/>
+          <a:p>
+            <a:pPr indent="0" marL="0">
+              <a:lnSpc>
+                <a:spcPts val="1250"/>
+              </a:lnSpc>
+              <a:buNone/>
+            </a:pPr>
+            <a:r>
+              <a:rPr lang="en-US" sz="900" dirty="0">
+                <a:solidFill>
+                  <a:srgbClr val="6E7378"/>
+                </a:solidFill>
+                <a:latin typeface="Yu Gothic" pitchFamily="34" charset="0"/>
+                <a:ea typeface="Yu Gothic" pitchFamily="34" charset="-122"/>
+                <a:cs typeface="Yu Gothic" pitchFamily="34" charset="-120"/>
+              </a:rPr>
+              <a:t>数千本のウォークインセラーとミシュランシェフ。ワインを目的に人が集まる場所へ。</a:t>
+            </a:r>
+            <a:endParaRPr lang="en-US" sz="900" dirty="0"/>
+          </a:p>
+        </p:txBody>
+      </p:sp>
+      <p:sp>
+        <p:nvSpPr>
+          <p:cNvPr id="26" name="Shape 23"/>
+          <p:cNvSpPr/>
+          <p:nvPr/>
+        </p:nvSpPr>
+        <p:spPr>
+          <a:xfrm>
+            <a:off x="731520" y="4443984"/>
+            <a:ext cx="3017520" cy="1097280"/>
+          </a:xfrm>
+          <a:prstGeom prst="roundRect">
+            <a:avLst>
+              <a:gd name="adj" fmla="val 4167"/>
+            </a:avLst>
+          </a:prstGeom>
+          <a:solidFill>
+            <a:srgbClr val="F6F6F6"/>
+          </a:solidFill>
+          <a:ln w="12700">
+            <a:solidFill>
+              <a:srgbClr val="333333"/>
+            </a:solidFill>
+            <a:prstDash val="solid"/>
+          </a:ln>
+        </p:spPr>
+      </p:sp>
+      <p:sp>
+        <p:nvSpPr>
+          <p:cNvPr id="27" name="Text 24"/>
+          <p:cNvSpPr/>
+          <p:nvPr/>
+        </p:nvSpPr>
+        <p:spPr>
+          <a:xfrm>
+            <a:off x="969264" y="4572000"/>
+            <a:ext cx="2542032" cy="201168"/>
+          </a:xfrm>
+          <a:prstGeom prst="rect">
+            <a:avLst/>
+          </a:prstGeom>
+          <a:noFill/>
+          <a:ln/>
+        </p:spPr>
+        <p:txBody>
+          <a:bodyPr wrap="square" lIns="0" tIns="0" rIns="0" bIns="0" rtlCol="0" anchor="ctr"/>
+          <a:lstStyle/>
+          <a:p>
+            <a:pPr indent="0" marL="0">
+              <a:buNone/>
+            </a:pPr>
+            <a:r>
+              <a:rPr lang="en-US" sz="900" b="1" dirty="0">
+                <a:solidFill>
+                  <a:srgbClr val="A06D4C"/>
+                </a:solidFill>
+                <a:latin typeface="Yu Gothic" pitchFamily="34" charset="0"/>
+                <a:ea typeface="Yu Gothic" pitchFamily="34" charset="-122"/>
+                <a:cs typeface="Yu Gothic" pitchFamily="34" charset="-120"/>
+              </a:rPr>
+              <a:t>テナント飲食店</a:t>
+            </a:r>
+            <a:endParaRPr lang="en-US" sz="900" dirty="0"/>
+          </a:p>
+        </p:txBody>
+      </p:sp>
+      <p:sp>
+        <p:nvSpPr>
+          <p:cNvPr id="28" name="Text 25"/>
+          <p:cNvSpPr/>
+          <p:nvPr/>
+        </p:nvSpPr>
+        <p:spPr>
+          <a:xfrm>
+            <a:off x="969264" y="4791456"/>
+            <a:ext cx="2542032" cy="274320"/>
+          </a:xfrm>
+          <a:prstGeom prst="rect">
+            <a:avLst/>
+          </a:prstGeom>
+          <a:noFill/>
+          <a:ln/>
+        </p:spPr>
+        <p:txBody>
+          <a:bodyPr wrap="square" lIns="0" tIns="0" rIns="0" bIns="0" rtlCol="0" anchor="ctr"/>
+          <a:lstStyle/>
+          <a:p>
+            <a:pPr indent="0" marL="0">
+              <a:buNone/>
+            </a:pPr>
+            <a:r>
+              <a:rPr lang="en-US" sz="1250" b="1" dirty="0">
+                <a:solidFill>
+                  <a:srgbClr val="1A1A1A"/>
+                </a:solidFill>
+                <a:latin typeface="Yu Gothic" pitchFamily="34" charset="0"/>
+                <a:ea typeface="Yu Gothic" pitchFamily="34" charset="-122"/>
+                <a:cs typeface="Yu Gothic" pitchFamily="34" charset="-120"/>
+              </a:rPr>
+              <a:t>在庫ゼロで、世界水準のリスト</a:t>
+            </a:r>
+            <a:endParaRPr lang="en-US" sz="1250" dirty="0"/>
+          </a:p>
+        </p:txBody>
+      </p:sp>
+      <p:sp>
+        <p:nvSpPr>
+          <p:cNvPr id="29" name="Text 26"/>
+          <p:cNvSpPr/>
+          <p:nvPr/>
+        </p:nvSpPr>
+        <p:spPr>
+          <a:xfrm>
+            <a:off x="969264" y="5084064"/>
+            <a:ext cx="2542032" cy="384048"/>
+          </a:xfrm>
+          <a:prstGeom prst="rect">
+            <a:avLst/>
+          </a:prstGeom>
+          <a:noFill/>
+          <a:ln/>
+        </p:spPr>
+        <p:txBody>
+          <a:bodyPr wrap="square" lIns="0" tIns="0" rIns="0" bIns="0" rtlCol="0" anchor="ctr"/>
+          <a:lstStyle/>
+          <a:p>
+            <a:pPr indent="0" marL="0">
+              <a:lnSpc>
+                <a:spcPts val="1250"/>
+              </a:lnSpc>
+              <a:buNone/>
+            </a:pPr>
+            <a:r>
+              <a:rPr lang="en-US" sz="900" dirty="0">
+                <a:solidFill>
+                  <a:srgbClr val="6E7378"/>
+                </a:solidFill>
+                <a:latin typeface="Yu Gothic" pitchFamily="34" charset="0"/>
+                <a:ea typeface="Yu Gothic" pitchFamily="34" charset="-122"/>
+                <a:cs typeface="Yu Gothic" pitchFamily="34" charset="-120"/>
+              </a:rPr>
+              <a:t>ワイン在庫は0円。セラーは小さく、客席は広く。それでも品揃えは数万本。</a:t>
+            </a:r>
+            <a:endParaRPr lang="en-US" sz="900" dirty="0"/>
+          </a:p>
+        </p:txBody>
+      </p:sp>
+      <p:sp>
+        <p:nvSpPr>
+          <p:cNvPr id="30" name="Shape 27"/>
+          <p:cNvSpPr/>
+          <p:nvPr/>
+        </p:nvSpPr>
+        <p:spPr>
+          <a:xfrm>
+            <a:off x="8430768" y="4443984"/>
+            <a:ext cx="3017520" cy="1097280"/>
+          </a:xfrm>
+          <a:prstGeom prst="roundRect">
+            <a:avLst>
+              <a:gd name="adj" fmla="val 4167"/>
+            </a:avLst>
+          </a:prstGeom>
+          <a:solidFill>
+            <a:srgbClr val="F6F6F6"/>
+          </a:solidFill>
+          <a:ln w="12700">
+            <a:solidFill>
+              <a:srgbClr val="333333"/>
+            </a:solidFill>
+            <a:prstDash val="solid"/>
+          </a:ln>
+        </p:spPr>
+      </p:sp>
+      <p:sp>
+        <p:nvSpPr>
+          <p:cNvPr id="31" name="Text 28"/>
+          <p:cNvSpPr/>
+          <p:nvPr/>
+        </p:nvSpPr>
+        <p:spPr>
+          <a:xfrm>
+            <a:off x="8668512" y="4572000"/>
+            <a:ext cx="2542032" cy="201168"/>
+          </a:xfrm>
+          <a:prstGeom prst="rect">
+            <a:avLst/>
+          </a:prstGeom>
+          <a:noFill/>
+          <a:ln/>
+        </p:spPr>
+        <p:txBody>
+          <a:bodyPr wrap="square" lIns="0" tIns="0" rIns="0" bIns="0" rtlCol="0" anchor="ctr"/>
+          <a:lstStyle/>
+          <a:p>
+            <a:pPr indent="0" marL="0">
+              <a:buNone/>
+            </a:pPr>
+            <a:r>
+              <a:rPr lang="en-US" sz="900" b="1" dirty="0">
+                <a:solidFill>
+                  <a:srgbClr val="A06D4C"/>
+                </a:solidFill>
+                <a:latin typeface="Yu Gothic" pitchFamily="34" charset="0"/>
+                <a:ea typeface="Yu Gothic" pitchFamily="34" charset="-122"/>
+                <a:cs typeface="Yu Gothic" pitchFamily="34" charset="-120"/>
+              </a:rPr>
+              <a:t>ヒルズワーカー</a:t>
+            </a:r>
+            <a:endParaRPr lang="en-US" sz="900" dirty="0"/>
+          </a:p>
+        </p:txBody>
+      </p:sp>
+      <p:sp>
+        <p:nvSpPr>
+          <p:cNvPr id="32" name="Text 29"/>
+          <p:cNvSpPr/>
+          <p:nvPr/>
+        </p:nvSpPr>
+        <p:spPr>
+          <a:xfrm>
+            <a:off x="8668512" y="4791456"/>
+            <a:ext cx="2542032" cy="274320"/>
+          </a:xfrm>
+          <a:prstGeom prst="rect">
+            <a:avLst/>
+          </a:prstGeom>
+          <a:noFill/>
+          <a:ln/>
+        </p:spPr>
+        <p:txBody>
+          <a:bodyPr wrap="square" lIns="0" tIns="0" rIns="0" bIns="0" rtlCol="0" anchor="ctr"/>
+          <a:lstStyle/>
+          <a:p>
+            <a:pPr indent="0" marL="0">
+              <a:buNone/>
+            </a:pPr>
+            <a:r>
+              <a:rPr lang="en-US" sz="1250" b="1" dirty="0">
+                <a:solidFill>
+                  <a:srgbClr val="1A1A1A"/>
+                </a:solidFill>
+                <a:latin typeface="Yu Gothic" pitchFamily="34" charset="0"/>
+                <a:ea typeface="Yu Gothic" pitchFamily="34" charset="-122"/>
+                <a:cs typeface="Yu Gothic" pitchFamily="34" charset="-120"/>
+              </a:rPr>
+              <a:t>手ぶらで、会食へ</a:t>
+            </a:r>
+            <a:endParaRPr lang="en-US" sz="1250" dirty="0"/>
+          </a:p>
+        </p:txBody>
+      </p:sp>
+      <p:sp>
+        <p:nvSpPr>
+          <p:cNvPr id="33" name="Text 30"/>
+          <p:cNvSpPr/>
+          <p:nvPr/>
+        </p:nvSpPr>
+        <p:spPr>
+          <a:xfrm>
+            <a:off x="8668512" y="5084064"/>
+            <a:ext cx="2542032" cy="384048"/>
+          </a:xfrm>
+          <a:prstGeom prst="rect">
+            <a:avLst/>
+          </a:prstGeom>
+          <a:noFill/>
+          <a:ln/>
+        </p:spPr>
+        <p:txBody>
+          <a:bodyPr wrap="square" lIns="0" tIns="0" rIns="0" bIns="0" rtlCol="0" anchor="ctr"/>
+          <a:lstStyle/>
+          <a:p>
+            <a:pPr indent="0" marL="0">
+              <a:lnSpc>
+                <a:spcPts val="1250"/>
+              </a:lnSpc>
+              <a:buNone/>
+            </a:pPr>
+            <a:r>
+              <a:rPr lang="en-US" sz="900" dirty="0">
+                <a:solidFill>
+                  <a:srgbClr val="6E7378"/>
+                </a:solidFill>
+                <a:latin typeface="Yu Gothic" pitchFamily="34" charset="0"/>
+                <a:ea typeface="Yu Gothic" pitchFamily="34" charset="-122"/>
+                <a:cs typeface="Yu Gothic" pitchFamily="34" charset="-120"/>
+              </a:rPr>
+              <a:t>仕入原価相当のワインをコルケージなしで。接待の質は上がり、費用は下がる。</a:t>
+            </a:r>
+            <a:endParaRPr lang="en-US" sz="900" dirty="0"/>
+          </a:p>
+        </p:txBody>
+      </p:sp>
+      <p:sp>
+        <p:nvSpPr>
+          <p:cNvPr id="34" name="Text 31"/>
+          <p:cNvSpPr/>
+          <p:nvPr/>
+        </p:nvSpPr>
+        <p:spPr>
+          <a:xfrm>
+            <a:off x="731520" y="3054096"/>
+            <a:ext cx="2834640" cy="640080"/>
+          </a:xfrm>
+          <a:prstGeom prst="rect">
+            <a:avLst/>
+          </a:prstGeom>
+          <a:noFill/>
+          <a:ln/>
+        </p:spPr>
+        <p:txBody>
+          <a:bodyPr wrap="square" lIns="0" tIns="0" rIns="0" bIns="0" rtlCol="0" anchor="ctr"/>
+          <a:lstStyle/>
+          <a:p>
+            <a:pPr indent="0" marL="0">
+              <a:lnSpc>
+                <a:spcPts val="1500"/>
+              </a:lnSpc>
+              <a:buNone/>
+            </a:pPr>
+            <a:r>
+              <a:rPr lang="en-US" sz="1020" dirty="0">
+                <a:solidFill>
+                  <a:srgbClr val="6E7378"/>
+                </a:solidFill>
+                <a:latin typeface="Yu Gothic" pitchFamily="34" charset="0"/>
+                <a:ea typeface="Yu Gothic" pitchFamily="34" charset="-122"/>
+                <a:cs typeface="Yu Gothic" pitchFamily="34" charset="-120"/>
+              </a:rPr>
+              <a:t>各店が抱えていた在庫が、</a:t>
+            </a:r>
+            <a:endParaRPr lang="en-US" sz="1020" dirty="0"/>
+          </a:p>
+          <a:p>
+            <a:pPr indent="0" marL="0">
+              <a:lnSpc>
+                <a:spcPts val="1500"/>
+              </a:lnSpc>
+              <a:buNone/>
+            </a:pPr>
+            <a:r>
+              <a:rPr lang="en-US" sz="1020" dirty="0">
+                <a:solidFill>
+                  <a:srgbClr val="6E7378"/>
+                </a:solidFill>
+                <a:latin typeface="Yu Gothic" pitchFamily="34" charset="0"/>
+                <a:ea typeface="Yu Gothic" pitchFamily="34" charset="-122"/>
+                <a:cs typeface="Yu Gothic" pitchFamily="34" charset="-120"/>
+              </a:rPr>
+              <a:t>街のひとつのセラーに集まる。</a:t>
+            </a:r>
+            <a:endParaRPr lang="en-US" sz="1020" dirty="0"/>
+          </a:p>
+        </p:txBody>
+      </p:sp>
+      <p:sp>
+        <p:nvSpPr>
+          <p:cNvPr id="35" name="Text 32"/>
+          <p:cNvSpPr/>
+          <p:nvPr/>
+        </p:nvSpPr>
+        <p:spPr>
+          <a:xfrm>
+            <a:off x="8613648" y="3054096"/>
+            <a:ext cx="2834640" cy="640080"/>
+          </a:xfrm>
+          <a:prstGeom prst="rect">
+            <a:avLst/>
+          </a:prstGeom>
+          <a:noFill/>
+          <a:ln/>
+        </p:spPr>
+        <p:txBody>
+          <a:bodyPr wrap="square" lIns="0" tIns="0" rIns="0" bIns="0" rtlCol="0" anchor="ctr"/>
+          <a:lstStyle/>
+          <a:p>
+            <a:pPr algn="r" indent="0" marL="0">
+              <a:lnSpc>
+                <a:spcPts val="1500"/>
+              </a:lnSpc>
+              <a:buNone/>
+            </a:pPr>
+            <a:r>
+              <a:rPr lang="en-US" sz="1020" dirty="0">
+                <a:solidFill>
+                  <a:srgbClr val="6E7378"/>
+                </a:solidFill>
+                <a:latin typeface="Yu Gothic" pitchFamily="34" charset="0"/>
+                <a:ea typeface="Yu Gothic" pitchFamily="34" charset="-122"/>
+                <a:cs typeface="Yu Gothic" pitchFamily="34" charset="-120"/>
+              </a:rPr>
+              <a:t>そのセラーから、</a:t>
+            </a:r>
+            <a:endParaRPr lang="en-US" sz="1020" dirty="0"/>
+          </a:p>
+          <a:p>
+            <a:pPr algn="r" indent="0" marL="0">
+              <a:lnSpc>
+                <a:spcPts val="1500"/>
+              </a:lnSpc>
+              <a:buNone/>
+            </a:pPr>
+            <a:r>
+              <a:rPr lang="en-US" sz="1020" dirty="0">
+                <a:solidFill>
+                  <a:srgbClr val="6E7378"/>
+                </a:solidFill>
+                <a:latin typeface="Yu Gothic" pitchFamily="34" charset="0"/>
+                <a:ea typeface="Yu Gothic" pitchFamily="34" charset="-122"/>
+                <a:cs typeface="Yu Gothic" pitchFamily="34" charset="-120"/>
+              </a:rPr>
+              <a:t>街のあらゆる場所へワインが動く。</a:t>
+            </a:r>
+            <a:endParaRPr lang="en-US" sz="1020" dirty="0"/>
+          </a:p>
+        </p:txBody>
+      </p:sp>
+      <p:sp>
+        <p:nvSpPr>
+          <p:cNvPr id="36" name="Shape 33"/>
+          <p:cNvSpPr/>
+          <p:nvPr/>
+        </p:nvSpPr>
+        <p:spPr>
+          <a:xfrm>
+            <a:off x="566928" y="5705856"/>
+            <a:ext cx="11057839" cy="475488"/>
+          </a:xfrm>
+          <a:prstGeom prst="rect">
+            <a:avLst/>
+          </a:prstGeom>
+          <a:solidFill>
+            <a:srgbClr val="2F3941"/>
+          </a:solidFill>
+          <a:ln w="12700">
+            <a:solidFill>
+              <a:srgbClr val="333333"/>
+            </a:solidFill>
+            <a:prstDash val="solid"/>
+          </a:ln>
+        </p:spPr>
+      </p:sp>
+      <p:sp>
+        <p:nvSpPr>
+          <p:cNvPr id="37" name="Text 34"/>
+          <p:cNvSpPr/>
+          <p:nvPr/>
+        </p:nvSpPr>
+        <p:spPr>
+          <a:xfrm>
+            <a:off x="566928" y="5705856"/>
+            <a:ext cx="11057839" cy="475488"/>
+          </a:xfrm>
+          <a:prstGeom prst="rect">
+            <a:avLst/>
+          </a:prstGeom>
+          <a:noFill/>
+          <a:ln/>
+        </p:spPr>
+        <p:txBody>
+          <a:bodyPr wrap="square" lIns="0" tIns="0" rIns="0" bIns="0" rtlCol="0" anchor="ctr"/>
+          <a:lstStyle/>
+          <a:p>
+            <a:pPr algn="ctr" indent="0" marL="0">
+              <a:buNone/>
+            </a:pPr>
+            <a:r>
+              <a:rPr lang="en-US" sz="1500" b="1" dirty="0">
+                <a:solidFill>
+                  <a:srgbClr val="EFDCCE"/>
+                </a:solidFill>
+                <a:latin typeface="Yu Gothic" pitchFamily="34" charset="0"/>
+                <a:ea typeface="Yu Gothic" pitchFamily="34" charset="-122"/>
+                <a:cs typeface="Yu Gothic" pitchFamily="34" charset="-120"/>
+              </a:rPr>
+              <a:t>他の街には真似のできない「ワインが巡る街」を、ヒルズに。</a:t>
+            </a:r>
+            <a:endParaRPr lang="en-US" sz="1500" dirty="0"/>
           </a:p>
         </p:txBody>
       </p:sp>
@@ -31757,14 +32905,220 @@
         </p:blipFill>
         <p:spPr>
           <a:xfrm>
-            <a:off x="0" y="0"/>
-            <a:ext cx="12191695" cy="6858000"/>
+            <a:off x="10381183" y="292608"/>
+            <a:ext cx="1243584" cy="247802"/>
           </a:xfrm>
           <a:prstGeom prst="rect">
             <a:avLst/>
           </a:prstGeom>
         </p:spPr>
       </p:pic>
+      <p:sp>
+        <p:nvSpPr>
+          <p:cNvPr id="3" name="Text 0"/>
+          <p:cNvSpPr/>
+          <p:nvPr/>
+        </p:nvSpPr>
+        <p:spPr>
+          <a:xfrm>
+            <a:off x="0" y="2798064"/>
+            <a:ext cx="12191695" cy="548640"/>
+          </a:xfrm>
+          <a:prstGeom prst="rect">
+            <a:avLst/>
+          </a:prstGeom>
+          <a:noFill/>
+          <a:ln/>
+        </p:spPr>
+        <p:txBody>
+          <a:bodyPr wrap="square" lIns="0" tIns="0" rIns="0" bIns="0" rtlCol="0" anchor="ctr"/>
+          <a:lstStyle/>
+          <a:p>
+            <a:pPr algn="ctr" indent="0" marL="0">
+              <a:buNone/>
+            </a:pPr>
+            <a:r>
+              <a:rPr lang="en-US" sz="3000" b="1" spc="240" kern="0" dirty="0">
+                <a:solidFill>
+                  <a:srgbClr val="1A1A1A"/>
+                </a:solidFill>
+                <a:latin typeface="Calibri" pitchFamily="34" charset="0"/>
+                <a:ea typeface="Calibri" pitchFamily="34" charset="-122"/>
+                <a:cs typeface="Calibri" pitchFamily="34" charset="-120"/>
+              </a:rPr>
+              <a:t>APPENDIX</a:t>
+            </a:r>
+            <a:endParaRPr lang="en-US" sz="3000" dirty="0"/>
+          </a:p>
+        </p:txBody>
+      </p:sp>
+      <p:sp>
+        <p:nvSpPr>
+          <p:cNvPr id="4" name="Shape 1"/>
+          <p:cNvSpPr/>
+          <p:nvPr/>
+        </p:nvSpPr>
+        <p:spPr>
+          <a:xfrm>
+            <a:off x="5730088" y="3438144"/>
+            <a:ext cx="731520" cy="32004"/>
+          </a:xfrm>
+          <a:prstGeom prst="rect">
+            <a:avLst/>
+          </a:prstGeom>
+          <a:solidFill>
+            <a:srgbClr val="C68A65"/>
+          </a:solidFill>
+          <a:ln w="12700">
+            <a:solidFill>
+              <a:srgbClr val="333333"/>
+            </a:solidFill>
+            <a:prstDash val="solid"/>
+          </a:ln>
+        </p:spPr>
+      </p:sp>
+      <p:sp>
+        <p:nvSpPr>
+          <p:cNvPr id="5" name="Text 2"/>
+          <p:cNvSpPr/>
+          <p:nvPr/>
+        </p:nvSpPr>
+        <p:spPr>
+          <a:xfrm>
+            <a:off x="0" y="3602736"/>
+            <a:ext cx="12191695" cy="274320"/>
+          </a:xfrm>
+          <a:prstGeom prst="rect">
+            <a:avLst/>
+          </a:prstGeom>
+          <a:noFill/>
+          <a:ln/>
+        </p:spPr>
+        <p:txBody>
+          <a:bodyPr wrap="square" lIns="0" tIns="0" rIns="0" bIns="0" rtlCol="0" anchor="ctr"/>
+          <a:lstStyle/>
+          <a:p>
+            <a:pPr algn="ctr" indent="0" marL="0">
+              <a:buNone/>
+            </a:pPr>
+            <a:r>
+              <a:rPr lang="en-US" sz="1100" dirty="0">
+                <a:solidFill>
+                  <a:srgbClr val="6E7378"/>
+                </a:solidFill>
+                <a:latin typeface="Yu Gothic" pitchFamily="34" charset="0"/>
+                <a:ea typeface="Yu Gothic" pitchFamily="34" charset="-122"/>
+                <a:cs typeface="Yu Gothic" pitchFamily="34" charset="-120"/>
+              </a:rPr>
+              <a:t>会社紹介（2026年6月）より抜粋</a:t>
+            </a:r>
+            <a:endParaRPr lang="en-US" sz="1100" dirty="0"/>
+          </a:p>
+        </p:txBody>
+      </p:sp>
+      <p:sp>
+        <p:nvSpPr>
+          <p:cNvPr id="6" name="Shape 3"/>
+          <p:cNvSpPr/>
+          <p:nvPr/>
+        </p:nvSpPr>
+        <p:spPr>
+          <a:xfrm>
+            <a:off x="0" y="6583680"/>
+            <a:ext cx="12191695" cy="274320"/>
+          </a:xfrm>
+          <a:prstGeom prst="rect">
+            <a:avLst/>
+          </a:prstGeom>
+          <a:solidFill>
+            <a:srgbClr val="2F3941"/>
+          </a:solidFill>
+          <a:ln w="12700">
+            <a:solidFill>
+              <a:srgbClr val="333333"/>
+            </a:solidFill>
+            <a:prstDash val="solid"/>
+          </a:ln>
+        </p:spPr>
+      </p:sp>
+      <p:sp>
+        <p:nvSpPr>
+          <p:cNvPr id="7" name="Text 4"/>
+          <p:cNvSpPr/>
+          <p:nvPr/>
+        </p:nvSpPr>
+        <p:spPr>
+          <a:xfrm>
+            <a:off x="10893247" y="6272784"/>
+            <a:ext cx="731520" cy="256032"/>
+          </a:xfrm>
+          <a:prstGeom prst="rect">
+            <a:avLst/>
+          </a:prstGeom>
+          <a:noFill/>
+          <a:ln/>
+        </p:spPr>
+        <p:txBody>
+          <a:bodyPr wrap="square" lIns="0" tIns="0" rIns="0" bIns="0" rtlCol="0" anchor="ctr"/>
+          <a:lstStyle/>
+          <a:p>
+            <a:pPr algn="r" indent="0" marL="0">
+              <a:buNone/>
+            </a:pPr>
+            <a:r>
+              <a:rPr lang="en-US" sz="1000" dirty="0">
+                <a:solidFill>
+                  <a:srgbClr val="A6ABAF"/>
+                </a:solidFill>
+                <a:latin typeface="Calibri" pitchFamily="34" charset="0"/>
+                <a:ea typeface="Calibri" pitchFamily="34" charset="-122"/>
+                <a:cs typeface="Calibri" pitchFamily="34" charset="-120"/>
+              </a:rPr>
+              <a:t>26</a:t>
+            </a:r>
+            <a:endParaRPr lang="en-US" sz="1000" dirty="0"/>
+          </a:p>
+        </p:txBody>
+      </p:sp>
+      <p:sp>
+        <p:nvSpPr>
+          <p:cNvPr id="8" name="Text 5"/>
+          <p:cNvSpPr/>
+          <p:nvPr/>
+        </p:nvSpPr>
+        <p:spPr>
+          <a:xfrm>
+            <a:off x="566928" y="6272784"/>
+            <a:ext cx="2926080" cy="256032"/>
+          </a:xfrm>
+          <a:prstGeom prst="rect">
+            <a:avLst/>
+          </a:prstGeom>
+          <a:noFill/>
+          <a:ln/>
+        </p:spPr>
+        <p:txBody>
+          <a:bodyPr wrap="square" lIns="0" tIns="0" rIns="0" bIns="0" rtlCol="0" anchor="ctr"/>
+          <a:lstStyle/>
+          <a:p>
+            <a:pPr indent="0" marL="0">
+              <a:buNone/>
+            </a:pPr>
+            <a:r>
+              <a:rPr lang="en-US" sz="850" spc="120" kern="0" dirty="0">
+                <a:solidFill>
+                  <a:srgbClr val="C7CACC"/>
+                </a:solidFill>
+                <a:latin typeface="Calibri" pitchFamily="34" charset="0"/>
+                <a:ea typeface="Calibri" pitchFamily="34" charset="-122"/>
+                <a:cs typeface="Calibri" pitchFamily="34" charset="-120"/>
+              </a:rPr>
+              <a:t>CONFIDENTIAL</a:t>
+            </a:r>
+            <a:endParaRPr lang="en-US" sz="850" dirty="0"/>
+          </a:p>
+        </p:txBody>
+      </p:sp>
     </p:spTree>
   </p:cSld>
   <p:clrMapOvr>
@@ -33439,1574 +34793,14 @@
         </p:blipFill>
         <p:spPr>
           <a:xfrm>
-            <a:off x="10381183" y="292608"/>
-            <a:ext cx="1243584" cy="247802"/>
+            <a:off x="0" y="0"/>
+            <a:ext cx="12191695" cy="6858000"/>
           </a:xfrm>
           <a:prstGeom prst="rect">
             <a:avLst/>
           </a:prstGeom>
         </p:spPr>
       </p:pic>
-      <p:sp>
-        <p:nvSpPr>
-          <p:cNvPr id="3" name="Shape 0"/>
-          <p:cNvSpPr/>
-          <p:nvPr/>
-        </p:nvSpPr>
-        <p:spPr>
-          <a:xfrm>
-            <a:off x="566928" y="292608"/>
-            <a:ext cx="950976" cy="237744"/>
-          </a:xfrm>
-          <a:prstGeom prst="roundRect">
-            <a:avLst>
-              <a:gd name="adj" fmla="val 11538"/>
-            </a:avLst>
-          </a:prstGeom>
-          <a:solidFill>
-            <a:srgbClr val="C68A65"/>
-          </a:solidFill>
-          <a:ln w="12700">
-            <a:solidFill>
-              <a:srgbClr val="333333"/>
-            </a:solidFill>
-            <a:prstDash val="solid"/>
-          </a:ln>
-        </p:spPr>
-      </p:sp>
-      <p:sp>
-        <p:nvSpPr>
-          <p:cNvPr id="4" name="Text 1"/>
-          <p:cNvSpPr/>
-          <p:nvPr/>
-        </p:nvSpPr>
-        <p:spPr>
-          <a:xfrm>
-            <a:off x="566928" y="292608"/>
-            <a:ext cx="950976" cy="237744"/>
-          </a:xfrm>
-          <a:prstGeom prst="rect">
-            <a:avLst/>
-          </a:prstGeom>
-          <a:noFill/>
-          <a:ln/>
-        </p:spPr>
-        <p:txBody>
-          <a:bodyPr wrap="square" lIns="0" tIns="0" rIns="0" bIns="0" rtlCol="0" anchor="ctr"/>
-          <a:lstStyle/>
-          <a:p>
-            <a:pPr algn="ctr" indent="0" marL="0">
-              <a:buNone/>
-            </a:pPr>
-            <a:r>
-              <a:rPr lang="en-US" sz="850" b="1" dirty="0">
-                <a:solidFill>
-                  <a:srgbClr val="FFFFFF"/>
-                </a:solidFill>
-                <a:latin typeface="Yu Gothic" pitchFamily="34" charset="0"/>
-                <a:ea typeface="Yu Gothic" pitchFamily="34" charset="-122"/>
-                <a:cs typeface="Yu Gothic" pitchFamily="34" charset="-120"/>
-              </a:rPr>
-              <a:t>APPENDIX</a:t>
-            </a:r>
-            <a:endParaRPr lang="en-US" sz="850" dirty="0"/>
-          </a:p>
-        </p:txBody>
-      </p:sp>
-      <p:sp>
-        <p:nvSpPr>
-          <p:cNvPr id="5" name="Text 2"/>
-          <p:cNvSpPr/>
-          <p:nvPr/>
-        </p:nvSpPr>
-        <p:spPr>
-          <a:xfrm>
-            <a:off x="566928" y="585216"/>
-            <a:ext cx="9509760" cy="420624"/>
-          </a:xfrm>
-          <a:prstGeom prst="rect">
-            <a:avLst/>
-          </a:prstGeom>
-          <a:noFill/>
-          <a:ln/>
-        </p:spPr>
-        <p:txBody>
-          <a:bodyPr wrap="square" lIns="0" tIns="0" rIns="0" bIns="0" rtlCol="0" anchor="ctr"/>
-          <a:lstStyle/>
-          <a:p>
-            <a:pPr indent="0" marL="0">
-              <a:buNone/>
-            </a:pPr>
-            <a:r>
-              <a:rPr lang="en-US" sz="2300" b="1" dirty="0">
-                <a:solidFill>
-                  <a:srgbClr val="1A1A1A"/>
-                </a:solidFill>
-                <a:latin typeface="Yu Gothic" pitchFamily="34" charset="0"/>
-                <a:ea typeface="Yu Gothic" pitchFamily="34" charset="-122"/>
-                <a:cs typeface="Yu Gothic" pitchFamily="34" charset="-120"/>
-              </a:rPr>
-              <a:t>なぜ、Cloud Wine Cave の価格が成立するのか</a:t>
-            </a:r>
-            <a:endParaRPr lang="en-US" sz="2300" dirty="0"/>
-          </a:p>
-        </p:txBody>
-      </p:sp>
-      <p:sp>
-        <p:nvSpPr>
-          <p:cNvPr id="6" name="Text 3"/>
-          <p:cNvSpPr/>
-          <p:nvPr/>
-        </p:nvSpPr>
-        <p:spPr>
-          <a:xfrm>
-            <a:off x="566928" y="1024128"/>
-            <a:ext cx="11057839" cy="310896"/>
-          </a:xfrm>
-          <a:prstGeom prst="rect">
-            <a:avLst/>
-          </a:prstGeom>
-          <a:noFill/>
-          <a:ln/>
-        </p:spPr>
-        <p:txBody>
-          <a:bodyPr wrap="square" lIns="0" tIns="0" rIns="0" bIns="0" rtlCol="0" anchor="ctr"/>
-          <a:lstStyle/>
-          <a:p>
-            <a:pPr indent="0" marL="0">
-              <a:lnSpc>
-                <a:spcPts val="1700"/>
-              </a:lnSpc>
-              <a:buNone/>
-            </a:pPr>
-            <a:r>
-              <a:rPr lang="en-US" sz="1150" dirty="0">
-                <a:solidFill>
-                  <a:srgbClr val="6E7378"/>
-                </a:solidFill>
-                <a:latin typeface="Yu Gothic" pitchFamily="34" charset="0"/>
-                <a:ea typeface="Yu Gothic" pitchFamily="34" charset="-122"/>
-                <a:cs typeface="Yu Gothic" pitchFamily="34" charset="-120"/>
-              </a:rPr>
-              <a:t>ワイン流通は、生産者から消費者までに何段もの中間マージンが積み上がります。当社は最上流に立っています。</a:t>
-            </a:r>
-            <a:endParaRPr lang="en-US" sz="1150" dirty="0"/>
-          </a:p>
-        </p:txBody>
-      </p:sp>
-      <p:sp>
-        <p:nvSpPr>
-          <p:cNvPr id="7" name="Shape 4"/>
-          <p:cNvSpPr/>
-          <p:nvPr/>
-        </p:nvSpPr>
-        <p:spPr>
-          <a:xfrm>
-            <a:off x="0" y="6583680"/>
-            <a:ext cx="12191695" cy="274320"/>
-          </a:xfrm>
-          <a:prstGeom prst="rect">
-            <a:avLst/>
-          </a:prstGeom>
-          <a:solidFill>
-            <a:srgbClr val="2F3941"/>
-          </a:solidFill>
-          <a:ln w="12700">
-            <a:solidFill>
-              <a:srgbClr val="333333"/>
-            </a:solidFill>
-            <a:prstDash val="solid"/>
-          </a:ln>
-        </p:spPr>
-      </p:sp>
-      <p:sp>
-        <p:nvSpPr>
-          <p:cNvPr id="8" name="Text 5"/>
-          <p:cNvSpPr/>
-          <p:nvPr/>
-        </p:nvSpPr>
-        <p:spPr>
-          <a:xfrm>
-            <a:off x="10893247" y="6272784"/>
-            <a:ext cx="731520" cy="256032"/>
-          </a:xfrm>
-          <a:prstGeom prst="rect">
-            <a:avLst/>
-          </a:prstGeom>
-          <a:noFill/>
-          <a:ln/>
-        </p:spPr>
-        <p:txBody>
-          <a:bodyPr wrap="square" lIns="0" tIns="0" rIns="0" bIns="0" rtlCol="0" anchor="ctr"/>
-          <a:lstStyle/>
-          <a:p>
-            <a:pPr algn="r" indent="0" marL="0">
-              <a:buNone/>
-            </a:pPr>
-            <a:r>
-              <a:rPr lang="en-US" sz="1000" dirty="0">
-                <a:solidFill>
-                  <a:srgbClr val="A6ABAF"/>
-                </a:solidFill>
-                <a:latin typeface="Calibri" pitchFamily="34" charset="0"/>
-                <a:ea typeface="Calibri" pitchFamily="34" charset="-122"/>
-                <a:cs typeface="Calibri" pitchFamily="34" charset="-120"/>
-              </a:rPr>
-              <a:t>31</a:t>
-            </a:r>
-            <a:endParaRPr lang="en-US" sz="1000" dirty="0"/>
-          </a:p>
-        </p:txBody>
-      </p:sp>
-      <p:sp>
-        <p:nvSpPr>
-          <p:cNvPr id="9" name="Text 6"/>
-          <p:cNvSpPr/>
-          <p:nvPr/>
-        </p:nvSpPr>
-        <p:spPr>
-          <a:xfrm>
-            <a:off x="566928" y="6272784"/>
-            <a:ext cx="2926080" cy="256032"/>
-          </a:xfrm>
-          <a:prstGeom prst="rect">
-            <a:avLst/>
-          </a:prstGeom>
-          <a:noFill/>
-          <a:ln/>
-        </p:spPr>
-        <p:txBody>
-          <a:bodyPr wrap="square" lIns="0" tIns="0" rIns="0" bIns="0" rtlCol="0" anchor="ctr"/>
-          <a:lstStyle/>
-          <a:p>
-            <a:pPr indent="0" marL="0">
-              <a:buNone/>
-            </a:pPr>
-            <a:r>
-              <a:rPr lang="en-US" sz="850" spc="120" kern="0" dirty="0">
-                <a:solidFill>
-                  <a:srgbClr val="C7CACC"/>
-                </a:solidFill>
-                <a:latin typeface="Calibri" pitchFamily="34" charset="0"/>
-                <a:ea typeface="Calibri" pitchFamily="34" charset="-122"/>
-                <a:cs typeface="Calibri" pitchFamily="34" charset="-120"/>
-              </a:rPr>
-              <a:t>CONFIDENTIAL</a:t>
-            </a:r>
-            <a:endParaRPr lang="en-US" sz="850" dirty="0"/>
-          </a:p>
-        </p:txBody>
-      </p:sp>
-      <p:sp>
-        <p:nvSpPr>
-          <p:cNvPr id="10" name="Shape 7"/>
-          <p:cNvSpPr/>
-          <p:nvPr/>
-        </p:nvSpPr>
-        <p:spPr>
-          <a:xfrm>
-            <a:off x="566928" y="1481328"/>
-            <a:ext cx="6583680" cy="1170432"/>
-          </a:xfrm>
-          <a:prstGeom prst="roundRect">
-            <a:avLst>
-              <a:gd name="adj" fmla="val 3906"/>
-            </a:avLst>
-          </a:prstGeom>
-          <a:solidFill>
-            <a:srgbClr val="F6F6F6"/>
-          </a:solidFill>
-          <a:ln w="12700">
-            <a:solidFill>
-              <a:srgbClr val="333333"/>
-            </a:solidFill>
-            <a:prstDash val="solid"/>
-          </a:ln>
-        </p:spPr>
-      </p:sp>
-      <p:sp>
-        <p:nvSpPr>
-          <p:cNvPr id="11" name="Text 8"/>
-          <p:cNvSpPr/>
-          <p:nvPr/>
-        </p:nvSpPr>
-        <p:spPr>
-          <a:xfrm>
-            <a:off x="841248" y="1609344"/>
-            <a:ext cx="6035040" cy="256032"/>
-          </a:xfrm>
-          <a:prstGeom prst="rect">
-            <a:avLst/>
-          </a:prstGeom>
-          <a:noFill/>
-          <a:ln/>
-        </p:spPr>
-        <p:txBody>
-          <a:bodyPr wrap="square" lIns="0" tIns="0" rIns="0" bIns="0" rtlCol="0" anchor="ctr"/>
-          <a:lstStyle/>
-          <a:p>
-            <a:pPr indent="0" marL="0">
-              <a:buNone/>
-            </a:pPr>
-            <a:r>
-              <a:rPr lang="en-US" sz="1300" b="1" dirty="0">
-                <a:solidFill>
-                  <a:srgbClr val="1A1A1A"/>
-                </a:solidFill>
-                <a:latin typeface="Yu Gothic" pitchFamily="34" charset="0"/>
-                <a:ea typeface="Yu Gothic" pitchFamily="34" charset="-122"/>
-                <a:cs typeface="Yu Gothic" pitchFamily="34" charset="-120"/>
-              </a:rPr>
-              <a:t>最上流に立てる理由</a:t>
-            </a:r>
-            <a:endParaRPr lang="en-US" sz="1300" dirty="0"/>
-          </a:p>
-        </p:txBody>
-      </p:sp>
-      <p:sp>
-        <p:nvSpPr>
-          <p:cNvPr id="12" name="Text 9"/>
-          <p:cNvSpPr/>
-          <p:nvPr/>
-        </p:nvSpPr>
-        <p:spPr>
-          <a:xfrm>
-            <a:off x="841248" y="1920240"/>
-            <a:ext cx="6035040" cy="640080"/>
-          </a:xfrm>
-          <a:prstGeom prst="rect">
-            <a:avLst/>
-          </a:prstGeom>
-          <a:noFill/>
-          <a:ln/>
-        </p:spPr>
-        <p:txBody>
-          <a:bodyPr wrap="square" lIns="0" tIns="0" rIns="0" bIns="0" rtlCol="0" anchor="ctr"/>
-          <a:lstStyle/>
-          <a:p>
-            <a:pPr marL="342900" indent="-342900">
-              <a:lnSpc>
-                <a:spcPts val="1300"/>
-              </a:lnSpc>
-              <a:spcAft>
-                <a:spcPts val="200"/>
-              </a:spcAft>
-              <a:buSzPct val="100000"/>
-              <a:buChar char="▪"/>
-            </a:pPr>
-            <a:r>
-              <a:rPr lang="en-US" sz="980" dirty="0">
-                <a:solidFill>
-                  <a:srgbClr val="1A1A1A"/>
-                </a:solidFill>
-                <a:latin typeface="Yu Gothic" pitchFamily="34" charset="0"/>
-                <a:ea typeface="Yu Gothic" pitchFamily="34" charset="-122"/>
-                <a:cs typeface="Yu Gothic" pitchFamily="34" charset="-120"/>
-              </a:rPr>
-              <a:t>創業55年の酒販業実績による、生産者・インポーターとの信頼とパイプ</a:t>
-            </a:r>
-            <a:endParaRPr lang="en-US" sz="980" dirty="0"/>
-          </a:p>
-          <a:p>
-            <a:pPr marL="342900" indent="-342900">
-              <a:lnSpc>
-                <a:spcPts val="1300"/>
-              </a:lnSpc>
-              <a:spcAft>
-                <a:spcPts val="200"/>
-              </a:spcAft>
-              <a:buSzPct val="100000"/>
-              <a:buChar char="▪"/>
-            </a:pPr>
-            <a:r>
-              <a:rPr lang="en-US" sz="980" dirty="0">
-                <a:solidFill>
-                  <a:srgbClr val="1A1A1A"/>
-                </a:solidFill>
-                <a:latin typeface="Yu Gothic" pitchFamily="34" charset="0"/>
-                <a:ea typeface="Yu Gothic" pitchFamily="34" charset="-122"/>
-                <a:cs typeface="Yu Gothic" pitchFamily="34" charset="-120"/>
-              </a:rPr>
-              <a:t>国内大手インポーターとの直接取引による特価・正規品仕入</a:t>
-            </a:r>
-            <a:endParaRPr lang="en-US" sz="980" dirty="0"/>
-          </a:p>
-          <a:p>
-            <a:pPr marL="342900" indent="-342900">
-              <a:lnSpc>
-                <a:spcPts val="1300"/>
-              </a:lnSpc>
-              <a:spcAft>
-                <a:spcPts val="200"/>
-              </a:spcAft>
-              <a:buSzPct val="100000"/>
-              <a:buChar char="▪"/>
-            </a:pPr>
-            <a:r>
-              <a:rPr lang="en-US" sz="980" dirty="0">
-                <a:solidFill>
-                  <a:srgbClr val="1A1A1A"/>
-                </a:solidFill>
-                <a:latin typeface="Yu Gothic" pitchFamily="34" charset="0"/>
-                <a:ea typeface="Yu Gothic" pitchFamily="34" charset="-122"/>
-                <a:cs typeface="Yu Gothic" pitchFamily="34" charset="-120"/>
-              </a:rPr>
-              <a:t>海外輸出入ライセンスを活かした独自の仕入ネットワークと情報収集</a:t>
-            </a:r>
-            <a:endParaRPr lang="en-US" sz="980" dirty="0"/>
-          </a:p>
-        </p:txBody>
-      </p:sp>
-      <p:sp>
-        <p:nvSpPr>
-          <p:cNvPr id="13" name="Shape 10"/>
-          <p:cNvSpPr/>
-          <p:nvPr/>
-        </p:nvSpPr>
-        <p:spPr>
-          <a:xfrm>
-            <a:off x="984352" y="4315968"/>
-            <a:ext cx="10222992" cy="0"/>
-          </a:xfrm>
-          <a:prstGeom prst="line">
-            <a:avLst/>
-          </a:prstGeom>
-          <a:noFill/>
-          <a:ln w="12700">
-            <a:solidFill>
-              <a:srgbClr val="DDE0E2"/>
-            </a:solidFill>
-            <a:prstDash val="solid"/>
-          </a:ln>
-        </p:spPr>
-      </p:sp>
-      <p:sp>
-        <p:nvSpPr>
-          <p:cNvPr id="14" name="Shape 11"/>
-          <p:cNvSpPr/>
-          <p:nvPr/>
-        </p:nvSpPr>
-        <p:spPr>
-          <a:xfrm>
-            <a:off x="1258672" y="4042867"/>
-            <a:ext cx="1481328" cy="273101"/>
-          </a:xfrm>
-          <a:prstGeom prst="rect">
-            <a:avLst/>
-          </a:prstGeom>
-          <a:solidFill>
-            <a:srgbClr val="C68A65"/>
-          </a:solidFill>
-          <a:ln w="12700">
-            <a:solidFill>
-              <a:srgbClr val="333333"/>
-            </a:solidFill>
-            <a:prstDash val="solid"/>
-          </a:ln>
-        </p:spPr>
-      </p:sp>
-      <p:sp>
-        <p:nvSpPr>
-          <p:cNvPr id="15" name="Text 12"/>
-          <p:cNvSpPr/>
-          <p:nvPr/>
-        </p:nvSpPr>
-        <p:spPr>
-          <a:xfrm>
-            <a:off x="1258672" y="3695395"/>
-            <a:ext cx="1481328" cy="292608"/>
-          </a:xfrm>
-          <a:prstGeom prst="rect">
-            <a:avLst/>
-          </a:prstGeom>
-          <a:noFill/>
-          <a:ln/>
-        </p:spPr>
-        <p:txBody>
-          <a:bodyPr wrap="square" lIns="0" tIns="0" rIns="0" bIns="0" rtlCol="0" anchor="ctr"/>
-          <a:lstStyle/>
-          <a:p>
-            <a:pPr algn="ctr" indent="0" marL="0">
-              <a:buNone/>
-            </a:pPr>
-            <a:r>
-              <a:rPr lang="en-US" sz="1500" b="1" dirty="0">
-                <a:solidFill>
-                  <a:srgbClr val="A06D4C"/>
-                </a:solidFill>
-                <a:latin typeface="Yu Gothic" pitchFamily="34" charset="0"/>
-                <a:ea typeface="Yu Gothic" pitchFamily="34" charset="-122"/>
-                <a:cs typeface="Yu Gothic" pitchFamily="34" charset="-120"/>
-              </a:rPr>
-              <a:t>40</a:t>
-            </a:r>
-            <a:endParaRPr lang="en-US" sz="1500" dirty="0"/>
-          </a:p>
-        </p:txBody>
-      </p:sp>
-      <p:sp>
-        <p:nvSpPr>
-          <p:cNvPr id="16" name="Text 13"/>
-          <p:cNvSpPr/>
-          <p:nvPr/>
-        </p:nvSpPr>
-        <p:spPr>
-          <a:xfrm>
-            <a:off x="1258672" y="4407408"/>
-            <a:ext cx="1481328" cy="457200"/>
-          </a:xfrm>
-          <a:prstGeom prst="rect">
-            <a:avLst/>
-          </a:prstGeom>
-          <a:noFill/>
-          <a:ln/>
-        </p:spPr>
-        <p:txBody>
-          <a:bodyPr wrap="square" lIns="0" tIns="0" rIns="0" bIns="0" rtlCol="0" anchor="ctr"/>
-          <a:lstStyle/>
-          <a:p>
-            <a:pPr algn="ctr" indent="0" marL="0">
-              <a:lnSpc>
-                <a:spcPts val="1350"/>
-              </a:lnSpc>
-              <a:buNone/>
-            </a:pPr>
-            <a:r>
-              <a:rPr lang="en-US" sz="1000" dirty="0">
-                <a:solidFill>
-                  <a:srgbClr val="6E7378"/>
-                </a:solidFill>
-                <a:latin typeface="Yu Gothic" pitchFamily="34" charset="0"/>
-                <a:ea typeface="Yu Gothic" pitchFamily="34" charset="-122"/>
-                <a:cs typeface="Yu Gothic" pitchFamily="34" charset="-120"/>
-              </a:rPr>
-              <a:t>インポーター</a:t>
-            </a:r>
-            <a:endParaRPr lang="en-US" sz="1000" dirty="0"/>
-          </a:p>
-          <a:p>
-            <a:pPr algn="ctr" indent="0" marL="0">
-              <a:lnSpc>
-                <a:spcPts val="1350"/>
-              </a:lnSpc>
-              <a:buNone/>
-            </a:pPr>
-            <a:r>
-              <a:rPr lang="en-US" sz="1000" dirty="0">
-                <a:solidFill>
-                  <a:srgbClr val="6E7378"/>
-                </a:solidFill>
-                <a:latin typeface="Yu Gothic" pitchFamily="34" charset="0"/>
-                <a:ea typeface="Yu Gothic" pitchFamily="34" charset="-122"/>
-                <a:cs typeface="Yu Gothic" pitchFamily="34" charset="-120"/>
-              </a:rPr>
-              <a:t>仕入価格</a:t>
-            </a:r>
-            <a:endParaRPr lang="en-US" sz="1000" dirty="0"/>
-          </a:p>
-        </p:txBody>
-      </p:sp>
-      <p:sp>
-        <p:nvSpPr>
-          <p:cNvPr id="17" name="Text 14"/>
-          <p:cNvSpPr/>
-          <p:nvPr/>
-        </p:nvSpPr>
-        <p:spPr>
-          <a:xfrm>
-            <a:off x="1075792" y="3366211"/>
-            <a:ext cx="1847088" cy="274320"/>
-          </a:xfrm>
-          <a:prstGeom prst="rect">
-            <a:avLst/>
-          </a:prstGeom>
-          <a:noFill/>
-          <a:ln/>
-        </p:spPr>
-        <p:txBody>
-          <a:bodyPr wrap="square" lIns="0" tIns="0" rIns="0" bIns="0" rtlCol="0" anchor="ctr"/>
-          <a:lstStyle/>
-          <a:p>
-            <a:pPr algn="ctr" indent="0" marL="0">
-              <a:buNone/>
-            </a:pPr>
-            <a:r>
-              <a:rPr lang="en-US" sz="1100" b="1" dirty="0">
-                <a:solidFill>
-                  <a:srgbClr val="A06D4C"/>
-                </a:solidFill>
-                <a:latin typeface="Yu Gothic" pitchFamily="34" charset="0"/>
-                <a:ea typeface="Yu Gothic" pitchFamily="34" charset="-122"/>
-                <a:cs typeface="Yu Gothic" pitchFamily="34" charset="-120"/>
-              </a:rPr>
-              <a:t>WineBank はここ</a:t>
-            </a:r>
-            <a:endParaRPr lang="en-US" sz="1100" dirty="0"/>
-          </a:p>
-        </p:txBody>
-      </p:sp>
-      <p:sp>
-        <p:nvSpPr>
-          <p:cNvPr id="18" name="Shape 15"/>
-          <p:cNvSpPr/>
-          <p:nvPr/>
-        </p:nvSpPr>
-        <p:spPr>
-          <a:xfrm>
-            <a:off x="3306928" y="3906317"/>
-            <a:ext cx="1481328" cy="409651"/>
-          </a:xfrm>
-          <a:prstGeom prst="rect">
-            <a:avLst/>
-          </a:prstGeom>
-          <a:solidFill>
-            <a:srgbClr val="9AA1A6"/>
-          </a:solidFill>
-          <a:ln w="12700">
-            <a:solidFill>
-              <a:srgbClr val="333333"/>
-            </a:solidFill>
-            <a:prstDash val="solid"/>
-          </a:ln>
-        </p:spPr>
-      </p:sp>
-      <p:sp>
-        <p:nvSpPr>
-          <p:cNvPr id="19" name="Text 16"/>
-          <p:cNvSpPr/>
-          <p:nvPr/>
-        </p:nvSpPr>
-        <p:spPr>
-          <a:xfrm>
-            <a:off x="3306928" y="3558845"/>
-            <a:ext cx="1481328" cy="292608"/>
-          </a:xfrm>
-          <a:prstGeom prst="rect">
-            <a:avLst/>
-          </a:prstGeom>
-          <a:noFill/>
-          <a:ln/>
-        </p:spPr>
-        <p:txBody>
-          <a:bodyPr wrap="square" lIns="0" tIns="0" rIns="0" bIns="0" rtlCol="0" anchor="ctr"/>
-          <a:lstStyle/>
-          <a:p>
-            <a:pPr algn="ctr" indent="0" marL="0">
-              <a:buNone/>
-            </a:pPr>
-            <a:r>
-              <a:rPr lang="en-US" sz="1500" b="1" dirty="0">
-                <a:solidFill>
-                  <a:srgbClr val="1A1A1A"/>
-                </a:solidFill>
-                <a:latin typeface="Yu Gothic" pitchFamily="34" charset="0"/>
-                <a:ea typeface="Yu Gothic" pitchFamily="34" charset="-122"/>
-                <a:cs typeface="Yu Gothic" pitchFamily="34" charset="-120"/>
-              </a:rPr>
-              <a:t>60</a:t>
-            </a:r>
-            <a:endParaRPr lang="en-US" sz="1500" dirty="0"/>
-          </a:p>
-        </p:txBody>
-      </p:sp>
-      <p:sp>
-        <p:nvSpPr>
-          <p:cNvPr id="20" name="Text 17"/>
-          <p:cNvSpPr/>
-          <p:nvPr/>
-        </p:nvSpPr>
-        <p:spPr>
-          <a:xfrm>
-            <a:off x="3306928" y="4407408"/>
-            <a:ext cx="1481328" cy="457200"/>
-          </a:xfrm>
-          <a:prstGeom prst="rect">
-            <a:avLst/>
-          </a:prstGeom>
-          <a:noFill/>
-          <a:ln/>
-        </p:spPr>
-        <p:txBody>
-          <a:bodyPr wrap="square" lIns="0" tIns="0" rIns="0" bIns="0" rtlCol="0" anchor="ctr"/>
-          <a:lstStyle/>
-          <a:p>
-            <a:pPr algn="ctr" indent="0" marL="0">
-              <a:lnSpc>
-                <a:spcPts val="1350"/>
-              </a:lnSpc>
-              <a:buNone/>
-            </a:pPr>
-            <a:r>
-              <a:rPr lang="en-US" sz="1000" dirty="0">
-                <a:solidFill>
-                  <a:srgbClr val="6E7378"/>
-                </a:solidFill>
-                <a:latin typeface="Yu Gothic" pitchFamily="34" charset="0"/>
-                <a:ea typeface="Yu Gothic" pitchFamily="34" charset="-122"/>
-                <a:cs typeface="Yu Gothic" pitchFamily="34" charset="-120"/>
-              </a:rPr>
-              <a:t>酒販店①</a:t>
-            </a:r>
-            <a:endParaRPr lang="en-US" sz="1000" dirty="0"/>
-          </a:p>
-          <a:p>
-            <a:pPr algn="ctr" indent="0" marL="0">
-              <a:lnSpc>
-                <a:spcPts val="1350"/>
-              </a:lnSpc>
-              <a:buNone/>
-            </a:pPr>
-            <a:r>
-              <a:rPr lang="en-US" sz="1000" dirty="0">
-                <a:solidFill>
-                  <a:srgbClr val="6E7378"/>
-                </a:solidFill>
-                <a:latin typeface="Yu Gothic" pitchFamily="34" charset="0"/>
-                <a:ea typeface="Yu Gothic" pitchFamily="34" charset="-122"/>
-                <a:cs typeface="Yu Gothic" pitchFamily="34" charset="-120"/>
-              </a:rPr>
-              <a:t>仕入価格</a:t>
-            </a:r>
-            <a:endParaRPr lang="en-US" sz="1000" dirty="0"/>
-          </a:p>
-        </p:txBody>
-      </p:sp>
-      <p:sp>
-        <p:nvSpPr>
-          <p:cNvPr id="21" name="Shape 18"/>
-          <p:cNvSpPr/>
-          <p:nvPr/>
-        </p:nvSpPr>
-        <p:spPr>
-          <a:xfrm>
-            <a:off x="5355184" y="3838042"/>
-            <a:ext cx="1481328" cy="477926"/>
-          </a:xfrm>
-          <a:prstGeom prst="rect">
-            <a:avLst/>
-          </a:prstGeom>
-          <a:solidFill>
-            <a:srgbClr val="9AA1A6"/>
-          </a:solidFill>
-          <a:ln w="12700">
-            <a:solidFill>
-              <a:srgbClr val="333333"/>
-            </a:solidFill>
-            <a:prstDash val="solid"/>
-          </a:ln>
-        </p:spPr>
-      </p:sp>
-      <p:sp>
-        <p:nvSpPr>
-          <p:cNvPr id="22" name="Text 19"/>
-          <p:cNvSpPr/>
-          <p:nvPr/>
-        </p:nvSpPr>
-        <p:spPr>
-          <a:xfrm>
-            <a:off x="5355184" y="3490570"/>
-            <a:ext cx="1481328" cy="292608"/>
-          </a:xfrm>
-          <a:prstGeom prst="rect">
-            <a:avLst/>
-          </a:prstGeom>
-          <a:noFill/>
-          <a:ln/>
-        </p:spPr>
-        <p:txBody>
-          <a:bodyPr wrap="square" lIns="0" tIns="0" rIns="0" bIns="0" rtlCol="0" anchor="ctr"/>
-          <a:lstStyle/>
-          <a:p>
-            <a:pPr algn="ctr" indent="0" marL="0">
-              <a:buNone/>
-            </a:pPr>
-            <a:r>
-              <a:rPr lang="en-US" sz="1500" b="1" dirty="0">
-                <a:solidFill>
-                  <a:srgbClr val="1A1A1A"/>
-                </a:solidFill>
-                <a:latin typeface="Yu Gothic" pitchFamily="34" charset="0"/>
-                <a:ea typeface="Yu Gothic" pitchFamily="34" charset="-122"/>
-                <a:cs typeface="Yu Gothic" pitchFamily="34" charset="-120"/>
-              </a:rPr>
-              <a:t>70</a:t>
-            </a:r>
-            <a:endParaRPr lang="en-US" sz="1500" dirty="0"/>
-          </a:p>
-        </p:txBody>
-      </p:sp>
-      <p:sp>
-        <p:nvSpPr>
-          <p:cNvPr id="23" name="Text 20"/>
-          <p:cNvSpPr/>
-          <p:nvPr/>
-        </p:nvSpPr>
-        <p:spPr>
-          <a:xfrm>
-            <a:off x="5355184" y="4407408"/>
-            <a:ext cx="1481328" cy="457200"/>
-          </a:xfrm>
-          <a:prstGeom prst="rect">
-            <a:avLst/>
-          </a:prstGeom>
-          <a:noFill/>
-          <a:ln/>
-        </p:spPr>
-        <p:txBody>
-          <a:bodyPr wrap="square" lIns="0" tIns="0" rIns="0" bIns="0" rtlCol="0" anchor="ctr"/>
-          <a:lstStyle/>
-          <a:p>
-            <a:pPr algn="ctr" indent="0" marL="0">
-              <a:lnSpc>
-                <a:spcPts val="1350"/>
-              </a:lnSpc>
-              <a:buNone/>
-            </a:pPr>
-            <a:r>
-              <a:rPr lang="en-US" sz="1000" dirty="0">
-                <a:solidFill>
-                  <a:srgbClr val="6E7378"/>
-                </a:solidFill>
-                <a:latin typeface="Yu Gothic" pitchFamily="34" charset="0"/>
-                <a:ea typeface="Yu Gothic" pitchFamily="34" charset="-122"/>
-                <a:cs typeface="Yu Gothic" pitchFamily="34" charset="-120"/>
-              </a:rPr>
-              <a:t>酒販店②</a:t>
-            </a:r>
-            <a:endParaRPr lang="en-US" sz="1000" dirty="0"/>
-          </a:p>
-          <a:p>
-            <a:pPr algn="ctr" indent="0" marL="0">
-              <a:lnSpc>
-                <a:spcPts val="1350"/>
-              </a:lnSpc>
-              <a:buNone/>
-            </a:pPr>
-            <a:r>
-              <a:rPr lang="en-US" sz="1000" dirty="0">
-                <a:solidFill>
-                  <a:srgbClr val="6E7378"/>
-                </a:solidFill>
-                <a:latin typeface="Yu Gothic" pitchFamily="34" charset="0"/>
-                <a:ea typeface="Yu Gothic" pitchFamily="34" charset="-122"/>
-                <a:cs typeface="Yu Gothic" pitchFamily="34" charset="-120"/>
-              </a:rPr>
-              <a:t>仕入価格</a:t>
-            </a:r>
-            <a:endParaRPr lang="en-US" sz="1000" dirty="0"/>
-          </a:p>
-        </p:txBody>
-      </p:sp>
-      <p:sp>
-        <p:nvSpPr>
-          <p:cNvPr id="24" name="Shape 21"/>
-          <p:cNvSpPr/>
-          <p:nvPr/>
-        </p:nvSpPr>
-        <p:spPr>
-          <a:xfrm>
-            <a:off x="7403440" y="3633216"/>
-            <a:ext cx="1481328" cy="682752"/>
-          </a:xfrm>
-          <a:prstGeom prst="rect">
-            <a:avLst/>
-          </a:prstGeom>
-          <a:solidFill>
-            <a:srgbClr val="9AA1A6"/>
-          </a:solidFill>
-          <a:ln w="12700">
-            <a:solidFill>
-              <a:srgbClr val="333333"/>
-            </a:solidFill>
-            <a:prstDash val="solid"/>
-          </a:ln>
-        </p:spPr>
-      </p:sp>
-      <p:sp>
-        <p:nvSpPr>
-          <p:cNvPr id="25" name="Text 22"/>
-          <p:cNvSpPr/>
-          <p:nvPr/>
-        </p:nvSpPr>
-        <p:spPr>
-          <a:xfrm>
-            <a:off x="7403440" y="3285744"/>
-            <a:ext cx="1481328" cy="292608"/>
-          </a:xfrm>
-          <a:prstGeom prst="rect">
-            <a:avLst/>
-          </a:prstGeom>
-          <a:noFill/>
-          <a:ln/>
-        </p:spPr>
-        <p:txBody>
-          <a:bodyPr wrap="square" lIns="0" tIns="0" rIns="0" bIns="0" rtlCol="0" anchor="ctr"/>
-          <a:lstStyle/>
-          <a:p>
-            <a:pPr algn="ctr" indent="0" marL="0">
-              <a:buNone/>
-            </a:pPr>
-            <a:r>
-              <a:rPr lang="en-US" sz="1500" b="1" dirty="0">
-                <a:solidFill>
-                  <a:srgbClr val="1A1A1A"/>
-                </a:solidFill>
-                <a:latin typeface="Yu Gothic" pitchFamily="34" charset="0"/>
-                <a:ea typeface="Yu Gothic" pitchFamily="34" charset="-122"/>
-                <a:cs typeface="Yu Gothic" pitchFamily="34" charset="-120"/>
-              </a:rPr>
-              <a:t>80〜100</a:t>
-            </a:r>
-            <a:endParaRPr lang="en-US" sz="1500" dirty="0"/>
-          </a:p>
-        </p:txBody>
-      </p:sp>
-      <p:sp>
-        <p:nvSpPr>
-          <p:cNvPr id="26" name="Text 23"/>
-          <p:cNvSpPr/>
-          <p:nvPr/>
-        </p:nvSpPr>
-        <p:spPr>
-          <a:xfrm>
-            <a:off x="7403440" y="4407408"/>
-            <a:ext cx="1481328" cy="457200"/>
-          </a:xfrm>
-          <a:prstGeom prst="rect">
-            <a:avLst/>
-          </a:prstGeom>
-          <a:noFill/>
-          <a:ln/>
-        </p:spPr>
-        <p:txBody>
-          <a:bodyPr wrap="square" lIns="0" tIns="0" rIns="0" bIns="0" rtlCol="0" anchor="ctr"/>
-          <a:lstStyle/>
-          <a:p>
-            <a:pPr algn="ctr" indent="0" marL="0">
-              <a:lnSpc>
-                <a:spcPts val="1350"/>
-              </a:lnSpc>
-              <a:buNone/>
-            </a:pPr>
-            <a:r>
-              <a:rPr lang="en-US" sz="1000" dirty="0">
-                <a:solidFill>
-                  <a:srgbClr val="6E7378"/>
-                </a:solidFill>
-                <a:latin typeface="Yu Gothic" pitchFamily="34" charset="0"/>
-                <a:ea typeface="Yu Gothic" pitchFamily="34" charset="-122"/>
-                <a:cs typeface="Yu Gothic" pitchFamily="34" charset="-120"/>
-              </a:rPr>
-              <a:t>一般消費者</a:t>
-            </a:r>
-            <a:endParaRPr lang="en-US" sz="1000" dirty="0"/>
-          </a:p>
-          <a:p>
-            <a:pPr algn="ctr" indent="0" marL="0">
-              <a:lnSpc>
-                <a:spcPts val="1350"/>
-              </a:lnSpc>
-              <a:buNone/>
-            </a:pPr>
-            <a:r>
-              <a:rPr lang="en-US" sz="1000" dirty="0">
-                <a:solidFill>
-                  <a:srgbClr val="6E7378"/>
-                </a:solidFill>
-                <a:latin typeface="Yu Gothic" pitchFamily="34" charset="0"/>
-                <a:ea typeface="Yu Gothic" pitchFamily="34" charset="-122"/>
-                <a:cs typeface="Yu Gothic" pitchFamily="34" charset="-120"/>
-              </a:rPr>
-              <a:t>購入価格</a:t>
-            </a:r>
-            <a:endParaRPr lang="en-US" sz="1000" dirty="0"/>
-          </a:p>
-        </p:txBody>
-      </p:sp>
-      <p:sp>
-        <p:nvSpPr>
-          <p:cNvPr id="27" name="Shape 24"/>
-          <p:cNvSpPr/>
-          <p:nvPr/>
-        </p:nvSpPr>
-        <p:spPr>
-          <a:xfrm>
-            <a:off x="9451696" y="2267712"/>
-            <a:ext cx="1481328" cy="1024128"/>
-          </a:xfrm>
-          <a:prstGeom prst="rect">
-            <a:avLst/>
-          </a:prstGeom>
-          <a:solidFill>
-            <a:srgbClr val="2F3941">
-              <a:alpha val="45000"/>
-            </a:srgbClr>
-          </a:solidFill>
-          <a:ln w="12700">
-            <a:solidFill>
-              <a:srgbClr val="333333"/>
-            </a:solidFill>
-            <a:prstDash val="solid"/>
-          </a:ln>
-        </p:spPr>
-      </p:sp>
-      <p:sp>
-        <p:nvSpPr>
-          <p:cNvPr id="28" name="Shape 25"/>
-          <p:cNvSpPr/>
-          <p:nvPr/>
-        </p:nvSpPr>
-        <p:spPr>
-          <a:xfrm>
-            <a:off x="9451696" y="3291840"/>
-            <a:ext cx="1481328" cy="1024128"/>
-          </a:xfrm>
-          <a:prstGeom prst="rect">
-            <a:avLst/>
-          </a:prstGeom>
-          <a:solidFill>
-            <a:srgbClr val="2F3941"/>
-          </a:solidFill>
-          <a:ln w="12700">
-            <a:solidFill>
-              <a:srgbClr val="333333"/>
-            </a:solidFill>
-            <a:prstDash val="solid"/>
-          </a:ln>
-        </p:spPr>
-      </p:sp>
-      <p:sp>
-        <p:nvSpPr>
-          <p:cNvPr id="29" name="Text 26"/>
-          <p:cNvSpPr/>
-          <p:nvPr/>
-        </p:nvSpPr>
-        <p:spPr>
-          <a:xfrm>
-            <a:off x="9451696" y="1920240"/>
-            <a:ext cx="1481328" cy="292608"/>
-          </a:xfrm>
-          <a:prstGeom prst="rect">
-            <a:avLst/>
-          </a:prstGeom>
-          <a:noFill/>
-          <a:ln/>
-        </p:spPr>
-        <p:txBody>
-          <a:bodyPr wrap="square" lIns="0" tIns="0" rIns="0" bIns="0" rtlCol="0" anchor="ctr"/>
-          <a:lstStyle/>
-          <a:p>
-            <a:pPr algn="ctr" indent="0" marL="0">
-              <a:buNone/>
-            </a:pPr>
-            <a:r>
-              <a:rPr lang="en-US" sz="1500" b="1" dirty="0">
-                <a:solidFill>
-                  <a:srgbClr val="1A1A1A"/>
-                </a:solidFill>
-                <a:latin typeface="Yu Gothic" pitchFamily="34" charset="0"/>
-                <a:ea typeface="Yu Gothic" pitchFamily="34" charset="-122"/>
-                <a:cs typeface="Yu Gothic" pitchFamily="34" charset="-120"/>
-              </a:rPr>
-              <a:t>150〜300</a:t>
-            </a:r>
-            <a:endParaRPr lang="en-US" sz="1500" dirty="0"/>
-          </a:p>
-        </p:txBody>
-      </p:sp>
-      <p:sp>
-        <p:nvSpPr>
-          <p:cNvPr id="30" name="Text 27"/>
-          <p:cNvSpPr/>
-          <p:nvPr/>
-        </p:nvSpPr>
-        <p:spPr>
-          <a:xfrm>
-            <a:off x="9451696" y="4407408"/>
-            <a:ext cx="1481328" cy="457200"/>
-          </a:xfrm>
-          <a:prstGeom prst="rect">
-            <a:avLst/>
-          </a:prstGeom>
-          <a:noFill/>
-          <a:ln/>
-        </p:spPr>
-        <p:txBody>
-          <a:bodyPr wrap="square" lIns="0" tIns="0" rIns="0" bIns="0" rtlCol="0" anchor="ctr"/>
-          <a:lstStyle/>
-          <a:p>
-            <a:pPr algn="ctr" indent="0" marL="0">
-              <a:lnSpc>
-                <a:spcPts val="1350"/>
-              </a:lnSpc>
-              <a:buNone/>
-            </a:pPr>
-            <a:r>
-              <a:rPr lang="en-US" sz="1000" dirty="0">
-                <a:solidFill>
-                  <a:srgbClr val="6E7378"/>
-                </a:solidFill>
-                <a:latin typeface="Yu Gothic" pitchFamily="34" charset="0"/>
-                <a:ea typeface="Yu Gothic" pitchFamily="34" charset="-122"/>
-                <a:cs typeface="Yu Gothic" pitchFamily="34" charset="-120"/>
-              </a:rPr>
-              <a:t>レストラン</a:t>
-            </a:r>
-            <a:endParaRPr lang="en-US" sz="1000" dirty="0"/>
-          </a:p>
-          <a:p>
-            <a:pPr algn="ctr" indent="0" marL="0">
-              <a:lnSpc>
-                <a:spcPts val="1350"/>
-              </a:lnSpc>
-              <a:buNone/>
-            </a:pPr>
-            <a:r>
-              <a:rPr lang="en-US" sz="1000" dirty="0">
-                <a:solidFill>
-                  <a:srgbClr val="6E7378"/>
-                </a:solidFill>
-                <a:latin typeface="Yu Gothic" pitchFamily="34" charset="0"/>
-                <a:ea typeface="Yu Gothic" pitchFamily="34" charset="-122"/>
-                <a:cs typeface="Yu Gothic" pitchFamily="34" charset="-120"/>
-              </a:rPr>
-              <a:t>店頭価格</a:t>
-            </a:r>
-            <a:endParaRPr lang="en-US" sz="1000" dirty="0"/>
-          </a:p>
-        </p:txBody>
-      </p:sp>
-      <p:sp>
-        <p:nvSpPr>
-          <p:cNvPr id="31" name="Shape 28"/>
-          <p:cNvSpPr/>
-          <p:nvPr/>
-        </p:nvSpPr>
-        <p:spPr>
-          <a:xfrm>
-            <a:off x="566928" y="4992624"/>
-            <a:ext cx="11057839" cy="932688"/>
-          </a:xfrm>
-          <a:prstGeom prst="roundRect">
-            <a:avLst>
-              <a:gd name="adj" fmla="val 4902"/>
-            </a:avLst>
-          </a:prstGeom>
-          <a:solidFill>
-            <a:srgbClr val="2F3941"/>
-          </a:solidFill>
-          <a:ln w="12700">
-            <a:solidFill>
-              <a:srgbClr val="333333"/>
-            </a:solidFill>
-            <a:prstDash val="solid"/>
-          </a:ln>
-        </p:spPr>
-      </p:sp>
-      <p:sp>
-        <p:nvSpPr>
-          <p:cNvPr id="32" name="Text 29"/>
-          <p:cNvSpPr/>
-          <p:nvPr/>
-        </p:nvSpPr>
-        <p:spPr>
-          <a:xfrm>
-            <a:off x="877824" y="4992624"/>
-            <a:ext cx="4023360" cy="932688"/>
-          </a:xfrm>
-          <a:prstGeom prst="rect">
-            <a:avLst/>
-          </a:prstGeom>
-          <a:noFill/>
-          <a:ln/>
-        </p:spPr>
-        <p:txBody>
-          <a:bodyPr wrap="square" lIns="0" tIns="0" rIns="0" bIns="0" rtlCol="0" anchor="ctr"/>
-          <a:lstStyle/>
-          <a:p>
-            <a:pPr indent="0" marL="0">
-              <a:lnSpc>
-                <a:spcPts val="2100"/>
-              </a:lnSpc>
-              <a:buNone/>
-            </a:pPr>
-            <a:r>
-              <a:rPr lang="en-US" sz="1500" b="1" dirty="0">
-                <a:solidFill>
-                  <a:srgbClr val="EFDCCE"/>
-                </a:solidFill>
-                <a:latin typeface="Yu Gothic" pitchFamily="34" charset="0"/>
-                <a:ea typeface="Yu Gothic" pitchFamily="34" charset="-122"/>
-                <a:cs typeface="Yu Gothic" pitchFamily="34" charset="-120"/>
-              </a:rPr>
-              <a:t>レストラン店頭価格の</a:t>
-            </a:r>
-            <a:endParaRPr lang="en-US" sz="1500" dirty="0"/>
-          </a:p>
-          <a:p>
-            <a:pPr indent="0" marL="0">
-              <a:lnSpc>
-                <a:spcPts val="2100"/>
-              </a:lnSpc>
-              <a:buNone/>
-            </a:pPr>
-            <a:r>
-              <a:rPr lang="en-US" sz="1500" b="1" dirty="0">
-                <a:solidFill>
-                  <a:srgbClr val="EFDCCE"/>
-                </a:solidFill>
-                <a:latin typeface="Yu Gothic" pitchFamily="34" charset="0"/>
-                <a:ea typeface="Yu Gothic" pitchFamily="34" charset="-122"/>
-                <a:cs typeface="Yu Gothic" pitchFamily="34" charset="-120"/>
-              </a:rPr>
-              <a:t>1/4〜1/7 の水準で仕入れる。</a:t>
-            </a:r>
-            <a:endParaRPr lang="en-US" sz="1500" dirty="0"/>
-          </a:p>
-        </p:txBody>
-      </p:sp>
-      <p:sp>
-        <p:nvSpPr>
-          <p:cNvPr id="33" name="Text 30"/>
-          <p:cNvSpPr/>
-          <p:nvPr/>
-        </p:nvSpPr>
-        <p:spPr>
-          <a:xfrm>
-            <a:off x="5230368" y="5138928"/>
-            <a:ext cx="2121408" cy="256032"/>
-          </a:xfrm>
-          <a:prstGeom prst="rect">
-            <a:avLst/>
-          </a:prstGeom>
-          <a:noFill/>
-          <a:ln/>
-        </p:spPr>
-        <p:txBody>
-          <a:bodyPr wrap="square" lIns="0" tIns="0" rIns="0" bIns="0" rtlCol="0" anchor="ctr"/>
-          <a:lstStyle/>
-          <a:p>
-            <a:pPr indent="0" marL="0">
-              <a:buNone/>
-            </a:pPr>
-            <a:r>
-              <a:rPr lang="en-US" sz="1050" b="1" dirty="0">
-                <a:solidFill>
-                  <a:srgbClr val="FFFFFF"/>
-                </a:solidFill>
-                <a:latin typeface="Yu Gothic" pitchFamily="34" charset="0"/>
-                <a:ea typeface="Yu Gothic" pitchFamily="34" charset="-122"/>
-                <a:cs typeface="Yu Gothic" pitchFamily="34" charset="-120"/>
-              </a:rPr>
-              <a:t>飲食店は卸値で仕入れられる</a:t>
-            </a:r>
-            <a:endParaRPr lang="en-US" sz="1050" dirty="0"/>
-          </a:p>
-        </p:txBody>
-      </p:sp>
-      <p:sp>
-        <p:nvSpPr>
-          <p:cNvPr id="34" name="Text 31"/>
-          <p:cNvSpPr/>
-          <p:nvPr/>
-        </p:nvSpPr>
-        <p:spPr>
-          <a:xfrm>
-            <a:off x="5230368" y="5413248"/>
-            <a:ext cx="2121408" cy="438912"/>
-          </a:xfrm>
-          <a:prstGeom prst="rect">
-            <a:avLst/>
-          </a:prstGeom>
-          <a:noFill/>
-          <a:ln/>
-        </p:spPr>
-        <p:txBody>
-          <a:bodyPr wrap="square" lIns="0" tIns="0" rIns="0" bIns="0" rtlCol="0" anchor="ctr"/>
-          <a:lstStyle/>
-          <a:p>
-            <a:pPr indent="0" marL="0">
-              <a:lnSpc>
-                <a:spcPts val="1250"/>
-              </a:lnSpc>
-              <a:buNone/>
-            </a:pPr>
-            <a:r>
-              <a:rPr lang="en-US" sz="900" dirty="0">
-                <a:solidFill>
-                  <a:srgbClr val="B9BEC2"/>
-                </a:solidFill>
-                <a:latin typeface="Yu Gothic" pitchFamily="34" charset="0"/>
-                <a:ea typeface="Yu Gothic" pitchFamily="34" charset="-122"/>
-                <a:cs typeface="Yu Gothic" pitchFamily="34" charset="-120"/>
-              </a:rPr>
-              <a:t>在庫を持たずに、店内価格の</a:t>
-            </a:r>
-            <a:endParaRPr lang="en-US" sz="900" dirty="0"/>
-          </a:p>
-          <a:p>
-            <a:pPr indent="0" marL="0">
-              <a:lnSpc>
-                <a:spcPts val="1250"/>
-              </a:lnSpc>
-              <a:buNone/>
-            </a:pPr>
-            <a:r>
-              <a:rPr lang="en-US" sz="900" dirty="0">
-                <a:solidFill>
-                  <a:srgbClr val="B9BEC2"/>
-                </a:solidFill>
-                <a:latin typeface="Yu Gothic" pitchFamily="34" charset="0"/>
-                <a:ea typeface="Yu Gothic" pitchFamily="34" charset="-122"/>
-                <a:cs typeface="Yu Gothic" pitchFamily="34" charset="-120"/>
-              </a:rPr>
-              <a:t>数分の一で調達できる</a:t>
-            </a:r>
-            <a:endParaRPr lang="en-US" sz="900" dirty="0"/>
-          </a:p>
-        </p:txBody>
-      </p:sp>
-      <p:sp>
-        <p:nvSpPr>
-          <p:cNvPr id="35" name="Text 32"/>
-          <p:cNvSpPr/>
-          <p:nvPr/>
-        </p:nvSpPr>
-        <p:spPr>
-          <a:xfrm>
-            <a:off x="7443216" y="5138928"/>
-            <a:ext cx="2121408" cy="256032"/>
-          </a:xfrm>
-          <a:prstGeom prst="rect">
-            <a:avLst/>
-          </a:prstGeom>
-          <a:noFill/>
-          <a:ln/>
-        </p:spPr>
-        <p:txBody>
-          <a:bodyPr wrap="square" lIns="0" tIns="0" rIns="0" bIns="0" rtlCol="0" anchor="ctr"/>
-          <a:lstStyle/>
-          <a:p>
-            <a:pPr indent="0" marL="0">
-              <a:buNone/>
-            </a:pPr>
-            <a:r>
-              <a:rPr lang="en-US" sz="1050" b="1" dirty="0">
-                <a:solidFill>
-                  <a:srgbClr val="FFFFFF"/>
-                </a:solidFill>
-                <a:latin typeface="Yu Gothic" pitchFamily="34" charset="0"/>
-                <a:ea typeface="Yu Gothic" pitchFamily="34" charset="-122"/>
-                <a:cs typeface="Yu Gothic" pitchFamily="34" charset="-120"/>
-              </a:rPr>
-              <a:t>居住者にも余力を渡せる</a:t>
-            </a:r>
-            <a:endParaRPr lang="en-US" sz="1050" dirty="0"/>
-          </a:p>
-        </p:txBody>
-      </p:sp>
-      <p:sp>
-        <p:nvSpPr>
-          <p:cNvPr id="36" name="Text 33"/>
-          <p:cNvSpPr/>
-          <p:nvPr/>
-        </p:nvSpPr>
-        <p:spPr>
-          <a:xfrm>
-            <a:off x="7443216" y="5413248"/>
-            <a:ext cx="2121408" cy="438912"/>
-          </a:xfrm>
-          <a:prstGeom prst="rect">
-            <a:avLst/>
-          </a:prstGeom>
-          <a:noFill/>
-          <a:ln/>
-        </p:spPr>
-        <p:txBody>
-          <a:bodyPr wrap="square" lIns="0" tIns="0" rIns="0" bIns="0" rtlCol="0" anchor="ctr"/>
-          <a:lstStyle/>
-          <a:p>
-            <a:pPr indent="0" marL="0">
-              <a:lnSpc>
-                <a:spcPts val="1250"/>
-              </a:lnSpc>
-              <a:buNone/>
-            </a:pPr>
-            <a:r>
-              <a:rPr lang="en-US" sz="900" dirty="0">
-                <a:solidFill>
-                  <a:srgbClr val="B9BEC2"/>
-                </a:solidFill>
-                <a:latin typeface="Yu Gothic" pitchFamily="34" charset="0"/>
-                <a:ea typeface="Yu Gothic" pitchFamily="34" charset="-122"/>
-                <a:cs typeface="Yu Gothic" pitchFamily="34" charset="-120"/>
-              </a:rPr>
-              <a:t>卸値×1.1でも、市中の</a:t>
-            </a:r>
-            <a:endParaRPr lang="en-US" sz="900" dirty="0"/>
-          </a:p>
-          <a:p>
-            <a:pPr indent="0" marL="0">
-              <a:lnSpc>
-                <a:spcPts val="1250"/>
-              </a:lnSpc>
-              <a:buNone/>
-            </a:pPr>
-            <a:r>
-              <a:rPr lang="en-US" sz="900" dirty="0">
-                <a:solidFill>
-                  <a:srgbClr val="B9BEC2"/>
-                </a:solidFill>
-                <a:latin typeface="Yu Gothic" pitchFamily="34" charset="0"/>
-                <a:ea typeface="Yu Gothic" pitchFamily="34" charset="-122"/>
-                <a:cs typeface="Yu Gothic" pitchFamily="34" charset="-120"/>
-              </a:rPr>
-              <a:t>どの価格帯より有利</a:t>
-            </a:r>
-            <a:endParaRPr lang="en-US" sz="900" dirty="0"/>
-          </a:p>
-        </p:txBody>
-      </p:sp>
-      <p:sp>
-        <p:nvSpPr>
-          <p:cNvPr id="37" name="Text 34"/>
-          <p:cNvSpPr/>
-          <p:nvPr/>
-        </p:nvSpPr>
-        <p:spPr>
-          <a:xfrm>
-            <a:off x="9656064" y="5138928"/>
-            <a:ext cx="2121408" cy="256032"/>
-          </a:xfrm>
-          <a:prstGeom prst="rect">
-            <a:avLst/>
-          </a:prstGeom>
-          <a:noFill/>
-          <a:ln/>
-        </p:spPr>
-        <p:txBody>
-          <a:bodyPr wrap="square" lIns="0" tIns="0" rIns="0" bIns="0" rtlCol="0" anchor="ctr"/>
-          <a:lstStyle/>
-          <a:p>
-            <a:pPr indent="0" marL="0">
-              <a:buNone/>
-            </a:pPr>
-            <a:r>
-              <a:rPr lang="en-US" sz="1050" b="1" dirty="0">
-                <a:solidFill>
-                  <a:srgbClr val="FFFFFF"/>
-                </a:solidFill>
-                <a:latin typeface="Yu Gothic" pitchFamily="34" charset="0"/>
-                <a:ea typeface="Yu Gothic" pitchFamily="34" charset="-122"/>
-                <a:cs typeface="Yu Gothic" pitchFamily="34" charset="-120"/>
-              </a:rPr>
-              <a:t>新規参入は追随できない</a:t>
-            </a:r>
-            <a:endParaRPr lang="en-US" sz="1050" dirty="0"/>
-          </a:p>
-        </p:txBody>
-      </p:sp>
-      <p:sp>
-        <p:nvSpPr>
-          <p:cNvPr id="38" name="Text 35"/>
-          <p:cNvSpPr/>
-          <p:nvPr/>
-        </p:nvSpPr>
-        <p:spPr>
-          <a:xfrm>
-            <a:off x="9656064" y="5413248"/>
-            <a:ext cx="2121408" cy="438912"/>
-          </a:xfrm>
-          <a:prstGeom prst="rect">
-            <a:avLst/>
-          </a:prstGeom>
-          <a:noFill/>
-          <a:ln/>
-        </p:spPr>
-        <p:txBody>
-          <a:bodyPr wrap="square" lIns="0" tIns="0" rIns="0" bIns="0" rtlCol="0" anchor="ctr"/>
-          <a:lstStyle/>
-          <a:p>
-            <a:pPr indent="0" marL="0">
-              <a:lnSpc>
-                <a:spcPts val="1250"/>
-              </a:lnSpc>
-              <a:buNone/>
-            </a:pPr>
-            <a:r>
-              <a:rPr lang="en-US" sz="900" dirty="0">
-                <a:solidFill>
-                  <a:srgbClr val="B9BEC2"/>
-                </a:solidFill>
-                <a:latin typeface="Yu Gothic" pitchFamily="34" charset="0"/>
-                <a:ea typeface="Yu Gothic" pitchFamily="34" charset="-122"/>
-                <a:cs typeface="Yu Gothic" pitchFamily="34" charset="-120"/>
-              </a:rPr>
-              <a:t>参入業者は「70」の</a:t>
-            </a:r>
-            <a:endParaRPr lang="en-US" sz="900" dirty="0"/>
-          </a:p>
-          <a:p>
-            <a:pPr indent="0" marL="0">
-              <a:lnSpc>
-                <a:spcPts val="1250"/>
-              </a:lnSpc>
-              <a:buNone/>
-            </a:pPr>
-            <a:r>
-              <a:rPr lang="en-US" sz="900" dirty="0">
-                <a:solidFill>
-                  <a:srgbClr val="B9BEC2"/>
-                </a:solidFill>
-                <a:latin typeface="Yu Gothic" pitchFamily="34" charset="0"/>
-                <a:ea typeface="Yu Gothic" pitchFamily="34" charset="-122"/>
-                <a:cs typeface="Yu Gothic" pitchFamily="34" charset="-120"/>
-              </a:rPr>
-              <a:t>水準からしか始まらない</a:t>
-            </a:r>
-            <a:endParaRPr lang="en-US" sz="900" dirty="0"/>
-          </a:p>
-        </p:txBody>
-      </p:sp>
-      <p:sp>
-        <p:nvSpPr>
-          <p:cNvPr id="39" name="Text 36"/>
-          <p:cNvSpPr/>
-          <p:nvPr/>
-        </p:nvSpPr>
-        <p:spPr>
-          <a:xfrm>
-            <a:off x="566928" y="6035040"/>
-            <a:ext cx="10972800" cy="256032"/>
-          </a:xfrm>
-          <a:prstGeom prst="rect">
-            <a:avLst/>
-          </a:prstGeom>
-          <a:noFill/>
-          <a:ln/>
-        </p:spPr>
-        <p:txBody>
-          <a:bodyPr wrap="square" lIns="0" tIns="0" rIns="0" bIns="0" rtlCol="0" anchor="ctr"/>
-          <a:lstStyle/>
-          <a:p>
-            <a:pPr indent="0" marL="0">
-              <a:buNone/>
-            </a:pPr>
-            <a:r>
-              <a:rPr lang="en-US" sz="880" dirty="0">
-                <a:solidFill>
-                  <a:srgbClr val="A6ABAF"/>
-                </a:solidFill>
-                <a:latin typeface="Yu Gothic" pitchFamily="34" charset="0"/>
-                <a:ea typeface="Yu Gothic" pitchFamily="34" charset="-122"/>
-                <a:cs typeface="Yu Gothic" pitchFamily="34" charset="-120"/>
-              </a:rPr>
-              <a:t>※ 希望小売価格を100とした相対指数。ネット最安値／並行輸入価格は概ね80の水準。出典：当社資料。</a:t>
-            </a:r>
-            <a:endParaRPr lang="en-US" sz="880" dirty="0"/>
-          </a:p>
-        </p:txBody>
-      </p:sp>
     </p:spTree>
   </p:cSld>
   <p:clrMapOvr>
@@ -35162,7 +34956,7 @@
                 <a:ea typeface="Yu Gothic" pitchFamily="34" charset="-122"/>
                 <a:cs typeface="Yu Gothic" pitchFamily="34" charset="-120"/>
               </a:rPr>
-              <a:t>WineBank CLUB 会員特典の内訳</a:t>
+              <a:t>なぜ、Cloud Wine Cave の価格が成立するのか</a:t>
             </a:r>
             <a:endParaRPr lang="en-US" sz="2300" dirty="0"/>
           </a:p>
@@ -35204,7 +34998,7 @@
                 <a:ea typeface="Yu Gothic" pitchFamily="34" charset="-122"/>
                 <a:cs typeface="Yu Gothic" pitchFamily="34" charset="-120"/>
               </a:rPr>
-              <a:t>通常会員の年会費30万円に対し、提供サービスは46.4万円相当。ヒルズ枠ではこれを基準に条件を設計します。</a:t>
+              <a:t>ワイン流通は、生産者から消費者までに何段もの中間マージンが積み上がります。当社は最上流に立っています。</a:t>
             </a:r>
             <a:endParaRPr lang="en-US" sz="1150" dirty="0"/>
           </a:p>
@@ -35313,9 +35107,1625 @@
           </a:p>
         </p:txBody>
       </p:sp>
+      <p:sp>
+        <p:nvSpPr>
+          <p:cNvPr id="10" name="Shape 7"/>
+          <p:cNvSpPr/>
+          <p:nvPr/>
+        </p:nvSpPr>
+        <p:spPr>
+          <a:xfrm>
+            <a:off x="566928" y="1481328"/>
+            <a:ext cx="6583680" cy="1170432"/>
+          </a:xfrm>
+          <a:prstGeom prst="roundRect">
+            <a:avLst>
+              <a:gd name="adj" fmla="val 3906"/>
+            </a:avLst>
+          </a:prstGeom>
+          <a:solidFill>
+            <a:srgbClr val="F6F6F6"/>
+          </a:solidFill>
+          <a:ln w="12700">
+            <a:solidFill>
+              <a:srgbClr val="333333"/>
+            </a:solidFill>
+            <a:prstDash val="solid"/>
+          </a:ln>
+        </p:spPr>
+      </p:sp>
+      <p:sp>
+        <p:nvSpPr>
+          <p:cNvPr id="11" name="Text 8"/>
+          <p:cNvSpPr/>
+          <p:nvPr/>
+        </p:nvSpPr>
+        <p:spPr>
+          <a:xfrm>
+            <a:off x="841248" y="1609344"/>
+            <a:ext cx="6035040" cy="256032"/>
+          </a:xfrm>
+          <a:prstGeom prst="rect">
+            <a:avLst/>
+          </a:prstGeom>
+          <a:noFill/>
+          <a:ln/>
+        </p:spPr>
+        <p:txBody>
+          <a:bodyPr wrap="square" lIns="0" tIns="0" rIns="0" bIns="0" rtlCol="0" anchor="ctr"/>
+          <a:lstStyle/>
+          <a:p>
+            <a:pPr indent="0" marL="0">
+              <a:buNone/>
+            </a:pPr>
+            <a:r>
+              <a:rPr lang="en-US" sz="1300" b="1" dirty="0">
+                <a:solidFill>
+                  <a:srgbClr val="1A1A1A"/>
+                </a:solidFill>
+                <a:latin typeface="Yu Gothic" pitchFamily="34" charset="0"/>
+                <a:ea typeface="Yu Gothic" pitchFamily="34" charset="-122"/>
+                <a:cs typeface="Yu Gothic" pitchFamily="34" charset="-120"/>
+              </a:rPr>
+              <a:t>最上流に立てる理由</a:t>
+            </a:r>
+            <a:endParaRPr lang="en-US" sz="1300" dirty="0"/>
+          </a:p>
+        </p:txBody>
+      </p:sp>
+      <p:sp>
+        <p:nvSpPr>
+          <p:cNvPr id="12" name="Text 9"/>
+          <p:cNvSpPr/>
+          <p:nvPr/>
+        </p:nvSpPr>
+        <p:spPr>
+          <a:xfrm>
+            <a:off x="841248" y="1920240"/>
+            <a:ext cx="6035040" cy="640080"/>
+          </a:xfrm>
+          <a:prstGeom prst="rect">
+            <a:avLst/>
+          </a:prstGeom>
+          <a:noFill/>
+          <a:ln/>
+        </p:spPr>
+        <p:txBody>
+          <a:bodyPr wrap="square" lIns="0" tIns="0" rIns="0" bIns="0" rtlCol="0" anchor="ctr"/>
+          <a:lstStyle/>
+          <a:p>
+            <a:pPr marL="342900" indent="-342900">
+              <a:lnSpc>
+                <a:spcPts val="1300"/>
+              </a:lnSpc>
+              <a:spcAft>
+                <a:spcPts val="200"/>
+              </a:spcAft>
+              <a:buSzPct val="100000"/>
+              <a:buChar char="▪"/>
+            </a:pPr>
+            <a:r>
+              <a:rPr lang="en-US" sz="980" dirty="0">
+                <a:solidFill>
+                  <a:srgbClr val="1A1A1A"/>
+                </a:solidFill>
+                <a:latin typeface="Yu Gothic" pitchFamily="34" charset="0"/>
+                <a:ea typeface="Yu Gothic" pitchFamily="34" charset="-122"/>
+                <a:cs typeface="Yu Gothic" pitchFamily="34" charset="-120"/>
+              </a:rPr>
+              <a:t>創業55年の酒販業実績による、生産者・インポーターとの信頼とパイプ</a:t>
+            </a:r>
+            <a:endParaRPr lang="en-US" sz="980" dirty="0"/>
+          </a:p>
+          <a:p>
+            <a:pPr marL="342900" indent="-342900">
+              <a:lnSpc>
+                <a:spcPts val="1300"/>
+              </a:lnSpc>
+              <a:spcAft>
+                <a:spcPts val="200"/>
+              </a:spcAft>
+              <a:buSzPct val="100000"/>
+              <a:buChar char="▪"/>
+            </a:pPr>
+            <a:r>
+              <a:rPr lang="en-US" sz="980" dirty="0">
+                <a:solidFill>
+                  <a:srgbClr val="1A1A1A"/>
+                </a:solidFill>
+                <a:latin typeface="Yu Gothic" pitchFamily="34" charset="0"/>
+                <a:ea typeface="Yu Gothic" pitchFamily="34" charset="-122"/>
+                <a:cs typeface="Yu Gothic" pitchFamily="34" charset="-120"/>
+              </a:rPr>
+              <a:t>国内大手インポーターとの直接取引による特価・正規品仕入</a:t>
+            </a:r>
+            <a:endParaRPr lang="en-US" sz="980" dirty="0"/>
+          </a:p>
+          <a:p>
+            <a:pPr marL="342900" indent="-342900">
+              <a:lnSpc>
+                <a:spcPts val="1300"/>
+              </a:lnSpc>
+              <a:spcAft>
+                <a:spcPts val="200"/>
+              </a:spcAft>
+              <a:buSzPct val="100000"/>
+              <a:buChar char="▪"/>
+            </a:pPr>
+            <a:r>
+              <a:rPr lang="en-US" sz="980" dirty="0">
+                <a:solidFill>
+                  <a:srgbClr val="1A1A1A"/>
+                </a:solidFill>
+                <a:latin typeface="Yu Gothic" pitchFamily="34" charset="0"/>
+                <a:ea typeface="Yu Gothic" pitchFamily="34" charset="-122"/>
+                <a:cs typeface="Yu Gothic" pitchFamily="34" charset="-120"/>
+              </a:rPr>
+              <a:t>海外輸出入ライセンスを活かした独自の仕入ネットワークと情報収集</a:t>
+            </a:r>
+            <a:endParaRPr lang="en-US" sz="980" dirty="0"/>
+          </a:p>
+        </p:txBody>
+      </p:sp>
+      <p:sp>
+        <p:nvSpPr>
+          <p:cNvPr id="13" name="Shape 10"/>
+          <p:cNvSpPr/>
+          <p:nvPr/>
+        </p:nvSpPr>
+        <p:spPr>
+          <a:xfrm>
+            <a:off x="984352" y="4315968"/>
+            <a:ext cx="10222992" cy="0"/>
+          </a:xfrm>
+          <a:prstGeom prst="line">
+            <a:avLst/>
+          </a:prstGeom>
+          <a:noFill/>
+          <a:ln w="12700">
+            <a:solidFill>
+              <a:srgbClr val="DDE0E2"/>
+            </a:solidFill>
+            <a:prstDash val="solid"/>
+          </a:ln>
+        </p:spPr>
+      </p:sp>
+      <p:sp>
+        <p:nvSpPr>
+          <p:cNvPr id="14" name="Shape 11"/>
+          <p:cNvSpPr/>
+          <p:nvPr/>
+        </p:nvSpPr>
+        <p:spPr>
+          <a:xfrm>
+            <a:off x="1258672" y="4042867"/>
+            <a:ext cx="1481328" cy="273101"/>
+          </a:xfrm>
+          <a:prstGeom prst="rect">
+            <a:avLst/>
+          </a:prstGeom>
+          <a:solidFill>
+            <a:srgbClr val="C68A65"/>
+          </a:solidFill>
+          <a:ln w="12700">
+            <a:solidFill>
+              <a:srgbClr val="333333"/>
+            </a:solidFill>
+            <a:prstDash val="solid"/>
+          </a:ln>
+        </p:spPr>
+      </p:sp>
+      <p:sp>
+        <p:nvSpPr>
+          <p:cNvPr id="15" name="Text 12"/>
+          <p:cNvSpPr/>
+          <p:nvPr/>
+        </p:nvSpPr>
+        <p:spPr>
+          <a:xfrm>
+            <a:off x="1258672" y="3695395"/>
+            <a:ext cx="1481328" cy="292608"/>
+          </a:xfrm>
+          <a:prstGeom prst="rect">
+            <a:avLst/>
+          </a:prstGeom>
+          <a:noFill/>
+          <a:ln/>
+        </p:spPr>
+        <p:txBody>
+          <a:bodyPr wrap="square" lIns="0" tIns="0" rIns="0" bIns="0" rtlCol="0" anchor="ctr"/>
+          <a:lstStyle/>
+          <a:p>
+            <a:pPr algn="ctr" indent="0" marL="0">
+              <a:buNone/>
+            </a:pPr>
+            <a:r>
+              <a:rPr lang="en-US" sz="1500" b="1" dirty="0">
+                <a:solidFill>
+                  <a:srgbClr val="A06D4C"/>
+                </a:solidFill>
+                <a:latin typeface="Yu Gothic" pitchFamily="34" charset="0"/>
+                <a:ea typeface="Yu Gothic" pitchFamily="34" charset="-122"/>
+                <a:cs typeface="Yu Gothic" pitchFamily="34" charset="-120"/>
+              </a:rPr>
+              <a:t>40</a:t>
+            </a:r>
+            <a:endParaRPr lang="en-US" sz="1500" dirty="0"/>
+          </a:p>
+        </p:txBody>
+      </p:sp>
+      <p:sp>
+        <p:nvSpPr>
+          <p:cNvPr id="16" name="Text 13"/>
+          <p:cNvSpPr/>
+          <p:nvPr/>
+        </p:nvSpPr>
+        <p:spPr>
+          <a:xfrm>
+            <a:off x="1258672" y="4407408"/>
+            <a:ext cx="1481328" cy="457200"/>
+          </a:xfrm>
+          <a:prstGeom prst="rect">
+            <a:avLst/>
+          </a:prstGeom>
+          <a:noFill/>
+          <a:ln/>
+        </p:spPr>
+        <p:txBody>
+          <a:bodyPr wrap="square" lIns="0" tIns="0" rIns="0" bIns="0" rtlCol="0" anchor="ctr"/>
+          <a:lstStyle/>
+          <a:p>
+            <a:pPr algn="ctr" indent="0" marL="0">
+              <a:lnSpc>
+                <a:spcPts val="1350"/>
+              </a:lnSpc>
+              <a:buNone/>
+            </a:pPr>
+            <a:r>
+              <a:rPr lang="en-US" sz="1000" dirty="0">
+                <a:solidFill>
+                  <a:srgbClr val="6E7378"/>
+                </a:solidFill>
+                <a:latin typeface="Yu Gothic" pitchFamily="34" charset="0"/>
+                <a:ea typeface="Yu Gothic" pitchFamily="34" charset="-122"/>
+                <a:cs typeface="Yu Gothic" pitchFamily="34" charset="-120"/>
+              </a:rPr>
+              <a:t>インポーター</a:t>
+            </a:r>
+            <a:endParaRPr lang="en-US" sz="1000" dirty="0"/>
+          </a:p>
+          <a:p>
+            <a:pPr algn="ctr" indent="0" marL="0">
+              <a:lnSpc>
+                <a:spcPts val="1350"/>
+              </a:lnSpc>
+              <a:buNone/>
+            </a:pPr>
+            <a:r>
+              <a:rPr lang="en-US" sz="1000" dirty="0">
+                <a:solidFill>
+                  <a:srgbClr val="6E7378"/>
+                </a:solidFill>
+                <a:latin typeface="Yu Gothic" pitchFamily="34" charset="0"/>
+                <a:ea typeface="Yu Gothic" pitchFamily="34" charset="-122"/>
+                <a:cs typeface="Yu Gothic" pitchFamily="34" charset="-120"/>
+              </a:rPr>
+              <a:t>仕入価格</a:t>
+            </a:r>
+            <a:endParaRPr lang="en-US" sz="1000" dirty="0"/>
+          </a:p>
+        </p:txBody>
+      </p:sp>
+      <p:sp>
+        <p:nvSpPr>
+          <p:cNvPr id="17" name="Text 14"/>
+          <p:cNvSpPr/>
+          <p:nvPr/>
+        </p:nvSpPr>
+        <p:spPr>
+          <a:xfrm>
+            <a:off x="1075792" y="3366211"/>
+            <a:ext cx="1847088" cy="274320"/>
+          </a:xfrm>
+          <a:prstGeom prst="rect">
+            <a:avLst/>
+          </a:prstGeom>
+          <a:noFill/>
+          <a:ln/>
+        </p:spPr>
+        <p:txBody>
+          <a:bodyPr wrap="square" lIns="0" tIns="0" rIns="0" bIns="0" rtlCol="0" anchor="ctr"/>
+          <a:lstStyle/>
+          <a:p>
+            <a:pPr algn="ctr" indent="0" marL="0">
+              <a:buNone/>
+            </a:pPr>
+            <a:r>
+              <a:rPr lang="en-US" sz="1100" b="1" dirty="0">
+                <a:solidFill>
+                  <a:srgbClr val="A06D4C"/>
+                </a:solidFill>
+                <a:latin typeface="Yu Gothic" pitchFamily="34" charset="0"/>
+                <a:ea typeface="Yu Gothic" pitchFamily="34" charset="-122"/>
+                <a:cs typeface="Yu Gothic" pitchFamily="34" charset="-120"/>
+              </a:rPr>
+              <a:t>WineBank はここ</a:t>
+            </a:r>
+            <a:endParaRPr lang="en-US" sz="1100" dirty="0"/>
+          </a:p>
+        </p:txBody>
+      </p:sp>
+      <p:sp>
+        <p:nvSpPr>
+          <p:cNvPr id="18" name="Shape 15"/>
+          <p:cNvSpPr/>
+          <p:nvPr/>
+        </p:nvSpPr>
+        <p:spPr>
+          <a:xfrm>
+            <a:off x="3306928" y="3906317"/>
+            <a:ext cx="1481328" cy="409651"/>
+          </a:xfrm>
+          <a:prstGeom prst="rect">
+            <a:avLst/>
+          </a:prstGeom>
+          <a:solidFill>
+            <a:srgbClr val="9AA1A6"/>
+          </a:solidFill>
+          <a:ln w="12700">
+            <a:solidFill>
+              <a:srgbClr val="333333"/>
+            </a:solidFill>
+            <a:prstDash val="solid"/>
+          </a:ln>
+        </p:spPr>
+      </p:sp>
+      <p:sp>
+        <p:nvSpPr>
+          <p:cNvPr id="19" name="Text 16"/>
+          <p:cNvSpPr/>
+          <p:nvPr/>
+        </p:nvSpPr>
+        <p:spPr>
+          <a:xfrm>
+            <a:off x="3306928" y="3558845"/>
+            <a:ext cx="1481328" cy="292608"/>
+          </a:xfrm>
+          <a:prstGeom prst="rect">
+            <a:avLst/>
+          </a:prstGeom>
+          <a:noFill/>
+          <a:ln/>
+        </p:spPr>
+        <p:txBody>
+          <a:bodyPr wrap="square" lIns="0" tIns="0" rIns="0" bIns="0" rtlCol="0" anchor="ctr"/>
+          <a:lstStyle/>
+          <a:p>
+            <a:pPr algn="ctr" indent="0" marL="0">
+              <a:buNone/>
+            </a:pPr>
+            <a:r>
+              <a:rPr lang="en-US" sz="1500" b="1" dirty="0">
+                <a:solidFill>
+                  <a:srgbClr val="1A1A1A"/>
+                </a:solidFill>
+                <a:latin typeface="Yu Gothic" pitchFamily="34" charset="0"/>
+                <a:ea typeface="Yu Gothic" pitchFamily="34" charset="-122"/>
+                <a:cs typeface="Yu Gothic" pitchFamily="34" charset="-120"/>
+              </a:rPr>
+              <a:t>60</a:t>
+            </a:r>
+            <a:endParaRPr lang="en-US" sz="1500" dirty="0"/>
+          </a:p>
+        </p:txBody>
+      </p:sp>
+      <p:sp>
+        <p:nvSpPr>
+          <p:cNvPr id="20" name="Text 17"/>
+          <p:cNvSpPr/>
+          <p:nvPr/>
+        </p:nvSpPr>
+        <p:spPr>
+          <a:xfrm>
+            <a:off x="3306928" y="4407408"/>
+            <a:ext cx="1481328" cy="457200"/>
+          </a:xfrm>
+          <a:prstGeom prst="rect">
+            <a:avLst/>
+          </a:prstGeom>
+          <a:noFill/>
+          <a:ln/>
+        </p:spPr>
+        <p:txBody>
+          <a:bodyPr wrap="square" lIns="0" tIns="0" rIns="0" bIns="0" rtlCol="0" anchor="ctr"/>
+          <a:lstStyle/>
+          <a:p>
+            <a:pPr algn="ctr" indent="0" marL="0">
+              <a:lnSpc>
+                <a:spcPts val="1350"/>
+              </a:lnSpc>
+              <a:buNone/>
+            </a:pPr>
+            <a:r>
+              <a:rPr lang="en-US" sz="1000" dirty="0">
+                <a:solidFill>
+                  <a:srgbClr val="6E7378"/>
+                </a:solidFill>
+                <a:latin typeface="Yu Gothic" pitchFamily="34" charset="0"/>
+                <a:ea typeface="Yu Gothic" pitchFamily="34" charset="-122"/>
+                <a:cs typeface="Yu Gothic" pitchFamily="34" charset="-120"/>
+              </a:rPr>
+              <a:t>酒販店①</a:t>
+            </a:r>
+            <a:endParaRPr lang="en-US" sz="1000" dirty="0"/>
+          </a:p>
+          <a:p>
+            <a:pPr algn="ctr" indent="0" marL="0">
+              <a:lnSpc>
+                <a:spcPts val="1350"/>
+              </a:lnSpc>
+              <a:buNone/>
+            </a:pPr>
+            <a:r>
+              <a:rPr lang="en-US" sz="1000" dirty="0">
+                <a:solidFill>
+                  <a:srgbClr val="6E7378"/>
+                </a:solidFill>
+                <a:latin typeface="Yu Gothic" pitchFamily="34" charset="0"/>
+                <a:ea typeface="Yu Gothic" pitchFamily="34" charset="-122"/>
+                <a:cs typeface="Yu Gothic" pitchFamily="34" charset="-120"/>
+              </a:rPr>
+              <a:t>仕入価格</a:t>
+            </a:r>
+            <a:endParaRPr lang="en-US" sz="1000" dirty="0"/>
+          </a:p>
+        </p:txBody>
+      </p:sp>
+      <p:sp>
+        <p:nvSpPr>
+          <p:cNvPr id="21" name="Shape 18"/>
+          <p:cNvSpPr/>
+          <p:nvPr/>
+        </p:nvSpPr>
+        <p:spPr>
+          <a:xfrm>
+            <a:off x="5355184" y="3838042"/>
+            <a:ext cx="1481328" cy="477926"/>
+          </a:xfrm>
+          <a:prstGeom prst="rect">
+            <a:avLst/>
+          </a:prstGeom>
+          <a:solidFill>
+            <a:srgbClr val="9AA1A6"/>
+          </a:solidFill>
+          <a:ln w="12700">
+            <a:solidFill>
+              <a:srgbClr val="333333"/>
+            </a:solidFill>
+            <a:prstDash val="solid"/>
+          </a:ln>
+        </p:spPr>
+      </p:sp>
+      <p:sp>
+        <p:nvSpPr>
+          <p:cNvPr id="22" name="Text 19"/>
+          <p:cNvSpPr/>
+          <p:nvPr/>
+        </p:nvSpPr>
+        <p:spPr>
+          <a:xfrm>
+            <a:off x="5355184" y="3490570"/>
+            <a:ext cx="1481328" cy="292608"/>
+          </a:xfrm>
+          <a:prstGeom prst="rect">
+            <a:avLst/>
+          </a:prstGeom>
+          <a:noFill/>
+          <a:ln/>
+        </p:spPr>
+        <p:txBody>
+          <a:bodyPr wrap="square" lIns="0" tIns="0" rIns="0" bIns="0" rtlCol="0" anchor="ctr"/>
+          <a:lstStyle/>
+          <a:p>
+            <a:pPr algn="ctr" indent="0" marL="0">
+              <a:buNone/>
+            </a:pPr>
+            <a:r>
+              <a:rPr lang="en-US" sz="1500" b="1" dirty="0">
+                <a:solidFill>
+                  <a:srgbClr val="1A1A1A"/>
+                </a:solidFill>
+                <a:latin typeface="Yu Gothic" pitchFamily="34" charset="0"/>
+                <a:ea typeface="Yu Gothic" pitchFamily="34" charset="-122"/>
+                <a:cs typeface="Yu Gothic" pitchFamily="34" charset="-120"/>
+              </a:rPr>
+              <a:t>70</a:t>
+            </a:r>
+            <a:endParaRPr lang="en-US" sz="1500" dirty="0"/>
+          </a:p>
+        </p:txBody>
+      </p:sp>
+      <p:sp>
+        <p:nvSpPr>
+          <p:cNvPr id="23" name="Text 20"/>
+          <p:cNvSpPr/>
+          <p:nvPr/>
+        </p:nvSpPr>
+        <p:spPr>
+          <a:xfrm>
+            <a:off x="5355184" y="4407408"/>
+            <a:ext cx="1481328" cy="457200"/>
+          </a:xfrm>
+          <a:prstGeom prst="rect">
+            <a:avLst/>
+          </a:prstGeom>
+          <a:noFill/>
+          <a:ln/>
+        </p:spPr>
+        <p:txBody>
+          <a:bodyPr wrap="square" lIns="0" tIns="0" rIns="0" bIns="0" rtlCol="0" anchor="ctr"/>
+          <a:lstStyle/>
+          <a:p>
+            <a:pPr algn="ctr" indent="0" marL="0">
+              <a:lnSpc>
+                <a:spcPts val="1350"/>
+              </a:lnSpc>
+              <a:buNone/>
+            </a:pPr>
+            <a:r>
+              <a:rPr lang="en-US" sz="1000" dirty="0">
+                <a:solidFill>
+                  <a:srgbClr val="6E7378"/>
+                </a:solidFill>
+                <a:latin typeface="Yu Gothic" pitchFamily="34" charset="0"/>
+                <a:ea typeface="Yu Gothic" pitchFamily="34" charset="-122"/>
+                <a:cs typeface="Yu Gothic" pitchFamily="34" charset="-120"/>
+              </a:rPr>
+              <a:t>酒販店②</a:t>
+            </a:r>
+            <a:endParaRPr lang="en-US" sz="1000" dirty="0"/>
+          </a:p>
+          <a:p>
+            <a:pPr algn="ctr" indent="0" marL="0">
+              <a:lnSpc>
+                <a:spcPts val="1350"/>
+              </a:lnSpc>
+              <a:buNone/>
+            </a:pPr>
+            <a:r>
+              <a:rPr lang="en-US" sz="1000" dirty="0">
+                <a:solidFill>
+                  <a:srgbClr val="6E7378"/>
+                </a:solidFill>
+                <a:latin typeface="Yu Gothic" pitchFamily="34" charset="0"/>
+                <a:ea typeface="Yu Gothic" pitchFamily="34" charset="-122"/>
+                <a:cs typeface="Yu Gothic" pitchFamily="34" charset="-120"/>
+              </a:rPr>
+              <a:t>仕入価格</a:t>
+            </a:r>
+            <a:endParaRPr lang="en-US" sz="1000" dirty="0"/>
+          </a:p>
+        </p:txBody>
+      </p:sp>
+      <p:sp>
+        <p:nvSpPr>
+          <p:cNvPr id="24" name="Shape 21"/>
+          <p:cNvSpPr/>
+          <p:nvPr/>
+        </p:nvSpPr>
+        <p:spPr>
+          <a:xfrm>
+            <a:off x="7403440" y="3633216"/>
+            <a:ext cx="1481328" cy="682752"/>
+          </a:xfrm>
+          <a:prstGeom prst="rect">
+            <a:avLst/>
+          </a:prstGeom>
+          <a:solidFill>
+            <a:srgbClr val="9AA1A6"/>
+          </a:solidFill>
+          <a:ln w="12700">
+            <a:solidFill>
+              <a:srgbClr val="333333"/>
+            </a:solidFill>
+            <a:prstDash val="solid"/>
+          </a:ln>
+        </p:spPr>
+      </p:sp>
+      <p:sp>
+        <p:nvSpPr>
+          <p:cNvPr id="25" name="Text 22"/>
+          <p:cNvSpPr/>
+          <p:nvPr/>
+        </p:nvSpPr>
+        <p:spPr>
+          <a:xfrm>
+            <a:off x="7403440" y="3285744"/>
+            <a:ext cx="1481328" cy="292608"/>
+          </a:xfrm>
+          <a:prstGeom prst="rect">
+            <a:avLst/>
+          </a:prstGeom>
+          <a:noFill/>
+          <a:ln/>
+        </p:spPr>
+        <p:txBody>
+          <a:bodyPr wrap="square" lIns="0" tIns="0" rIns="0" bIns="0" rtlCol="0" anchor="ctr"/>
+          <a:lstStyle/>
+          <a:p>
+            <a:pPr algn="ctr" indent="0" marL="0">
+              <a:buNone/>
+            </a:pPr>
+            <a:r>
+              <a:rPr lang="en-US" sz="1500" b="1" dirty="0">
+                <a:solidFill>
+                  <a:srgbClr val="1A1A1A"/>
+                </a:solidFill>
+                <a:latin typeface="Yu Gothic" pitchFamily="34" charset="0"/>
+                <a:ea typeface="Yu Gothic" pitchFamily="34" charset="-122"/>
+                <a:cs typeface="Yu Gothic" pitchFamily="34" charset="-120"/>
+              </a:rPr>
+              <a:t>80〜100</a:t>
+            </a:r>
+            <a:endParaRPr lang="en-US" sz="1500" dirty="0"/>
+          </a:p>
+        </p:txBody>
+      </p:sp>
+      <p:sp>
+        <p:nvSpPr>
+          <p:cNvPr id="26" name="Text 23"/>
+          <p:cNvSpPr/>
+          <p:nvPr/>
+        </p:nvSpPr>
+        <p:spPr>
+          <a:xfrm>
+            <a:off x="7403440" y="4407408"/>
+            <a:ext cx="1481328" cy="457200"/>
+          </a:xfrm>
+          <a:prstGeom prst="rect">
+            <a:avLst/>
+          </a:prstGeom>
+          <a:noFill/>
+          <a:ln/>
+        </p:spPr>
+        <p:txBody>
+          <a:bodyPr wrap="square" lIns="0" tIns="0" rIns="0" bIns="0" rtlCol="0" anchor="ctr"/>
+          <a:lstStyle/>
+          <a:p>
+            <a:pPr algn="ctr" indent="0" marL="0">
+              <a:lnSpc>
+                <a:spcPts val="1350"/>
+              </a:lnSpc>
+              <a:buNone/>
+            </a:pPr>
+            <a:r>
+              <a:rPr lang="en-US" sz="1000" dirty="0">
+                <a:solidFill>
+                  <a:srgbClr val="6E7378"/>
+                </a:solidFill>
+                <a:latin typeface="Yu Gothic" pitchFamily="34" charset="0"/>
+                <a:ea typeface="Yu Gothic" pitchFamily="34" charset="-122"/>
+                <a:cs typeface="Yu Gothic" pitchFamily="34" charset="-120"/>
+              </a:rPr>
+              <a:t>一般消費者</a:t>
+            </a:r>
+            <a:endParaRPr lang="en-US" sz="1000" dirty="0"/>
+          </a:p>
+          <a:p>
+            <a:pPr algn="ctr" indent="0" marL="0">
+              <a:lnSpc>
+                <a:spcPts val="1350"/>
+              </a:lnSpc>
+              <a:buNone/>
+            </a:pPr>
+            <a:r>
+              <a:rPr lang="en-US" sz="1000" dirty="0">
+                <a:solidFill>
+                  <a:srgbClr val="6E7378"/>
+                </a:solidFill>
+                <a:latin typeface="Yu Gothic" pitchFamily="34" charset="0"/>
+                <a:ea typeface="Yu Gothic" pitchFamily="34" charset="-122"/>
+                <a:cs typeface="Yu Gothic" pitchFamily="34" charset="-120"/>
+              </a:rPr>
+              <a:t>購入価格</a:t>
+            </a:r>
+            <a:endParaRPr lang="en-US" sz="1000" dirty="0"/>
+          </a:p>
+        </p:txBody>
+      </p:sp>
+      <p:sp>
+        <p:nvSpPr>
+          <p:cNvPr id="27" name="Shape 24"/>
+          <p:cNvSpPr/>
+          <p:nvPr/>
+        </p:nvSpPr>
+        <p:spPr>
+          <a:xfrm>
+            <a:off x="9451696" y="2267712"/>
+            <a:ext cx="1481328" cy="1024128"/>
+          </a:xfrm>
+          <a:prstGeom prst="rect">
+            <a:avLst/>
+          </a:prstGeom>
+          <a:solidFill>
+            <a:srgbClr val="2F3941">
+              <a:alpha val="45000"/>
+            </a:srgbClr>
+          </a:solidFill>
+          <a:ln w="12700">
+            <a:solidFill>
+              <a:srgbClr val="333333"/>
+            </a:solidFill>
+            <a:prstDash val="solid"/>
+          </a:ln>
+        </p:spPr>
+      </p:sp>
+      <p:sp>
+        <p:nvSpPr>
+          <p:cNvPr id="28" name="Shape 25"/>
+          <p:cNvSpPr/>
+          <p:nvPr/>
+        </p:nvSpPr>
+        <p:spPr>
+          <a:xfrm>
+            <a:off x="9451696" y="3291840"/>
+            <a:ext cx="1481328" cy="1024128"/>
+          </a:xfrm>
+          <a:prstGeom prst="rect">
+            <a:avLst/>
+          </a:prstGeom>
+          <a:solidFill>
+            <a:srgbClr val="2F3941"/>
+          </a:solidFill>
+          <a:ln w="12700">
+            <a:solidFill>
+              <a:srgbClr val="333333"/>
+            </a:solidFill>
+            <a:prstDash val="solid"/>
+          </a:ln>
+        </p:spPr>
+      </p:sp>
+      <p:sp>
+        <p:nvSpPr>
+          <p:cNvPr id="29" name="Text 26"/>
+          <p:cNvSpPr/>
+          <p:nvPr/>
+        </p:nvSpPr>
+        <p:spPr>
+          <a:xfrm>
+            <a:off x="9451696" y="1920240"/>
+            <a:ext cx="1481328" cy="292608"/>
+          </a:xfrm>
+          <a:prstGeom prst="rect">
+            <a:avLst/>
+          </a:prstGeom>
+          <a:noFill/>
+          <a:ln/>
+        </p:spPr>
+        <p:txBody>
+          <a:bodyPr wrap="square" lIns="0" tIns="0" rIns="0" bIns="0" rtlCol="0" anchor="ctr"/>
+          <a:lstStyle/>
+          <a:p>
+            <a:pPr algn="ctr" indent="0" marL="0">
+              <a:buNone/>
+            </a:pPr>
+            <a:r>
+              <a:rPr lang="en-US" sz="1500" b="1" dirty="0">
+                <a:solidFill>
+                  <a:srgbClr val="1A1A1A"/>
+                </a:solidFill>
+                <a:latin typeface="Yu Gothic" pitchFamily="34" charset="0"/>
+                <a:ea typeface="Yu Gothic" pitchFamily="34" charset="-122"/>
+                <a:cs typeface="Yu Gothic" pitchFamily="34" charset="-120"/>
+              </a:rPr>
+              <a:t>150〜300</a:t>
+            </a:r>
+            <a:endParaRPr lang="en-US" sz="1500" dirty="0"/>
+          </a:p>
+        </p:txBody>
+      </p:sp>
+      <p:sp>
+        <p:nvSpPr>
+          <p:cNvPr id="30" name="Text 27"/>
+          <p:cNvSpPr/>
+          <p:nvPr/>
+        </p:nvSpPr>
+        <p:spPr>
+          <a:xfrm>
+            <a:off x="9451696" y="4407408"/>
+            <a:ext cx="1481328" cy="457200"/>
+          </a:xfrm>
+          <a:prstGeom prst="rect">
+            <a:avLst/>
+          </a:prstGeom>
+          <a:noFill/>
+          <a:ln/>
+        </p:spPr>
+        <p:txBody>
+          <a:bodyPr wrap="square" lIns="0" tIns="0" rIns="0" bIns="0" rtlCol="0" anchor="ctr"/>
+          <a:lstStyle/>
+          <a:p>
+            <a:pPr algn="ctr" indent="0" marL="0">
+              <a:lnSpc>
+                <a:spcPts val="1350"/>
+              </a:lnSpc>
+              <a:buNone/>
+            </a:pPr>
+            <a:r>
+              <a:rPr lang="en-US" sz="1000" dirty="0">
+                <a:solidFill>
+                  <a:srgbClr val="6E7378"/>
+                </a:solidFill>
+                <a:latin typeface="Yu Gothic" pitchFamily="34" charset="0"/>
+                <a:ea typeface="Yu Gothic" pitchFamily="34" charset="-122"/>
+                <a:cs typeface="Yu Gothic" pitchFamily="34" charset="-120"/>
+              </a:rPr>
+              <a:t>レストラン</a:t>
+            </a:r>
+            <a:endParaRPr lang="en-US" sz="1000" dirty="0"/>
+          </a:p>
+          <a:p>
+            <a:pPr algn="ctr" indent="0" marL="0">
+              <a:lnSpc>
+                <a:spcPts val="1350"/>
+              </a:lnSpc>
+              <a:buNone/>
+            </a:pPr>
+            <a:r>
+              <a:rPr lang="en-US" sz="1000" dirty="0">
+                <a:solidFill>
+                  <a:srgbClr val="6E7378"/>
+                </a:solidFill>
+                <a:latin typeface="Yu Gothic" pitchFamily="34" charset="0"/>
+                <a:ea typeface="Yu Gothic" pitchFamily="34" charset="-122"/>
+                <a:cs typeface="Yu Gothic" pitchFamily="34" charset="-120"/>
+              </a:rPr>
+              <a:t>店頭価格</a:t>
+            </a:r>
+            <a:endParaRPr lang="en-US" sz="1000" dirty="0"/>
+          </a:p>
+        </p:txBody>
+      </p:sp>
+      <p:sp>
+        <p:nvSpPr>
+          <p:cNvPr id="31" name="Shape 28"/>
+          <p:cNvSpPr/>
+          <p:nvPr/>
+        </p:nvSpPr>
+        <p:spPr>
+          <a:xfrm>
+            <a:off x="566928" y="4992624"/>
+            <a:ext cx="11057839" cy="932688"/>
+          </a:xfrm>
+          <a:prstGeom prst="roundRect">
+            <a:avLst>
+              <a:gd name="adj" fmla="val 4902"/>
+            </a:avLst>
+          </a:prstGeom>
+          <a:solidFill>
+            <a:srgbClr val="2F3941"/>
+          </a:solidFill>
+          <a:ln w="12700">
+            <a:solidFill>
+              <a:srgbClr val="333333"/>
+            </a:solidFill>
+            <a:prstDash val="solid"/>
+          </a:ln>
+        </p:spPr>
+      </p:sp>
+      <p:sp>
+        <p:nvSpPr>
+          <p:cNvPr id="32" name="Text 29"/>
+          <p:cNvSpPr/>
+          <p:nvPr/>
+        </p:nvSpPr>
+        <p:spPr>
+          <a:xfrm>
+            <a:off x="877824" y="4992624"/>
+            <a:ext cx="4023360" cy="932688"/>
+          </a:xfrm>
+          <a:prstGeom prst="rect">
+            <a:avLst/>
+          </a:prstGeom>
+          <a:noFill/>
+          <a:ln/>
+        </p:spPr>
+        <p:txBody>
+          <a:bodyPr wrap="square" lIns="0" tIns="0" rIns="0" bIns="0" rtlCol="0" anchor="ctr"/>
+          <a:lstStyle/>
+          <a:p>
+            <a:pPr indent="0" marL="0">
+              <a:lnSpc>
+                <a:spcPts val="2100"/>
+              </a:lnSpc>
+              <a:buNone/>
+            </a:pPr>
+            <a:r>
+              <a:rPr lang="en-US" sz="1500" b="1" dirty="0">
+                <a:solidFill>
+                  <a:srgbClr val="EFDCCE"/>
+                </a:solidFill>
+                <a:latin typeface="Yu Gothic" pitchFamily="34" charset="0"/>
+                <a:ea typeface="Yu Gothic" pitchFamily="34" charset="-122"/>
+                <a:cs typeface="Yu Gothic" pitchFamily="34" charset="-120"/>
+              </a:rPr>
+              <a:t>レストラン店頭価格の</a:t>
+            </a:r>
+            <a:endParaRPr lang="en-US" sz="1500" dirty="0"/>
+          </a:p>
+          <a:p>
+            <a:pPr indent="0" marL="0">
+              <a:lnSpc>
+                <a:spcPts val="2100"/>
+              </a:lnSpc>
+              <a:buNone/>
+            </a:pPr>
+            <a:r>
+              <a:rPr lang="en-US" sz="1500" b="1" dirty="0">
+                <a:solidFill>
+                  <a:srgbClr val="EFDCCE"/>
+                </a:solidFill>
+                <a:latin typeface="Yu Gothic" pitchFamily="34" charset="0"/>
+                <a:ea typeface="Yu Gothic" pitchFamily="34" charset="-122"/>
+                <a:cs typeface="Yu Gothic" pitchFamily="34" charset="-120"/>
+              </a:rPr>
+              <a:t>1/4〜1/7 の水準で仕入れる。</a:t>
+            </a:r>
+            <a:endParaRPr lang="en-US" sz="1500" dirty="0"/>
+          </a:p>
+        </p:txBody>
+      </p:sp>
+      <p:sp>
+        <p:nvSpPr>
+          <p:cNvPr id="33" name="Text 30"/>
+          <p:cNvSpPr/>
+          <p:nvPr/>
+        </p:nvSpPr>
+        <p:spPr>
+          <a:xfrm>
+            <a:off x="5230368" y="5138928"/>
+            <a:ext cx="2121408" cy="256032"/>
+          </a:xfrm>
+          <a:prstGeom prst="rect">
+            <a:avLst/>
+          </a:prstGeom>
+          <a:noFill/>
+          <a:ln/>
+        </p:spPr>
+        <p:txBody>
+          <a:bodyPr wrap="square" lIns="0" tIns="0" rIns="0" bIns="0" rtlCol="0" anchor="ctr"/>
+          <a:lstStyle/>
+          <a:p>
+            <a:pPr indent="0" marL="0">
+              <a:buNone/>
+            </a:pPr>
+            <a:r>
+              <a:rPr lang="en-US" sz="1050" b="1" dirty="0">
+                <a:solidFill>
+                  <a:srgbClr val="FFFFFF"/>
+                </a:solidFill>
+                <a:latin typeface="Yu Gothic" pitchFamily="34" charset="0"/>
+                <a:ea typeface="Yu Gothic" pitchFamily="34" charset="-122"/>
+                <a:cs typeface="Yu Gothic" pitchFamily="34" charset="-120"/>
+              </a:rPr>
+              <a:t>飲食店は卸値で仕入れられる</a:t>
+            </a:r>
+            <a:endParaRPr lang="en-US" sz="1050" dirty="0"/>
+          </a:p>
+        </p:txBody>
+      </p:sp>
+      <p:sp>
+        <p:nvSpPr>
+          <p:cNvPr id="34" name="Text 31"/>
+          <p:cNvSpPr/>
+          <p:nvPr/>
+        </p:nvSpPr>
+        <p:spPr>
+          <a:xfrm>
+            <a:off x="5230368" y="5413248"/>
+            <a:ext cx="2121408" cy="438912"/>
+          </a:xfrm>
+          <a:prstGeom prst="rect">
+            <a:avLst/>
+          </a:prstGeom>
+          <a:noFill/>
+          <a:ln/>
+        </p:spPr>
+        <p:txBody>
+          <a:bodyPr wrap="square" lIns="0" tIns="0" rIns="0" bIns="0" rtlCol="0" anchor="ctr"/>
+          <a:lstStyle/>
+          <a:p>
+            <a:pPr indent="0" marL="0">
+              <a:lnSpc>
+                <a:spcPts val="1250"/>
+              </a:lnSpc>
+              <a:buNone/>
+            </a:pPr>
+            <a:r>
+              <a:rPr lang="en-US" sz="900" dirty="0">
+                <a:solidFill>
+                  <a:srgbClr val="B9BEC2"/>
+                </a:solidFill>
+                <a:latin typeface="Yu Gothic" pitchFamily="34" charset="0"/>
+                <a:ea typeface="Yu Gothic" pitchFamily="34" charset="-122"/>
+                <a:cs typeface="Yu Gothic" pitchFamily="34" charset="-120"/>
+              </a:rPr>
+              <a:t>在庫を持たずに、店内価格の</a:t>
+            </a:r>
+            <a:endParaRPr lang="en-US" sz="900" dirty="0"/>
+          </a:p>
+          <a:p>
+            <a:pPr indent="0" marL="0">
+              <a:lnSpc>
+                <a:spcPts val="1250"/>
+              </a:lnSpc>
+              <a:buNone/>
+            </a:pPr>
+            <a:r>
+              <a:rPr lang="en-US" sz="900" dirty="0">
+                <a:solidFill>
+                  <a:srgbClr val="B9BEC2"/>
+                </a:solidFill>
+                <a:latin typeface="Yu Gothic" pitchFamily="34" charset="0"/>
+                <a:ea typeface="Yu Gothic" pitchFamily="34" charset="-122"/>
+                <a:cs typeface="Yu Gothic" pitchFamily="34" charset="-120"/>
+              </a:rPr>
+              <a:t>数分の一で調達できる</a:t>
+            </a:r>
+            <a:endParaRPr lang="en-US" sz="900" dirty="0"/>
+          </a:p>
+        </p:txBody>
+      </p:sp>
+      <p:sp>
+        <p:nvSpPr>
+          <p:cNvPr id="35" name="Text 32"/>
+          <p:cNvSpPr/>
+          <p:nvPr/>
+        </p:nvSpPr>
+        <p:spPr>
+          <a:xfrm>
+            <a:off x="7443216" y="5138928"/>
+            <a:ext cx="2121408" cy="256032"/>
+          </a:xfrm>
+          <a:prstGeom prst="rect">
+            <a:avLst/>
+          </a:prstGeom>
+          <a:noFill/>
+          <a:ln/>
+        </p:spPr>
+        <p:txBody>
+          <a:bodyPr wrap="square" lIns="0" tIns="0" rIns="0" bIns="0" rtlCol="0" anchor="ctr"/>
+          <a:lstStyle/>
+          <a:p>
+            <a:pPr indent="0" marL="0">
+              <a:buNone/>
+            </a:pPr>
+            <a:r>
+              <a:rPr lang="en-US" sz="1050" b="1" dirty="0">
+                <a:solidFill>
+                  <a:srgbClr val="FFFFFF"/>
+                </a:solidFill>
+                <a:latin typeface="Yu Gothic" pitchFamily="34" charset="0"/>
+                <a:ea typeface="Yu Gothic" pitchFamily="34" charset="-122"/>
+                <a:cs typeface="Yu Gothic" pitchFamily="34" charset="-120"/>
+              </a:rPr>
+              <a:t>居住者にも余力を渡せる</a:t>
+            </a:r>
+            <a:endParaRPr lang="en-US" sz="1050" dirty="0"/>
+          </a:p>
+        </p:txBody>
+      </p:sp>
+      <p:sp>
+        <p:nvSpPr>
+          <p:cNvPr id="36" name="Text 33"/>
+          <p:cNvSpPr/>
+          <p:nvPr/>
+        </p:nvSpPr>
+        <p:spPr>
+          <a:xfrm>
+            <a:off x="7443216" y="5413248"/>
+            <a:ext cx="2121408" cy="438912"/>
+          </a:xfrm>
+          <a:prstGeom prst="rect">
+            <a:avLst/>
+          </a:prstGeom>
+          <a:noFill/>
+          <a:ln/>
+        </p:spPr>
+        <p:txBody>
+          <a:bodyPr wrap="square" lIns="0" tIns="0" rIns="0" bIns="0" rtlCol="0" anchor="ctr"/>
+          <a:lstStyle/>
+          <a:p>
+            <a:pPr indent="0" marL="0">
+              <a:lnSpc>
+                <a:spcPts val="1250"/>
+              </a:lnSpc>
+              <a:buNone/>
+            </a:pPr>
+            <a:r>
+              <a:rPr lang="en-US" sz="900" dirty="0">
+                <a:solidFill>
+                  <a:srgbClr val="B9BEC2"/>
+                </a:solidFill>
+                <a:latin typeface="Yu Gothic" pitchFamily="34" charset="0"/>
+                <a:ea typeface="Yu Gothic" pitchFamily="34" charset="-122"/>
+                <a:cs typeface="Yu Gothic" pitchFamily="34" charset="-120"/>
+              </a:rPr>
+              <a:t>卸値×1.1でも、市中の</a:t>
+            </a:r>
+            <a:endParaRPr lang="en-US" sz="900" dirty="0"/>
+          </a:p>
+          <a:p>
+            <a:pPr indent="0" marL="0">
+              <a:lnSpc>
+                <a:spcPts val="1250"/>
+              </a:lnSpc>
+              <a:buNone/>
+            </a:pPr>
+            <a:r>
+              <a:rPr lang="en-US" sz="900" dirty="0">
+                <a:solidFill>
+                  <a:srgbClr val="B9BEC2"/>
+                </a:solidFill>
+                <a:latin typeface="Yu Gothic" pitchFamily="34" charset="0"/>
+                <a:ea typeface="Yu Gothic" pitchFamily="34" charset="-122"/>
+                <a:cs typeface="Yu Gothic" pitchFamily="34" charset="-120"/>
+              </a:rPr>
+              <a:t>どの価格帯より有利</a:t>
+            </a:r>
+            <a:endParaRPr lang="en-US" sz="900" dirty="0"/>
+          </a:p>
+        </p:txBody>
+      </p:sp>
+      <p:sp>
+        <p:nvSpPr>
+          <p:cNvPr id="37" name="Text 34"/>
+          <p:cNvSpPr/>
+          <p:nvPr/>
+        </p:nvSpPr>
+        <p:spPr>
+          <a:xfrm>
+            <a:off x="9656064" y="5138928"/>
+            <a:ext cx="2121408" cy="256032"/>
+          </a:xfrm>
+          <a:prstGeom prst="rect">
+            <a:avLst/>
+          </a:prstGeom>
+          <a:noFill/>
+          <a:ln/>
+        </p:spPr>
+        <p:txBody>
+          <a:bodyPr wrap="square" lIns="0" tIns="0" rIns="0" bIns="0" rtlCol="0" anchor="ctr"/>
+          <a:lstStyle/>
+          <a:p>
+            <a:pPr indent="0" marL="0">
+              <a:buNone/>
+            </a:pPr>
+            <a:r>
+              <a:rPr lang="en-US" sz="1050" b="1" dirty="0">
+                <a:solidFill>
+                  <a:srgbClr val="FFFFFF"/>
+                </a:solidFill>
+                <a:latin typeface="Yu Gothic" pitchFamily="34" charset="0"/>
+                <a:ea typeface="Yu Gothic" pitchFamily="34" charset="-122"/>
+                <a:cs typeface="Yu Gothic" pitchFamily="34" charset="-120"/>
+              </a:rPr>
+              <a:t>新規参入は追随できない</a:t>
+            </a:r>
+            <a:endParaRPr lang="en-US" sz="1050" dirty="0"/>
+          </a:p>
+        </p:txBody>
+      </p:sp>
+      <p:sp>
+        <p:nvSpPr>
+          <p:cNvPr id="38" name="Text 35"/>
+          <p:cNvSpPr/>
+          <p:nvPr/>
+        </p:nvSpPr>
+        <p:spPr>
+          <a:xfrm>
+            <a:off x="9656064" y="5413248"/>
+            <a:ext cx="2121408" cy="438912"/>
+          </a:xfrm>
+          <a:prstGeom prst="rect">
+            <a:avLst/>
+          </a:prstGeom>
+          <a:noFill/>
+          <a:ln/>
+        </p:spPr>
+        <p:txBody>
+          <a:bodyPr wrap="square" lIns="0" tIns="0" rIns="0" bIns="0" rtlCol="0" anchor="ctr"/>
+          <a:lstStyle/>
+          <a:p>
+            <a:pPr indent="0" marL="0">
+              <a:lnSpc>
+                <a:spcPts val="1250"/>
+              </a:lnSpc>
+              <a:buNone/>
+            </a:pPr>
+            <a:r>
+              <a:rPr lang="en-US" sz="900" dirty="0">
+                <a:solidFill>
+                  <a:srgbClr val="B9BEC2"/>
+                </a:solidFill>
+                <a:latin typeface="Yu Gothic" pitchFamily="34" charset="0"/>
+                <a:ea typeface="Yu Gothic" pitchFamily="34" charset="-122"/>
+                <a:cs typeface="Yu Gothic" pitchFamily="34" charset="-120"/>
+              </a:rPr>
+              <a:t>参入業者は「70」の</a:t>
+            </a:r>
+            <a:endParaRPr lang="en-US" sz="900" dirty="0"/>
+          </a:p>
+          <a:p>
+            <a:pPr indent="0" marL="0">
+              <a:lnSpc>
+                <a:spcPts val="1250"/>
+              </a:lnSpc>
+              <a:buNone/>
+            </a:pPr>
+            <a:r>
+              <a:rPr lang="en-US" sz="900" dirty="0">
+                <a:solidFill>
+                  <a:srgbClr val="B9BEC2"/>
+                </a:solidFill>
+                <a:latin typeface="Yu Gothic" pitchFamily="34" charset="0"/>
+                <a:ea typeface="Yu Gothic" pitchFamily="34" charset="-122"/>
+                <a:cs typeface="Yu Gothic" pitchFamily="34" charset="-120"/>
+              </a:rPr>
+              <a:t>水準からしか始まらない</a:t>
+            </a:r>
+            <a:endParaRPr lang="en-US" sz="900" dirty="0"/>
+          </a:p>
+        </p:txBody>
+      </p:sp>
+      <p:sp>
+        <p:nvSpPr>
+          <p:cNvPr id="39" name="Text 36"/>
+          <p:cNvSpPr/>
+          <p:nvPr/>
+        </p:nvSpPr>
+        <p:spPr>
+          <a:xfrm>
+            <a:off x="566928" y="6035040"/>
+            <a:ext cx="10972800" cy="256032"/>
+          </a:xfrm>
+          <a:prstGeom prst="rect">
+            <a:avLst/>
+          </a:prstGeom>
+          <a:noFill/>
+          <a:ln/>
+        </p:spPr>
+        <p:txBody>
+          <a:bodyPr wrap="square" lIns="0" tIns="0" rIns="0" bIns="0" rtlCol="0" anchor="ctr"/>
+          <a:lstStyle/>
+          <a:p>
+            <a:pPr indent="0" marL="0">
+              <a:buNone/>
+            </a:pPr>
+            <a:r>
+              <a:rPr lang="en-US" sz="880" dirty="0">
+                <a:solidFill>
+                  <a:srgbClr val="A6ABAF"/>
+                </a:solidFill>
+                <a:latin typeface="Yu Gothic" pitchFamily="34" charset="0"/>
+                <a:ea typeface="Yu Gothic" pitchFamily="34" charset="-122"/>
+                <a:cs typeface="Yu Gothic" pitchFamily="34" charset="-120"/>
+              </a:rPr>
+              <a:t>※ 希望小売価格を100とした相対指数。ネット最安値／並行輸入価格は概ね80の水準。出典：当社資料。</a:t>
+            </a:r>
+            <a:endParaRPr lang="en-US" sz="880" dirty="0"/>
+          </a:p>
+        </p:txBody>
+      </p:sp>
+    </p:spTree>
+  </p:cSld>
+  <p:clrMapOvr>
+    <a:masterClrMapping/>
+  </p:clrMapOvr>
+</p:sld>
+</file>
+
+<file path=ppt/slides/slide34.xml><?xml version="1.0" encoding="utf-8"?>
+<p:sld xmlns:a="http://schemas.openxmlformats.org/drawingml/2006/main" xmlns:r="http://schemas.openxmlformats.org/officeDocument/2006/relationships" xmlns:p="http://schemas.openxmlformats.org/presentationml/2006/main">
+  <p:cSld name="Slide 34">
+    <p:bg>
+      <p:bgPr>
+        <a:solidFill>
+          <a:srgbClr val="FFFFFF"/>
+        </a:solidFill>
+      </p:bgPr>
+    </p:bg>
+    <p:spTree>
+      <p:nvGrpSpPr>
+        <p:cNvPr id="1" name=""/>
+        <p:cNvGrpSpPr/>
+        <p:nvPr/>
+      </p:nvGrpSpPr>
+      <p:grpSpPr>
+        <a:xfrm>
+          <a:off x="0" y="0"/>
+          <a:ext cx="0" cy="0"/>
+          <a:chOff x="0" y="0"/>
+          <a:chExt cx="0" cy="0"/>
+        </a:xfrm>
+      </p:grpSpPr>
+      <p:pic>
+        <p:nvPicPr>
+          <p:cNvPr id="2" name="Image 0" descr="preencoded.png">    </p:cNvPr>
+          <p:cNvPicPr>
+            <a:picLocks noChangeAspect="1"/>
+          </p:cNvPicPr>
+          <p:nvPr/>
+        </p:nvPicPr>
+        <p:blipFill>
+          <a:blip r:embed="rId1"/>
+          <a:stretch>
+            <a:fillRect/>
+          </a:stretch>
+        </p:blipFill>
+        <p:spPr>
+          <a:xfrm>
+            <a:off x="10381183" y="292608"/>
+            <a:ext cx="1243584" cy="247802"/>
+          </a:xfrm>
+          <a:prstGeom prst="rect">
+            <a:avLst/>
+          </a:prstGeom>
+        </p:spPr>
+      </p:pic>
+      <p:sp>
+        <p:nvSpPr>
+          <p:cNvPr id="3" name="Shape 0"/>
+          <p:cNvSpPr/>
+          <p:nvPr/>
+        </p:nvSpPr>
+        <p:spPr>
+          <a:xfrm>
+            <a:off x="566928" y="292608"/>
+            <a:ext cx="950976" cy="237744"/>
+          </a:xfrm>
+          <a:prstGeom prst="roundRect">
+            <a:avLst>
+              <a:gd name="adj" fmla="val 11538"/>
+            </a:avLst>
+          </a:prstGeom>
+          <a:solidFill>
+            <a:srgbClr val="C68A65"/>
+          </a:solidFill>
+          <a:ln w="12700">
+            <a:solidFill>
+              <a:srgbClr val="333333"/>
+            </a:solidFill>
+            <a:prstDash val="solid"/>
+          </a:ln>
+        </p:spPr>
+      </p:sp>
+      <p:sp>
+        <p:nvSpPr>
+          <p:cNvPr id="4" name="Text 1"/>
+          <p:cNvSpPr/>
+          <p:nvPr/>
+        </p:nvSpPr>
+        <p:spPr>
+          <a:xfrm>
+            <a:off x="566928" y="292608"/>
+            <a:ext cx="950976" cy="237744"/>
+          </a:xfrm>
+          <a:prstGeom prst="rect">
+            <a:avLst/>
+          </a:prstGeom>
+          <a:noFill/>
+          <a:ln/>
+        </p:spPr>
+        <p:txBody>
+          <a:bodyPr wrap="square" lIns="0" tIns="0" rIns="0" bIns="0" rtlCol="0" anchor="ctr"/>
+          <a:lstStyle/>
+          <a:p>
+            <a:pPr algn="ctr" indent="0" marL="0">
+              <a:buNone/>
+            </a:pPr>
+            <a:r>
+              <a:rPr lang="en-US" sz="850" b="1" dirty="0">
+                <a:solidFill>
+                  <a:srgbClr val="FFFFFF"/>
+                </a:solidFill>
+                <a:latin typeface="Yu Gothic" pitchFamily="34" charset="0"/>
+                <a:ea typeface="Yu Gothic" pitchFamily="34" charset="-122"/>
+                <a:cs typeface="Yu Gothic" pitchFamily="34" charset="-120"/>
+              </a:rPr>
+              <a:t>APPENDIX</a:t>
+            </a:r>
+            <a:endParaRPr lang="en-US" sz="850" dirty="0"/>
+          </a:p>
+        </p:txBody>
+      </p:sp>
+      <p:sp>
+        <p:nvSpPr>
+          <p:cNvPr id="5" name="Text 2"/>
+          <p:cNvSpPr/>
+          <p:nvPr/>
+        </p:nvSpPr>
+        <p:spPr>
+          <a:xfrm>
+            <a:off x="566928" y="585216"/>
+            <a:ext cx="9509760" cy="420624"/>
+          </a:xfrm>
+          <a:prstGeom prst="rect">
+            <a:avLst/>
+          </a:prstGeom>
+          <a:noFill/>
+          <a:ln/>
+        </p:spPr>
+        <p:txBody>
+          <a:bodyPr wrap="square" lIns="0" tIns="0" rIns="0" bIns="0" rtlCol="0" anchor="ctr"/>
+          <a:lstStyle/>
+          <a:p>
+            <a:pPr indent="0" marL="0">
+              <a:buNone/>
+            </a:pPr>
+            <a:r>
+              <a:rPr lang="en-US" sz="2300" b="1" dirty="0">
+                <a:solidFill>
+                  <a:srgbClr val="1A1A1A"/>
+                </a:solidFill>
+                <a:latin typeface="Yu Gothic" pitchFamily="34" charset="0"/>
+                <a:ea typeface="Yu Gothic" pitchFamily="34" charset="-122"/>
+                <a:cs typeface="Yu Gothic" pitchFamily="34" charset="-120"/>
+              </a:rPr>
+              <a:t>リニューアル版 WineBank CLUB 会員特典の内訳（想定）</a:t>
+            </a:r>
+            <a:endParaRPr lang="en-US" sz="2300" dirty="0"/>
+          </a:p>
+        </p:txBody>
+      </p:sp>
+      <p:sp>
+        <p:nvSpPr>
+          <p:cNvPr id="6" name="Text 3"/>
+          <p:cNvSpPr/>
+          <p:nvPr/>
+        </p:nvSpPr>
+        <p:spPr>
+          <a:xfrm>
+            <a:off x="566928" y="1024128"/>
+            <a:ext cx="11057839" cy="310896"/>
+          </a:xfrm>
+          <a:prstGeom prst="rect">
+            <a:avLst/>
+          </a:prstGeom>
+          <a:noFill/>
+          <a:ln/>
+        </p:spPr>
+        <p:txBody>
+          <a:bodyPr wrap="square" lIns="0" tIns="0" rIns="0" bIns="0" rtlCol="0" anchor="ctr"/>
+          <a:lstStyle/>
+          <a:p>
+            <a:pPr indent="0" marL="0">
+              <a:lnSpc>
+                <a:spcPts val="1700"/>
+              </a:lnSpc>
+              <a:buNone/>
+            </a:pPr>
+            <a:r>
+              <a:rPr lang="en-US" sz="1150" dirty="0">
+                <a:solidFill>
+                  <a:srgbClr val="6E7378"/>
+                </a:solidFill>
+                <a:latin typeface="Yu Gothic" pitchFamily="34" charset="0"/>
+                <a:ea typeface="Yu Gothic" pitchFamily="34" charset="-122"/>
+                <a:cs typeface="Yu Gothic" pitchFamily="34" charset="-120"/>
+              </a:rPr>
+              <a:t>現行は月会費8,800円〜のプラン制です。下表はワイン預り100本を含む上位プランを想定した提供価値の内訳で、ヒルズ枠を設計する際の基準としてご参照ください。</a:t>
+            </a:r>
+            <a:endParaRPr lang="en-US" sz="1150" dirty="0"/>
+          </a:p>
+        </p:txBody>
+      </p:sp>
+      <p:sp>
+        <p:nvSpPr>
+          <p:cNvPr id="7" name="Shape 4"/>
+          <p:cNvSpPr/>
+          <p:nvPr/>
+        </p:nvSpPr>
+        <p:spPr>
+          <a:xfrm>
+            <a:off x="0" y="6583680"/>
+            <a:ext cx="12191695" cy="274320"/>
+          </a:xfrm>
+          <a:prstGeom prst="rect">
+            <a:avLst/>
+          </a:prstGeom>
+          <a:solidFill>
+            <a:srgbClr val="2F3941"/>
+          </a:solidFill>
+          <a:ln w="12700">
+            <a:solidFill>
+              <a:srgbClr val="333333"/>
+            </a:solidFill>
+            <a:prstDash val="solid"/>
+          </a:ln>
+        </p:spPr>
+      </p:sp>
+      <p:sp>
+        <p:nvSpPr>
+          <p:cNvPr id="8" name="Text 5"/>
+          <p:cNvSpPr/>
+          <p:nvPr/>
+        </p:nvSpPr>
+        <p:spPr>
+          <a:xfrm>
+            <a:off x="10893247" y="6272784"/>
+            <a:ext cx="731520" cy="256032"/>
+          </a:xfrm>
+          <a:prstGeom prst="rect">
+            <a:avLst/>
+          </a:prstGeom>
+          <a:noFill/>
+          <a:ln/>
+        </p:spPr>
+        <p:txBody>
+          <a:bodyPr wrap="square" lIns="0" tIns="0" rIns="0" bIns="0" rtlCol="0" anchor="ctr"/>
+          <a:lstStyle/>
+          <a:p>
+            <a:pPr algn="r" indent="0" marL="0">
+              <a:buNone/>
+            </a:pPr>
+            <a:r>
+              <a:rPr lang="en-US" sz="1000" dirty="0">
+                <a:solidFill>
+                  <a:srgbClr val="A6ABAF"/>
+                </a:solidFill>
+                <a:latin typeface="Calibri" pitchFamily="34" charset="0"/>
+                <a:ea typeface="Calibri" pitchFamily="34" charset="-122"/>
+                <a:cs typeface="Calibri" pitchFamily="34" charset="-120"/>
+              </a:rPr>
+              <a:t>33</a:t>
+            </a:r>
+            <a:endParaRPr lang="en-US" sz="1000" dirty="0"/>
+          </a:p>
+        </p:txBody>
+      </p:sp>
+      <p:sp>
+        <p:nvSpPr>
+          <p:cNvPr id="9" name="Text 6"/>
+          <p:cNvSpPr/>
+          <p:nvPr/>
+        </p:nvSpPr>
+        <p:spPr>
+          <a:xfrm>
+            <a:off x="566928" y="6272784"/>
+            <a:ext cx="2926080" cy="256032"/>
+          </a:xfrm>
+          <a:prstGeom prst="rect">
+            <a:avLst/>
+          </a:prstGeom>
+          <a:noFill/>
+          <a:ln/>
+        </p:spPr>
+        <p:txBody>
+          <a:bodyPr wrap="square" lIns="0" tIns="0" rIns="0" bIns="0" rtlCol="0" anchor="ctr"/>
+          <a:lstStyle/>
+          <a:p>
+            <a:pPr indent="0" marL="0">
+              <a:buNone/>
+            </a:pPr>
+            <a:r>
+              <a:rPr lang="en-US" sz="850" spc="120" kern="0" dirty="0">
+                <a:solidFill>
+                  <a:srgbClr val="C7CACC"/>
+                </a:solidFill>
+                <a:latin typeface="Calibri" pitchFamily="34" charset="0"/>
+                <a:ea typeface="Calibri" pitchFamily="34" charset="-122"/>
+                <a:cs typeface="Calibri" pitchFamily="34" charset="-120"/>
+              </a:rPr>
+              <a:t>CONFIDENTIAL</a:t>
+            </a:r>
+            <a:endParaRPr lang="en-US" sz="850" dirty="0"/>
+          </a:p>
+        </p:txBody>
+      </p:sp>
       <p:graphicFrame>
         <p:nvGraphicFramePr>
-          <p:cNvPr id="34" name="Table 0"/>
+          <p:cNvPr id="35" name="Table 0"/>
           <p:cNvGraphicFramePr>
             <a:graphicFrameLocks noGrp="1"/>
           </p:cNvGraphicFramePr>
@@ -35949,7 +37359,7 @@
                           <a:ea typeface="Yu Gothic" pitchFamily="34" charset="-122"/>
                           <a:cs typeface="Yu Gothic" pitchFamily="34" charset="-120"/>
                         </a:rPr>
-                        <a:t>WineBank Standard 会員資格</a:t>
+                        <a:t>会員資格（レストラン特典）</a:t>
                       </a:r>
                       <a:endParaRPr lang="en-US" sz="980" dirty="0">
                         <a:latin typeface="Yu Gothic" charset="0"/>
@@ -36014,7 +37424,7 @@
                           <a:ea typeface="Yu Gothic" pitchFamily="34" charset="-122"/>
                           <a:cs typeface="Yu Gothic" pitchFamily="34" charset="-120"/>
                         </a:rPr>
-                        <a:t>グループ飲食店20%OFF、優先割当ほか</a:t>
+                        <a:t>ワインが仕入原価相当。同伴者も同特典</a:t>
                       </a:r>
                       <a:endParaRPr lang="en-US" sz="980" dirty="0">
                         <a:latin typeface="Yu Gothic" charset="0"/>
@@ -36408,7 +37818,7 @@
                           <a:ea typeface="Yu Gothic" pitchFamily="34" charset="-122"/>
                           <a:cs typeface="Yu Gothic" pitchFamily="34" charset="-120"/>
                         </a:rPr>
-                        <a:t>提携26店舗へのBYO。抜栓料・持込料ゼロ</a:t>
+                        <a:t>提携店へのBYO。抜栓料・持込料ゼロ</a:t>
                       </a:r>
                       <a:endParaRPr lang="en-US" sz="980" dirty="0">
                         <a:latin typeface="Yu Gothic" charset="0"/>
@@ -37195,7 +38605,7 @@
                 <a:ea typeface="Yu Gothic" pitchFamily="34" charset="-122"/>
                 <a:cs typeface="Yu Gothic" pitchFamily="34" charset="-120"/>
               </a:rPr>
-              <a:t>店内価格は市価の2〜3倍。BYO無料と卸値仕入により、年間接待費600万円規模の利用で約200万円の削減余地が生まれます。</a:t>
+              <a:t>一般の飲食店はワインを卸原価の2〜3倍で提供しています。仕入原価相当での提供とBYO無料により、年間接待費600万円規模のご利用で約200万円の削減余地が生まれます。</a:t>
             </a:r>
             <a:endParaRPr lang="en-US" sz="1000" dirty="0"/>
           </a:p>
@@ -37237,7 +38647,7 @@
                 <a:ea typeface="Yu Gothic" pitchFamily="34" charset="-122"/>
                 <a:cs typeface="Yu Gothic" pitchFamily="34" charset="-120"/>
               </a:rPr>
-              <a:t>会員特典46.4万円相当 ＋ 接待費削減 約200万円</a:t>
+              <a:t>特典46.4万円相当 ＋ 接待費削減 約200万円</a:t>
             </a:r>
             <a:endParaRPr lang="en-US" sz="1050" dirty="0"/>
           </a:p>
@@ -37257,7 +38667,7 @@
                 <a:ea typeface="Yu Gothic" pitchFamily="34" charset="-122"/>
                 <a:cs typeface="Yu Gothic" pitchFamily="34" charset="-120"/>
               </a:rPr>
-              <a:t>＝ 年会費を大きく上回る実利</a:t>
+              <a:t>＝ 会費を大きく上回る実利</a:t>
             </a:r>
             <a:endParaRPr lang="en-US" sz="1050" dirty="0"/>
           </a:p>
@@ -38199,7 +39609,7 @@
                 <a:ea typeface="Yu Gothic" pitchFamily="34" charset="-122"/>
                 <a:cs typeface="Yu Gothic" pitchFamily="34" charset="-120"/>
               </a:rPr>
-              <a:t>通常プランに加え、ヒルズ向けにオーダーメイドした Hills WineBank CLUB をご提案。</a:t>
+              <a:t>レストランでワインが仕入原価相当。通常プランに加えヒルズ向けのオーダーメイド版をご提案。</a:t>
             </a:r>
             <a:endParaRPr lang="en-US" sz="1000" dirty="0"/>
           </a:p>
